--- a/Apresentação_Cristiano&José.pptx
+++ b/Apresentação_Cristiano&José.pptx
@@ -1,42 +1,145 @@
 
 <file path=ppt/presentation.xml><?xml version="1.0" encoding="utf-8"?>
-<p:presentation xmlns:a="http://schemas.openxmlformats.org/drawingml/2006/main" xmlns:p="http://schemas.openxmlformats.org/presentationml/2006/main" xmlns:r="http://schemas.openxmlformats.org/officeDocument/2006/relationships" xmlns:p14="http://schemas.microsoft.com/office/powerpoint/2010/main" xmlns:p15="http://schemas.microsoft.com/office/powerpoint/2012/main" xmlns:mc="http://schemas.openxmlformats.org/markup-compatibility/2006">
+<p:presentation xmlns:a="http://schemas.openxmlformats.org/drawingml/2006/main" xmlns:r="http://schemas.openxmlformats.org/officeDocument/2006/relationships" xmlns:p="http://schemas.openxmlformats.org/presentationml/2006/main">
   <p:sldMasterIdLst>
-    <p:sldMasterId id="2147483648" r:id="rId2"/>
+    <p:sldMasterId id="2147483648" r:id="rId1"/>
   </p:sldMasterIdLst>
   <p:sldIdLst>
-    <p:sldId id="256" r:id="rId3"/>
-    <p:sldId id="257" r:id="rId4"/>
-    <p:sldId id="258" r:id="rId5"/>
-    <p:sldId id="259" r:id="rId6"/>
-    <p:sldId id="260" r:id="rId7"/>
-    <p:sldId id="261" r:id="rId8"/>
-    <p:sldId id="262" r:id="rId9"/>
-    <p:sldId id="263" r:id="rId10"/>
-    <p:sldId id="264" r:id="rId11"/>
-    <p:sldId id="265" r:id="rId12"/>
-    <p:sldId id="266" r:id="rId13"/>
+    <p:sldId id="256" r:id="rId2"/>
+    <p:sldId id="257" r:id="rId3"/>
+    <p:sldId id="258" r:id="rId4"/>
+    <p:sldId id="259" r:id="rId5"/>
+    <p:sldId id="260" r:id="rId6"/>
+    <p:sldId id="261" r:id="rId7"/>
+    <p:sldId id="262" r:id="rId8"/>
+    <p:sldId id="263" r:id="rId9"/>
+    <p:sldId id="264" r:id="rId10"/>
+    <p:sldId id="265" r:id="rId11"/>
+    <p:sldId id="270" r:id="rId12"/>
+    <p:sldId id="271" r:id="rId13"/>
     <p:sldId id="267" r:id="rId14"/>
     <p:sldId id="268" r:id="rId15"/>
     <p:sldId id="269" r:id="rId16"/>
-    <p:sldId id="270" r:id="rId17"/>
-    <p:sldId id="271" r:id="rId18"/>
-    <p:sldId id="272" r:id="rId19"/>
-    <p:sldId id="273" r:id="rId20"/>
+    <p:sldId id="272" r:id="rId17"/>
   </p:sldIdLst>
-  <p:sldSz cx="9144000" cy="5143500"/>
+  <p:sldSz cx="9144000" cy="5143500" type="screen16x9"/>
   <p:notesSz cx="7559675" cy="10691813"/>
+  <p:defaultTextStyle>
+    <a:defPPr>
+      <a:defRPr lang="pt-PT"/>
+    </a:defPPr>
+    <a:lvl1pPr marL="0" algn="l" defTabSz="914400" rtl="0" eaLnBrk="1" latinLnBrk="0" hangingPunct="1">
+      <a:defRPr sz="1800" kern="1200">
+        <a:solidFill>
+          <a:schemeClr val="tx1"/>
+        </a:solidFill>
+        <a:latin typeface="+mn-lt"/>
+        <a:ea typeface="+mn-ea"/>
+        <a:cs typeface="+mn-cs"/>
+      </a:defRPr>
+    </a:lvl1pPr>
+    <a:lvl2pPr marL="457200" algn="l" defTabSz="914400" rtl="0" eaLnBrk="1" latinLnBrk="0" hangingPunct="1">
+      <a:defRPr sz="1800" kern="1200">
+        <a:solidFill>
+          <a:schemeClr val="tx1"/>
+        </a:solidFill>
+        <a:latin typeface="+mn-lt"/>
+        <a:ea typeface="+mn-ea"/>
+        <a:cs typeface="+mn-cs"/>
+      </a:defRPr>
+    </a:lvl2pPr>
+    <a:lvl3pPr marL="914400" algn="l" defTabSz="914400" rtl="0" eaLnBrk="1" latinLnBrk="0" hangingPunct="1">
+      <a:defRPr sz="1800" kern="1200">
+        <a:solidFill>
+          <a:schemeClr val="tx1"/>
+        </a:solidFill>
+        <a:latin typeface="+mn-lt"/>
+        <a:ea typeface="+mn-ea"/>
+        <a:cs typeface="+mn-cs"/>
+      </a:defRPr>
+    </a:lvl3pPr>
+    <a:lvl4pPr marL="1371600" algn="l" defTabSz="914400" rtl="0" eaLnBrk="1" latinLnBrk="0" hangingPunct="1">
+      <a:defRPr sz="1800" kern="1200">
+        <a:solidFill>
+          <a:schemeClr val="tx1"/>
+        </a:solidFill>
+        <a:latin typeface="+mn-lt"/>
+        <a:ea typeface="+mn-ea"/>
+        <a:cs typeface="+mn-cs"/>
+      </a:defRPr>
+    </a:lvl4pPr>
+    <a:lvl5pPr marL="1828800" algn="l" defTabSz="914400" rtl="0" eaLnBrk="1" latinLnBrk="0" hangingPunct="1">
+      <a:defRPr sz="1800" kern="1200">
+        <a:solidFill>
+          <a:schemeClr val="tx1"/>
+        </a:solidFill>
+        <a:latin typeface="+mn-lt"/>
+        <a:ea typeface="+mn-ea"/>
+        <a:cs typeface="+mn-cs"/>
+      </a:defRPr>
+    </a:lvl5pPr>
+    <a:lvl6pPr marL="2286000" algn="l" defTabSz="914400" rtl="0" eaLnBrk="1" latinLnBrk="0" hangingPunct="1">
+      <a:defRPr sz="1800" kern="1200">
+        <a:solidFill>
+          <a:schemeClr val="tx1"/>
+        </a:solidFill>
+        <a:latin typeface="+mn-lt"/>
+        <a:ea typeface="+mn-ea"/>
+        <a:cs typeface="+mn-cs"/>
+      </a:defRPr>
+    </a:lvl6pPr>
+    <a:lvl7pPr marL="2743200" algn="l" defTabSz="914400" rtl="0" eaLnBrk="1" latinLnBrk="0" hangingPunct="1">
+      <a:defRPr sz="1800" kern="1200">
+        <a:solidFill>
+          <a:schemeClr val="tx1"/>
+        </a:solidFill>
+        <a:latin typeface="+mn-lt"/>
+        <a:ea typeface="+mn-ea"/>
+        <a:cs typeface="+mn-cs"/>
+      </a:defRPr>
+    </a:lvl7pPr>
+    <a:lvl8pPr marL="3200400" algn="l" defTabSz="914400" rtl="0" eaLnBrk="1" latinLnBrk="0" hangingPunct="1">
+      <a:defRPr sz="1800" kern="1200">
+        <a:solidFill>
+          <a:schemeClr val="tx1"/>
+        </a:solidFill>
+        <a:latin typeface="+mn-lt"/>
+        <a:ea typeface="+mn-ea"/>
+        <a:cs typeface="+mn-cs"/>
+      </a:defRPr>
+    </a:lvl8pPr>
+    <a:lvl9pPr marL="3657600" algn="l" defTabSz="914400" rtl="0" eaLnBrk="1" latinLnBrk="0" hangingPunct="1">
+      <a:defRPr sz="1800" kern="1200">
+        <a:solidFill>
+          <a:schemeClr val="tx1"/>
+        </a:solidFill>
+        <a:latin typeface="+mn-lt"/>
+        <a:ea typeface="+mn-ea"/>
+        <a:cs typeface="+mn-cs"/>
+      </a:defRPr>
+    </a:lvl9pPr>
+  </p:defaultTextStyle>
 </p:presentation>
 </file>
 
+<file path=ppt/revisionInfo.xml><?xml version="1.0" encoding="utf-8"?>
+<p1510:revInfo xmlns:a="http://schemas.openxmlformats.org/drawingml/2006/main" xmlns:r="http://schemas.openxmlformats.org/officeDocument/2006/relationships" xmlns:p1510="http://schemas.microsoft.com/office/powerpoint/2015/10/main">
+  <p1510:revLst>
+    <p1510:client id="{440B71E5-B544-46A5-BD5E-838399FC70A4}" v="3" dt="2026-05-10T19:50:59.359"/>
+    <p1510:client id="{C4091688-A97B-4B0E-A795-1BA6403BB0FA}" v="1" dt="2026-05-10T19:58:17.791"/>
+  </p1510:revLst>
+</p1510:revInfo>
+</file>
+
 <file path=ppt/slideLayouts/slideLayout1.xml><?xml version="1.0" encoding="utf-8"?>
-<p:sldLayout xmlns:a="http://schemas.openxmlformats.org/drawingml/2006/main" xmlns:p="http://schemas.openxmlformats.org/presentationml/2006/main" xmlns:r="http://schemas.openxmlformats.org/officeDocument/2006/relationships" xmlns:p14="http://schemas.microsoft.com/office/powerpoint/2010/main" xmlns:p15="http://schemas.microsoft.com/office/powerpoint/2012/main" xmlns:mc="http://schemas.openxmlformats.org/markup-compatibility/2006" type="tx" preserve="1">
+<p:sldLayout xmlns:a="http://schemas.openxmlformats.org/drawingml/2006/main" xmlns:r="http://schemas.openxmlformats.org/officeDocument/2006/relationships" xmlns:p="http://schemas.openxmlformats.org/presentationml/2006/main" type="tx" preserve="1">
   <p:cSld name="TITLE_AND_BODY">
     <p:bg>
       <p:bgPr>
         <a:solidFill>
-          <a:srgbClr val="ffffff"/>
+          <a:srgbClr val="FFFFFF"/>
         </a:solidFill>
+        <a:effectLst/>
       </p:bgPr>
     </p:bg>
     <p:spTree>
@@ -55,7 +158,7 @@
       </p:grpSpPr>
       <p:sp>
         <p:nvSpPr>
-          <p:cNvPr id="0" name="PlaceHolder 1"/>
+          <p:cNvPr id="3" name="PlaceHolder 1"/>
           <p:cNvSpPr>
             <a:spLocks noGrp="1"/>
           </p:cNvSpPr>
@@ -77,9 +180,10 @@
           </a:ln>
         </p:spPr>
         <p:txBody>
-          <a:bodyPr lIns="91440" rIns="91440" tIns="91440" bIns="91440" anchor="t">
+          <a:bodyPr lIns="91440" tIns="91440" rIns="91440" bIns="91440" anchor="t">
             <a:normAutofit lnSpcReduction="9999"/>
           </a:bodyPr>
+          <a:lstStyle/>
           <a:p>
             <a:pPr indent="0" defTabSz="914400">
               <a:lnSpc>
@@ -87,11 +191,11 @@
               </a:lnSpc>
               <a:buNone/>
               <a:tabLst>
-                <a:tab algn="l" pos="0"/>
+                <a:tab pos="0" algn="l"/>
               </a:tabLst>
             </a:pPr>
             <a:r>
-              <a:rPr b="0" lang="pt-PT" sz="2800" strike="noStrike" u="none">
+              <a:rPr lang="pt-PT" sz="2800" b="0" u="none" strike="noStrike">
                 <a:solidFill>
                   <a:srgbClr val="000000"/>
                 </a:solidFill>
@@ -101,20 +205,12 @@
               </a:rPr>
               <a:t>Clique para editar o formato do título</a:t>
             </a:r>
-            <a:endParaRPr b="0" lang="pt-PT" sz="2800" strike="noStrike" u="none">
-              <a:solidFill>
-                <a:srgbClr val="000000"/>
-              </a:solidFill>
-              <a:effectLst/>
-              <a:uFillTx/>
-              <a:latin typeface="Arial"/>
-            </a:endParaRPr>
           </a:p>
         </p:txBody>
       </p:sp>
       <p:sp>
         <p:nvSpPr>
-          <p:cNvPr id="1" name="PlaceHolder 2"/>
+          <p:cNvPr id="4" name="PlaceHolder 2"/>
           <p:cNvSpPr>
             <a:spLocks noGrp="1"/>
           </p:cNvSpPr>
@@ -136,9 +232,10 @@
           </a:ln>
         </p:spPr>
         <p:txBody>
-          <a:bodyPr lIns="91440" rIns="91440" tIns="91440" bIns="91440" anchor="t">
+          <a:bodyPr lIns="91440" tIns="91440" rIns="91440" bIns="91440" anchor="t">
             <a:normAutofit/>
           </a:bodyPr>
+          <a:lstStyle/>
           <a:p>
             <a:pPr marL="432000" indent="-324000" defTabSz="914400">
               <a:lnSpc>
@@ -155,7 +252,7 @@
               <a:buChar char=""/>
             </a:pPr>
             <a:r>
-              <a:rPr b="0" lang="pt-PT" sz="1800" strike="noStrike" u="none">
+              <a:rPr lang="pt-PT" sz="1800" b="0" u="none" strike="noStrike">
                 <a:solidFill>
                   <a:srgbClr val="000000"/>
                 </a:solidFill>
@@ -165,17 +262,9 @@
               </a:rPr>
               <a:t>Clique para editar o formato de texto dos tópicos</a:t>
             </a:r>
-            <a:endParaRPr b="0" lang="pt-PT" sz="1800" strike="noStrike" u="none">
-              <a:solidFill>
-                <a:srgbClr val="000000"/>
-              </a:solidFill>
-              <a:effectLst/>
-              <a:uFillTx/>
-              <a:latin typeface="Arial"/>
-            </a:endParaRPr>
-          </a:p>
-          <a:p>
-            <a:pPr lvl="1" marL="864000" indent="-324000" defTabSz="914400">
+          </a:p>
+          <a:p>
+            <a:pPr marL="864000" lvl="1" indent="-324000" defTabSz="914400">
               <a:lnSpc>
                 <a:spcPct val="100000"/>
               </a:lnSpc>
@@ -190,7 +279,7 @@
               <a:buChar char=""/>
             </a:pPr>
             <a:r>
-              <a:rPr b="0" lang="pt-PT" sz="1800" strike="noStrike" u="none">
+              <a:rPr lang="pt-PT" sz="1800" b="0" u="none" strike="noStrike">
                 <a:solidFill>
                   <a:srgbClr val="000000"/>
                 </a:solidFill>
@@ -200,17 +289,9 @@
               </a:rPr>
               <a:t>Segundo nível de tópicos</a:t>
             </a:r>
-            <a:endParaRPr b="0" lang="pt-PT" sz="1800" strike="noStrike" u="none">
-              <a:solidFill>
-                <a:srgbClr val="000000"/>
-              </a:solidFill>
-              <a:effectLst/>
-              <a:uFillTx/>
-              <a:latin typeface="Arial"/>
-            </a:endParaRPr>
-          </a:p>
-          <a:p>
-            <a:pPr lvl="2" marL="1296000" indent="-288000" defTabSz="914400">
+          </a:p>
+          <a:p>
+            <a:pPr marL="1296000" lvl="2" indent="-288000" defTabSz="914400">
               <a:lnSpc>
                 <a:spcPct val="100000"/>
               </a:lnSpc>
@@ -225,7 +306,7 @@
               <a:buChar char=""/>
             </a:pPr>
             <a:r>
-              <a:rPr b="0" lang="pt-PT" sz="1800" strike="noStrike" u="none">
+              <a:rPr lang="pt-PT" sz="1800" b="0" u="none" strike="noStrike">
                 <a:solidFill>
                   <a:srgbClr val="000000"/>
                 </a:solidFill>
@@ -235,17 +316,9 @@
               </a:rPr>
               <a:t>Terceiro nível de tópicos</a:t>
             </a:r>
-            <a:endParaRPr b="0" lang="pt-PT" sz="1800" strike="noStrike" u="none">
-              <a:solidFill>
-                <a:srgbClr val="000000"/>
-              </a:solidFill>
-              <a:effectLst/>
-              <a:uFillTx/>
-              <a:latin typeface="Arial"/>
-            </a:endParaRPr>
-          </a:p>
-          <a:p>
-            <a:pPr lvl="3" marL="1728000" indent="-216000" defTabSz="914400">
+          </a:p>
+          <a:p>
+            <a:pPr marL="1728000" lvl="3" indent="-216000" defTabSz="914400">
               <a:lnSpc>
                 <a:spcPct val="100000"/>
               </a:lnSpc>
@@ -260,7 +333,7 @@
               <a:buChar char=""/>
             </a:pPr>
             <a:r>
-              <a:rPr b="0" lang="pt-PT" sz="1800" strike="noStrike" u="none">
+              <a:rPr lang="pt-PT" sz="1800" b="0" u="none" strike="noStrike">
                 <a:solidFill>
                   <a:srgbClr val="000000"/>
                 </a:solidFill>
@@ -270,17 +343,9 @@
               </a:rPr>
               <a:t>Quarto nível de tópicos</a:t>
             </a:r>
-            <a:endParaRPr b="0" lang="pt-PT" sz="1800" strike="noStrike" u="none">
-              <a:solidFill>
-                <a:srgbClr val="000000"/>
-              </a:solidFill>
-              <a:effectLst/>
-              <a:uFillTx/>
-              <a:latin typeface="Arial"/>
-            </a:endParaRPr>
-          </a:p>
-          <a:p>
-            <a:pPr lvl="4" marL="2160000" indent="-216000" defTabSz="914400">
+          </a:p>
+          <a:p>
+            <a:pPr marL="2160000" lvl="4" indent="-216000" defTabSz="914400">
               <a:lnSpc>
                 <a:spcPct val="100000"/>
               </a:lnSpc>
@@ -295,7 +360,7 @@
               <a:buChar char=""/>
             </a:pPr>
             <a:r>
-              <a:rPr b="0" lang="pt-PT" sz="1800" strike="noStrike" u="none">
+              <a:rPr lang="pt-PT" sz="1800" b="0" u="none" strike="noStrike">
                 <a:solidFill>
                   <a:srgbClr val="000000"/>
                 </a:solidFill>
@@ -305,17 +370,9 @@
               </a:rPr>
               <a:t>Quinto nível de tópicos</a:t>
             </a:r>
-            <a:endParaRPr b="0" lang="pt-PT" sz="1800" strike="noStrike" u="none">
-              <a:solidFill>
-                <a:srgbClr val="000000"/>
-              </a:solidFill>
-              <a:effectLst/>
-              <a:uFillTx/>
-              <a:latin typeface="Arial"/>
-            </a:endParaRPr>
-          </a:p>
-          <a:p>
-            <a:pPr lvl="5" marL="2592000" indent="-216000" defTabSz="914400">
+          </a:p>
+          <a:p>
+            <a:pPr marL="2592000" lvl="5" indent="-216000" defTabSz="914400">
               <a:lnSpc>
                 <a:spcPct val="100000"/>
               </a:lnSpc>
@@ -330,7 +387,7 @@
               <a:buChar char=""/>
             </a:pPr>
             <a:r>
-              <a:rPr b="0" lang="pt-PT" sz="1800" strike="noStrike" u="none">
+              <a:rPr lang="pt-PT" sz="1800" b="0" u="none" strike="noStrike">
                 <a:solidFill>
                   <a:srgbClr val="000000"/>
                 </a:solidFill>
@@ -340,17 +397,9 @@
               </a:rPr>
               <a:t>Sexto nível de tópicos</a:t>
             </a:r>
-            <a:endParaRPr b="0" lang="pt-PT" sz="1800" strike="noStrike" u="none">
-              <a:solidFill>
-                <a:srgbClr val="000000"/>
-              </a:solidFill>
-              <a:effectLst/>
-              <a:uFillTx/>
-              <a:latin typeface="Arial"/>
-            </a:endParaRPr>
-          </a:p>
-          <a:p>
-            <a:pPr lvl="6" marL="3024000" indent="-216000" defTabSz="914400">
+          </a:p>
+          <a:p>
+            <a:pPr marL="3024000" lvl="6" indent="-216000" defTabSz="914400">
               <a:lnSpc>
                 <a:spcPct val="100000"/>
               </a:lnSpc>
@@ -365,7 +414,7 @@
               <a:buChar char=""/>
             </a:pPr>
             <a:r>
-              <a:rPr b="0" lang="pt-PT" sz="1800" strike="noStrike" u="none">
+              <a:rPr lang="pt-PT" sz="1800" b="0" u="none" strike="noStrike">
                 <a:solidFill>
                   <a:srgbClr val="000000"/>
                 </a:solidFill>
@@ -375,14 +424,6 @@
               </a:rPr>
               <a:t>Sétimo nível de tópicos</a:t>
             </a:r>
-            <a:endParaRPr b="0" lang="pt-PT" sz="1800" strike="noStrike" u="none">
-              <a:solidFill>
-                <a:srgbClr val="000000"/>
-              </a:solidFill>
-              <a:effectLst/>
-              <a:uFillTx/>
-              <a:latin typeface="Arial"/>
-            </a:endParaRPr>
           </a:p>
         </p:txBody>
       </p:sp>
@@ -410,7 +451,7 @@
           </a:ln>
         </p:spPr>
         <p:txBody>
-          <a:bodyPr lIns="91440" rIns="91440" tIns="91440" bIns="91440" anchor="ctr">
+          <a:bodyPr lIns="91440" tIns="91440" rIns="91440" bIns="91440" anchor="ctr">
             <a:normAutofit/>
           </a:bodyPr>
           <a:lstStyle>
@@ -420,9 +461,9 @@
               </a:lnSpc>
               <a:buNone/>
               <a:tabLst>
-                <a:tab algn="l" pos="0"/>
+                <a:tab pos="0" algn="l"/>
               </a:tabLst>
-              <a:defRPr b="0" lang="pt-PT" sz="1000" strike="noStrike" u="none">
+              <a:defRPr lang="pt-PT" sz="1000" b="0" u="none" strike="noStrike">
                 <a:solidFill>
                   <a:schemeClr val="dk2"/>
                 </a:solidFill>
@@ -440,11 +481,11 @@
               </a:lnSpc>
               <a:buNone/>
               <a:tabLst>
-                <a:tab algn="l" pos="0"/>
+                <a:tab pos="0" algn="l"/>
               </a:tabLst>
             </a:pPr>
             <a:fld id="{F3000015-3E70-4F48-A467-7F09F34F656F}" type="slidenum">
-              <a:rPr b="0" lang="pt-PT" sz="1000" strike="noStrike" u="none">
+              <a:rPr lang="pt-PT" sz="1000" b="0" u="none" strike="noStrike">
                 <a:solidFill>
                   <a:schemeClr val="dk2"/>
                 </a:solidFill>
@@ -453,9 +494,9 @@
                 <a:latin typeface="Arial"/>
                 <a:ea typeface="Arial"/>
               </a:rPr>
-              <a:t>&lt;número&gt;</a:t>
+              <a:t>‹nº›</a:t>
             </a:fld>
-            <a:endParaRPr b="0" lang="pt-PT" sz="1000" strike="noStrike" u="none">
+            <a:endParaRPr lang="pt-PT" sz="1000" b="0" u="none" strike="noStrike">
               <a:solidFill>
                 <a:srgbClr val="000000"/>
               </a:solidFill>
@@ -468,17 +509,21 @@
       </p:sp>
     </p:spTree>
   </p:cSld>
+  <p:clrMapOvr>
+    <a:masterClrMapping/>
+  </p:clrMapOvr>
 </p:sldLayout>
 </file>
 
 <file path=ppt/slideLayouts/slideLayout10.xml><?xml version="1.0" encoding="utf-8"?>
-<p:sldLayout xmlns:a="http://schemas.openxmlformats.org/drawingml/2006/main" xmlns:p="http://schemas.openxmlformats.org/presentationml/2006/main" xmlns:r="http://schemas.openxmlformats.org/officeDocument/2006/relationships" xmlns:p14="http://schemas.microsoft.com/office/powerpoint/2010/main" xmlns:p15="http://schemas.microsoft.com/office/powerpoint/2012/main" xmlns:mc="http://schemas.openxmlformats.org/markup-compatibility/2006" type="blank" preserve="1">
+<p:sldLayout xmlns:a="http://schemas.openxmlformats.org/drawingml/2006/main" xmlns:r="http://schemas.openxmlformats.org/officeDocument/2006/relationships" xmlns:p="http://schemas.openxmlformats.org/presentationml/2006/main" type="blank" preserve="1">
   <p:cSld name="BLANK">
     <p:bg>
       <p:bgPr>
         <a:solidFill>
-          <a:srgbClr val="ffffff"/>
+          <a:srgbClr val="FFFFFF"/>
         </a:solidFill>
+        <a:effectLst/>
       </p:bgPr>
     </p:bg>
     <p:spTree>
@@ -519,7 +564,7 @@
           </a:ln>
         </p:spPr>
         <p:txBody>
-          <a:bodyPr lIns="91440" rIns="91440" tIns="91440" bIns="91440" anchor="ctr">
+          <a:bodyPr lIns="91440" tIns="91440" rIns="91440" bIns="91440" anchor="ctr">
             <a:normAutofit/>
           </a:bodyPr>
           <a:lstStyle>
@@ -529,9 +574,9 @@
               </a:lnSpc>
               <a:buNone/>
               <a:tabLst>
-                <a:tab algn="l" pos="0"/>
+                <a:tab pos="0" algn="l"/>
               </a:tabLst>
-              <a:defRPr b="0" lang="pt-PT" sz="1000" strike="noStrike" u="none">
+              <a:defRPr lang="pt-PT" sz="1000" b="0" u="none" strike="noStrike">
                 <a:solidFill>
                   <a:schemeClr val="dk2"/>
                 </a:solidFill>
@@ -549,11 +594,11 @@
               </a:lnSpc>
               <a:buNone/>
               <a:tabLst>
-                <a:tab algn="l" pos="0"/>
+                <a:tab pos="0" algn="l"/>
               </a:tabLst>
             </a:pPr>
             <a:fld id="{077D5153-3E4B-454F-A086-B93E3CFAECDF}" type="slidenum">
-              <a:rPr b="0" lang="pt-PT" sz="1000" strike="noStrike" u="none">
+              <a:rPr lang="pt-PT" sz="1000" b="0" u="none" strike="noStrike">
                 <a:solidFill>
                   <a:schemeClr val="dk2"/>
                 </a:solidFill>
@@ -562,9 +607,9 @@
                 <a:latin typeface="Arial"/>
                 <a:ea typeface="Arial"/>
               </a:rPr>
-              <a:t>&lt;número&gt;</a:t>
+              <a:t>‹nº›</a:t>
             </a:fld>
-            <a:endParaRPr b="0" lang="pt-PT" sz="1000" strike="noStrike" u="none">
+            <a:endParaRPr lang="pt-PT" sz="1000" b="0" u="none" strike="noStrike">
               <a:solidFill>
                 <a:srgbClr val="000000"/>
               </a:solidFill>
@@ -599,9 +644,10 @@
           </a:ln>
         </p:spPr>
         <p:txBody>
-          <a:bodyPr lIns="0" rIns="0" tIns="0" bIns="0" anchor="ctr">
+          <a:bodyPr lIns="0" tIns="0" rIns="0" bIns="0" anchor="ctr">
             <a:noAutofit/>
           </a:bodyPr>
+          <a:lstStyle/>
           <a:p>
             <a:pPr indent="0" defTabSz="914400">
               <a:lnSpc>
@@ -609,11 +655,11 @@
               </a:lnSpc>
               <a:buNone/>
               <a:tabLst>
-                <a:tab algn="l" pos="0"/>
+                <a:tab pos="0" algn="l"/>
               </a:tabLst>
             </a:pPr>
             <a:r>
-              <a:rPr b="0" lang="pt-PT" sz="1400" strike="noStrike" u="none">
+              <a:rPr lang="pt-PT" sz="1400" b="0" u="none" strike="noStrike">
                 <a:solidFill>
                   <a:srgbClr val="000000"/>
                 </a:solidFill>
@@ -623,14 +669,6 @@
               </a:rPr>
               <a:t>Clique para editar o formato do título</a:t>
             </a:r>
-            <a:endParaRPr b="0" lang="pt-PT" sz="1400" strike="noStrike" u="none">
-              <a:solidFill>
-                <a:srgbClr val="000000"/>
-              </a:solidFill>
-              <a:effectLst/>
-              <a:uFillTx/>
-              <a:latin typeface="Arial"/>
-            </a:endParaRPr>
           </a:p>
         </p:txBody>
       </p:sp>
@@ -658,9 +696,10 @@
           </a:ln>
         </p:spPr>
         <p:txBody>
-          <a:bodyPr lIns="0" rIns="0" tIns="0" bIns="0" anchor="t">
+          <a:bodyPr lIns="0" tIns="0" rIns="0" bIns="0" anchor="t">
             <a:normAutofit/>
           </a:bodyPr>
+          <a:lstStyle/>
           <a:p>
             <a:pPr marL="432000" indent="-324000" defTabSz="914400">
               <a:lnSpc>
@@ -677,7 +716,7 @@
               <a:buChar char=""/>
             </a:pPr>
             <a:r>
-              <a:rPr b="0" lang="pt-PT" sz="1400" strike="noStrike" u="none">
+              <a:rPr lang="pt-PT" sz="1400" b="0" u="none" strike="noStrike">
                 <a:solidFill>
                   <a:srgbClr val="000000"/>
                 </a:solidFill>
@@ -687,17 +726,9 @@
               </a:rPr>
               <a:t>Clique para editar o formato de texto dos tópicos</a:t>
             </a:r>
-            <a:endParaRPr b="0" lang="pt-PT" sz="1400" strike="noStrike" u="none">
-              <a:solidFill>
-                <a:srgbClr val="000000"/>
-              </a:solidFill>
-              <a:effectLst/>
-              <a:uFillTx/>
-              <a:latin typeface="Arial"/>
-            </a:endParaRPr>
-          </a:p>
-          <a:p>
-            <a:pPr lvl="1" marL="864000" indent="-324000" defTabSz="914400">
+          </a:p>
+          <a:p>
+            <a:pPr marL="864000" lvl="1" indent="-324000" defTabSz="914400">
               <a:lnSpc>
                 <a:spcPct val="100000"/>
               </a:lnSpc>
@@ -712,7 +743,7 @@
               <a:buChar char=""/>
             </a:pPr>
             <a:r>
-              <a:rPr b="0" lang="pt-PT" sz="1400" strike="noStrike" u="none">
+              <a:rPr lang="pt-PT" sz="1400" b="0" u="none" strike="noStrike">
                 <a:solidFill>
                   <a:srgbClr val="000000"/>
                 </a:solidFill>
@@ -722,17 +753,9 @@
               </a:rPr>
               <a:t>Segundo nível de tópicos</a:t>
             </a:r>
-            <a:endParaRPr b="0" lang="pt-PT" sz="1400" strike="noStrike" u="none">
-              <a:solidFill>
-                <a:srgbClr val="000000"/>
-              </a:solidFill>
-              <a:effectLst/>
-              <a:uFillTx/>
-              <a:latin typeface="Arial"/>
-            </a:endParaRPr>
-          </a:p>
-          <a:p>
-            <a:pPr lvl="2" marL="1296000" indent="-288000" defTabSz="914400">
+          </a:p>
+          <a:p>
+            <a:pPr marL="1296000" lvl="2" indent="-288000" defTabSz="914400">
               <a:lnSpc>
                 <a:spcPct val="100000"/>
               </a:lnSpc>
@@ -747,7 +770,7 @@
               <a:buChar char=""/>
             </a:pPr>
             <a:r>
-              <a:rPr b="0" lang="pt-PT" sz="1400" strike="noStrike" u="none">
+              <a:rPr lang="pt-PT" sz="1400" b="0" u="none" strike="noStrike">
                 <a:solidFill>
                   <a:srgbClr val="000000"/>
                 </a:solidFill>
@@ -757,17 +780,9 @@
               </a:rPr>
               <a:t>Terceiro nível de tópicos</a:t>
             </a:r>
-            <a:endParaRPr b="0" lang="pt-PT" sz="1400" strike="noStrike" u="none">
-              <a:solidFill>
-                <a:srgbClr val="000000"/>
-              </a:solidFill>
-              <a:effectLst/>
-              <a:uFillTx/>
-              <a:latin typeface="Arial"/>
-            </a:endParaRPr>
-          </a:p>
-          <a:p>
-            <a:pPr lvl="3" marL="1728000" indent="-216000" defTabSz="914400">
+          </a:p>
+          <a:p>
+            <a:pPr marL="1728000" lvl="3" indent="-216000" defTabSz="914400">
               <a:lnSpc>
                 <a:spcPct val="100000"/>
               </a:lnSpc>
@@ -782,7 +797,7 @@
               <a:buChar char=""/>
             </a:pPr>
             <a:r>
-              <a:rPr b="0" lang="pt-PT" sz="1400" strike="noStrike" u="none">
+              <a:rPr lang="pt-PT" sz="1400" b="0" u="none" strike="noStrike">
                 <a:solidFill>
                   <a:srgbClr val="000000"/>
                 </a:solidFill>
@@ -792,17 +807,9 @@
               </a:rPr>
               <a:t>Quarto nível de tópicos</a:t>
             </a:r>
-            <a:endParaRPr b="0" lang="pt-PT" sz="1400" strike="noStrike" u="none">
-              <a:solidFill>
-                <a:srgbClr val="000000"/>
-              </a:solidFill>
-              <a:effectLst/>
-              <a:uFillTx/>
-              <a:latin typeface="Arial"/>
-            </a:endParaRPr>
-          </a:p>
-          <a:p>
-            <a:pPr lvl="4" marL="2160000" indent="-216000" defTabSz="914400">
+          </a:p>
+          <a:p>
+            <a:pPr marL="2160000" lvl="4" indent="-216000" defTabSz="914400">
               <a:lnSpc>
                 <a:spcPct val="100000"/>
               </a:lnSpc>
@@ -817,7 +824,7 @@
               <a:buChar char=""/>
             </a:pPr>
             <a:r>
-              <a:rPr b="0" lang="pt-PT" sz="2000" strike="noStrike" u="none">
+              <a:rPr lang="pt-PT" sz="2000" b="0" u="none" strike="noStrike">
                 <a:solidFill>
                   <a:srgbClr val="000000"/>
                 </a:solidFill>
@@ -827,17 +834,9 @@
               </a:rPr>
               <a:t>Quinto nível de tópicos</a:t>
             </a:r>
-            <a:endParaRPr b="0" lang="pt-PT" sz="2000" strike="noStrike" u="none">
-              <a:solidFill>
-                <a:srgbClr val="000000"/>
-              </a:solidFill>
-              <a:effectLst/>
-              <a:uFillTx/>
-              <a:latin typeface="Arial"/>
-            </a:endParaRPr>
-          </a:p>
-          <a:p>
-            <a:pPr lvl="5" marL="2592000" indent="-216000" defTabSz="914400">
+          </a:p>
+          <a:p>
+            <a:pPr marL="2592000" lvl="5" indent="-216000" defTabSz="914400">
               <a:lnSpc>
                 <a:spcPct val="100000"/>
               </a:lnSpc>
@@ -852,7 +851,7 @@
               <a:buChar char=""/>
             </a:pPr>
             <a:r>
-              <a:rPr b="0" lang="pt-PT" sz="2000" strike="noStrike" u="none">
+              <a:rPr lang="pt-PT" sz="2000" b="0" u="none" strike="noStrike">
                 <a:solidFill>
                   <a:srgbClr val="000000"/>
                 </a:solidFill>
@@ -862,17 +861,9 @@
               </a:rPr>
               <a:t>Sexto nível de tópicos</a:t>
             </a:r>
-            <a:endParaRPr b="0" lang="pt-PT" sz="2000" strike="noStrike" u="none">
-              <a:solidFill>
-                <a:srgbClr val="000000"/>
-              </a:solidFill>
-              <a:effectLst/>
-              <a:uFillTx/>
-              <a:latin typeface="Arial"/>
-            </a:endParaRPr>
-          </a:p>
-          <a:p>
-            <a:pPr lvl="6" marL="3024000" indent="-216000" defTabSz="914400">
+          </a:p>
+          <a:p>
+            <a:pPr marL="3024000" lvl="6" indent="-216000" defTabSz="914400">
               <a:lnSpc>
                 <a:spcPct val="100000"/>
               </a:lnSpc>
@@ -887,7 +878,7 @@
               <a:buChar char=""/>
             </a:pPr>
             <a:r>
-              <a:rPr b="0" lang="pt-PT" sz="2000" strike="noStrike" u="none">
+              <a:rPr lang="pt-PT" sz="2000" b="0" u="none" strike="noStrike">
                 <a:solidFill>
                   <a:srgbClr val="000000"/>
                 </a:solidFill>
@@ -897,30 +888,26 @@
               </a:rPr>
               <a:t>Sétimo nível de tópicos</a:t>
             </a:r>
-            <a:endParaRPr b="0" lang="pt-PT" sz="2000" strike="noStrike" u="none">
-              <a:solidFill>
-                <a:srgbClr val="000000"/>
-              </a:solidFill>
-              <a:effectLst/>
-              <a:uFillTx/>
-              <a:latin typeface="Arial"/>
-            </a:endParaRPr>
           </a:p>
         </p:txBody>
       </p:sp>
     </p:spTree>
   </p:cSld>
+  <p:clrMapOvr>
+    <a:masterClrMapping/>
+  </p:clrMapOvr>
 </p:sldLayout>
 </file>
 
 <file path=ppt/slideLayouts/slideLayout11.xml><?xml version="1.0" encoding="utf-8"?>
-<p:sldLayout xmlns:a="http://schemas.openxmlformats.org/drawingml/2006/main" xmlns:p="http://schemas.openxmlformats.org/presentationml/2006/main" xmlns:r="http://schemas.openxmlformats.org/officeDocument/2006/relationships" xmlns:p14="http://schemas.microsoft.com/office/powerpoint/2010/main" xmlns:p15="http://schemas.microsoft.com/office/powerpoint/2012/main" xmlns:mc="http://schemas.openxmlformats.org/markup-compatibility/2006" type="blank" preserve="1">
+<p:sldLayout xmlns:a="http://schemas.openxmlformats.org/drawingml/2006/main" xmlns:r="http://schemas.openxmlformats.org/officeDocument/2006/relationships" xmlns:p="http://schemas.openxmlformats.org/presentationml/2006/main" type="blank" preserve="1">
   <p:cSld name="SECTION_HEADER">
     <p:bg>
       <p:bgPr>
         <a:solidFill>
-          <a:srgbClr val="ffffff"/>
+          <a:srgbClr val="FFFFFF"/>
         </a:solidFill>
+        <a:effectLst/>
       </p:bgPr>
     </p:bg>
     <p:spTree>
@@ -961,9 +948,10 @@
           </a:ln>
         </p:spPr>
         <p:txBody>
-          <a:bodyPr lIns="91440" rIns="91440" tIns="91440" bIns="91440" anchor="ctr">
+          <a:bodyPr lIns="91440" tIns="91440" rIns="91440" bIns="91440" anchor="ctr">
             <a:normAutofit/>
           </a:bodyPr>
+          <a:lstStyle/>
           <a:p>
             <a:pPr indent="0" defTabSz="914400">
               <a:lnSpc>
@@ -971,11 +959,11 @@
               </a:lnSpc>
               <a:buNone/>
               <a:tabLst>
-                <a:tab algn="l" pos="0"/>
+                <a:tab pos="0" algn="l"/>
               </a:tabLst>
             </a:pPr>
             <a:r>
-              <a:rPr b="0" lang="pt-PT" sz="3600" strike="noStrike" u="none">
+              <a:rPr lang="pt-PT" sz="3600" b="0" u="none" strike="noStrike">
                 <a:solidFill>
                   <a:srgbClr val="000000"/>
                 </a:solidFill>
@@ -985,14 +973,6 @@
               </a:rPr>
               <a:t>Clique para editar o formato do título</a:t>
             </a:r>
-            <a:endParaRPr b="0" lang="pt-PT" sz="3600" strike="noStrike" u="none">
-              <a:solidFill>
-                <a:srgbClr val="000000"/>
-              </a:solidFill>
-              <a:effectLst/>
-              <a:uFillTx/>
-              <a:latin typeface="Arial"/>
-            </a:endParaRPr>
           </a:p>
         </p:txBody>
       </p:sp>
@@ -1020,7 +1000,7 @@
           </a:ln>
         </p:spPr>
         <p:txBody>
-          <a:bodyPr lIns="91440" rIns="91440" tIns="91440" bIns="91440" anchor="ctr">
+          <a:bodyPr lIns="91440" tIns="91440" rIns="91440" bIns="91440" anchor="ctr">
             <a:normAutofit/>
           </a:bodyPr>
           <a:lstStyle>
@@ -1030,9 +1010,9 @@
               </a:lnSpc>
               <a:buNone/>
               <a:tabLst>
-                <a:tab algn="l" pos="0"/>
+                <a:tab pos="0" algn="l"/>
               </a:tabLst>
-              <a:defRPr b="0" lang="pt-PT" sz="1000" strike="noStrike" u="none">
+              <a:defRPr lang="pt-PT" sz="1000" b="0" u="none" strike="noStrike">
                 <a:solidFill>
                   <a:schemeClr val="dk2"/>
                 </a:solidFill>
@@ -1050,11 +1030,11 @@
               </a:lnSpc>
               <a:buNone/>
               <a:tabLst>
-                <a:tab algn="l" pos="0"/>
+                <a:tab pos="0" algn="l"/>
               </a:tabLst>
             </a:pPr>
             <a:fld id="{C92D7670-D5D9-4FC0-B716-86CF49F97A47}" type="slidenum">
-              <a:rPr b="0" lang="pt-PT" sz="1000" strike="noStrike" u="none">
+              <a:rPr lang="pt-PT" sz="1000" b="0" u="none" strike="noStrike">
                 <a:solidFill>
                   <a:schemeClr val="dk2"/>
                 </a:solidFill>
@@ -1063,9 +1043,9 @@
                 <a:latin typeface="Arial"/>
                 <a:ea typeface="Arial"/>
               </a:rPr>
-              <a:t>&lt;número&gt;</a:t>
+              <a:t>‹nº›</a:t>
             </a:fld>
-            <a:endParaRPr b="0" lang="pt-PT" sz="1000" strike="noStrike" u="none">
+            <a:endParaRPr lang="pt-PT" sz="1000" b="0" u="none" strike="noStrike">
               <a:solidFill>
                 <a:srgbClr val="000000"/>
               </a:solidFill>
@@ -1078,17 +1058,21 @@
       </p:sp>
     </p:spTree>
   </p:cSld>
+  <p:clrMapOvr>
+    <a:masterClrMapping/>
+  </p:clrMapOvr>
 </p:sldLayout>
 </file>
 
 <file path=ppt/slideLayouts/slideLayout2.xml><?xml version="1.0" encoding="utf-8"?>
-<p:sldLayout xmlns:a="http://schemas.openxmlformats.org/drawingml/2006/main" xmlns:p="http://schemas.openxmlformats.org/presentationml/2006/main" xmlns:r="http://schemas.openxmlformats.org/officeDocument/2006/relationships" xmlns:p14="http://schemas.microsoft.com/office/powerpoint/2010/main" xmlns:p15="http://schemas.microsoft.com/office/powerpoint/2012/main" xmlns:mc="http://schemas.openxmlformats.org/markup-compatibility/2006" type="blank" preserve="1">
+<p:sldLayout xmlns:a="http://schemas.openxmlformats.org/drawingml/2006/main" xmlns:r="http://schemas.openxmlformats.org/officeDocument/2006/relationships" xmlns:p="http://schemas.openxmlformats.org/presentationml/2006/main" type="blank" preserve="1">
   <p:cSld name="ONE_COLUMN_TEXT">
     <p:bg>
       <p:bgPr>
         <a:solidFill>
-          <a:srgbClr val="ffffff"/>
+          <a:srgbClr val="FFFFFF"/>
         </a:solidFill>
+        <a:effectLst/>
       </p:bgPr>
     </p:bg>
     <p:spTree>
@@ -1129,9 +1113,10 @@
           </a:ln>
         </p:spPr>
         <p:txBody>
-          <a:bodyPr lIns="91440" rIns="91440" tIns="91440" bIns="91440" anchor="b">
+          <a:bodyPr lIns="91440" tIns="91440" rIns="91440" bIns="91440" anchor="b">
             <a:normAutofit fontScale="92500" lnSpcReduction="19999"/>
           </a:bodyPr>
+          <a:lstStyle/>
           <a:p>
             <a:pPr indent="0" defTabSz="914400">
               <a:lnSpc>
@@ -1139,11 +1124,11 @@
               </a:lnSpc>
               <a:buNone/>
               <a:tabLst>
-                <a:tab algn="l" pos="0"/>
+                <a:tab pos="0" algn="l"/>
               </a:tabLst>
             </a:pPr>
             <a:r>
-              <a:rPr b="0" lang="pt-PT" sz="2400" strike="noStrike" u="none">
+              <a:rPr lang="pt-PT" sz="2400" b="0" u="none" strike="noStrike">
                 <a:solidFill>
                   <a:srgbClr val="000000"/>
                 </a:solidFill>
@@ -1153,14 +1138,6 @@
               </a:rPr>
               <a:t>Clique para editar o formato do título</a:t>
             </a:r>
-            <a:endParaRPr b="0" lang="pt-PT" sz="2400" strike="noStrike" u="none">
-              <a:solidFill>
-                <a:srgbClr val="000000"/>
-              </a:solidFill>
-              <a:effectLst/>
-              <a:uFillTx/>
-              <a:latin typeface="Arial"/>
-            </a:endParaRPr>
           </a:p>
         </p:txBody>
       </p:sp>
@@ -1188,9 +1165,10 @@
           </a:ln>
         </p:spPr>
         <p:txBody>
-          <a:bodyPr lIns="91440" rIns="91440" tIns="91440" bIns="91440" anchor="t">
+          <a:bodyPr lIns="91440" tIns="91440" rIns="91440" bIns="91440" anchor="t">
             <a:normAutofit fontScale="32500" lnSpcReduction="19999"/>
           </a:bodyPr>
+          <a:lstStyle/>
           <a:p>
             <a:pPr marL="432000" indent="-324000" defTabSz="914400">
               <a:lnSpc>
@@ -1207,7 +1185,7 @@
               <a:buChar char=""/>
             </a:pPr>
             <a:r>
-              <a:rPr b="0" lang="pt-PT" sz="1200" strike="noStrike" u="none">
+              <a:rPr lang="pt-PT" sz="1200" b="0" u="none" strike="noStrike">
                 <a:solidFill>
                   <a:srgbClr val="000000"/>
                 </a:solidFill>
@@ -1217,17 +1195,9 @@
               </a:rPr>
               <a:t>Clique para editar o formato de texto dos tópicos</a:t>
             </a:r>
-            <a:endParaRPr b="0" lang="pt-PT" sz="1200" strike="noStrike" u="none">
-              <a:solidFill>
-                <a:srgbClr val="000000"/>
-              </a:solidFill>
-              <a:effectLst/>
-              <a:uFillTx/>
-              <a:latin typeface="Arial"/>
-            </a:endParaRPr>
-          </a:p>
-          <a:p>
-            <a:pPr lvl="1" marL="864000" indent="-324000" defTabSz="914400">
+          </a:p>
+          <a:p>
+            <a:pPr marL="864000" lvl="1" indent="-324000" defTabSz="914400">
               <a:lnSpc>
                 <a:spcPct val="100000"/>
               </a:lnSpc>
@@ -1242,7 +1212,7 @@
               <a:buChar char=""/>
             </a:pPr>
             <a:r>
-              <a:rPr b="0" lang="pt-PT" sz="1200" strike="noStrike" u="none">
+              <a:rPr lang="pt-PT" sz="1200" b="0" u="none" strike="noStrike">
                 <a:solidFill>
                   <a:srgbClr val="000000"/>
                 </a:solidFill>
@@ -1252,17 +1222,9 @@
               </a:rPr>
               <a:t>Segundo nível de tópicos</a:t>
             </a:r>
-            <a:endParaRPr b="0" lang="pt-PT" sz="1200" strike="noStrike" u="none">
-              <a:solidFill>
-                <a:srgbClr val="000000"/>
-              </a:solidFill>
-              <a:effectLst/>
-              <a:uFillTx/>
-              <a:latin typeface="Arial"/>
-            </a:endParaRPr>
-          </a:p>
-          <a:p>
-            <a:pPr lvl="2" marL="1296000" indent="-288000" defTabSz="914400">
+          </a:p>
+          <a:p>
+            <a:pPr marL="1296000" lvl="2" indent="-288000" defTabSz="914400">
               <a:lnSpc>
                 <a:spcPct val="100000"/>
               </a:lnSpc>
@@ -1277,7 +1239,7 @@
               <a:buChar char=""/>
             </a:pPr>
             <a:r>
-              <a:rPr b="0" lang="pt-PT" sz="1200" strike="noStrike" u="none">
+              <a:rPr lang="pt-PT" sz="1200" b="0" u="none" strike="noStrike">
                 <a:solidFill>
                   <a:srgbClr val="000000"/>
                 </a:solidFill>
@@ -1287,17 +1249,9 @@
               </a:rPr>
               <a:t>Terceiro nível de tópicos</a:t>
             </a:r>
-            <a:endParaRPr b="0" lang="pt-PT" sz="1200" strike="noStrike" u="none">
-              <a:solidFill>
-                <a:srgbClr val="000000"/>
-              </a:solidFill>
-              <a:effectLst/>
-              <a:uFillTx/>
-              <a:latin typeface="Arial"/>
-            </a:endParaRPr>
-          </a:p>
-          <a:p>
-            <a:pPr lvl="3" marL="1728000" indent="-216000" defTabSz="914400">
+          </a:p>
+          <a:p>
+            <a:pPr marL="1728000" lvl="3" indent="-216000" defTabSz="914400">
               <a:lnSpc>
                 <a:spcPct val="100000"/>
               </a:lnSpc>
@@ -1312,7 +1266,7 @@
               <a:buChar char=""/>
             </a:pPr>
             <a:r>
-              <a:rPr b="0" lang="pt-PT" sz="1200" strike="noStrike" u="none">
+              <a:rPr lang="pt-PT" sz="1200" b="0" u="none" strike="noStrike">
                 <a:solidFill>
                   <a:srgbClr val="000000"/>
                 </a:solidFill>
@@ -1322,17 +1276,9 @@
               </a:rPr>
               <a:t>Quarto nível de tópicos</a:t>
             </a:r>
-            <a:endParaRPr b="0" lang="pt-PT" sz="1200" strike="noStrike" u="none">
-              <a:solidFill>
-                <a:srgbClr val="000000"/>
-              </a:solidFill>
-              <a:effectLst/>
-              <a:uFillTx/>
-              <a:latin typeface="Arial"/>
-            </a:endParaRPr>
-          </a:p>
-          <a:p>
-            <a:pPr lvl="4" marL="2160000" indent="-216000" defTabSz="914400">
+          </a:p>
+          <a:p>
+            <a:pPr marL="2160000" lvl="4" indent="-216000" defTabSz="914400">
               <a:lnSpc>
                 <a:spcPct val="100000"/>
               </a:lnSpc>
@@ -1347,7 +1293,7 @@
               <a:buChar char=""/>
             </a:pPr>
             <a:r>
-              <a:rPr b="0" lang="pt-PT" sz="1200" strike="noStrike" u="none">
+              <a:rPr lang="pt-PT" sz="1200" b="0" u="none" strike="noStrike">
                 <a:solidFill>
                   <a:srgbClr val="000000"/>
                 </a:solidFill>
@@ -1357,17 +1303,9 @@
               </a:rPr>
               <a:t>Quinto nível de tópicos</a:t>
             </a:r>
-            <a:endParaRPr b="0" lang="pt-PT" sz="1200" strike="noStrike" u="none">
-              <a:solidFill>
-                <a:srgbClr val="000000"/>
-              </a:solidFill>
-              <a:effectLst/>
-              <a:uFillTx/>
-              <a:latin typeface="Arial"/>
-            </a:endParaRPr>
-          </a:p>
-          <a:p>
-            <a:pPr lvl="5" marL="2592000" indent="-216000" defTabSz="914400">
+          </a:p>
+          <a:p>
+            <a:pPr marL="2592000" lvl="5" indent="-216000" defTabSz="914400">
               <a:lnSpc>
                 <a:spcPct val="100000"/>
               </a:lnSpc>
@@ -1382,7 +1320,7 @@
               <a:buChar char=""/>
             </a:pPr>
             <a:r>
-              <a:rPr b="0" lang="pt-PT" sz="1200" strike="noStrike" u="none">
+              <a:rPr lang="pt-PT" sz="1200" b="0" u="none" strike="noStrike">
                 <a:solidFill>
                   <a:srgbClr val="000000"/>
                 </a:solidFill>
@@ -1392,17 +1330,9 @@
               </a:rPr>
               <a:t>Sexto nível de tópicos</a:t>
             </a:r>
-            <a:endParaRPr b="0" lang="pt-PT" sz="1200" strike="noStrike" u="none">
-              <a:solidFill>
-                <a:srgbClr val="000000"/>
-              </a:solidFill>
-              <a:effectLst/>
-              <a:uFillTx/>
-              <a:latin typeface="Arial"/>
-            </a:endParaRPr>
-          </a:p>
-          <a:p>
-            <a:pPr lvl="6" marL="3024000" indent="-216000" defTabSz="914400">
+          </a:p>
+          <a:p>
+            <a:pPr marL="3024000" lvl="6" indent="-216000" defTabSz="914400">
               <a:lnSpc>
                 <a:spcPct val="100000"/>
               </a:lnSpc>
@@ -1417,7 +1347,7 @@
               <a:buChar char=""/>
             </a:pPr>
             <a:r>
-              <a:rPr b="0" lang="pt-PT" sz="1200" strike="noStrike" u="none">
+              <a:rPr lang="pt-PT" sz="1200" b="0" u="none" strike="noStrike">
                 <a:solidFill>
                   <a:srgbClr val="000000"/>
                 </a:solidFill>
@@ -1427,14 +1357,6 @@
               </a:rPr>
               <a:t>Sétimo nível de tópicos</a:t>
             </a:r>
-            <a:endParaRPr b="0" lang="pt-PT" sz="1200" strike="noStrike" u="none">
-              <a:solidFill>
-                <a:srgbClr val="000000"/>
-              </a:solidFill>
-              <a:effectLst/>
-              <a:uFillTx/>
-              <a:latin typeface="Arial"/>
-            </a:endParaRPr>
           </a:p>
         </p:txBody>
       </p:sp>
@@ -1462,7 +1384,7 @@
           </a:ln>
         </p:spPr>
         <p:txBody>
-          <a:bodyPr lIns="91440" rIns="91440" tIns="91440" bIns="91440" anchor="ctr">
+          <a:bodyPr lIns="91440" tIns="91440" rIns="91440" bIns="91440" anchor="ctr">
             <a:normAutofit/>
           </a:bodyPr>
           <a:lstStyle>
@@ -1472,9 +1394,9 @@
               </a:lnSpc>
               <a:buNone/>
               <a:tabLst>
-                <a:tab algn="l" pos="0"/>
+                <a:tab pos="0" algn="l"/>
               </a:tabLst>
-              <a:defRPr b="0" lang="pt-PT" sz="1000" strike="noStrike" u="none">
+              <a:defRPr lang="pt-PT" sz="1000" b="0" u="none" strike="noStrike">
                 <a:solidFill>
                   <a:schemeClr val="dk2"/>
                 </a:solidFill>
@@ -1492,11 +1414,11 @@
               </a:lnSpc>
               <a:buNone/>
               <a:tabLst>
-                <a:tab algn="l" pos="0"/>
+                <a:tab pos="0" algn="l"/>
               </a:tabLst>
             </a:pPr>
             <a:fld id="{2F91DB5A-382D-44B9-929D-831FF6AF1E01}" type="slidenum">
-              <a:rPr b="0" lang="pt-PT" sz="1000" strike="noStrike" u="none">
+              <a:rPr lang="pt-PT" sz="1000" b="0" u="none" strike="noStrike">
                 <a:solidFill>
                   <a:schemeClr val="dk2"/>
                 </a:solidFill>
@@ -1505,9 +1427,9 @@
                 <a:latin typeface="Arial"/>
                 <a:ea typeface="Arial"/>
               </a:rPr>
-              <a:t>&lt;número&gt;</a:t>
+              <a:t>‹nº›</a:t>
             </a:fld>
-            <a:endParaRPr b="0" lang="pt-PT" sz="1000" strike="noStrike" u="none">
+            <a:endParaRPr lang="pt-PT" sz="1000" b="0" u="none" strike="noStrike">
               <a:solidFill>
                 <a:srgbClr val="000000"/>
               </a:solidFill>
@@ -1520,17 +1442,21 @@
       </p:sp>
     </p:spTree>
   </p:cSld>
+  <p:clrMapOvr>
+    <a:masterClrMapping/>
+  </p:clrMapOvr>
 </p:sldLayout>
 </file>
 
 <file path=ppt/slideLayouts/slideLayout3.xml><?xml version="1.0" encoding="utf-8"?>
-<p:sldLayout xmlns:a="http://schemas.openxmlformats.org/drawingml/2006/main" xmlns:p="http://schemas.openxmlformats.org/presentationml/2006/main" xmlns:r="http://schemas.openxmlformats.org/officeDocument/2006/relationships" xmlns:p14="http://schemas.microsoft.com/office/powerpoint/2010/main" xmlns:p15="http://schemas.microsoft.com/office/powerpoint/2012/main" xmlns:mc="http://schemas.openxmlformats.org/markup-compatibility/2006" type="twoObj" preserve="1">
+<p:sldLayout xmlns:a="http://schemas.openxmlformats.org/drawingml/2006/main" xmlns:r="http://schemas.openxmlformats.org/officeDocument/2006/relationships" xmlns:p="http://schemas.openxmlformats.org/presentationml/2006/main" type="twoObj" preserve="1">
   <p:cSld name="TITLE_AND_TWO_COLUMNS">
     <p:bg>
       <p:bgPr>
         <a:solidFill>
-          <a:srgbClr val="ffffff"/>
+          <a:srgbClr val="FFFFFF"/>
         </a:solidFill>
+        <a:effectLst/>
       </p:bgPr>
     </p:bg>
     <p:spTree>
@@ -1571,9 +1497,10 @@
           </a:ln>
         </p:spPr>
         <p:txBody>
-          <a:bodyPr lIns="91440" rIns="91440" tIns="91440" bIns="91440" anchor="t">
+          <a:bodyPr lIns="91440" tIns="91440" rIns="91440" bIns="91440" anchor="t">
             <a:normAutofit lnSpcReduction="9999"/>
           </a:bodyPr>
+          <a:lstStyle/>
           <a:p>
             <a:pPr indent="0" defTabSz="914400">
               <a:lnSpc>
@@ -1581,11 +1508,11 @@
               </a:lnSpc>
               <a:buNone/>
               <a:tabLst>
-                <a:tab algn="l" pos="0"/>
+                <a:tab pos="0" algn="l"/>
               </a:tabLst>
             </a:pPr>
             <a:r>
-              <a:rPr b="0" lang="pt-PT" sz="2800" strike="noStrike" u="none">
+              <a:rPr lang="pt-PT" sz="2800" b="0" u="none" strike="noStrike">
                 <a:solidFill>
                   <a:srgbClr val="000000"/>
                 </a:solidFill>
@@ -1595,14 +1522,6 @@
               </a:rPr>
               <a:t>Clique para editar o formato do título</a:t>
             </a:r>
-            <a:endParaRPr b="0" lang="pt-PT" sz="2800" strike="noStrike" u="none">
-              <a:solidFill>
-                <a:srgbClr val="000000"/>
-              </a:solidFill>
-              <a:effectLst/>
-              <a:uFillTx/>
-              <a:latin typeface="Arial"/>
-            </a:endParaRPr>
           </a:p>
         </p:txBody>
       </p:sp>
@@ -1630,9 +1549,10 @@
           </a:ln>
         </p:spPr>
         <p:txBody>
-          <a:bodyPr lIns="91440" rIns="91440" tIns="91440" bIns="91440" anchor="t">
+          <a:bodyPr lIns="91440" tIns="91440" rIns="91440" bIns="91440" anchor="t">
             <a:normAutofit/>
           </a:bodyPr>
+          <a:lstStyle/>
           <a:p>
             <a:pPr marL="432000" indent="-324000" defTabSz="914400">
               <a:lnSpc>
@@ -1649,7 +1569,7 @@
               <a:buChar char=""/>
             </a:pPr>
             <a:r>
-              <a:rPr b="0" lang="pt-PT" sz="1400" strike="noStrike" u="none">
+              <a:rPr lang="pt-PT" sz="1400" b="0" u="none" strike="noStrike">
                 <a:solidFill>
                   <a:srgbClr val="000000"/>
                 </a:solidFill>
@@ -1659,17 +1579,9 @@
               </a:rPr>
               <a:t>Clique para editar o formato de texto dos tópicos</a:t>
             </a:r>
-            <a:endParaRPr b="0" lang="pt-PT" sz="1400" strike="noStrike" u="none">
-              <a:solidFill>
-                <a:srgbClr val="000000"/>
-              </a:solidFill>
-              <a:effectLst/>
-              <a:uFillTx/>
-              <a:latin typeface="Arial"/>
-            </a:endParaRPr>
-          </a:p>
-          <a:p>
-            <a:pPr lvl="1" marL="864000" indent="-324000" defTabSz="914400">
+          </a:p>
+          <a:p>
+            <a:pPr marL="864000" lvl="1" indent="-324000" defTabSz="914400">
               <a:lnSpc>
                 <a:spcPct val="100000"/>
               </a:lnSpc>
@@ -1684,7 +1596,7 @@
               <a:buChar char=""/>
             </a:pPr>
             <a:r>
-              <a:rPr b="0" lang="pt-PT" sz="1400" strike="noStrike" u="none">
+              <a:rPr lang="pt-PT" sz="1400" b="0" u="none" strike="noStrike">
                 <a:solidFill>
                   <a:srgbClr val="000000"/>
                 </a:solidFill>
@@ -1694,17 +1606,9 @@
               </a:rPr>
               <a:t>Segundo nível de tópicos</a:t>
             </a:r>
-            <a:endParaRPr b="0" lang="pt-PT" sz="1400" strike="noStrike" u="none">
-              <a:solidFill>
-                <a:srgbClr val="000000"/>
-              </a:solidFill>
-              <a:effectLst/>
-              <a:uFillTx/>
-              <a:latin typeface="Arial"/>
-            </a:endParaRPr>
-          </a:p>
-          <a:p>
-            <a:pPr lvl="2" marL="1296000" indent="-288000" defTabSz="914400">
+          </a:p>
+          <a:p>
+            <a:pPr marL="1296000" lvl="2" indent="-288000" defTabSz="914400">
               <a:lnSpc>
                 <a:spcPct val="100000"/>
               </a:lnSpc>
@@ -1719,7 +1623,7 @@
               <a:buChar char=""/>
             </a:pPr>
             <a:r>
-              <a:rPr b="0" lang="pt-PT" sz="1400" strike="noStrike" u="none">
+              <a:rPr lang="pt-PT" sz="1400" b="0" u="none" strike="noStrike">
                 <a:solidFill>
                   <a:srgbClr val="000000"/>
                 </a:solidFill>
@@ -1729,17 +1633,9 @@
               </a:rPr>
               <a:t>Terceiro nível de tópicos</a:t>
             </a:r>
-            <a:endParaRPr b="0" lang="pt-PT" sz="1400" strike="noStrike" u="none">
-              <a:solidFill>
-                <a:srgbClr val="000000"/>
-              </a:solidFill>
-              <a:effectLst/>
-              <a:uFillTx/>
-              <a:latin typeface="Arial"/>
-            </a:endParaRPr>
-          </a:p>
-          <a:p>
-            <a:pPr lvl="3" marL="1728000" indent="-216000" defTabSz="914400">
+          </a:p>
+          <a:p>
+            <a:pPr marL="1728000" lvl="3" indent="-216000" defTabSz="914400">
               <a:lnSpc>
                 <a:spcPct val="100000"/>
               </a:lnSpc>
@@ -1754,7 +1650,7 @@
               <a:buChar char=""/>
             </a:pPr>
             <a:r>
-              <a:rPr b="0" lang="pt-PT" sz="1400" strike="noStrike" u="none">
+              <a:rPr lang="pt-PT" sz="1400" b="0" u="none" strike="noStrike">
                 <a:solidFill>
                   <a:srgbClr val="000000"/>
                 </a:solidFill>
@@ -1764,17 +1660,9 @@
               </a:rPr>
               <a:t>Quarto nível de tópicos</a:t>
             </a:r>
-            <a:endParaRPr b="0" lang="pt-PT" sz="1400" strike="noStrike" u="none">
-              <a:solidFill>
-                <a:srgbClr val="000000"/>
-              </a:solidFill>
-              <a:effectLst/>
-              <a:uFillTx/>
-              <a:latin typeface="Arial"/>
-            </a:endParaRPr>
-          </a:p>
-          <a:p>
-            <a:pPr lvl="4" marL="2160000" indent="-216000" defTabSz="914400">
+          </a:p>
+          <a:p>
+            <a:pPr marL="2160000" lvl="4" indent="-216000" defTabSz="914400">
               <a:lnSpc>
                 <a:spcPct val="100000"/>
               </a:lnSpc>
@@ -1789,7 +1677,7 @@
               <a:buChar char=""/>
             </a:pPr>
             <a:r>
-              <a:rPr b="0" lang="pt-PT" sz="1400" strike="noStrike" u="none">
+              <a:rPr lang="pt-PT" sz="1400" b="0" u="none" strike="noStrike">
                 <a:solidFill>
                   <a:srgbClr val="000000"/>
                 </a:solidFill>
@@ -1799,17 +1687,9 @@
               </a:rPr>
               <a:t>Quinto nível de tópicos</a:t>
             </a:r>
-            <a:endParaRPr b="0" lang="pt-PT" sz="1400" strike="noStrike" u="none">
-              <a:solidFill>
-                <a:srgbClr val="000000"/>
-              </a:solidFill>
-              <a:effectLst/>
-              <a:uFillTx/>
-              <a:latin typeface="Arial"/>
-            </a:endParaRPr>
-          </a:p>
-          <a:p>
-            <a:pPr lvl="5" marL="2592000" indent="-216000" defTabSz="914400">
+          </a:p>
+          <a:p>
+            <a:pPr marL="2592000" lvl="5" indent="-216000" defTabSz="914400">
               <a:lnSpc>
                 <a:spcPct val="100000"/>
               </a:lnSpc>
@@ -1824,7 +1704,7 @@
               <a:buChar char=""/>
             </a:pPr>
             <a:r>
-              <a:rPr b="0" lang="pt-PT" sz="1400" strike="noStrike" u="none">
+              <a:rPr lang="pt-PT" sz="1400" b="0" u="none" strike="noStrike">
                 <a:solidFill>
                   <a:srgbClr val="000000"/>
                 </a:solidFill>
@@ -1834,17 +1714,9 @@
               </a:rPr>
               <a:t>Sexto nível de tópicos</a:t>
             </a:r>
-            <a:endParaRPr b="0" lang="pt-PT" sz="1400" strike="noStrike" u="none">
-              <a:solidFill>
-                <a:srgbClr val="000000"/>
-              </a:solidFill>
-              <a:effectLst/>
-              <a:uFillTx/>
-              <a:latin typeface="Arial"/>
-            </a:endParaRPr>
-          </a:p>
-          <a:p>
-            <a:pPr lvl="6" marL="3024000" indent="-216000" defTabSz="914400">
+          </a:p>
+          <a:p>
+            <a:pPr marL="3024000" lvl="6" indent="-216000" defTabSz="914400">
               <a:lnSpc>
                 <a:spcPct val="100000"/>
               </a:lnSpc>
@@ -1859,7 +1731,7 @@
               <a:buChar char=""/>
             </a:pPr>
             <a:r>
-              <a:rPr b="0" lang="pt-PT" sz="1400" strike="noStrike" u="none">
+              <a:rPr lang="pt-PT" sz="1400" b="0" u="none" strike="noStrike">
                 <a:solidFill>
                   <a:srgbClr val="000000"/>
                 </a:solidFill>
@@ -1869,14 +1741,6 @@
               </a:rPr>
               <a:t>Sétimo nível de tópicos</a:t>
             </a:r>
-            <a:endParaRPr b="0" lang="pt-PT" sz="1400" strike="noStrike" u="none">
-              <a:solidFill>
-                <a:srgbClr val="000000"/>
-              </a:solidFill>
-              <a:effectLst/>
-              <a:uFillTx/>
-              <a:latin typeface="Arial"/>
-            </a:endParaRPr>
           </a:p>
         </p:txBody>
       </p:sp>
@@ -1904,9 +1768,10 @@
           </a:ln>
         </p:spPr>
         <p:txBody>
-          <a:bodyPr lIns="91440" rIns="91440" tIns="91440" bIns="91440" anchor="t">
+          <a:bodyPr lIns="91440" tIns="91440" rIns="91440" bIns="91440" anchor="t">
             <a:normAutofit/>
           </a:bodyPr>
+          <a:lstStyle/>
           <a:p>
             <a:pPr marL="432000" indent="-324000" defTabSz="914400">
               <a:lnSpc>
@@ -1923,7 +1788,7 @@
               <a:buChar char=""/>
             </a:pPr>
             <a:r>
-              <a:rPr b="0" lang="pt-PT" sz="1400" strike="noStrike" u="none">
+              <a:rPr lang="pt-PT" sz="1400" b="0" u="none" strike="noStrike">
                 <a:solidFill>
                   <a:srgbClr val="000000"/>
                 </a:solidFill>
@@ -1933,17 +1798,9 @@
               </a:rPr>
               <a:t>Clique para editar o formato de texto dos tópicos</a:t>
             </a:r>
-            <a:endParaRPr b="0" lang="pt-PT" sz="1400" strike="noStrike" u="none">
-              <a:solidFill>
-                <a:srgbClr val="000000"/>
-              </a:solidFill>
-              <a:effectLst/>
-              <a:uFillTx/>
-              <a:latin typeface="Arial"/>
-            </a:endParaRPr>
-          </a:p>
-          <a:p>
-            <a:pPr lvl="1" marL="864000" indent="-324000" defTabSz="914400">
+          </a:p>
+          <a:p>
+            <a:pPr marL="864000" lvl="1" indent="-324000" defTabSz="914400">
               <a:lnSpc>
                 <a:spcPct val="100000"/>
               </a:lnSpc>
@@ -1958,7 +1815,7 @@
               <a:buChar char=""/>
             </a:pPr>
             <a:r>
-              <a:rPr b="0" lang="pt-PT" sz="1400" strike="noStrike" u="none">
+              <a:rPr lang="pt-PT" sz="1400" b="0" u="none" strike="noStrike">
                 <a:solidFill>
                   <a:srgbClr val="000000"/>
                 </a:solidFill>
@@ -1968,17 +1825,9 @@
               </a:rPr>
               <a:t>Segundo nível de tópicos</a:t>
             </a:r>
-            <a:endParaRPr b="0" lang="pt-PT" sz="1400" strike="noStrike" u="none">
-              <a:solidFill>
-                <a:srgbClr val="000000"/>
-              </a:solidFill>
-              <a:effectLst/>
-              <a:uFillTx/>
-              <a:latin typeface="Arial"/>
-            </a:endParaRPr>
-          </a:p>
-          <a:p>
-            <a:pPr lvl="2" marL="1296000" indent="-288000" defTabSz="914400">
+          </a:p>
+          <a:p>
+            <a:pPr marL="1296000" lvl="2" indent="-288000" defTabSz="914400">
               <a:lnSpc>
                 <a:spcPct val="100000"/>
               </a:lnSpc>
@@ -1993,7 +1842,7 @@
               <a:buChar char=""/>
             </a:pPr>
             <a:r>
-              <a:rPr b="0" lang="pt-PT" sz="1400" strike="noStrike" u="none">
+              <a:rPr lang="pt-PT" sz="1400" b="0" u="none" strike="noStrike">
                 <a:solidFill>
                   <a:srgbClr val="000000"/>
                 </a:solidFill>
@@ -2003,17 +1852,9 @@
               </a:rPr>
               <a:t>Terceiro nível de tópicos</a:t>
             </a:r>
-            <a:endParaRPr b="0" lang="pt-PT" sz="1400" strike="noStrike" u="none">
-              <a:solidFill>
-                <a:srgbClr val="000000"/>
-              </a:solidFill>
-              <a:effectLst/>
-              <a:uFillTx/>
-              <a:latin typeface="Arial"/>
-            </a:endParaRPr>
-          </a:p>
-          <a:p>
-            <a:pPr lvl="3" marL="1728000" indent="-216000" defTabSz="914400">
+          </a:p>
+          <a:p>
+            <a:pPr marL="1728000" lvl="3" indent="-216000" defTabSz="914400">
               <a:lnSpc>
                 <a:spcPct val="100000"/>
               </a:lnSpc>
@@ -2028,7 +1869,7 @@
               <a:buChar char=""/>
             </a:pPr>
             <a:r>
-              <a:rPr b="0" lang="pt-PT" sz="1400" strike="noStrike" u="none">
+              <a:rPr lang="pt-PT" sz="1400" b="0" u="none" strike="noStrike">
                 <a:solidFill>
                   <a:srgbClr val="000000"/>
                 </a:solidFill>
@@ -2038,17 +1879,9 @@
               </a:rPr>
               <a:t>Quarto nível de tópicos</a:t>
             </a:r>
-            <a:endParaRPr b="0" lang="pt-PT" sz="1400" strike="noStrike" u="none">
-              <a:solidFill>
-                <a:srgbClr val="000000"/>
-              </a:solidFill>
-              <a:effectLst/>
-              <a:uFillTx/>
-              <a:latin typeface="Arial"/>
-            </a:endParaRPr>
-          </a:p>
-          <a:p>
-            <a:pPr lvl="4" marL="2160000" indent="-216000" defTabSz="914400">
+          </a:p>
+          <a:p>
+            <a:pPr marL="2160000" lvl="4" indent="-216000" defTabSz="914400">
               <a:lnSpc>
                 <a:spcPct val="100000"/>
               </a:lnSpc>
@@ -2063,7 +1896,7 @@
               <a:buChar char=""/>
             </a:pPr>
             <a:r>
-              <a:rPr b="0" lang="pt-PT" sz="1400" strike="noStrike" u="none">
+              <a:rPr lang="pt-PT" sz="1400" b="0" u="none" strike="noStrike">
                 <a:solidFill>
                   <a:srgbClr val="000000"/>
                 </a:solidFill>
@@ -2073,17 +1906,9 @@
               </a:rPr>
               <a:t>Quinto nível de tópicos</a:t>
             </a:r>
-            <a:endParaRPr b="0" lang="pt-PT" sz="1400" strike="noStrike" u="none">
-              <a:solidFill>
-                <a:srgbClr val="000000"/>
-              </a:solidFill>
-              <a:effectLst/>
-              <a:uFillTx/>
-              <a:latin typeface="Arial"/>
-            </a:endParaRPr>
-          </a:p>
-          <a:p>
-            <a:pPr lvl="5" marL="2592000" indent="-216000" defTabSz="914400">
+          </a:p>
+          <a:p>
+            <a:pPr marL="2592000" lvl="5" indent="-216000" defTabSz="914400">
               <a:lnSpc>
                 <a:spcPct val="100000"/>
               </a:lnSpc>
@@ -2098,7 +1923,7 @@
               <a:buChar char=""/>
             </a:pPr>
             <a:r>
-              <a:rPr b="0" lang="pt-PT" sz="1400" strike="noStrike" u="none">
+              <a:rPr lang="pt-PT" sz="1400" b="0" u="none" strike="noStrike">
                 <a:solidFill>
                   <a:srgbClr val="000000"/>
                 </a:solidFill>
@@ -2108,17 +1933,9 @@
               </a:rPr>
               <a:t>Sexto nível de tópicos</a:t>
             </a:r>
-            <a:endParaRPr b="0" lang="pt-PT" sz="1400" strike="noStrike" u="none">
-              <a:solidFill>
-                <a:srgbClr val="000000"/>
-              </a:solidFill>
-              <a:effectLst/>
-              <a:uFillTx/>
-              <a:latin typeface="Arial"/>
-            </a:endParaRPr>
-          </a:p>
-          <a:p>
-            <a:pPr lvl="6" marL="3024000" indent="-216000" defTabSz="914400">
+          </a:p>
+          <a:p>
+            <a:pPr marL="3024000" lvl="6" indent="-216000" defTabSz="914400">
               <a:lnSpc>
                 <a:spcPct val="100000"/>
               </a:lnSpc>
@@ -2133,7 +1950,7 @@
               <a:buChar char=""/>
             </a:pPr>
             <a:r>
-              <a:rPr b="0" lang="pt-PT" sz="1400" strike="noStrike" u="none">
+              <a:rPr lang="pt-PT" sz="1400" b="0" u="none" strike="noStrike">
                 <a:solidFill>
                   <a:srgbClr val="000000"/>
                 </a:solidFill>
@@ -2143,14 +1960,6 @@
               </a:rPr>
               <a:t>Sétimo nível de tópicos</a:t>
             </a:r>
-            <a:endParaRPr b="0" lang="pt-PT" sz="1400" strike="noStrike" u="none">
-              <a:solidFill>
-                <a:srgbClr val="000000"/>
-              </a:solidFill>
-              <a:effectLst/>
-              <a:uFillTx/>
-              <a:latin typeface="Arial"/>
-            </a:endParaRPr>
           </a:p>
         </p:txBody>
       </p:sp>
@@ -2178,7 +1987,7 @@
           </a:ln>
         </p:spPr>
         <p:txBody>
-          <a:bodyPr lIns="91440" rIns="91440" tIns="91440" bIns="91440" anchor="ctr">
+          <a:bodyPr lIns="91440" tIns="91440" rIns="91440" bIns="91440" anchor="ctr">
             <a:normAutofit/>
           </a:bodyPr>
           <a:lstStyle>
@@ -2188,9 +1997,9 @@
               </a:lnSpc>
               <a:buNone/>
               <a:tabLst>
-                <a:tab algn="l" pos="0"/>
+                <a:tab pos="0" algn="l"/>
               </a:tabLst>
-              <a:defRPr b="0" lang="pt-PT" sz="1000" strike="noStrike" u="none">
+              <a:defRPr lang="pt-PT" sz="1000" b="0" u="none" strike="noStrike">
                 <a:solidFill>
                   <a:schemeClr val="dk2"/>
                 </a:solidFill>
@@ -2208,11 +2017,11 @@
               </a:lnSpc>
               <a:buNone/>
               <a:tabLst>
-                <a:tab algn="l" pos="0"/>
+                <a:tab pos="0" algn="l"/>
               </a:tabLst>
             </a:pPr>
             <a:fld id="{5DBDFBE8-8F24-49BB-A894-1574CF71BACC}" type="slidenum">
-              <a:rPr b="0" lang="pt-PT" sz="1000" strike="noStrike" u="none">
+              <a:rPr lang="pt-PT" sz="1000" b="0" u="none" strike="noStrike">
                 <a:solidFill>
                   <a:schemeClr val="dk2"/>
                 </a:solidFill>
@@ -2221,9 +2030,9 @@
                 <a:latin typeface="Arial"/>
                 <a:ea typeface="Arial"/>
               </a:rPr>
-              <a:t>&lt;número&gt;</a:t>
+              <a:t>‹nº›</a:t>
             </a:fld>
-            <a:endParaRPr b="0" lang="pt-PT" sz="1000" strike="noStrike" u="none">
+            <a:endParaRPr lang="pt-PT" sz="1000" b="0" u="none" strike="noStrike">
               <a:solidFill>
                 <a:srgbClr val="000000"/>
               </a:solidFill>
@@ -2236,17 +2045,21 @@
       </p:sp>
     </p:spTree>
   </p:cSld>
+  <p:clrMapOvr>
+    <a:masterClrMapping/>
+  </p:clrMapOvr>
 </p:sldLayout>
 </file>
 
 <file path=ppt/slideLayouts/slideLayout4.xml><?xml version="1.0" encoding="utf-8"?>
-<p:sldLayout xmlns:a="http://schemas.openxmlformats.org/drawingml/2006/main" xmlns:p="http://schemas.openxmlformats.org/presentationml/2006/main" xmlns:r="http://schemas.openxmlformats.org/officeDocument/2006/relationships" xmlns:p14="http://schemas.microsoft.com/office/powerpoint/2010/main" xmlns:p15="http://schemas.microsoft.com/office/powerpoint/2012/main" xmlns:mc="http://schemas.openxmlformats.org/markup-compatibility/2006" type="titleOnly" preserve="1">
+<p:sldLayout xmlns:a="http://schemas.openxmlformats.org/drawingml/2006/main" xmlns:r="http://schemas.openxmlformats.org/officeDocument/2006/relationships" xmlns:p="http://schemas.openxmlformats.org/presentationml/2006/main" type="titleOnly" preserve="1">
   <p:cSld name="TITLE_ONLY">
     <p:bg>
       <p:bgPr>
         <a:solidFill>
-          <a:srgbClr val="ffffff"/>
+          <a:srgbClr val="FFFFFF"/>
         </a:solidFill>
+        <a:effectLst/>
       </p:bgPr>
     </p:bg>
     <p:spTree>
@@ -2287,9 +2100,10 @@
           </a:ln>
         </p:spPr>
         <p:txBody>
-          <a:bodyPr lIns="91440" rIns="91440" tIns="91440" bIns="91440" anchor="t">
+          <a:bodyPr lIns="91440" tIns="91440" rIns="91440" bIns="91440" anchor="t">
             <a:normAutofit lnSpcReduction="9999"/>
           </a:bodyPr>
+          <a:lstStyle/>
           <a:p>
             <a:pPr indent="0" defTabSz="914400">
               <a:lnSpc>
@@ -2297,11 +2111,11 @@
               </a:lnSpc>
               <a:buNone/>
               <a:tabLst>
-                <a:tab algn="l" pos="0"/>
+                <a:tab pos="0" algn="l"/>
               </a:tabLst>
             </a:pPr>
             <a:r>
-              <a:rPr b="0" lang="pt-PT" sz="2800" strike="noStrike" u="none">
+              <a:rPr lang="pt-PT" sz="2800" b="0" u="none" strike="noStrike">
                 <a:solidFill>
                   <a:srgbClr val="000000"/>
                 </a:solidFill>
@@ -2311,14 +2125,6 @@
               </a:rPr>
               <a:t>Clique para editar o formato do título</a:t>
             </a:r>
-            <a:endParaRPr b="0" lang="pt-PT" sz="2800" strike="noStrike" u="none">
-              <a:solidFill>
-                <a:srgbClr val="000000"/>
-              </a:solidFill>
-              <a:effectLst/>
-              <a:uFillTx/>
-              <a:latin typeface="Arial"/>
-            </a:endParaRPr>
           </a:p>
         </p:txBody>
       </p:sp>
@@ -2346,7 +2152,7 @@
           </a:ln>
         </p:spPr>
         <p:txBody>
-          <a:bodyPr lIns="91440" rIns="91440" tIns="91440" bIns="91440" anchor="ctr">
+          <a:bodyPr lIns="91440" tIns="91440" rIns="91440" bIns="91440" anchor="ctr">
             <a:normAutofit/>
           </a:bodyPr>
           <a:lstStyle>
@@ -2356,9 +2162,9 @@
               </a:lnSpc>
               <a:buNone/>
               <a:tabLst>
-                <a:tab algn="l" pos="0"/>
+                <a:tab pos="0" algn="l"/>
               </a:tabLst>
-              <a:defRPr b="0" lang="pt-PT" sz="1000" strike="noStrike" u="none">
+              <a:defRPr lang="pt-PT" sz="1000" b="0" u="none" strike="noStrike">
                 <a:solidFill>
                   <a:schemeClr val="dk2"/>
                 </a:solidFill>
@@ -2376,11 +2182,11 @@
               </a:lnSpc>
               <a:buNone/>
               <a:tabLst>
-                <a:tab algn="l" pos="0"/>
+                <a:tab pos="0" algn="l"/>
               </a:tabLst>
             </a:pPr>
             <a:fld id="{9CB8D008-DCD2-49B8-9380-2A994B49347F}" type="slidenum">
-              <a:rPr b="0" lang="pt-PT" sz="1000" strike="noStrike" u="none">
+              <a:rPr lang="pt-PT" sz="1000" b="0" u="none" strike="noStrike">
                 <a:solidFill>
                   <a:schemeClr val="dk2"/>
                 </a:solidFill>
@@ -2389,9 +2195,9 @@
                 <a:latin typeface="Arial"/>
                 <a:ea typeface="Arial"/>
               </a:rPr>
-              <a:t>&lt;número&gt;</a:t>
+              <a:t>‹nº›</a:t>
             </a:fld>
-            <a:endParaRPr b="0" lang="pt-PT" sz="1000" strike="noStrike" u="none">
+            <a:endParaRPr lang="pt-PT" sz="1000" b="0" u="none" strike="noStrike">
               <a:solidFill>
                 <a:srgbClr val="000000"/>
               </a:solidFill>
@@ -2404,17 +2210,21 @@
       </p:sp>
     </p:spTree>
   </p:cSld>
+  <p:clrMapOvr>
+    <a:masterClrMapping/>
+  </p:clrMapOvr>
 </p:sldLayout>
 </file>
 
 <file path=ppt/slideLayouts/slideLayout5.xml><?xml version="1.0" encoding="utf-8"?>
-<p:sldLayout xmlns:a="http://schemas.openxmlformats.org/drawingml/2006/main" xmlns:p="http://schemas.openxmlformats.org/presentationml/2006/main" xmlns:r="http://schemas.openxmlformats.org/officeDocument/2006/relationships" xmlns:p14="http://schemas.microsoft.com/office/powerpoint/2010/main" xmlns:p15="http://schemas.microsoft.com/office/powerpoint/2012/main" xmlns:mc="http://schemas.openxmlformats.org/markup-compatibility/2006" type="blank" preserve="1">
+<p:sldLayout xmlns:a="http://schemas.openxmlformats.org/drawingml/2006/main" xmlns:r="http://schemas.openxmlformats.org/officeDocument/2006/relationships" xmlns:p="http://schemas.openxmlformats.org/presentationml/2006/main" type="blank" preserve="1">
   <p:cSld name="MAIN_POINT">
     <p:bg>
       <p:bgPr>
         <a:solidFill>
-          <a:srgbClr val="ffffff"/>
+          <a:srgbClr val="FFFFFF"/>
         </a:solidFill>
+        <a:effectLst/>
       </p:bgPr>
     </p:bg>
     <p:spTree>
@@ -2455,9 +2265,10 @@
           </a:ln>
         </p:spPr>
         <p:txBody>
-          <a:bodyPr lIns="91440" rIns="91440" tIns="91440" bIns="91440" anchor="ctr">
+          <a:bodyPr lIns="91440" tIns="91440" rIns="91440" bIns="91440" anchor="ctr">
             <a:normAutofit/>
           </a:bodyPr>
+          <a:lstStyle/>
           <a:p>
             <a:pPr indent="0" defTabSz="914400">
               <a:lnSpc>
@@ -2465,11 +2276,11 @@
               </a:lnSpc>
               <a:buNone/>
               <a:tabLst>
-                <a:tab algn="l" pos="0"/>
+                <a:tab pos="0" algn="l"/>
               </a:tabLst>
             </a:pPr>
             <a:r>
-              <a:rPr b="0" lang="pt-PT" sz="4800" strike="noStrike" u="none">
+              <a:rPr lang="pt-PT" sz="4800" b="0" u="none" strike="noStrike">
                 <a:solidFill>
                   <a:srgbClr val="000000"/>
                 </a:solidFill>
@@ -2479,14 +2290,6 @@
               </a:rPr>
               <a:t>Clique para editar o formato do título</a:t>
             </a:r>
-            <a:endParaRPr b="0" lang="pt-PT" sz="4800" strike="noStrike" u="none">
-              <a:solidFill>
-                <a:srgbClr val="000000"/>
-              </a:solidFill>
-              <a:effectLst/>
-              <a:uFillTx/>
-              <a:latin typeface="Arial"/>
-            </a:endParaRPr>
           </a:p>
         </p:txBody>
       </p:sp>
@@ -2514,7 +2317,7 @@
           </a:ln>
         </p:spPr>
         <p:txBody>
-          <a:bodyPr lIns="91440" rIns="91440" tIns="91440" bIns="91440" anchor="ctr">
+          <a:bodyPr lIns="91440" tIns="91440" rIns="91440" bIns="91440" anchor="ctr">
             <a:normAutofit/>
           </a:bodyPr>
           <a:lstStyle>
@@ -2524,9 +2327,9 @@
               </a:lnSpc>
               <a:buNone/>
               <a:tabLst>
-                <a:tab algn="l" pos="0"/>
+                <a:tab pos="0" algn="l"/>
               </a:tabLst>
-              <a:defRPr b="0" lang="pt-PT" sz="1000" strike="noStrike" u="none">
+              <a:defRPr lang="pt-PT" sz="1000" b="0" u="none" strike="noStrike">
                 <a:solidFill>
                   <a:schemeClr val="dk2"/>
                 </a:solidFill>
@@ -2544,11 +2347,11 @@
               </a:lnSpc>
               <a:buNone/>
               <a:tabLst>
-                <a:tab algn="l" pos="0"/>
+                <a:tab pos="0" algn="l"/>
               </a:tabLst>
             </a:pPr>
             <a:fld id="{D488047E-F97E-418C-8D63-9634AE684AD0}" type="slidenum">
-              <a:rPr b="0" lang="pt-PT" sz="1000" strike="noStrike" u="none">
+              <a:rPr lang="pt-PT" sz="1000" b="0" u="none" strike="noStrike">
                 <a:solidFill>
                   <a:schemeClr val="dk2"/>
                 </a:solidFill>
@@ -2557,9 +2360,9 @@
                 <a:latin typeface="Arial"/>
                 <a:ea typeface="Arial"/>
               </a:rPr>
-              <a:t>&lt;número&gt;</a:t>
+              <a:t>‹nº›</a:t>
             </a:fld>
-            <a:endParaRPr b="0" lang="pt-PT" sz="1000" strike="noStrike" u="none">
+            <a:endParaRPr lang="pt-PT" sz="1000" b="0" u="none" strike="noStrike">
               <a:solidFill>
                 <a:srgbClr val="000000"/>
               </a:solidFill>
@@ -2572,17 +2375,21 @@
       </p:sp>
     </p:spTree>
   </p:cSld>
+  <p:clrMapOvr>
+    <a:masterClrMapping/>
+  </p:clrMapOvr>
 </p:sldLayout>
 </file>
 
 <file path=ppt/slideLayouts/slideLayout6.xml><?xml version="1.0" encoding="utf-8"?>
-<p:sldLayout xmlns:a="http://schemas.openxmlformats.org/drawingml/2006/main" xmlns:p="http://schemas.openxmlformats.org/presentationml/2006/main" xmlns:r="http://schemas.openxmlformats.org/officeDocument/2006/relationships" xmlns:p14="http://schemas.microsoft.com/office/powerpoint/2010/main" xmlns:p15="http://schemas.microsoft.com/office/powerpoint/2012/main" xmlns:mc="http://schemas.openxmlformats.org/markup-compatibility/2006" type="blank" preserve="1">
+<p:sldLayout xmlns:a="http://schemas.openxmlformats.org/drawingml/2006/main" xmlns:r="http://schemas.openxmlformats.org/officeDocument/2006/relationships" xmlns:p="http://schemas.openxmlformats.org/presentationml/2006/main" type="blank" preserve="1">
   <p:cSld name="SECTION_TITLE_AND_DESCRIPTION">
     <p:bg>
       <p:bgPr>
         <a:solidFill>
-          <a:srgbClr val="ffffff"/>
+          <a:srgbClr val="FFFFFF"/>
         </a:solidFill>
+        <a:effectLst/>
       </p:bgPr>
     </p:bg>
     <p:spTree>
@@ -2621,25 +2428,32 @@
           </a:ln>
         </p:spPr>
         <p:style>
-          <a:lnRef idx="0"/>
-          <a:fillRef idx="0"/>
-          <a:effectRef idx="0"/>
+          <a:lnRef idx="0">
+            <a:scrgbClr r="0" g="0" b="0"/>
+          </a:lnRef>
+          <a:fillRef idx="0">
+            <a:scrgbClr r="0" g="0" b="0"/>
+          </a:fillRef>
+          <a:effectRef idx="0">
+            <a:scrgbClr r="0" g="0" b="0"/>
+          </a:effectRef>
           <a:fontRef idx="minor"/>
         </p:style>
         <p:txBody>
-          <a:bodyPr lIns="90000" rIns="90000" tIns="91440" bIns="91440" anchor="ctr">
+          <a:bodyPr lIns="90000" tIns="91440" rIns="90000" bIns="91440" anchor="ctr">
             <a:noAutofit/>
           </a:bodyPr>
+          <a:lstStyle/>
           <a:p>
             <a:pPr defTabSz="914400">
               <a:lnSpc>
                 <a:spcPct val="100000"/>
               </a:lnSpc>
               <a:tabLst>
-                <a:tab algn="l" pos="0"/>
+                <a:tab pos="0" algn="l"/>
               </a:tabLst>
             </a:pPr>
-            <a:endParaRPr b="0" lang="pt-PT" sz="1400" strike="noStrike" u="none">
+            <a:endParaRPr lang="pt-PT" sz="1400" b="0" u="none" strike="noStrike">
               <a:solidFill>
                 <a:srgbClr val="000000"/>
               </a:solidFill>
@@ -2674,9 +2488,10 @@
           </a:ln>
         </p:spPr>
         <p:txBody>
-          <a:bodyPr lIns="91440" rIns="91440" tIns="91440" bIns="91440" anchor="b">
+          <a:bodyPr lIns="91440" tIns="91440" rIns="91440" bIns="91440" anchor="b">
             <a:normAutofit fontScale="85000" lnSpcReduction="9999"/>
           </a:bodyPr>
+          <a:lstStyle/>
           <a:p>
             <a:pPr indent="0" defTabSz="914400">
               <a:lnSpc>
@@ -2684,11 +2499,11 @@
               </a:lnSpc>
               <a:buNone/>
               <a:tabLst>
-                <a:tab algn="l" pos="0"/>
+                <a:tab pos="0" algn="l"/>
               </a:tabLst>
             </a:pPr>
             <a:r>
-              <a:rPr b="0" lang="pt-PT" sz="4200" strike="noStrike" u="none">
+              <a:rPr lang="pt-PT" sz="4200" b="0" u="none" strike="noStrike">
                 <a:solidFill>
                   <a:srgbClr val="000000"/>
                 </a:solidFill>
@@ -2698,14 +2513,6 @@
               </a:rPr>
               <a:t>Clique para editar o formato do título</a:t>
             </a:r>
-            <a:endParaRPr b="0" lang="pt-PT" sz="4200" strike="noStrike" u="none">
-              <a:solidFill>
-                <a:srgbClr val="000000"/>
-              </a:solidFill>
-              <a:effectLst/>
-              <a:uFillTx/>
-              <a:latin typeface="Arial"/>
-            </a:endParaRPr>
           </a:p>
         </p:txBody>
       </p:sp>
@@ -2733,9 +2540,10 @@
           </a:ln>
         </p:spPr>
         <p:txBody>
-          <a:bodyPr lIns="91440" rIns="91440" tIns="91440" bIns="91440" anchor="ctr">
+          <a:bodyPr lIns="91440" tIns="91440" rIns="91440" bIns="91440" anchor="ctr">
             <a:normAutofit fontScale="85000" lnSpcReduction="9999"/>
           </a:bodyPr>
+          <a:lstStyle/>
           <a:p>
             <a:pPr marL="432000" indent="-324000" defTabSz="914400">
               <a:lnSpc>
@@ -2752,7 +2560,7 @@
               <a:buChar char=""/>
             </a:pPr>
             <a:r>
-              <a:rPr b="0" lang="pt-PT" sz="1800" strike="noStrike" u="none">
+              <a:rPr lang="pt-PT" sz="1800" b="0" u="none" strike="noStrike">
                 <a:solidFill>
                   <a:srgbClr val="000000"/>
                 </a:solidFill>
@@ -2762,17 +2570,9 @@
               </a:rPr>
               <a:t>Clique para editar o formato de texto dos tópicos</a:t>
             </a:r>
-            <a:endParaRPr b="0" lang="pt-PT" sz="1800" strike="noStrike" u="none">
-              <a:solidFill>
-                <a:srgbClr val="000000"/>
-              </a:solidFill>
-              <a:effectLst/>
-              <a:uFillTx/>
-              <a:latin typeface="Arial"/>
-            </a:endParaRPr>
-          </a:p>
-          <a:p>
-            <a:pPr lvl="1" marL="864000" indent="-324000" defTabSz="914400">
+          </a:p>
+          <a:p>
+            <a:pPr marL="864000" lvl="1" indent="-324000" defTabSz="914400">
               <a:lnSpc>
                 <a:spcPct val="100000"/>
               </a:lnSpc>
@@ -2787,7 +2587,7 @@
               <a:buChar char=""/>
             </a:pPr>
             <a:r>
-              <a:rPr b="0" lang="pt-PT" sz="1800" strike="noStrike" u="none">
+              <a:rPr lang="pt-PT" sz="1800" b="0" u="none" strike="noStrike">
                 <a:solidFill>
                   <a:srgbClr val="000000"/>
                 </a:solidFill>
@@ -2797,17 +2597,9 @@
               </a:rPr>
               <a:t>Segundo nível de tópicos</a:t>
             </a:r>
-            <a:endParaRPr b="0" lang="pt-PT" sz="1800" strike="noStrike" u="none">
-              <a:solidFill>
-                <a:srgbClr val="000000"/>
-              </a:solidFill>
-              <a:effectLst/>
-              <a:uFillTx/>
-              <a:latin typeface="Arial"/>
-            </a:endParaRPr>
-          </a:p>
-          <a:p>
-            <a:pPr lvl="2" marL="1296000" indent="-288000" defTabSz="914400">
+          </a:p>
+          <a:p>
+            <a:pPr marL="1296000" lvl="2" indent="-288000" defTabSz="914400">
               <a:lnSpc>
                 <a:spcPct val="100000"/>
               </a:lnSpc>
@@ -2822,7 +2614,7 @@
               <a:buChar char=""/>
             </a:pPr>
             <a:r>
-              <a:rPr b="0" lang="pt-PT" sz="1800" strike="noStrike" u="none">
+              <a:rPr lang="pt-PT" sz="1800" b="0" u="none" strike="noStrike">
                 <a:solidFill>
                   <a:srgbClr val="000000"/>
                 </a:solidFill>
@@ -2832,17 +2624,9 @@
               </a:rPr>
               <a:t>Terceiro nível de tópicos</a:t>
             </a:r>
-            <a:endParaRPr b="0" lang="pt-PT" sz="1800" strike="noStrike" u="none">
-              <a:solidFill>
-                <a:srgbClr val="000000"/>
-              </a:solidFill>
-              <a:effectLst/>
-              <a:uFillTx/>
-              <a:latin typeface="Arial"/>
-            </a:endParaRPr>
-          </a:p>
-          <a:p>
-            <a:pPr lvl="3" marL="1728000" indent="-216000" defTabSz="914400">
+          </a:p>
+          <a:p>
+            <a:pPr marL="1728000" lvl="3" indent="-216000" defTabSz="914400">
               <a:lnSpc>
                 <a:spcPct val="100000"/>
               </a:lnSpc>
@@ -2857,7 +2641,7 @@
               <a:buChar char=""/>
             </a:pPr>
             <a:r>
-              <a:rPr b="0" lang="pt-PT" sz="1800" strike="noStrike" u="none">
+              <a:rPr lang="pt-PT" sz="1800" b="0" u="none" strike="noStrike">
                 <a:solidFill>
                   <a:srgbClr val="000000"/>
                 </a:solidFill>
@@ -2867,17 +2651,9 @@
               </a:rPr>
               <a:t>Quarto nível de tópicos</a:t>
             </a:r>
-            <a:endParaRPr b="0" lang="pt-PT" sz="1800" strike="noStrike" u="none">
-              <a:solidFill>
-                <a:srgbClr val="000000"/>
-              </a:solidFill>
-              <a:effectLst/>
-              <a:uFillTx/>
-              <a:latin typeface="Arial"/>
-            </a:endParaRPr>
-          </a:p>
-          <a:p>
-            <a:pPr lvl="4" marL="2160000" indent="-216000" defTabSz="914400">
+          </a:p>
+          <a:p>
+            <a:pPr marL="2160000" lvl="4" indent="-216000" defTabSz="914400">
               <a:lnSpc>
                 <a:spcPct val="100000"/>
               </a:lnSpc>
@@ -2892,7 +2668,7 @@
               <a:buChar char=""/>
             </a:pPr>
             <a:r>
-              <a:rPr b="0" lang="pt-PT" sz="1800" strike="noStrike" u="none">
+              <a:rPr lang="pt-PT" sz="1800" b="0" u="none" strike="noStrike">
                 <a:solidFill>
                   <a:srgbClr val="000000"/>
                 </a:solidFill>
@@ -2902,17 +2678,9 @@
               </a:rPr>
               <a:t>Quinto nível de tópicos</a:t>
             </a:r>
-            <a:endParaRPr b="0" lang="pt-PT" sz="1800" strike="noStrike" u="none">
-              <a:solidFill>
-                <a:srgbClr val="000000"/>
-              </a:solidFill>
-              <a:effectLst/>
-              <a:uFillTx/>
-              <a:latin typeface="Arial"/>
-            </a:endParaRPr>
-          </a:p>
-          <a:p>
-            <a:pPr lvl="5" marL="2592000" indent="-216000" defTabSz="914400">
+          </a:p>
+          <a:p>
+            <a:pPr marL="2592000" lvl="5" indent="-216000" defTabSz="914400">
               <a:lnSpc>
                 <a:spcPct val="100000"/>
               </a:lnSpc>
@@ -2927,7 +2695,7 @@
               <a:buChar char=""/>
             </a:pPr>
             <a:r>
-              <a:rPr b="0" lang="pt-PT" sz="1800" strike="noStrike" u="none">
+              <a:rPr lang="pt-PT" sz="1800" b="0" u="none" strike="noStrike">
                 <a:solidFill>
                   <a:srgbClr val="000000"/>
                 </a:solidFill>
@@ -2937,17 +2705,9 @@
               </a:rPr>
               <a:t>Sexto nível de tópicos</a:t>
             </a:r>
-            <a:endParaRPr b="0" lang="pt-PT" sz="1800" strike="noStrike" u="none">
-              <a:solidFill>
-                <a:srgbClr val="000000"/>
-              </a:solidFill>
-              <a:effectLst/>
-              <a:uFillTx/>
-              <a:latin typeface="Arial"/>
-            </a:endParaRPr>
-          </a:p>
-          <a:p>
-            <a:pPr lvl="6" marL="3024000" indent="-216000" defTabSz="914400">
+          </a:p>
+          <a:p>
+            <a:pPr marL="3024000" lvl="6" indent="-216000" defTabSz="914400">
               <a:lnSpc>
                 <a:spcPct val="100000"/>
               </a:lnSpc>
@@ -2962,7 +2722,7 @@
               <a:buChar char=""/>
             </a:pPr>
             <a:r>
-              <a:rPr b="0" lang="pt-PT" sz="1800" strike="noStrike" u="none">
+              <a:rPr lang="pt-PT" sz="1800" b="0" u="none" strike="noStrike">
                 <a:solidFill>
                   <a:srgbClr val="000000"/>
                 </a:solidFill>
@@ -2972,14 +2732,6 @@
               </a:rPr>
               <a:t>Sétimo nível de tópicos</a:t>
             </a:r>
-            <a:endParaRPr b="0" lang="pt-PT" sz="1800" strike="noStrike" u="none">
-              <a:solidFill>
-                <a:srgbClr val="000000"/>
-              </a:solidFill>
-              <a:effectLst/>
-              <a:uFillTx/>
-              <a:latin typeface="Arial"/>
-            </a:endParaRPr>
           </a:p>
         </p:txBody>
       </p:sp>
@@ -3007,7 +2759,7 @@
           </a:ln>
         </p:spPr>
         <p:txBody>
-          <a:bodyPr lIns="91440" rIns="91440" tIns="91440" bIns="91440" anchor="ctr">
+          <a:bodyPr lIns="91440" tIns="91440" rIns="91440" bIns="91440" anchor="ctr">
             <a:normAutofit/>
           </a:bodyPr>
           <a:lstStyle>
@@ -3017,9 +2769,9 @@
               </a:lnSpc>
               <a:buNone/>
               <a:tabLst>
-                <a:tab algn="l" pos="0"/>
+                <a:tab pos="0" algn="l"/>
               </a:tabLst>
-              <a:defRPr b="0" lang="pt-PT" sz="1000" strike="noStrike" u="none">
+              <a:defRPr lang="pt-PT" sz="1000" b="0" u="none" strike="noStrike">
                 <a:solidFill>
                   <a:schemeClr val="dk2"/>
                 </a:solidFill>
@@ -3037,11 +2789,11 @@
               </a:lnSpc>
               <a:buNone/>
               <a:tabLst>
-                <a:tab algn="l" pos="0"/>
+                <a:tab pos="0" algn="l"/>
               </a:tabLst>
             </a:pPr>
             <a:fld id="{471DE023-3390-435A-BB06-D1F4BAE926AD}" type="slidenum">
-              <a:rPr b="0" lang="pt-PT" sz="1000" strike="noStrike" u="none">
+              <a:rPr lang="pt-PT" sz="1000" b="0" u="none" strike="noStrike">
                 <a:solidFill>
                   <a:schemeClr val="dk2"/>
                 </a:solidFill>
@@ -3050,9 +2802,9 @@
                 <a:latin typeface="Arial"/>
                 <a:ea typeface="Arial"/>
               </a:rPr>
-              <a:t>&lt;número&gt;</a:t>
+              <a:t>‹nº›</a:t>
             </a:fld>
-            <a:endParaRPr b="0" lang="pt-PT" sz="1000" strike="noStrike" u="none">
+            <a:endParaRPr lang="pt-PT" sz="1000" b="0" u="none" strike="noStrike">
               <a:solidFill>
                 <a:srgbClr val="000000"/>
               </a:solidFill>
@@ -3065,17 +2817,21 @@
       </p:sp>
     </p:spTree>
   </p:cSld>
+  <p:clrMapOvr>
+    <a:masterClrMapping/>
+  </p:clrMapOvr>
 </p:sldLayout>
 </file>
 
 <file path=ppt/slideLayouts/slideLayout7.xml><?xml version="1.0" encoding="utf-8"?>
-<p:sldLayout xmlns:a="http://schemas.openxmlformats.org/drawingml/2006/main" xmlns:p="http://schemas.openxmlformats.org/presentationml/2006/main" xmlns:r="http://schemas.openxmlformats.org/officeDocument/2006/relationships" xmlns:p14="http://schemas.microsoft.com/office/powerpoint/2010/main" xmlns:p15="http://schemas.microsoft.com/office/powerpoint/2012/main" xmlns:mc="http://schemas.openxmlformats.org/markup-compatibility/2006" type="blank" preserve="1">
+<p:sldLayout xmlns:a="http://schemas.openxmlformats.org/drawingml/2006/main" xmlns:r="http://schemas.openxmlformats.org/officeDocument/2006/relationships" xmlns:p="http://schemas.openxmlformats.org/presentationml/2006/main" type="blank" preserve="1">
   <p:cSld name="CAPTION_ONLY">
     <p:bg>
       <p:bgPr>
         <a:solidFill>
-          <a:srgbClr val="ffffff"/>
+          <a:srgbClr val="FFFFFF"/>
         </a:solidFill>
+        <a:effectLst/>
       </p:bgPr>
     </p:bg>
     <p:spTree>
@@ -3116,9 +2872,10 @@
           </a:ln>
         </p:spPr>
         <p:txBody>
-          <a:bodyPr lIns="91440" rIns="91440" tIns="91440" bIns="91440" anchor="ctr">
+          <a:bodyPr lIns="91440" tIns="91440" rIns="91440" bIns="91440" anchor="ctr">
             <a:normAutofit fontScale="25000" lnSpcReduction="19999"/>
           </a:bodyPr>
+          <a:lstStyle/>
           <a:p>
             <a:pPr marL="432000" indent="-324000" defTabSz="914400">
               <a:lnSpc>
@@ -3135,7 +2892,7 @@
               <a:buChar char=""/>
             </a:pPr>
             <a:r>
-              <a:rPr b="0" lang="pt-PT" sz="1800" strike="noStrike" u="none">
+              <a:rPr lang="pt-PT" sz="1800" b="0" u="none" strike="noStrike">
                 <a:solidFill>
                   <a:srgbClr val="000000"/>
                 </a:solidFill>
@@ -3145,17 +2902,9 @@
               </a:rPr>
               <a:t>Clique para editar o formato de texto dos tópicos</a:t>
             </a:r>
-            <a:endParaRPr b="0" lang="pt-PT" sz="1800" strike="noStrike" u="none">
-              <a:solidFill>
-                <a:srgbClr val="000000"/>
-              </a:solidFill>
-              <a:effectLst/>
-              <a:uFillTx/>
-              <a:latin typeface="Arial"/>
-            </a:endParaRPr>
-          </a:p>
-          <a:p>
-            <a:pPr lvl="1" marL="864000" indent="-324000" defTabSz="914400">
+          </a:p>
+          <a:p>
+            <a:pPr marL="864000" lvl="1" indent="-324000" defTabSz="914400">
               <a:lnSpc>
                 <a:spcPct val="100000"/>
               </a:lnSpc>
@@ -3170,7 +2919,7 @@
               <a:buChar char=""/>
             </a:pPr>
             <a:r>
-              <a:rPr b="0" lang="pt-PT" sz="1800" strike="noStrike" u="none">
+              <a:rPr lang="pt-PT" sz="1800" b="0" u="none" strike="noStrike">
                 <a:solidFill>
                   <a:srgbClr val="000000"/>
                 </a:solidFill>
@@ -3180,17 +2929,9 @@
               </a:rPr>
               <a:t>Segundo nível de tópicos</a:t>
             </a:r>
-            <a:endParaRPr b="0" lang="pt-PT" sz="1800" strike="noStrike" u="none">
-              <a:solidFill>
-                <a:srgbClr val="000000"/>
-              </a:solidFill>
-              <a:effectLst/>
-              <a:uFillTx/>
-              <a:latin typeface="Arial"/>
-            </a:endParaRPr>
-          </a:p>
-          <a:p>
-            <a:pPr lvl="2" marL="1296000" indent="-288000" defTabSz="914400">
+          </a:p>
+          <a:p>
+            <a:pPr marL="1296000" lvl="2" indent="-288000" defTabSz="914400">
               <a:lnSpc>
                 <a:spcPct val="100000"/>
               </a:lnSpc>
@@ -3205,7 +2946,7 @@
               <a:buChar char=""/>
             </a:pPr>
             <a:r>
-              <a:rPr b="0" lang="pt-PT" sz="1800" strike="noStrike" u="none">
+              <a:rPr lang="pt-PT" sz="1800" b="0" u="none" strike="noStrike">
                 <a:solidFill>
                   <a:srgbClr val="000000"/>
                 </a:solidFill>
@@ -3215,17 +2956,9 @@
               </a:rPr>
               <a:t>Terceiro nível de tópicos</a:t>
             </a:r>
-            <a:endParaRPr b="0" lang="pt-PT" sz="1800" strike="noStrike" u="none">
-              <a:solidFill>
-                <a:srgbClr val="000000"/>
-              </a:solidFill>
-              <a:effectLst/>
-              <a:uFillTx/>
-              <a:latin typeface="Arial"/>
-            </a:endParaRPr>
-          </a:p>
-          <a:p>
-            <a:pPr lvl="3" marL="1728000" indent="-216000" defTabSz="914400">
+          </a:p>
+          <a:p>
+            <a:pPr marL="1728000" lvl="3" indent="-216000" defTabSz="914400">
               <a:lnSpc>
                 <a:spcPct val="100000"/>
               </a:lnSpc>
@@ -3240,7 +2973,7 @@
               <a:buChar char=""/>
             </a:pPr>
             <a:r>
-              <a:rPr b="0" lang="pt-PT" sz="1800" strike="noStrike" u="none">
+              <a:rPr lang="pt-PT" sz="1800" b="0" u="none" strike="noStrike">
                 <a:solidFill>
                   <a:srgbClr val="000000"/>
                 </a:solidFill>
@@ -3250,17 +2983,9 @@
               </a:rPr>
               <a:t>Quarto nível de tópicos</a:t>
             </a:r>
-            <a:endParaRPr b="0" lang="pt-PT" sz="1800" strike="noStrike" u="none">
-              <a:solidFill>
-                <a:srgbClr val="000000"/>
-              </a:solidFill>
-              <a:effectLst/>
-              <a:uFillTx/>
-              <a:latin typeface="Arial"/>
-            </a:endParaRPr>
-          </a:p>
-          <a:p>
-            <a:pPr lvl="4" marL="2160000" indent="-216000" defTabSz="914400">
+          </a:p>
+          <a:p>
+            <a:pPr marL="2160000" lvl="4" indent="-216000" defTabSz="914400">
               <a:lnSpc>
                 <a:spcPct val="100000"/>
               </a:lnSpc>
@@ -3275,7 +3000,7 @@
               <a:buChar char=""/>
             </a:pPr>
             <a:r>
-              <a:rPr b="0" lang="pt-PT" sz="1800" strike="noStrike" u="none">
+              <a:rPr lang="pt-PT" sz="1800" b="0" u="none" strike="noStrike">
                 <a:solidFill>
                   <a:srgbClr val="000000"/>
                 </a:solidFill>
@@ -3285,17 +3010,9 @@
               </a:rPr>
               <a:t>Quinto nível de tópicos</a:t>
             </a:r>
-            <a:endParaRPr b="0" lang="pt-PT" sz="1800" strike="noStrike" u="none">
-              <a:solidFill>
-                <a:srgbClr val="000000"/>
-              </a:solidFill>
-              <a:effectLst/>
-              <a:uFillTx/>
-              <a:latin typeface="Arial"/>
-            </a:endParaRPr>
-          </a:p>
-          <a:p>
-            <a:pPr lvl="5" marL="2592000" indent="-216000" defTabSz="914400">
+          </a:p>
+          <a:p>
+            <a:pPr marL="2592000" lvl="5" indent="-216000" defTabSz="914400">
               <a:lnSpc>
                 <a:spcPct val="100000"/>
               </a:lnSpc>
@@ -3310,7 +3027,7 @@
               <a:buChar char=""/>
             </a:pPr>
             <a:r>
-              <a:rPr b="0" lang="pt-PT" sz="1800" strike="noStrike" u="none">
+              <a:rPr lang="pt-PT" sz="1800" b="0" u="none" strike="noStrike">
                 <a:solidFill>
                   <a:srgbClr val="000000"/>
                 </a:solidFill>
@@ -3320,17 +3037,9 @@
               </a:rPr>
               <a:t>Sexto nível de tópicos</a:t>
             </a:r>
-            <a:endParaRPr b="0" lang="pt-PT" sz="1800" strike="noStrike" u="none">
-              <a:solidFill>
-                <a:srgbClr val="000000"/>
-              </a:solidFill>
-              <a:effectLst/>
-              <a:uFillTx/>
-              <a:latin typeface="Arial"/>
-            </a:endParaRPr>
-          </a:p>
-          <a:p>
-            <a:pPr lvl="6" marL="3024000" indent="-216000" defTabSz="914400">
+          </a:p>
+          <a:p>
+            <a:pPr marL="3024000" lvl="6" indent="-216000" defTabSz="914400">
               <a:lnSpc>
                 <a:spcPct val="100000"/>
               </a:lnSpc>
@@ -3345,7 +3054,7 @@
               <a:buChar char=""/>
             </a:pPr>
             <a:r>
-              <a:rPr b="0" lang="pt-PT" sz="1800" strike="noStrike" u="none">
+              <a:rPr lang="pt-PT" sz="1800" b="0" u="none" strike="noStrike">
                 <a:solidFill>
                   <a:srgbClr val="000000"/>
                 </a:solidFill>
@@ -3355,14 +3064,6 @@
               </a:rPr>
               <a:t>Sétimo nível de tópicos</a:t>
             </a:r>
-            <a:endParaRPr b="0" lang="pt-PT" sz="1800" strike="noStrike" u="none">
-              <a:solidFill>
-                <a:srgbClr val="000000"/>
-              </a:solidFill>
-              <a:effectLst/>
-              <a:uFillTx/>
-              <a:latin typeface="Arial"/>
-            </a:endParaRPr>
           </a:p>
         </p:txBody>
       </p:sp>
@@ -3390,7 +3091,7 @@
           </a:ln>
         </p:spPr>
         <p:txBody>
-          <a:bodyPr lIns="91440" rIns="91440" tIns="91440" bIns="91440" anchor="ctr">
+          <a:bodyPr lIns="91440" tIns="91440" rIns="91440" bIns="91440" anchor="ctr">
             <a:normAutofit/>
           </a:bodyPr>
           <a:lstStyle>
@@ -3400,9 +3101,9 @@
               </a:lnSpc>
               <a:buNone/>
               <a:tabLst>
-                <a:tab algn="l" pos="0"/>
+                <a:tab pos="0" algn="l"/>
               </a:tabLst>
-              <a:defRPr b="0" lang="pt-PT" sz="1000" strike="noStrike" u="none">
+              <a:defRPr lang="pt-PT" sz="1000" b="0" u="none" strike="noStrike">
                 <a:solidFill>
                   <a:schemeClr val="dk2"/>
                 </a:solidFill>
@@ -3420,11 +3121,11 @@
               </a:lnSpc>
               <a:buNone/>
               <a:tabLst>
-                <a:tab algn="l" pos="0"/>
+                <a:tab pos="0" algn="l"/>
               </a:tabLst>
             </a:pPr>
             <a:fld id="{1814D839-142B-4E5D-AAE6-AA1F79E0E1DB}" type="slidenum">
-              <a:rPr b="0" lang="pt-PT" sz="1000" strike="noStrike" u="none">
+              <a:rPr lang="pt-PT" sz="1000" b="0" u="none" strike="noStrike">
                 <a:solidFill>
                   <a:schemeClr val="dk2"/>
                 </a:solidFill>
@@ -3433,9 +3134,9 @@
                 <a:latin typeface="Arial"/>
                 <a:ea typeface="Arial"/>
               </a:rPr>
-              <a:t>&lt;número&gt;</a:t>
+              <a:t>‹nº›</a:t>
             </a:fld>
-            <a:endParaRPr b="0" lang="pt-PT" sz="1000" strike="noStrike" u="none">
+            <a:endParaRPr lang="pt-PT" sz="1000" b="0" u="none" strike="noStrike">
               <a:solidFill>
                 <a:srgbClr val="000000"/>
               </a:solidFill>
@@ -3448,17 +3149,21 @@
       </p:sp>
     </p:spTree>
   </p:cSld>
+  <p:clrMapOvr>
+    <a:masterClrMapping/>
+  </p:clrMapOvr>
 </p:sldLayout>
 </file>
 
 <file path=ppt/slideLayouts/slideLayout8.xml><?xml version="1.0" encoding="utf-8"?>
-<p:sldLayout xmlns:a="http://schemas.openxmlformats.org/drawingml/2006/main" xmlns:p="http://schemas.openxmlformats.org/presentationml/2006/main" xmlns:r="http://schemas.openxmlformats.org/officeDocument/2006/relationships" xmlns:p14="http://schemas.microsoft.com/office/powerpoint/2010/main" xmlns:p15="http://schemas.microsoft.com/office/powerpoint/2012/main" xmlns:mc="http://schemas.openxmlformats.org/markup-compatibility/2006" type="title" preserve="1">
+<p:sldLayout xmlns:a="http://schemas.openxmlformats.org/drawingml/2006/main" xmlns:r="http://schemas.openxmlformats.org/officeDocument/2006/relationships" xmlns:p="http://schemas.openxmlformats.org/presentationml/2006/main" type="title" preserve="1">
   <p:cSld name="TITLE">
     <p:bg>
       <p:bgPr>
         <a:solidFill>
-          <a:srgbClr val="ffffff"/>
+          <a:srgbClr val="FFFFFF"/>
         </a:solidFill>
+        <a:effectLst/>
       </p:bgPr>
     </p:bg>
     <p:spTree>
@@ -3499,9 +3204,10 @@
           </a:ln>
         </p:spPr>
         <p:txBody>
-          <a:bodyPr lIns="91440" rIns="91440" tIns="91440" bIns="91440" anchor="b">
+          <a:bodyPr lIns="91440" tIns="91440" rIns="91440" bIns="91440" anchor="b">
             <a:normAutofit/>
           </a:bodyPr>
+          <a:lstStyle/>
           <a:p>
             <a:pPr indent="0" defTabSz="914400">
               <a:lnSpc>
@@ -3509,11 +3215,11 @@
               </a:lnSpc>
               <a:buNone/>
               <a:tabLst>
-                <a:tab algn="l" pos="0"/>
+                <a:tab pos="0" algn="l"/>
               </a:tabLst>
             </a:pPr>
             <a:r>
-              <a:rPr b="0" lang="pt-PT" sz="5200" strike="noStrike" u="none">
+              <a:rPr lang="pt-PT" sz="5200" b="0" u="none" strike="noStrike">
                 <a:solidFill>
                   <a:srgbClr val="000000"/>
                 </a:solidFill>
@@ -3523,14 +3229,6 @@
               </a:rPr>
               <a:t>Clique para editar o formato do título</a:t>
             </a:r>
-            <a:endParaRPr b="0" lang="pt-PT" sz="5200" strike="noStrike" u="none">
-              <a:solidFill>
-                <a:srgbClr val="000000"/>
-              </a:solidFill>
-              <a:effectLst/>
-              <a:uFillTx/>
-              <a:latin typeface="Arial"/>
-            </a:endParaRPr>
           </a:p>
         </p:txBody>
       </p:sp>
@@ -3558,7 +3256,7 @@
           </a:ln>
         </p:spPr>
         <p:txBody>
-          <a:bodyPr lIns="91440" rIns="91440" tIns="91440" bIns="91440" anchor="ctr">
+          <a:bodyPr lIns="91440" tIns="91440" rIns="91440" bIns="91440" anchor="ctr">
             <a:normAutofit/>
           </a:bodyPr>
           <a:lstStyle>
@@ -3568,9 +3266,9 @@
               </a:lnSpc>
               <a:buNone/>
               <a:tabLst>
-                <a:tab algn="l" pos="0"/>
+                <a:tab pos="0" algn="l"/>
               </a:tabLst>
-              <a:defRPr b="0" lang="pt-PT" sz="1000" strike="noStrike" u="none">
+              <a:defRPr lang="pt-PT" sz="1000" b="0" u="none" strike="noStrike">
                 <a:solidFill>
                   <a:schemeClr val="dk2"/>
                 </a:solidFill>
@@ -3588,11 +3286,11 @@
               </a:lnSpc>
               <a:buNone/>
               <a:tabLst>
-                <a:tab algn="l" pos="0"/>
+                <a:tab pos="0" algn="l"/>
               </a:tabLst>
             </a:pPr>
             <a:fld id="{C18B5417-4C06-4048-9D17-45B36EEE3EED}" type="slidenum">
-              <a:rPr b="0" lang="pt-PT" sz="1000" strike="noStrike" u="none">
+              <a:rPr lang="pt-PT" sz="1000" b="0" u="none" strike="noStrike">
                 <a:solidFill>
                   <a:schemeClr val="dk2"/>
                 </a:solidFill>
@@ -3601,9 +3299,9 @@
                 <a:latin typeface="Arial"/>
                 <a:ea typeface="Arial"/>
               </a:rPr>
-              <a:t>&lt;número&gt;</a:t>
+              <a:t>‹nº›</a:t>
             </a:fld>
-            <a:endParaRPr b="0" lang="pt-PT" sz="1000" strike="noStrike" u="none">
+            <a:endParaRPr lang="pt-PT" sz="1000" b="0" u="none" strike="noStrike">
               <a:solidFill>
                 <a:srgbClr val="000000"/>
               </a:solidFill>
@@ -3616,17 +3314,21 @@
       </p:sp>
     </p:spTree>
   </p:cSld>
+  <p:clrMapOvr>
+    <a:masterClrMapping/>
+  </p:clrMapOvr>
 </p:sldLayout>
 </file>
 
 <file path=ppt/slideLayouts/slideLayout9.xml><?xml version="1.0" encoding="utf-8"?>
-<p:sldLayout xmlns:a="http://schemas.openxmlformats.org/drawingml/2006/main" xmlns:p="http://schemas.openxmlformats.org/presentationml/2006/main" xmlns:r="http://schemas.openxmlformats.org/officeDocument/2006/relationships" xmlns:p14="http://schemas.microsoft.com/office/powerpoint/2010/main" xmlns:p15="http://schemas.microsoft.com/office/powerpoint/2012/main" xmlns:mc="http://schemas.openxmlformats.org/markup-compatibility/2006" type="blank" preserve="1">
+<p:sldLayout xmlns:a="http://schemas.openxmlformats.org/drawingml/2006/main" xmlns:r="http://schemas.openxmlformats.org/officeDocument/2006/relationships" xmlns:p="http://schemas.openxmlformats.org/presentationml/2006/main" type="blank" preserve="1">
   <p:cSld name="BIG_NUMBER">
     <p:bg>
       <p:bgPr>
         <a:solidFill>
-          <a:srgbClr val="ffffff"/>
+          <a:srgbClr val="FFFFFF"/>
         </a:solidFill>
+        <a:effectLst/>
       </p:bgPr>
     </p:bg>
     <p:spTree>
@@ -3667,9 +3369,10 @@
           </a:ln>
         </p:spPr>
         <p:txBody>
-          <a:bodyPr lIns="91440" rIns="91440" tIns="91440" bIns="91440" anchor="b">
+          <a:bodyPr lIns="91440" tIns="91440" rIns="91440" bIns="91440" anchor="b">
             <a:normAutofit lnSpcReduction="9999"/>
           </a:bodyPr>
+          <a:lstStyle/>
           <a:p>
             <a:pPr indent="0" algn="ctr" defTabSz="914400">
               <a:lnSpc>
@@ -3677,11 +3380,11 @@
               </a:lnSpc>
               <a:buNone/>
               <a:tabLst>
-                <a:tab algn="l" pos="0"/>
+                <a:tab pos="0" algn="l"/>
               </a:tabLst>
             </a:pPr>
             <a:r>
-              <a:rPr b="0" lang="pt-PT" sz="12000" strike="noStrike" u="none">
+              <a:rPr lang="pt-PT" sz="12000" b="0" u="none" strike="noStrike">
                 <a:solidFill>
                   <a:schemeClr val="dk1"/>
                 </a:solidFill>
@@ -3692,7 +3395,7 @@
               </a:rPr>
               <a:t>xx%</a:t>
             </a:r>
-            <a:endParaRPr b="0" lang="pt-PT" sz="12000" strike="noStrike" u="none">
+            <a:endParaRPr lang="pt-PT" sz="12000" b="0" u="none" strike="noStrike">
               <a:solidFill>
                 <a:srgbClr val="000000"/>
               </a:solidFill>
@@ -3727,9 +3430,10 @@
           </a:ln>
         </p:spPr>
         <p:txBody>
-          <a:bodyPr lIns="91440" rIns="91440" tIns="91440" bIns="91440" anchor="t">
+          <a:bodyPr lIns="91440" tIns="91440" rIns="91440" bIns="91440" anchor="t">
             <a:normAutofit fontScale="40000" lnSpcReduction="19999"/>
           </a:bodyPr>
+          <a:lstStyle/>
           <a:p>
             <a:pPr marL="432000" indent="-324000" defTabSz="914400">
               <a:lnSpc>
@@ -3746,7 +3450,7 @@
               <a:buChar char=""/>
             </a:pPr>
             <a:r>
-              <a:rPr b="0" lang="pt-PT" sz="1800" strike="noStrike" u="none">
+              <a:rPr lang="pt-PT" sz="1800" b="0" u="none" strike="noStrike">
                 <a:solidFill>
                   <a:srgbClr val="000000"/>
                 </a:solidFill>
@@ -3756,17 +3460,9 @@
               </a:rPr>
               <a:t>Clique para editar o formato de texto dos tópicos</a:t>
             </a:r>
-            <a:endParaRPr b="0" lang="pt-PT" sz="1800" strike="noStrike" u="none">
-              <a:solidFill>
-                <a:srgbClr val="000000"/>
-              </a:solidFill>
-              <a:effectLst/>
-              <a:uFillTx/>
-              <a:latin typeface="Arial"/>
-            </a:endParaRPr>
-          </a:p>
-          <a:p>
-            <a:pPr lvl="1" marL="864000" indent="-324000" defTabSz="914400">
+          </a:p>
+          <a:p>
+            <a:pPr marL="864000" lvl="1" indent="-324000" defTabSz="914400">
               <a:lnSpc>
                 <a:spcPct val="100000"/>
               </a:lnSpc>
@@ -3781,7 +3477,7 @@
               <a:buChar char=""/>
             </a:pPr>
             <a:r>
-              <a:rPr b="0" lang="pt-PT" sz="1800" strike="noStrike" u="none">
+              <a:rPr lang="pt-PT" sz="1800" b="0" u="none" strike="noStrike">
                 <a:solidFill>
                   <a:srgbClr val="000000"/>
                 </a:solidFill>
@@ -3791,17 +3487,9 @@
               </a:rPr>
               <a:t>Segundo nível de tópicos</a:t>
             </a:r>
-            <a:endParaRPr b="0" lang="pt-PT" sz="1800" strike="noStrike" u="none">
-              <a:solidFill>
-                <a:srgbClr val="000000"/>
-              </a:solidFill>
-              <a:effectLst/>
-              <a:uFillTx/>
-              <a:latin typeface="Arial"/>
-            </a:endParaRPr>
-          </a:p>
-          <a:p>
-            <a:pPr lvl="2" marL="1296000" indent="-288000" defTabSz="914400">
+          </a:p>
+          <a:p>
+            <a:pPr marL="1296000" lvl="2" indent="-288000" defTabSz="914400">
               <a:lnSpc>
                 <a:spcPct val="100000"/>
               </a:lnSpc>
@@ -3816,7 +3504,7 @@
               <a:buChar char=""/>
             </a:pPr>
             <a:r>
-              <a:rPr b="0" lang="pt-PT" sz="1800" strike="noStrike" u="none">
+              <a:rPr lang="pt-PT" sz="1800" b="0" u="none" strike="noStrike">
                 <a:solidFill>
                   <a:srgbClr val="000000"/>
                 </a:solidFill>
@@ -3826,17 +3514,9 @@
               </a:rPr>
               <a:t>Terceiro nível de tópicos</a:t>
             </a:r>
-            <a:endParaRPr b="0" lang="pt-PT" sz="1800" strike="noStrike" u="none">
-              <a:solidFill>
-                <a:srgbClr val="000000"/>
-              </a:solidFill>
-              <a:effectLst/>
-              <a:uFillTx/>
-              <a:latin typeface="Arial"/>
-            </a:endParaRPr>
-          </a:p>
-          <a:p>
-            <a:pPr lvl="3" marL="1728000" indent="-216000" defTabSz="914400">
+          </a:p>
+          <a:p>
+            <a:pPr marL="1728000" lvl="3" indent="-216000" defTabSz="914400">
               <a:lnSpc>
                 <a:spcPct val="100000"/>
               </a:lnSpc>
@@ -3851,7 +3531,7 @@
               <a:buChar char=""/>
             </a:pPr>
             <a:r>
-              <a:rPr b="0" lang="pt-PT" sz="1800" strike="noStrike" u="none">
+              <a:rPr lang="pt-PT" sz="1800" b="0" u="none" strike="noStrike">
                 <a:solidFill>
                   <a:srgbClr val="000000"/>
                 </a:solidFill>
@@ -3861,17 +3541,9 @@
               </a:rPr>
               <a:t>Quarto nível de tópicos</a:t>
             </a:r>
-            <a:endParaRPr b="0" lang="pt-PT" sz="1800" strike="noStrike" u="none">
-              <a:solidFill>
-                <a:srgbClr val="000000"/>
-              </a:solidFill>
-              <a:effectLst/>
-              <a:uFillTx/>
-              <a:latin typeface="Arial"/>
-            </a:endParaRPr>
-          </a:p>
-          <a:p>
-            <a:pPr lvl="4" marL="2160000" indent="-216000" defTabSz="914400">
+          </a:p>
+          <a:p>
+            <a:pPr marL="2160000" lvl="4" indent="-216000" defTabSz="914400">
               <a:lnSpc>
                 <a:spcPct val="100000"/>
               </a:lnSpc>
@@ -3886,7 +3558,7 @@
               <a:buChar char=""/>
             </a:pPr>
             <a:r>
-              <a:rPr b="0" lang="pt-PT" sz="1800" strike="noStrike" u="none">
+              <a:rPr lang="pt-PT" sz="1800" b="0" u="none" strike="noStrike">
                 <a:solidFill>
                   <a:srgbClr val="000000"/>
                 </a:solidFill>
@@ -3896,17 +3568,9 @@
               </a:rPr>
               <a:t>Quinto nível de tópicos</a:t>
             </a:r>
-            <a:endParaRPr b="0" lang="pt-PT" sz="1800" strike="noStrike" u="none">
-              <a:solidFill>
-                <a:srgbClr val="000000"/>
-              </a:solidFill>
-              <a:effectLst/>
-              <a:uFillTx/>
-              <a:latin typeface="Arial"/>
-            </a:endParaRPr>
-          </a:p>
-          <a:p>
-            <a:pPr lvl="5" marL="2592000" indent="-216000" defTabSz="914400">
+          </a:p>
+          <a:p>
+            <a:pPr marL="2592000" lvl="5" indent="-216000" defTabSz="914400">
               <a:lnSpc>
                 <a:spcPct val="100000"/>
               </a:lnSpc>
@@ -3921,7 +3585,7 @@
               <a:buChar char=""/>
             </a:pPr>
             <a:r>
-              <a:rPr b="0" lang="pt-PT" sz="1800" strike="noStrike" u="none">
+              <a:rPr lang="pt-PT" sz="1800" b="0" u="none" strike="noStrike">
                 <a:solidFill>
                   <a:srgbClr val="000000"/>
                 </a:solidFill>
@@ -3931,17 +3595,9 @@
               </a:rPr>
               <a:t>Sexto nível de tópicos</a:t>
             </a:r>
-            <a:endParaRPr b="0" lang="pt-PT" sz="1800" strike="noStrike" u="none">
-              <a:solidFill>
-                <a:srgbClr val="000000"/>
-              </a:solidFill>
-              <a:effectLst/>
-              <a:uFillTx/>
-              <a:latin typeface="Arial"/>
-            </a:endParaRPr>
-          </a:p>
-          <a:p>
-            <a:pPr lvl="6" marL="3024000" indent="-216000" defTabSz="914400">
+          </a:p>
+          <a:p>
+            <a:pPr marL="3024000" lvl="6" indent="-216000" defTabSz="914400">
               <a:lnSpc>
                 <a:spcPct val="100000"/>
               </a:lnSpc>
@@ -3956,7 +3612,7 @@
               <a:buChar char=""/>
             </a:pPr>
             <a:r>
-              <a:rPr b="0" lang="pt-PT" sz="1800" strike="noStrike" u="none">
+              <a:rPr lang="pt-PT" sz="1800" b="0" u="none" strike="noStrike">
                 <a:solidFill>
                   <a:srgbClr val="000000"/>
                 </a:solidFill>
@@ -3966,14 +3622,6 @@
               </a:rPr>
               <a:t>Sétimo nível de tópicos</a:t>
             </a:r>
-            <a:endParaRPr b="0" lang="pt-PT" sz="1800" strike="noStrike" u="none">
-              <a:solidFill>
-                <a:srgbClr val="000000"/>
-              </a:solidFill>
-              <a:effectLst/>
-              <a:uFillTx/>
-              <a:latin typeface="Arial"/>
-            </a:endParaRPr>
           </a:p>
         </p:txBody>
       </p:sp>
@@ -4001,7 +3649,7 @@
           </a:ln>
         </p:spPr>
         <p:txBody>
-          <a:bodyPr lIns="91440" rIns="91440" tIns="91440" bIns="91440" anchor="ctr">
+          <a:bodyPr lIns="91440" tIns="91440" rIns="91440" bIns="91440" anchor="ctr">
             <a:normAutofit/>
           </a:bodyPr>
           <a:lstStyle>
@@ -4011,9 +3659,9 @@
               </a:lnSpc>
               <a:buNone/>
               <a:tabLst>
-                <a:tab algn="l" pos="0"/>
+                <a:tab pos="0" algn="l"/>
               </a:tabLst>
-              <a:defRPr b="0" lang="pt-PT" sz="1000" strike="noStrike" u="none">
+              <a:defRPr lang="pt-PT" sz="1000" b="0" u="none" strike="noStrike">
                 <a:solidFill>
                   <a:schemeClr val="dk2"/>
                 </a:solidFill>
@@ -4031,11 +3679,11 @@
               </a:lnSpc>
               <a:buNone/>
               <a:tabLst>
-                <a:tab algn="l" pos="0"/>
+                <a:tab pos="0" algn="l"/>
               </a:tabLst>
             </a:pPr>
             <a:fld id="{2859EC53-BF28-4B49-8D91-16210101F9ED}" type="slidenum">
-              <a:rPr b="0" lang="pt-PT" sz="1000" strike="noStrike" u="none">
+              <a:rPr lang="pt-PT" sz="1000" b="0" u="none" strike="noStrike">
                 <a:solidFill>
                   <a:schemeClr val="dk2"/>
                 </a:solidFill>
@@ -4044,9 +3692,9 @@
                 <a:latin typeface="Arial"/>
                 <a:ea typeface="Arial"/>
               </a:rPr>
-              <a:t>&lt;número&gt;</a:t>
+              <a:t>‹nº›</a:t>
             </a:fld>
-            <a:endParaRPr b="0" lang="pt-PT" sz="1000" strike="noStrike" u="none">
+            <a:endParaRPr lang="pt-PT" sz="1000" b="0" u="none" strike="noStrike">
               <a:solidFill>
                 <a:srgbClr val="000000"/>
               </a:solidFill>
@@ -4059,12 +3707,20 @@
       </p:sp>
     </p:spTree>
   </p:cSld>
+  <p:clrMapOvr>
+    <a:masterClrMapping/>
+  </p:clrMapOvr>
 </p:sldLayout>
 </file>
 
 <file path=ppt/slideMasters/slideMaster1.xml><?xml version="1.0" encoding="utf-8"?>
-<p:sldMaster xmlns:a="http://schemas.openxmlformats.org/drawingml/2006/main" xmlns:p="http://schemas.openxmlformats.org/presentationml/2006/main" xmlns:r="http://schemas.openxmlformats.org/officeDocument/2006/relationships" xmlns:p14="http://schemas.microsoft.com/office/powerpoint/2010/main" xmlns:p15="http://schemas.microsoft.com/office/powerpoint/2012/main" xmlns:mc="http://schemas.openxmlformats.org/markup-compatibility/2006">
+<p:sldMaster xmlns:a="http://schemas.openxmlformats.org/drawingml/2006/main" xmlns:r="http://schemas.openxmlformats.org/officeDocument/2006/relationships" xmlns:p="http://schemas.openxmlformats.org/presentationml/2006/main">
   <p:cSld>
+    <p:bg>
+      <p:bgRef idx="1001">
+        <a:schemeClr val="bg1"/>
+      </p:bgRef>
+    </p:bg>
     <p:spTree>
       <p:nvGrpSpPr>
         <p:cNvPr id="1" name=""/>
@@ -4083,23 +3739,303 @@
   </p:cSld>
   <p:clrMap bg1="lt1" tx1="dk1" bg2="dk2" tx2="lt2" accent1="accent1" accent2="accent2" accent3="accent3" accent4="accent4" accent5="accent5" accent6="accent6" hlink="hlink" folHlink="folHlink"/>
   <p:sldLayoutIdLst>
-    <p:sldLayoutId id="2147483649" r:id="rId2"/>
-    <p:sldLayoutId id="2147483650" r:id="rId3"/>
-    <p:sldLayoutId id="2147483651" r:id="rId4"/>
-    <p:sldLayoutId id="2147483652" r:id="rId5"/>
-    <p:sldLayoutId id="2147483653" r:id="rId6"/>
-    <p:sldLayoutId id="2147483654" r:id="rId7"/>
-    <p:sldLayoutId id="2147483655" r:id="rId8"/>
-    <p:sldLayoutId id="2147483656" r:id="rId9"/>
-    <p:sldLayoutId id="2147483657" r:id="rId10"/>
-    <p:sldLayoutId id="2147483658" r:id="rId11"/>
-    <p:sldLayoutId id="2147483659" r:id="rId12"/>
+    <p:sldLayoutId id="2147483649" r:id="rId1"/>
+    <p:sldLayoutId id="2147483650" r:id="rId2"/>
+    <p:sldLayoutId id="2147483651" r:id="rId3"/>
+    <p:sldLayoutId id="2147483652" r:id="rId4"/>
+    <p:sldLayoutId id="2147483653" r:id="rId5"/>
+    <p:sldLayoutId id="2147483654" r:id="rId6"/>
+    <p:sldLayoutId id="2147483655" r:id="rId7"/>
+    <p:sldLayoutId id="2147483656" r:id="rId8"/>
+    <p:sldLayoutId id="2147483657" r:id="rId9"/>
+    <p:sldLayoutId id="2147483658" r:id="rId10"/>
+    <p:sldLayoutId id="2147483659" r:id="rId11"/>
   </p:sldLayoutIdLst>
+  <p:txStyles>
+    <p:titleStyle>
+      <a:lvl1pPr algn="l" defTabSz="914400" rtl="0" eaLnBrk="1" latinLnBrk="0" hangingPunct="1">
+        <a:lnSpc>
+          <a:spcPct val="90000"/>
+        </a:lnSpc>
+        <a:spcBef>
+          <a:spcPct val="0"/>
+        </a:spcBef>
+        <a:buNone/>
+        <a:defRPr sz="4400" kern="1200">
+          <a:solidFill>
+            <a:schemeClr val="tx1"/>
+          </a:solidFill>
+          <a:latin typeface="+mj-lt"/>
+          <a:ea typeface="+mj-ea"/>
+          <a:cs typeface="+mj-cs"/>
+        </a:defRPr>
+      </a:lvl1pPr>
+    </p:titleStyle>
+    <p:bodyStyle>
+      <a:lvl1pPr marL="228600" indent="-228600" algn="l" defTabSz="914400" rtl="0" eaLnBrk="1" latinLnBrk="0" hangingPunct="1">
+        <a:lnSpc>
+          <a:spcPct val="90000"/>
+        </a:lnSpc>
+        <a:spcBef>
+          <a:spcPts val="1000"/>
+        </a:spcBef>
+        <a:buFont typeface="Arial" panose="020B0604020202020204" pitchFamily="34" charset="0"/>
+        <a:buChar char="•"/>
+        <a:defRPr sz="2800" kern="1200">
+          <a:solidFill>
+            <a:schemeClr val="tx1"/>
+          </a:solidFill>
+          <a:latin typeface="+mn-lt"/>
+          <a:ea typeface="+mn-ea"/>
+          <a:cs typeface="+mn-cs"/>
+        </a:defRPr>
+      </a:lvl1pPr>
+      <a:lvl2pPr marL="685800" indent="-228600" algn="l" defTabSz="914400" rtl="0" eaLnBrk="1" latinLnBrk="0" hangingPunct="1">
+        <a:lnSpc>
+          <a:spcPct val="90000"/>
+        </a:lnSpc>
+        <a:spcBef>
+          <a:spcPts val="500"/>
+        </a:spcBef>
+        <a:buFont typeface="Arial" panose="020B0604020202020204" pitchFamily="34" charset="0"/>
+        <a:buChar char="•"/>
+        <a:defRPr sz="2400" kern="1200">
+          <a:solidFill>
+            <a:schemeClr val="tx1"/>
+          </a:solidFill>
+          <a:latin typeface="+mn-lt"/>
+          <a:ea typeface="+mn-ea"/>
+          <a:cs typeface="+mn-cs"/>
+        </a:defRPr>
+      </a:lvl2pPr>
+      <a:lvl3pPr marL="1143000" indent="-228600" algn="l" defTabSz="914400" rtl="0" eaLnBrk="1" latinLnBrk="0" hangingPunct="1">
+        <a:lnSpc>
+          <a:spcPct val="90000"/>
+        </a:lnSpc>
+        <a:spcBef>
+          <a:spcPts val="500"/>
+        </a:spcBef>
+        <a:buFont typeface="Arial" panose="020B0604020202020204" pitchFamily="34" charset="0"/>
+        <a:buChar char="•"/>
+        <a:defRPr sz="2000" kern="1200">
+          <a:solidFill>
+            <a:schemeClr val="tx1"/>
+          </a:solidFill>
+          <a:latin typeface="+mn-lt"/>
+          <a:ea typeface="+mn-ea"/>
+          <a:cs typeface="+mn-cs"/>
+        </a:defRPr>
+      </a:lvl3pPr>
+      <a:lvl4pPr marL="1600200" indent="-228600" algn="l" defTabSz="914400" rtl="0" eaLnBrk="1" latinLnBrk="0" hangingPunct="1">
+        <a:lnSpc>
+          <a:spcPct val="90000"/>
+        </a:lnSpc>
+        <a:spcBef>
+          <a:spcPts val="500"/>
+        </a:spcBef>
+        <a:buFont typeface="Arial" panose="020B0604020202020204" pitchFamily="34" charset="0"/>
+        <a:buChar char="•"/>
+        <a:defRPr sz="1800" kern="1200">
+          <a:solidFill>
+            <a:schemeClr val="tx1"/>
+          </a:solidFill>
+          <a:latin typeface="+mn-lt"/>
+          <a:ea typeface="+mn-ea"/>
+          <a:cs typeface="+mn-cs"/>
+        </a:defRPr>
+      </a:lvl4pPr>
+      <a:lvl5pPr marL="2057400" indent="-228600" algn="l" defTabSz="914400" rtl="0" eaLnBrk="1" latinLnBrk="0" hangingPunct="1">
+        <a:lnSpc>
+          <a:spcPct val="90000"/>
+        </a:lnSpc>
+        <a:spcBef>
+          <a:spcPts val="500"/>
+        </a:spcBef>
+        <a:buFont typeface="Arial" panose="020B0604020202020204" pitchFamily="34" charset="0"/>
+        <a:buChar char="•"/>
+        <a:defRPr sz="1800" kern="1200">
+          <a:solidFill>
+            <a:schemeClr val="tx1"/>
+          </a:solidFill>
+          <a:latin typeface="+mn-lt"/>
+          <a:ea typeface="+mn-ea"/>
+          <a:cs typeface="+mn-cs"/>
+        </a:defRPr>
+      </a:lvl5pPr>
+      <a:lvl6pPr marL="2514600" indent="-228600" algn="l" defTabSz="914400" rtl="0" eaLnBrk="1" latinLnBrk="0" hangingPunct="1">
+        <a:lnSpc>
+          <a:spcPct val="90000"/>
+        </a:lnSpc>
+        <a:spcBef>
+          <a:spcPts val="500"/>
+        </a:spcBef>
+        <a:buFont typeface="Arial" panose="020B0604020202020204" pitchFamily="34" charset="0"/>
+        <a:buChar char="•"/>
+        <a:defRPr sz="1800" kern="1200">
+          <a:solidFill>
+            <a:schemeClr val="tx1"/>
+          </a:solidFill>
+          <a:latin typeface="+mn-lt"/>
+          <a:ea typeface="+mn-ea"/>
+          <a:cs typeface="+mn-cs"/>
+        </a:defRPr>
+      </a:lvl6pPr>
+      <a:lvl7pPr marL="2971800" indent="-228600" algn="l" defTabSz="914400" rtl="0" eaLnBrk="1" latinLnBrk="0" hangingPunct="1">
+        <a:lnSpc>
+          <a:spcPct val="90000"/>
+        </a:lnSpc>
+        <a:spcBef>
+          <a:spcPts val="500"/>
+        </a:spcBef>
+        <a:buFont typeface="Arial" panose="020B0604020202020204" pitchFamily="34" charset="0"/>
+        <a:buChar char="•"/>
+        <a:defRPr sz="1800" kern="1200">
+          <a:solidFill>
+            <a:schemeClr val="tx1"/>
+          </a:solidFill>
+          <a:latin typeface="+mn-lt"/>
+          <a:ea typeface="+mn-ea"/>
+          <a:cs typeface="+mn-cs"/>
+        </a:defRPr>
+      </a:lvl7pPr>
+      <a:lvl8pPr marL="3429000" indent="-228600" algn="l" defTabSz="914400" rtl="0" eaLnBrk="1" latinLnBrk="0" hangingPunct="1">
+        <a:lnSpc>
+          <a:spcPct val="90000"/>
+        </a:lnSpc>
+        <a:spcBef>
+          <a:spcPts val="500"/>
+        </a:spcBef>
+        <a:buFont typeface="Arial" panose="020B0604020202020204" pitchFamily="34" charset="0"/>
+        <a:buChar char="•"/>
+        <a:defRPr sz="1800" kern="1200">
+          <a:solidFill>
+            <a:schemeClr val="tx1"/>
+          </a:solidFill>
+          <a:latin typeface="+mn-lt"/>
+          <a:ea typeface="+mn-ea"/>
+          <a:cs typeface="+mn-cs"/>
+        </a:defRPr>
+      </a:lvl8pPr>
+      <a:lvl9pPr marL="3886200" indent="-228600" algn="l" defTabSz="914400" rtl="0" eaLnBrk="1" latinLnBrk="0" hangingPunct="1">
+        <a:lnSpc>
+          <a:spcPct val="90000"/>
+        </a:lnSpc>
+        <a:spcBef>
+          <a:spcPts val="500"/>
+        </a:spcBef>
+        <a:buFont typeface="Arial" panose="020B0604020202020204" pitchFamily="34" charset="0"/>
+        <a:buChar char="•"/>
+        <a:defRPr sz="1800" kern="1200">
+          <a:solidFill>
+            <a:schemeClr val="tx1"/>
+          </a:solidFill>
+          <a:latin typeface="+mn-lt"/>
+          <a:ea typeface="+mn-ea"/>
+          <a:cs typeface="+mn-cs"/>
+        </a:defRPr>
+      </a:lvl9pPr>
+    </p:bodyStyle>
+    <p:otherStyle>
+      <a:defPPr>
+        <a:defRPr lang="pt-PT"/>
+      </a:defPPr>
+      <a:lvl1pPr marL="0" algn="l" defTabSz="914400" rtl="0" eaLnBrk="1" latinLnBrk="0" hangingPunct="1">
+        <a:defRPr sz="1800" kern="1200">
+          <a:solidFill>
+            <a:schemeClr val="tx1"/>
+          </a:solidFill>
+          <a:latin typeface="+mn-lt"/>
+          <a:ea typeface="+mn-ea"/>
+          <a:cs typeface="+mn-cs"/>
+        </a:defRPr>
+      </a:lvl1pPr>
+      <a:lvl2pPr marL="457200" algn="l" defTabSz="914400" rtl="0" eaLnBrk="1" latinLnBrk="0" hangingPunct="1">
+        <a:defRPr sz="1800" kern="1200">
+          <a:solidFill>
+            <a:schemeClr val="tx1"/>
+          </a:solidFill>
+          <a:latin typeface="+mn-lt"/>
+          <a:ea typeface="+mn-ea"/>
+          <a:cs typeface="+mn-cs"/>
+        </a:defRPr>
+      </a:lvl2pPr>
+      <a:lvl3pPr marL="914400" algn="l" defTabSz="914400" rtl="0" eaLnBrk="1" latinLnBrk="0" hangingPunct="1">
+        <a:defRPr sz="1800" kern="1200">
+          <a:solidFill>
+            <a:schemeClr val="tx1"/>
+          </a:solidFill>
+          <a:latin typeface="+mn-lt"/>
+          <a:ea typeface="+mn-ea"/>
+          <a:cs typeface="+mn-cs"/>
+        </a:defRPr>
+      </a:lvl3pPr>
+      <a:lvl4pPr marL="1371600" algn="l" defTabSz="914400" rtl="0" eaLnBrk="1" latinLnBrk="0" hangingPunct="1">
+        <a:defRPr sz="1800" kern="1200">
+          <a:solidFill>
+            <a:schemeClr val="tx1"/>
+          </a:solidFill>
+          <a:latin typeface="+mn-lt"/>
+          <a:ea typeface="+mn-ea"/>
+          <a:cs typeface="+mn-cs"/>
+        </a:defRPr>
+      </a:lvl4pPr>
+      <a:lvl5pPr marL="1828800" algn="l" defTabSz="914400" rtl="0" eaLnBrk="1" latinLnBrk="0" hangingPunct="1">
+        <a:defRPr sz="1800" kern="1200">
+          <a:solidFill>
+            <a:schemeClr val="tx1"/>
+          </a:solidFill>
+          <a:latin typeface="+mn-lt"/>
+          <a:ea typeface="+mn-ea"/>
+          <a:cs typeface="+mn-cs"/>
+        </a:defRPr>
+      </a:lvl5pPr>
+      <a:lvl6pPr marL="2286000" algn="l" defTabSz="914400" rtl="0" eaLnBrk="1" latinLnBrk="0" hangingPunct="1">
+        <a:defRPr sz="1800" kern="1200">
+          <a:solidFill>
+            <a:schemeClr val="tx1"/>
+          </a:solidFill>
+          <a:latin typeface="+mn-lt"/>
+          <a:ea typeface="+mn-ea"/>
+          <a:cs typeface="+mn-cs"/>
+        </a:defRPr>
+      </a:lvl6pPr>
+      <a:lvl7pPr marL="2743200" algn="l" defTabSz="914400" rtl="0" eaLnBrk="1" latinLnBrk="0" hangingPunct="1">
+        <a:defRPr sz="1800" kern="1200">
+          <a:solidFill>
+            <a:schemeClr val="tx1"/>
+          </a:solidFill>
+          <a:latin typeface="+mn-lt"/>
+          <a:ea typeface="+mn-ea"/>
+          <a:cs typeface="+mn-cs"/>
+        </a:defRPr>
+      </a:lvl7pPr>
+      <a:lvl8pPr marL="3200400" algn="l" defTabSz="914400" rtl="0" eaLnBrk="1" latinLnBrk="0" hangingPunct="1">
+        <a:defRPr sz="1800" kern="1200">
+          <a:solidFill>
+            <a:schemeClr val="tx1"/>
+          </a:solidFill>
+          <a:latin typeface="+mn-lt"/>
+          <a:ea typeface="+mn-ea"/>
+          <a:cs typeface="+mn-cs"/>
+        </a:defRPr>
+      </a:lvl8pPr>
+      <a:lvl9pPr marL="3657600" algn="l" defTabSz="914400" rtl="0" eaLnBrk="1" latinLnBrk="0" hangingPunct="1">
+        <a:defRPr sz="1800" kern="1200">
+          <a:solidFill>
+            <a:schemeClr val="tx1"/>
+          </a:solidFill>
+          <a:latin typeface="+mn-lt"/>
+          <a:ea typeface="+mn-ea"/>
+          <a:cs typeface="+mn-cs"/>
+        </a:defRPr>
+      </a:lvl9pPr>
+    </p:otherStyle>
+  </p:txStyles>
 </p:sldMaster>
 </file>
 
 <file path=ppt/slides/slide1.xml><?xml version="1.0" encoding="utf-8"?>
-<p:sld xmlns:a="http://schemas.openxmlformats.org/drawingml/2006/main" xmlns:p="http://schemas.openxmlformats.org/presentationml/2006/main" xmlns:r="http://schemas.openxmlformats.org/officeDocument/2006/relationships" xmlns:p14="http://schemas.microsoft.com/office/powerpoint/2010/main" xmlns:p15="http://schemas.microsoft.com/office/powerpoint/2012/main" xmlns:mc="http://schemas.openxmlformats.org/markup-compatibility/2006">
+<p:sld xmlns:a="http://schemas.openxmlformats.org/drawingml/2006/main" xmlns:r="http://schemas.openxmlformats.org/officeDocument/2006/relationships" xmlns:p="http://schemas.openxmlformats.org/presentationml/2006/main">
   <p:cSld>
     <p:spTree>
       <p:nvGrpSpPr>
@@ -4117,12 +4053,12 @@
       </p:grpSpPr>
       <p:pic>
         <p:nvPicPr>
-          <p:cNvPr id="30" name="Google Shape;54;p13" descr=""/>
+          <p:cNvPr id="30" name="Google Shape;54;p13"/>
           <p:cNvPicPr/>
           <p:nvPr/>
         </p:nvPicPr>
         <p:blipFill>
-          <a:blip r:embed="rId1"/>
+          <a:blip r:embed="rId2"/>
           <a:stretch/>
         </p:blipFill>
         <p:spPr>
@@ -4159,32 +4095,39 @@
           </a:ln>
         </p:spPr>
         <p:style>
-          <a:lnRef idx="0"/>
-          <a:fillRef idx="0"/>
-          <a:effectRef idx="0"/>
+          <a:lnRef idx="0">
+            <a:scrgbClr r="0" g="0" b="0"/>
+          </a:lnRef>
+          <a:fillRef idx="0">
+            <a:scrgbClr r="0" g="0" b="0"/>
+          </a:fillRef>
+          <a:effectRef idx="0">
+            <a:scrgbClr r="0" g="0" b="0"/>
+          </a:effectRef>
           <a:fontRef idx="minor"/>
         </p:style>
         <p:txBody>
-          <a:bodyPr lIns="90000" rIns="90000" tIns="91440" bIns="91440" anchor="t">
+          <a:bodyPr lIns="90000" tIns="91440" rIns="90000" bIns="91440" anchor="t">
             <a:noAutofit/>
           </a:bodyPr>
+          <a:lstStyle/>
           <a:p>
             <a:pPr algn="ctr" defTabSz="914400">
               <a:lnSpc>
                 <a:spcPct val="115000"/>
               </a:lnSpc>
               <a:tabLst>
-                <a:tab algn="l" pos="0"/>
+                <a:tab pos="0" algn="l"/>
               </a:tabLst>
             </a:pPr>
             <a:r>
-              <a:rPr b="1" lang="pt-PT" sz="1200" strike="noStrike" u="none">
+              <a:rPr lang="pt-PT" sz="1200" b="1" u="none" strike="noStrike">
                 <a:solidFill>
                   <a:schemeClr val="dk1"/>
                 </a:solidFill>
                 <a:effectLst/>
                 <a:highlight>
-                  <a:srgbClr val="f5f5f5"/>
+                  <a:srgbClr val="F5F5F5"/>
                 </a:highlight>
                 <a:uFillTx/>
                 <a:latin typeface="Arial"/>
@@ -4193,13 +4136,13 @@
               <a:t>INSTITUTO POLITÉCNICO INDUSTRIAL DO KILAMBA KIAXI</a:t>
             </a:r>
             <a:r>
-              <a:rPr b="0" lang="pt-PT" sz="1200" strike="noStrike" u="none">
+              <a:rPr lang="pt-PT" sz="1200" b="0" u="none" strike="noStrike">
                 <a:solidFill>
                   <a:schemeClr val="dk1"/>
                 </a:solidFill>
                 <a:effectLst/>
                 <a:highlight>
-                  <a:srgbClr val="f5f5f5"/>
+                  <a:srgbClr val="F5F5F5"/>
                 </a:highlight>
                 <a:uFillTx/>
                 <a:latin typeface="Arial"/>
@@ -4207,7 +4150,7 @@
               </a:rPr>
               <a:t>​</a:t>
             </a:r>
-            <a:endParaRPr b="0" lang="pt-PT" sz="1200" strike="noStrike" u="none">
+            <a:endParaRPr lang="pt-PT" sz="1200" b="0" u="none" strike="noStrike">
               <a:solidFill>
                 <a:srgbClr val="000000"/>
               </a:solidFill>
@@ -4222,17 +4165,17 @@
                 <a:spcPct val="115000"/>
               </a:lnSpc>
               <a:tabLst>
-                <a:tab algn="l" pos="0"/>
+                <a:tab pos="0" algn="l"/>
               </a:tabLst>
             </a:pPr>
             <a:r>
-              <a:rPr b="1" lang="pt-PT" sz="1200" strike="noStrike" u="none">
+              <a:rPr lang="pt-PT" sz="1200" b="1" u="none" strike="noStrike">
                 <a:solidFill>
                   <a:schemeClr val="dk1"/>
                 </a:solidFill>
                 <a:effectLst/>
                 <a:highlight>
-                  <a:srgbClr val="f5f5f5"/>
+                  <a:srgbClr val="F5F5F5"/>
                 </a:highlight>
                 <a:uFillTx/>
                 <a:latin typeface="Arial"/>
@@ -4241,13 +4184,13 @@
               <a:t>Nº 8056 “NOVA VIDA”</a:t>
             </a:r>
             <a:r>
-              <a:rPr b="0" lang="pt-PT" sz="1200" strike="noStrike" u="none">
+              <a:rPr lang="pt-PT" sz="1200" b="0" u="none" strike="noStrike">
                 <a:solidFill>
                   <a:schemeClr val="dk1"/>
                 </a:solidFill>
                 <a:effectLst/>
                 <a:highlight>
-                  <a:srgbClr val="f5f5f5"/>
+                  <a:srgbClr val="F5F5F5"/>
                 </a:highlight>
                 <a:uFillTx/>
                 <a:latin typeface="Arial"/>
@@ -4255,7 +4198,7 @@
               </a:rPr>
               <a:t>​</a:t>
             </a:r>
-            <a:endParaRPr b="0" lang="pt-PT" sz="1200" strike="noStrike" u="none">
+            <a:endParaRPr lang="pt-PT" sz="1200" b="0" u="none" strike="noStrike">
               <a:solidFill>
                 <a:srgbClr val="000000"/>
               </a:solidFill>
@@ -4270,17 +4213,17 @@
                 <a:spcPct val="115000"/>
               </a:lnSpc>
               <a:tabLst>
-                <a:tab algn="l" pos="0"/>
+                <a:tab pos="0" algn="l"/>
               </a:tabLst>
             </a:pPr>
             <a:r>
-              <a:rPr b="0" lang="pt-PT" sz="1800" strike="noStrike" u="none">
+              <a:rPr lang="pt-PT" sz="1800" b="0" u="none" strike="noStrike">
                 <a:solidFill>
                   <a:schemeClr val="dk1"/>
                 </a:solidFill>
                 <a:effectLst/>
                 <a:highlight>
-                  <a:srgbClr val="f5f5f5"/>
+                  <a:srgbClr val="F5F5F5"/>
                 </a:highlight>
                 <a:uFillTx/>
                 <a:latin typeface="Arial"/>
@@ -4288,7 +4231,7 @@
               </a:rPr>
               <a:t>​</a:t>
             </a:r>
-            <a:endParaRPr b="0" lang="pt-PT" sz="1800" strike="noStrike" u="none">
+            <a:endParaRPr lang="pt-PT" sz="1800" b="0" u="none" strike="noStrike">
               <a:solidFill>
                 <a:srgbClr val="000000"/>
               </a:solidFill>
@@ -4303,10 +4246,10 @@
                 <a:spcPct val="100000"/>
               </a:lnSpc>
               <a:tabLst>
-                <a:tab algn="l" pos="0"/>
+                <a:tab pos="0" algn="l"/>
               </a:tabLst>
             </a:pPr>
-            <a:endParaRPr b="0" lang="pt-PT" sz="1800" strike="noStrike" u="none">
+            <a:endParaRPr lang="pt-PT" sz="1800" b="0" u="none" strike="noStrike">
               <a:solidFill>
                 <a:srgbClr val="000000"/>
               </a:solidFill>
@@ -4319,12 +4262,12 @@
       </p:sp>
       <p:pic>
         <p:nvPicPr>
-          <p:cNvPr id="32" name="Google Shape;56;p13" descr=""/>
+          <p:cNvPr id="32" name="Google Shape;56;p13"/>
           <p:cNvPicPr/>
           <p:nvPr/>
         </p:nvPicPr>
         <p:blipFill>
-          <a:blip r:embed="rId2"/>
+          <a:blip r:embed="rId3"/>
           <a:stretch/>
         </p:blipFill>
         <p:spPr>
@@ -4361,32 +4304,39 @@
           </a:ln>
         </p:spPr>
         <p:style>
-          <a:lnRef idx="0"/>
-          <a:fillRef idx="0"/>
-          <a:effectRef idx="0"/>
+          <a:lnRef idx="0">
+            <a:scrgbClr r="0" g="0" b="0"/>
+          </a:lnRef>
+          <a:fillRef idx="0">
+            <a:scrgbClr r="0" g="0" b="0"/>
+          </a:fillRef>
+          <a:effectRef idx="0">
+            <a:scrgbClr r="0" g="0" b="0"/>
+          </a:effectRef>
           <a:fontRef idx="minor"/>
         </p:style>
         <p:txBody>
-          <a:bodyPr lIns="90000" rIns="90000" tIns="91440" bIns="91440" anchor="t">
+          <a:bodyPr lIns="90000" tIns="91440" rIns="90000" bIns="91440" anchor="t">
             <a:noAutofit/>
           </a:bodyPr>
+          <a:lstStyle/>
           <a:p>
             <a:pPr defTabSz="914400">
               <a:lnSpc>
                 <a:spcPct val="100000"/>
               </a:lnSpc>
               <a:tabLst>
-                <a:tab algn="l" pos="0"/>
+                <a:tab pos="0" algn="l"/>
               </a:tabLst>
             </a:pPr>
             <a:r>
-              <a:rPr b="1" lang="pt-PT" sz="1200" strike="noStrike" u="none">
+              <a:rPr lang="pt-PT" sz="1200" b="1" u="none" strike="noStrike">
                 <a:solidFill>
                   <a:schemeClr val="dk1"/>
                 </a:solidFill>
                 <a:effectLst/>
                 <a:highlight>
-                  <a:srgbClr val="ffffff"/>
+                  <a:srgbClr val="FFFFFF"/>
                 </a:highlight>
                 <a:uFillTx/>
                 <a:latin typeface="Arial"/>
@@ -4395,13 +4345,13 @@
               <a:t>COMPLEXO ESCOLAR PRIVADO MONA TOWER</a:t>
             </a:r>
             <a:r>
-              <a:rPr b="0" lang="pt-PT" sz="1200" strike="noStrike" u="none">
+              <a:rPr lang="pt-PT" sz="1200" b="0" u="none" strike="noStrike">
                 <a:solidFill>
                   <a:schemeClr val="dk1"/>
                 </a:solidFill>
                 <a:effectLst/>
                 <a:highlight>
-                  <a:srgbClr val="ffffff"/>
+                  <a:srgbClr val="FFFFFF"/>
                 </a:highlight>
                 <a:uFillTx/>
                 <a:latin typeface="Arial"/>
@@ -4409,7 +4359,7 @@
               </a:rPr>
               <a:t> </a:t>
             </a:r>
-            <a:endParaRPr b="0" lang="pt-PT" sz="1200" strike="noStrike" u="none">
+            <a:endParaRPr lang="pt-PT" sz="1200" b="0" u="none" strike="noStrike">
               <a:solidFill>
                 <a:srgbClr val="000000"/>
               </a:solidFill>
@@ -4440,15 +4390,22 @@
           </a:ln>
         </p:spPr>
         <p:style>
-          <a:lnRef idx="0"/>
-          <a:fillRef idx="0"/>
-          <a:effectRef idx="0"/>
+          <a:lnRef idx="0">
+            <a:scrgbClr r="0" g="0" b="0"/>
+          </a:lnRef>
+          <a:fillRef idx="0">
+            <a:scrgbClr r="0" g="0" b="0"/>
+          </a:fillRef>
+          <a:effectRef idx="0">
+            <a:scrgbClr r="0" g="0" b="0"/>
+          </a:effectRef>
           <a:fontRef idx="minor"/>
         </p:style>
         <p:txBody>
-          <a:bodyPr lIns="90000" rIns="90000" tIns="91440" bIns="91440" anchor="t">
+          <a:bodyPr lIns="90000" tIns="91440" rIns="90000" bIns="91440" anchor="t">
             <a:noAutofit/>
           </a:bodyPr>
+          <a:lstStyle/>
           <a:p>
             <a:pPr algn="ctr" defTabSz="914400">
               <a:lnSpc>
@@ -4458,10 +4415,10 @@
                 <a:spcPts val="1199"/>
               </a:spcBef>
               <a:tabLst>
-                <a:tab algn="l" pos="0"/>
+                <a:tab pos="0" algn="l"/>
               </a:tabLst>
             </a:pPr>
-            <a:endParaRPr b="0" lang="pt-PT" sz="1200" strike="noStrike" u="none">
+            <a:endParaRPr lang="pt-PT" sz="1200" b="0" u="none" strike="noStrike">
               <a:solidFill>
                 <a:srgbClr val="000000"/>
               </a:solidFill>
@@ -4479,11 +4436,11 @@
                 <a:spcPts val="1199"/>
               </a:spcBef>
               <a:tabLst>
-                <a:tab algn="l" pos="0"/>
+                <a:tab pos="0" algn="l"/>
               </a:tabLst>
             </a:pPr>
             <a:r>
-              <a:rPr b="1" lang="pt-PT" sz="1200" strike="noStrike" u="none">
+              <a:rPr lang="pt-PT" sz="1200" b="1" u="none" strike="noStrike">
                 <a:solidFill>
                   <a:schemeClr val="dk1"/>
                 </a:solidFill>
@@ -4494,7 +4451,7 @@
               </a:rPr>
               <a:t>SISTEMA INTEGRADO DE GESTÃO E PROCESSAMENTO DE PAGAMENTOS PARA O COLÉGIO MONA TOWER</a:t>
             </a:r>
-            <a:endParaRPr b="0" lang="pt-PT" sz="1200" strike="noStrike" u="none">
+            <a:endParaRPr lang="pt-PT" sz="1200" b="0" u="none" strike="noStrike">
               <a:solidFill>
                 <a:srgbClr val="000000"/>
               </a:solidFill>
@@ -4512,10 +4469,10 @@
                 <a:spcPts val="99"/>
               </a:spcBef>
               <a:tabLst>
-                <a:tab algn="l" pos="0"/>
+                <a:tab pos="0" algn="l"/>
               </a:tabLst>
             </a:pPr>
-            <a:endParaRPr b="0" lang="pt-PT" sz="1200" strike="noStrike" u="none">
+            <a:endParaRPr lang="pt-PT" sz="1200" b="0" u="none" strike="noStrike">
               <a:solidFill>
                 <a:srgbClr val="000000"/>
               </a:solidFill>
@@ -4546,32 +4503,39 @@
           </a:ln>
         </p:spPr>
         <p:style>
-          <a:lnRef idx="0"/>
-          <a:fillRef idx="0"/>
-          <a:effectRef idx="0"/>
+          <a:lnRef idx="0">
+            <a:scrgbClr r="0" g="0" b="0"/>
+          </a:lnRef>
+          <a:fillRef idx="0">
+            <a:scrgbClr r="0" g="0" b="0"/>
+          </a:fillRef>
+          <a:effectRef idx="0">
+            <a:scrgbClr r="0" g="0" b="0"/>
+          </a:effectRef>
           <a:fontRef idx="minor"/>
         </p:style>
         <p:txBody>
-          <a:bodyPr lIns="90000" rIns="90000" tIns="91440" bIns="91440" anchor="t">
+          <a:bodyPr lIns="90000" tIns="91440" rIns="90000" bIns="91440" anchor="t">
             <a:normAutofit fontScale="25000" lnSpcReduction="19999"/>
           </a:bodyPr>
+          <a:lstStyle/>
           <a:p>
             <a:pPr algn="ctr" defTabSz="914400">
               <a:lnSpc>
                 <a:spcPct val="115000"/>
               </a:lnSpc>
               <a:tabLst>
-                <a:tab algn="l" pos="0"/>
+                <a:tab pos="0" algn="l"/>
               </a:tabLst>
             </a:pPr>
             <a:r>
-              <a:rPr b="0" lang="pt-PT" sz="4800" strike="noStrike" u="none">
+              <a:rPr lang="pt-PT" sz="4800" b="0" u="none" strike="noStrike">
                 <a:solidFill>
                   <a:schemeClr val="dk1"/>
                 </a:solidFill>
                 <a:effectLst/>
                 <a:highlight>
-                  <a:srgbClr val="f5f5f5"/>
+                  <a:srgbClr val="F5F5F5"/>
                 </a:highlight>
                 <a:uFillTx/>
                 <a:latin typeface="Arial"/>
@@ -4579,7 +4543,7 @@
               </a:rPr>
               <a:t>Luanda​</a:t>
             </a:r>
-            <a:endParaRPr b="0" lang="pt-PT" sz="4800" strike="noStrike" u="none">
+            <a:endParaRPr lang="pt-PT" sz="4800" b="0" u="none" strike="noStrike">
               <a:solidFill>
                 <a:srgbClr val="000000"/>
               </a:solidFill>
@@ -4594,17 +4558,17 @@
                 <a:spcPct val="115000"/>
               </a:lnSpc>
               <a:tabLst>
-                <a:tab algn="l" pos="0"/>
+                <a:tab pos="0" algn="l"/>
               </a:tabLst>
             </a:pPr>
             <a:r>
-              <a:rPr b="0" lang="pt-PT" sz="4800" strike="noStrike" u="none">
+              <a:rPr lang="pt-PT" sz="4800" b="0" u="none" strike="noStrike">
                 <a:solidFill>
                   <a:schemeClr val="dk1"/>
                 </a:solidFill>
                 <a:effectLst/>
                 <a:highlight>
-                  <a:srgbClr val="f5f5f5"/>
+                  <a:srgbClr val="F5F5F5"/>
                 </a:highlight>
                 <a:uFillTx/>
                 <a:latin typeface="Arial"/>
@@ -4612,7 +4576,7 @@
               </a:rPr>
               <a:t>2025/26</a:t>
             </a:r>
-            <a:endParaRPr b="0" lang="pt-PT" sz="4800" strike="noStrike" u="none">
+            <a:endParaRPr lang="pt-PT" sz="4800" b="0" u="none" strike="noStrike">
               <a:solidFill>
                 <a:srgbClr val="000000"/>
               </a:solidFill>
@@ -4627,10 +4591,10 @@
                 <a:spcPct val="100000"/>
               </a:lnSpc>
               <a:tabLst>
-                <a:tab algn="l" pos="0"/>
+                <a:tab pos="0" algn="l"/>
               </a:tabLst>
             </a:pPr>
-            <a:endParaRPr b="0" lang="pt-PT" sz="1800" strike="noStrike" u="none">
+            <a:endParaRPr lang="pt-PT" sz="1800" b="0" u="none" strike="noStrike">
               <a:solidFill>
                 <a:srgbClr val="000000"/>
               </a:solidFill>
@@ -4643,19 +4607,14 @@
       </p:sp>
     </p:spTree>
   </p:cSld>
-  <mc:AlternateContent>
-    <mc:Choice Requires="p14">
-      <p:transition spd="slow" p14:dur="2000"/>
-    </mc:Choice>
-    <mc:Fallback>
-      <p:transition spd="slow"/>
-    </mc:Fallback>
-  </mc:AlternateContent>
+  <p:clrMapOvr>
+    <a:masterClrMapping/>
+  </p:clrMapOvr>
 </p:sld>
 </file>
 
 <file path=ppt/slides/slide10.xml><?xml version="1.0" encoding="utf-8"?>
-<p:sld xmlns:a="http://schemas.openxmlformats.org/drawingml/2006/main" xmlns:p="http://schemas.openxmlformats.org/presentationml/2006/main" xmlns:r="http://schemas.openxmlformats.org/officeDocument/2006/relationships" xmlns:p14="http://schemas.microsoft.com/office/powerpoint/2010/main" xmlns:p15="http://schemas.microsoft.com/office/powerpoint/2012/main" xmlns:mc="http://schemas.openxmlformats.org/markup-compatibility/2006">
+<p:sld xmlns:a="http://schemas.openxmlformats.org/drawingml/2006/main" xmlns:r="http://schemas.openxmlformats.org/officeDocument/2006/relationships" xmlns:p="http://schemas.openxmlformats.org/presentationml/2006/main">
   <p:cSld>
     <p:spTree>
       <p:nvGrpSpPr>
@@ -4691,15 +4650,22 @@
           </a:ln>
         </p:spPr>
         <p:style>
-          <a:lnRef idx="0"/>
-          <a:fillRef idx="0"/>
-          <a:effectRef idx="0"/>
+          <a:lnRef idx="0">
+            <a:scrgbClr r="0" g="0" b="0"/>
+          </a:lnRef>
+          <a:fillRef idx="0">
+            <a:scrgbClr r="0" g="0" b="0"/>
+          </a:fillRef>
+          <a:effectRef idx="0">
+            <a:scrgbClr r="0" g="0" b="0"/>
+          </a:effectRef>
           <a:fontRef idx="minor"/>
         </p:style>
         <p:txBody>
-          <a:bodyPr numCol="1" spcCol="0" horzOverflow="overflow" lIns="90000" rIns="90000" tIns="45000" bIns="45000" anchor="t">
+          <a:bodyPr horzOverflow="overflow" lIns="90000" tIns="45000" rIns="90000" bIns="45000" numCol="1" spcCol="0" anchor="t">
             <a:spAutoFit/>
           </a:bodyPr>
+          <a:lstStyle/>
           <a:p>
             <a:pPr defTabSz="914400">
               <a:lnSpc>
@@ -4707,7 +4673,7 @@
               </a:lnSpc>
             </a:pPr>
             <a:r>
-              <a:rPr b="1" lang="pt-PT" sz="1800" strike="noStrike" u="none">
+              <a:rPr lang="pt-PT" sz="1800" b="1" u="none" strike="noStrike">
                 <a:solidFill>
                   <a:srgbClr val="000000"/>
                 </a:solidFill>
@@ -4718,7 +4684,7 @@
               </a:rPr>
               <a:t>Ferramentas </a:t>
             </a:r>
-            <a:endParaRPr b="0" lang="pt-PT" sz="1800" strike="noStrike" u="none">
+            <a:endParaRPr lang="pt-PT" sz="1800" b="0" u="none" strike="noStrike">
               <a:solidFill>
                 <a:srgbClr val="000000"/>
               </a:solidFill>
@@ -4733,7 +4699,7 @@
                 <a:spcPct val="100000"/>
               </a:lnSpc>
             </a:pPr>
-            <a:endParaRPr b="0" lang="pt-PT" sz="1800" strike="noStrike" u="none">
+            <a:endParaRPr lang="pt-PT" sz="1800" b="0" u="none" strike="noStrike">
               <a:solidFill>
                 <a:srgbClr val="000000"/>
               </a:solidFill>
@@ -4751,7 +4717,7 @@
           <p:nvPr/>
         </p:nvPicPr>
         <p:blipFill>
-          <a:blip r:embed="rId1"/>
+          <a:blip r:embed="rId2"/>
           <a:stretch/>
         </p:blipFill>
         <p:spPr>
@@ -4770,12 +4736,12 @@
       </p:pic>
       <p:pic>
         <p:nvPicPr>
-          <p:cNvPr id="63" name="Gráfico 5" descr=""/>
+          <p:cNvPr id="63" name="Gráfico 5"/>
           <p:cNvPicPr/>
           <p:nvPr/>
         </p:nvPicPr>
         <p:blipFill>
-          <a:blip r:embed="rId2">
+          <a:blip>
             <a:extLst>
               <a:ext uri="{96DAC541-7B7A-43D3-8B79-37D633B846F1}">
                 <asvg:svgBlip xmlns:asvg="http://schemas.microsoft.com/office/drawing/2016/SVG/main" r:embed="rId3"/>
@@ -4824,477 +4790,14 @@
       </p:pic>
     </p:spTree>
   </p:cSld>
-  <mc:AlternateContent>
-    <mc:Choice Requires="p14">
-      <p:transition spd="slow" p14:dur="2000"/>
-    </mc:Choice>
-    <mc:Fallback>
-      <p:transition spd="slow"/>
-    </mc:Fallback>
-  </mc:AlternateContent>
+  <p:clrMapOvr>
+    <a:masterClrMapping/>
+  </p:clrMapOvr>
 </p:sld>
 </file>
 
 <file path=ppt/slides/slide11.xml><?xml version="1.0" encoding="utf-8"?>
-<p:sld xmlns:a="http://schemas.openxmlformats.org/drawingml/2006/main" xmlns:p="http://schemas.openxmlformats.org/presentationml/2006/main" xmlns:r="http://schemas.openxmlformats.org/officeDocument/2006/relationships" xmlns:p14="http://schemas.microsoft.com/office/powerpoint/2010/main" xmlns:p15="http://schemas.microsoft.com/office/powerpoint/2012/main" xmlns:mc="http://schemas.openxmlformats.org/markup-compatibility/2006">
-  <p:cSld>
-    <p:spTree>
-      <p:nvGrpSpPr>
-        <p:cNvPr id="1" name=""/>
-        <p:cNvGrpSpPr/>
-        <p:nvPr/>
-      </p:nvGrpSpPr>
-      <p:grpSpPr>
-        <a:xfrm>
-          <a:off x="0" y="0"/>
-          <a:ext cx="0" cy="0"/>
-          <a:chOff x="0" y="0"/>
-          <a:chExt cx="0" cy="0"/>
-        </a:xfrm>
-      </p:grpSpPr>
-      <p:sp>
-        <p:nvSpPr>
-          <p:cNvPr id="65" name="Google Shape;120;p22"/>
-          <p:cNvSpPr/>
-          <p:nvPr/>
-        </p:nvSpPr>
-        <p:spPr>
-          <a:xfrm>
-            <a:off x="536400" y="625680"/>
-            <a:ext cx="2511720" cy="457560"/>
-          </a:xfrm>
-          <a:prstGeom prst="rect">
-            <a:avLst/>
-          </a:prstGeom>
-          <a:noFill/>
-          <a:ln w="0">
-            <a:noFill/>
-          </a:ln>
-        </p:spPr>
-        <p:style>
-          <a:lnRef idx="0"/>
-          <a:fillRef idx="0"/>
-          <a:effectRef idx="0"/>
-          <a:fontRef idx="minor"/>
-        </p:style>
-        <p:txBody>
-          <a:bodyPr lIns="90000" rIns="90000" tIns="91440" bIns="91440" anchor="t">
-            <a:spAutoFit/>
-          </a:bodyPr>
-          <a:p>
-            <a:pPr defTabSz="914400">
-              <a:lnSpc>
-                <a:spcPct val="100000"/>
-              </a:lnSpc>
-              <a:tabLst>
-                <a:tab algn="l" pos="0"/>
-              </a:tabLst>
-            </a:pPr>
-            <a:r>
-              <a:rPr b="1" lang="pt-PT" sz="1800" strike="noStrike" u="none">
-                <a:solidFill>
-                  <a:schemeClr val="dk1"/>
-                </a:solidFill>
-                <a:effectLst/>
-                <a:uFillTx/>
-                <a:latin typeface="Arial"/>
-                <a:ea typeface="Arial"/>
-              </a:rPr>
-              <a:t>Solução Proposta</a:t>
-            </a:r>
-            <a:endParaRPr b="0" lang="pt-PT" sz="1800" strike="noStrike" u="none">
-              <a:solidFill>
-                <a:srgbClr val="000000"/>
-              </a:solidFill>
-              <a:effectLst/>
-              <a:uFillTx/>
-              <a:latin typeface="Arial"/>
-            </a:endParaRPr>
-          </a:p>
-        </p:txBody>
-      </p:sp>
-      <p:sp>
-        <p:nvSpPr>
-          <p:cNvPr id="66" name="Google Shape;121;p22"/>
-          <p:cNvSpPr/>
-          <p:nvPr/>
-        </p:nvSpPr>
-        <p:spPr>
-          <a:xfrm>
-            <a:off x="536400" y="1087560"/>
-            <a:ext cx="7255440" cy="2933280"/>
-          </a:xfrm>
-          <a:prstGeom prst="rect">
-            <a:avLst/>
-          </a:prstGeom>
-          <a:noFill/>
-          <a:ln w="0">
-            <a:noFill/>
-          </a:ln>
-        </p:spPr>
-        <p:style>
-          <a:lnRef idx="0"/>
-          <a:fillRef idx="0"/>
-          <a:effectRef idx="0"/>
-          <a:fontRef idx="minor"/>
-        </p:style>
-        <p:txBody>
-          <a:bodyPr lIns="90000" rIns="90000" tIns="91440" bIns="91440" anchor="t">
-            <a:noAutofit/>
-          </a:bodyPr>
-          <a:p>
-            <a:pPr defTabSz="914400">
-              <a:lnSpc>
-                <a:spcPct val="175000"/>
-              </a:lnSpc>
-              <a:tabLst>
-                <a:tab algn="l" pos="0"/>
-              </a:tabLst>
-            </a:pPr>
-            <a:r>
-              <a:rPr b="0" lang="pt-PT" sz="1400" strike="noStrike" u="none">
-                <a:solidFill>
-                  <a:srgbClr val="0f1115"/>
-                </a:solidFill>
-                <a:effectLst/>
-                <a:highlight>
-                  <a:srgbClr val="ffffff"/>
-                </a:highlight>
-                <a:uFillTx/>
-                <a:latin typeface="Arial"/>
-                <a:ea typeface="Arial"/>
-              </a:rPr>
-              <a:t>O projeto propõe um sistema web que automatiza a gestão financeira do Colégio Mona Tower. A solução centraliza a facturação, pagamentos e relatórios num único ambiente.</a:t>
-            </a:r>
-            <a:endParaRPr b="0" lang="pt-PT" sz="1400" strike="noStrike" u="none">
-              <a:solidFill>
-                <a:srgbClr val="000000"/>
-              </a:solidFill>
-              <a:effectLst/>
-              <a:uFillTx/>
-              <a:latin typeface="Arial"/>
-            </a:endParaRPr>
-          </a:p>
-        </p:txBody>
-      </p:sp>
-    </p:spTree>
-  </p:cSld>
-  <mc:AlternateContent>
-    <mc:Choice Requires="p14">
-      <p:transition spd="slow" p14:dur="2000"/>
-    </mc:Choice>
-    <mc:Fallback>
-      <p:transition spd="slow"/>
-    </mc:Fallback>
-  </mc:AlternateContent>
-</p:sld>
-</file>
-
-<file path=ppt/slides/slide12.xml><?xml version="1.0" encoding="utf-8"?>
-<p:sld xmlns:a="http://schemas.openxmlformats.org/drawingml/2006/main" xmlns:p="http://schemas.openxmlformats.org/presentationml/2006/main" xmlns:r="http://schemas.openxmlformats.org/officeDocument/2006/relationships" xmlns:p14="http://schemas.microsoft.com/office/powerpoint/2010/main" xmlns:p15="http://schemas.microsoft.com/office/powerpoint/2012/main" xmlns:mc="http://schemas.openxmlformats.org/markup-compatibility/2006">
-  <p:cSld>
-    <p:spTree>
-      <p:nvGrpSpPr>
-        <p:cNvPr id="1" name=""/>
-        <p:cNvGrpSpPr/>
-        <p:nvPr/>
-      </p:nvGrpSpPr>
-      <p:grpSpPr>
-        <a:xfrm>
-          <a:off x="0" y="0"/>
-          <a:ext cx="0" cy="0"/>
-          <a:chOff x="0" y="0"/>
-          <a:chExt cx="0" cy="0"/>
-        </a:xfrm>
-      </p:grpSpPr>
-      <p:sp>
-        <p:nvSpPr>
-          <p:cNvPr id="67" name=""/>
-          <p:cNvSpPr txBox="1"/>
-          <p:nvPr/>
-        </p:nvSpPr>
-        <p:spPr>
-          <a:xfrm>
-            <a:off x="360000" y="360000"/>
-            <a:ext cx="2340000" cy="360000"/>
-          </a:xfrm>
-          <a:prstGeom prst="rect">
-            <a:avLst/>
-          </a:prstGeom>
-          <a:noFill/>
-          <a:ln w="0">
-            <a:noFill/>
-          </a:ln>
-        </p:spPr>
-        <p:txBody>
-          <a:bodyPr lIns="90000" rIns="90000" tIns="45000" bIns="45000" anchor="t">
-            <a:spAutoFit/>
-          </a:bodyPr>
-          <a:p>
-            <a:r>
-              <a:rPr b="1" lang="pt-PT" sz="1800" strike="noStrike" u="none">
-                <a:solidFill>
-                  <a:schemeClr val="dk1"/>
-                </a:solidFill>
-                <a:effectLst/>
-                <a:uFillTx/>
-                <a:latin typeface="Arial"/>
-                <a:ea typeface="Arial"/>
-              </a:rPr>
-              <a:t>Arquitetura Lógica</a:t>
-            </a:r>
-            <a:endParaRPr b="0" lang="pt-PT" sz="1800" strike="noStrike" u="none">
-              <a:solidFill>
-                <a:srgbClr val="000000"/>
-              </a:solidFill>
-              <a:effectLst/>
-              <a:uFillTx/>
-              <a:latin typeface="Arial"/>
-            </a:endParaRPr>
-          </a:p>
-        </p:txBody>
-      </p:sp>
-      <p:pic>
-        <p:nvPicPr>
-          <p:cNvPr id="68" name="" descr=""/>
-          <p:cNvPicPr/>
-          <p:nvPr/>
-        </p:nvPicPr>
-        <p:blipFill>
-          <a:blip r:embed="rId1"/>
-          <a:stretch/>
-        </p:blipFill>
-        <p:spPr>
-          <a:xfrm>
-            <a:off x="3012120" y="360000"/>
-            <a:ext cx="3210120" cy="4625640"/>
-          </a:xfrm>
-          <a:prstGeom prst="rect">
-            <a:avLst/>
-          </a:prstGeom>
-          <a:noFill/>
-          <a:ln w="0">
-            <a:noFill/>
-          </a:ln>
-        </p:spPr>
-      </p:pic>
-    </p:spTree>
-  </p:cSld>
-  <mc:AlternateContent>
-    <mc:Choice Requires="p14">
-      <p:transition spd="slow" p14:dur="2000"/>
-    </mc:Choice>
-    <mc:Fallback>
-      <p:transition spd="slow"/>
-    </mc:Fallback>
-  </mc:AlternateContent>
-</p:sld>
-</file>
-
-<file path=ppt/slides/slide13.xml><?xml version="1.0" encoding="utf-8"?>
-<p:sld xmlns:a="http://schemas.openxmlformats.org/drawingml/2006/main" xmlns:p="http://schemas.openxmlformats.org/presentationml/2006/main" xmlns:r="http://schemas.openxmlformats.org/officeDocument/2006/relationships" xmlns:p14="http://schemas.microsoft.com/office/powerpoint/2010/main" xmlns:p15="http://schemas.microsoft.com/office/powerpoint/2012/main" xmlns:mc="http://schemas.openxmlformats.org/markup-compatibility/2006">
-  <p:cSld>
-    <p:spTree>
-      <p:nvGrpSpPr>
-        <p:cNvPr id="1" name=""/>
-        <p:cNvGrpSpPr/>
-        <p:nvPr/>
-      </p:nvGrpSpPr>
-      <p:grpSpPr>
-        <a:xfrm>
-          <a:off x="0" y="0"/>
-          <a:ext cx="0" cy="0"/>
-          <a:chOff x="0" y="0"/>
-          <a:chExt cx="0" cy="0"/>
-        </a:xfrm>
-      </p:grpSpPr>
-      <p:sp>
-        <p:nvSpPr>
-          <p:cNvPr id="69" name=""/>
-          <p:cNvSpPr txBox="1"/>
-          <p:nvPr/>
-        </p:nvSpPr>
-        <p:spPr>
-          <a:xfrm>
-            <a:off x="360000" y="360000"/>
-            <a:ext cx="2880000" cy="360000"/>
-          </a:xfrm>
-          <a:prstGeom prst="rect">
-            <a:avLst/>
-          </a:prstGeom>
-          <a:noFill/>
-          <a:ln w="0">
-            <a:noFill/>
-          </a:ln>
-        </p:spPr>
-        <p:txBody>
-          <a:bodyPr lIns="90000" rIns="90000" tIns="45000" bIns="45000" anchor="t">
-            <a:spAutoFit/>
-          </a:bodyPr>
-          <a:p>
-            <a:r>
-              <a:rPr b="1" lang="pt-PT" sz="1800" strike="noStrike" u="none">
-                <a:solidFill>
-                  <a:schemeClr val="dk1"/>
-                </a:solidFill>
-                <a:effectLst/>
-                <a:uFillTx/>
-                <a:latin typeface="Arial"/>
-                <a:ea typeface="Arial"/>
-              </a:rPr>
-              <a:t>Arquitetura de Software</a:t>
-            </a:r>
-            <a:endParaRPr b="0" lang="pt-PT" sz="1800" strike="noStrike" u="none">
-              <a:solidFill>
-                <a:srgbClr val="000000"/>
-              </a:solidFill>
-              <a:effectLst/>
-              <a:uFillTx/>
-              <a:latin typeface="Arial"/>
-            </a:endParaRPr>
-          </a:p>
-        </p:txBody>
-      </p:sp>
-      <p:pic>
-        <p:nvPicPr>
-          <p:cNvPr id="70" name="" descr=""/>
-          <p:cNvPicPr/>
-          <p:nvPr/>
-        </p:nvPicPr>
-        <p:blipFill>
-          <a:blip r:embed="rId1"/>
-          <a:stretch/>
-        </p:blipFill>
-        <p:spPr>
-          <a:xfrm>
-            <a:off x="3302280" y="54360"/>
-            <a:ext cx="2630160" cy="4985640"/>
-          </a:xfrm>
-          <a:prstGeom prst="rect">
-            <a:avLst/>
-          </a:prstGeom>
-          <a:noFill/>
-          <a:ln w="0">
-            <a:noFill/>
-          </a:ln>
-        </p:spPr>
-      </p:pic>
-    </p:spTree>
-  </p:cSld>
-  <mc:AlternateContent>
-    <mc:Choice Requires="p14">
-      <p:transition spd="slow" p14:dur="2000"/>
-    </mc:Choice>
-    <mc:Fallback>
-      <p:transition spd="slow"/>
-    </mc:Fallback>
-  </mc:AlternateContent>
-</p:sld>
-</file>
-
-<file path=ppt/slides/slide14.xml><?xml version="1.0" encoding="utf-8"?>
-<p:sld xmlns:a="http://schemas.openxmlformats.org/drawingml/2006/main" xmlns:p="http://schemas.openxmlformats.org/presentationml/2006/main" xmlns:r="http://schemas.openxmlformats.org/officeDocument/2006/relationships" xmlns:p14="http://schemas.microsoft.com/office/powerpoint/2010/main" xmlns:p15="http://schemas.microsoft.com/office/powerpoint/2012/main" xmlns:mc="http://schemas.openxmlformats.org/markup-compatibility/2006">
-  <p:cSld>
-    <p:spTree>
-      <p:nvGrpSpPr>
-        <p:cNvPr id="1" name=""/>
-        <p:cNvGrpSpPr/>
-        <p:nvPr/>
-      </p:nvGrpSpPr>
-      <p:grpSpPr>
-        <a:xfrm>
-          <a:off x="0" y="0"/>
-          <a:ext cx="0" cy="0"/>
-          <a:chOff x="0" y="0"/>
-          <a:chExt cx="0" cy="0"/>
-        </a:xfrm>
-      </p:grpSpPr>
-      <p:sp>
-        <p:nvSpPr>
-          <p:cNvPr id="71" name=""/>
-          <p:cNvSpPr txBox="1"/>
-          <p:nvPr/>
-        </p:nvSpPr>
-        <p:spPr>
-          <a:xfrm>
-            <a:off x="360000" y="360000"/>
-            <a:ext cx="2124000" cy="346680"/>
-          </a:xfrm>
-          <a:prstGeom prst="rect">
-            <a:avLst/>
-          </a:prstGeom>
-          <a:noFill/>
-          <a:ln w="0">
-            <a:noFill/>
-          </a:ln>
-        </p:spPr>
-        <p:txBody>
-          <a:bodyPr lIns="90000" rIns="90000" tIns="45000" bIns="45000" anchor="t">
-            <a:spAutoFit/>
-          </a:bodyPr>
-          <a:p>
-            <a:r>
-              <a:rPr b="1" lang="pt-PT" sz="1800" strike="noStrike" u="none">
-                <a:solidFill>
-                  <a:schemeClr val="dk1"/>
-                </a:solidFill>
-                <a:effectLst/>
-                <a:uFillTx/>
-                <a:latin typeface="Arial"/>
-                <a:ea typeface="Arial"/>
-              </a:rPr>
-              <a:t>Arquitetura Física</a:t>
-            </a:r>
-            <a:endParaRPr b="0" lang="pt-PT" sz="1800" strike="noStrike" u="none">
-              <a:solidFill>
-                <a:srgbClr val="000000"/>
-              </a:solidFill>
-              <a:effectLst/>
-              <a:uFillTx/>
-              <a:latin typeface="Arial"/>
-            </a:endParaRPr>
-          </a:p>
-        </p:txBody>
-      </p:sp>
-      <p:pic>
-        <p:nvPicPr>
-          <p:cNvPr id="72" name="" descr=""/>
-          <p:cNvPicPr/>
-          <p:nvPr/>
-        </p:nvPicPr>
-        <p:blipFill>
-          <a:blip r:embed="rId1"/>
-          <a:stretch/>
-        </p:blipFill>
-        <p:spPr>
-          <a:xfrm>
-            <a:off x="2102760" y="900000"/>
-            <a:ext cx="5028840" cy="3600000"/>
-          </a:xfrm>
-          <a:prstGeom prst="rect">
-            <a:avLst/>
-          </a:prstGeom>
-          <a:noFill/>
-          <a:ln w="0">
-            <a:noFill/>
-          </a:ln>
-        </p:spPr>
-      </p:pic>
-    </p:spTree>
-  </p:cSld>
-  <mc:AlternateContent>
-    <mc:Choice Requires="p14">
-      <p:transition spd="slow" p14:dur="2000"/>
-    </mc:Choice>
-    <mc:Fallback>
-      <p:transition spd="slow"/>
-    </mc:Fallback>
-  </mc:AlternateContent>
-</p:sld>
-</file>
-
-<file path=ppt/slides/slide15.xml><?xml version="1.0" encoding="utf-8"?>
-<p:sld xmlns:a="http://schemas.openxmlformats.org/drawingml/2006/main" xmlns:p="http://schemas.openxmlformats.org/presentationml/2006/main" xmlns:r="http://schemas.openxmlformats.org/officeDocument/2006/relationships" xmlns:p14="http://schemas.microsoft.com/office/powerpoint/2010/main" xmlns:p15="http://schemas.microsoft.com/office/powerpoint/2012/main" xmlns:mc="http://schemas.openxmlformats.org/markup-compatibility/2006">
+<p:sld xmlns:a="http://schemas.openxmlformats.org/drawingml/2006/main" xmlns:r="http://schemas.openxmlformats.org/officeDocument/2006/relationships" xmlns:p="http://schemas.openxmlformats.org/presentationml/2006/main">
   <p:cSld>
     <p:spTree>
       <p:nvGrpSpPr>
@@ -5330,26 +4833,33 @@
           </a:ln>
         </p:spPr>
         <p:style>
-          <a:lnRef idx="0"/>
-          <a:fillRef idx="0"/>
-          <a:effectRef idx="0"/>
+          <a:lnRef idx="0">
+            <a:scrgbClr r="0" g="0" b="0"/>
+          </a:lnRef>
+          <a:fillRef idx="0">
+            <a:scrgbClr r="0" g="0" b="0"/>
+          </a:fillRef>
+          <a:effectRef idx="0">
+            <a:scrgbClr r="0" g="0" b="0"/>
+          </a:effectRef>
           <a:fontRef idx="minor"/>
         </p:style>
         <p:txBody>
-          <a:bodyPr lIns="90000" rIns="90000" tIns="91440" bIns="91440" anchor="t">
+          <a:bodyPr lIns="90000" tIns="91440" rIns="90000" bIns="91440" anchor="t">
             <a:spAutoFit/>
           </a:bodyPr>
+          <a:lstStyle/>
           <a:p>
             <a:pPr defTabSz="914400">
               <a:lnSpc>
                 <a:spcPct val="100000"/>
               </a:lnSpc>
               <a:tabLst>
-                <a:tab algn="l" pos="0"/>
+                <a:tab pos="0" algn="l"/>
               </a:tabLst>
             </a:pPr>
             <a:r>
-              <a:rPr b="1" lang="pt-PT" sz="1800" strike="noStrike" u="none">
+              <a:rPr lang="pt-PT" sz="1800" b="1" u="none" strike="noStrike">
                 <a:solidFill>
                   <a:schemeClr val="dk1"/>
                 </a:solidFill>
@@ -5360,7 +4870,7 @@
               </a:rPr>
               <a:t>Diagrama de Caso de Uso</a:t>
             </a:r>
-            <a:endParaRPr b="0" lang="pt-PT" sz="1800" strike="noStrike" u="none">
+            <a:endParaRPr lang="pt-PT" sz="1800" b="0" u="none" strike="noStrike">
               <a:solidFill>
                 <a:srgbClr val="000000"/>
               </a:solidFill>
@@ -5373,12 +4883,12 @@
       </p:sp>
       <p:pic>
         <p:nvPicPr>
-          <p:cNvPr id="74" name="" descr=""/>
+          <p:cNvPr id="74" name="Imagem 73"/>
           <p:cNvPicPr/>
           <p:nvPr/>
         </p:nvPicPr>
         <p:blipFill>
-          <a:blip r:embed="rId1"/>
+          <a:blip r:embed="rId2"/>
           <a:stretch/>
         </p:blipFill>
         <p:spPr>
@@ -5397,19 +4907,14 @@
       </p:pic>
     </p:spTree>
   </p:cSld>
-  <mc:AlternateContent>
-    <mc:Choice Requires="p14">
-      <p:transition spd="slow" p14:dur="2000"/>
-    </mc:Choice>
-    <mc:Fallback>
-      <p:transition spd="slow"/>
-    </mc:Fallback>
-  </mc:AlternateContent>
+  <p:clrMapOvr>
+    <a:masterClrMapping/>
+  </p:clrMapOvr>
 </p:sld>
 </file>
 
-<file path=ppt/slides/slide16.xml><?xml version="1.0" encoding="utf-8"?>
-<p:sld xmlns:a="http://schemas.openxmlformats.org/drawingml/2006/main" xmlns:p="http://schemas.openxmlformats.org/presentationml/2006/main" xmlns:r="http://schemas.openxmlformats.org/officeDocument/2006/relationships" xmlns:p14="http://schemas.microsoft.com/office/powerpoint/2010/main" xmlns:p15="http://schemas.microsoft.com/office/powerpoint/2012/main" xmlns:mc="http://schemas.openxmlformats.org/markup-compatibility/2006">
+<file path=ppt/slides/slide12.xml><?xml version="1.0" encoding="utf-8"?>
+<p:sld xmlns:a="http://schemas.openxmlformats.org/drawingml/2006/main" xmlns:r="http://schemas.openxmlformats.org/officeDocument/2006/relationships" xmlns:p="http://schemas.openxmlformats.org/presentationml/2006/main">
   <p:cSld>
     <p:spTree>
       <p:nvGrpSpPr>
@@ -5445,26 +4950,33 @@
           </a:ln>
         </p:spPr>
         <p:style>
-          <a:lnRef idx="0"/>
-          <a:fillRef idx="0"/>
-          <a:effectRef idx="0"/>
+          <a:lnRef idx="0">
+            <a:scrgbClr r="0" g="0" b="0"/>
+          </a:lnRef>
+          <a:fillRef idx="0">
+            <a:scrgbClr r="0" g="0" b="0"/>
+          </a:fillRef>
+          <a:effectRef idx="0">
+            <a:scrgbClr r="0" g="0" b="0"/>
+          </a:effectRef>
           <a:fontRef idx="minor"/>
         </p:style>
         <p:txBody>
-          <a:bodyPr lIns="90000" rIns="90000" tIns="91440" bIns="91440" anchor="t">
+          <a:bodyPr lIns="90000" tIns="91440" rIns="90000" bIns="91440" anchor="t">
             <a:noAutofit/>
           </a:bodyPr>
+          <a:lstStyle/>
           <a:p>
             <a:pPr defTabSz="914400">
               <a:lnSpc>
                 <a:spcPct val="100000"/>
               </a:lnSpc>
               <a:tabLst>
-                <a:tab algn="l" pos="0"/>
+                <a:tab pos="0" algn="l"/>
               </a:tabLst>
             </a:pPr>
             <a:r>
-              <a:rPr b="1" lang="pt-PT" sz="1800" strike="noStrike" u="none">
+              <a:rPr lang="pt-PT" sz="1800" b="1" u="none" strike="noStrike">
                 <a:solidFill>
                   <a:schemeClr val="dk1"/>
                 </a:solidFill>
@@ -5475,7 +4987,7 @@
               </a:rPr>
               <a:t>DER</a:t>
             </a:r>
-            <a:endParaRPr b="0" lang="pt-PT" sz="1800" strike="noStrike" u="none">
+            <a:endParaRPr lang="pt-PT" sz="1800" b="0" u="none" strike="noStrike">
               <a:solidFill>
                 <a:srgbClr val="000000"/>
               </a:solidFill>
@@ -5493,7 +5005,7 @@
           <p:nvPr/>
         </p:nvPicPr>
         <p:blipFill>
-          <a:blip r:embed="rId1"/>
+          <a:blip r:embed="rId2"/>
           <a:stretch/>
         </p:blipFill>
         <p:spPr>
@@ -5512,19 +5024,305 @@
       </p:pic>
     </p:spTree>
   </p:cSld>
-  <mc:AlternateContent>
-    <mc:Choice Requires="p14">
-      <p:transition spd="slow" p14:dur="2000"/>
-    </mc:Choice>
-    <mc:Fallback>
-      <p:transition spd="slow"/>
-    </mc:Fallback>
-  </mc:AlternateContent>
+  <p:clrMapOvr>
+    <a:masterClrMapping/>
+  </p:clrMapOvr>
 </p:sld>
 </file>
 
-<file path=ppt/slides/slide17.xml><?xml version="1.0" encoding="utf-8"?>
-<p:sld xmlns:a="http://schemas.openxmlformats.org/drawingml/2006/main" xmlns:p="http://schemas.openxmlformats.org/presentationml/2006/main" xmlns:r="http://schemas.openxmlformats.org/officeDocument/2006/relationships" xmlns:p14="http://schemas.microsoft.com/office/powerpoint/2010/main" xmlns:p15="http://schemas.microsoft.com/office/powerpoint/2012/main" xmlns:mc="http://schemas.openxmlformats.org/markup-compatibility/2006">
+<file path=ppt/slides/slide13.xml><?xml version="1.0" encoding="utf-8"?>
+<p:sld xmlns:a="http://schemas.openxmlformats.org/drawingml/2006/main" xmlns:r="http://schemas.openxmlformats.org/officeDocument/2006/relationships" xmlns:p="http://schemas.openxmlformats.org/presentationml/2006/main">
+  <p:cSld>
+    <p:spTree>
+      <p:nvGrpSpPr>
+        <p:cNvPr id="1" name=""/>
+        <p:cNvGrpSpPr/>
+        <p:nvPr/>
+      </p:nvGrpSpPr>
+      <p:grpSpPr>
+        <a:xfrm>
+          <a:off x="0" y="0"/>
+          <a:ext cx="0" cy="0"/>
+          <a:chOff x="0" y="0"/>
+          <a:chExt cx="0" cy="0"/>
+        </a:xfrm>
+      </p:grpSpPr>
+      <p:sp>
+        <p:nvSpPr>
+          <p:cNvPr id="67" name="CaixaDeTexto 66"/>
+          <p:cNvSpPr txBox="1"/>
+          <p:nvPr/>
+        </p:nvSpPr>
+        <p:spPr>
+          <a:xfrm>
+            <a:off x="360000" y="360000"/>
+            <a:ext cx="2340000" cy="360000"/>
+          </a:xfrm>
+          <a:prstGeom prst="rect">
+            <a:avLst/>
+          </a:prstGeom>
+          <a:noFill/>
+          <a:ln w="0">
+            <a:noFill/>
+          </a:ln>
+        </p:spPr>
+        <p:txBody>
+          <a:bodyPr lIns="90000" tIns="45000" rIns="90000" bIns="45000" anchor="t">
+            <a:spAutoFit/>
+          </a:bodyPr>
+          <a:lstStyle/>
+          <a:p>
+            <a:r>
+              <a:rPr lang="pt-PT" sz="1800" b="1" u="none" strike="noStrike">
+                <a:solidFill>
+                  <a:schemeClr val="dk1"/>
+                </a:solidFill>
+                <a:effectLst/>
+                <a:uFillTx/>
+                <a:latin typeface="Arial"/>
+                <a:ea typeface="Arial"/>
+              </a:rPr>
+              <a:t>Arquitetura Lógica</a:t>
+            </a:r>
+            <a:endParaRPr lang="pt-PT" sz="1800" b="0" u="none" strike="noStrike">
+              <a:solidFill>
+                <a:srgbClr val="000000"/>
+              </a:solidFill>
+              <a:effectLst/>
+              <a:uFillTx/>
+              <a:latin typeface="Arial"/>
+            </a:endParaRPr>
+          </a:p>
+        </p:txBody>
+      </p:sp>
+      <p:pic>
+        <p:nvPicPr>
+          <p:cNvPr id="68" name="Imagem 67"/>
+          <p:cNvPicPr/>
+          <p:nvPr/>
+        </p:nvPicPr>
+        <p:blipFill>
+          <a:blip r:embed="rId2"/>
+          <a:stretch/>
+        </p:blipFill>
+        <p:spPr>
+          <a:xfrm>
+            <a:off x="3012120" y="360000"/>
+            <a:ext cx="3210120" cy="4625640"/>
+          </a:xfrm>
+          <a:prstGeom prst="rect">
+            <a:avLst/>
+          </a:prstGeom>
+          <a:noFill/>
+          <a:ln w="0">
+            <a:noFill/>
+          </a:ln>
+        </p:spPr>
+      </p:pic>
+    </p:spTree>
+  </p:cSld>
+  <p:clrMapOvr>
+    <a:masterClrMapping/>
+  </p:clrMapOvr>
+</p:sld>
+</file>
+
+<file path=ppt/slides/slide14.xml><?xml version="1.0" encoding="utf-8"?>
+<p:sld xmlns:a="http://schemas.openxmlformats.org/drawingml/2006/main" xmlns:r="http://schemas.openxmlformats.org/officeDocument/2006/relationships" xmlns:p="http://schemas.openxmlformats.org/presentationml/2006/main">
+  <p:cSld>
+    <p:spTree>
+      <p:nvGrpSpPr>
+        <p:cNvPr id="1" name=""/>
+        <p:cNvGrpSpPr/>
+        <p:nvPr/>
+      </p:nvGrpSpPr>
+      <p:grpSpPr>
+        <a:xfrm>
+          <a:off x="0" y="0"/>
+          <a:ext cx="0" cy="0"/>
+          <a:chOff x="0" y="0"/>
+          <a:chExt cx="0" cy="0"/>
+        </a:xfrm>
+      </p:grpSpPr>
+      <p:sp>
+        <p:nvSpPr>
+          <p:cNvPr id="69" name="CaixaDeTexto 68"/>
+          <p:cNvSpPr txBox="1"/>
+          <p:nvPr/>
+        </p:nvSpPr>
+        <p:spPr>
+          <a:xfrm>
+            <a:off x="360000" y="360000"/>
+            <a:ext cx="2880000" cy="360000"/>
+          </a:xfrm>
+          <a:prstGeom prst="rect">
+            <a:avLst/>
+          </a:prstGeom>
+          <a:noFill/>
+          <a:ln w="0">
+            <a:noFill/>
+          </a:ln>
+        </p:spPr>
+        <p:txBody>
+          <a:bodyPr lIns="90000" tIns="45000" rIns="90000" bIns="45000" anchor="t">
+            <a:spAutoFit/>
+          </a:bodyPr>
+          <a:lstStyle/>
+          <a:p>
+            <a:r>
+              <a:rPr lang="pt-PT" sz="1800" b="1" u="none" strike="noStrike">
+                <a:solidFill>
+                  <a:schemeClr val="dk1"/>
+                </a:solidFill>
+                <a:effectLst/>
+                <a:uFillTx/>
+                <a:latin typeface="Arial"/>
+                <a:ea typeface="Arial"/>
+              </a:rPr>
+              <a:t>Arquitetura de Software</a:t>
+            </a:r>
+            <a:endParaRPr lang="pt-PT" sz="1800" b="0" u="none" strike="noStrike">
+              <a:solidFill>
+                <a:srgbClr val="000000"/>
+              </a:solidFill>
+              <a:effectLst/>
+              <a:uFillTx/>
+              <a:latin typeface="Arial"/>
+            </a:endParaRPr>
+          </a:p>
+        </p:txBody>
+      </p:sp>
+      <p:pic>
+        <p:nvPicPr>
+          <p:cNvPr id="70" name="Imagem 69"/>
+          <p:cNvPicPr/>
+          <p:nvPr/>
+        </p:nvPicPr>
+        <p:blipFill>
+          <a:blip r:embed="rId2"/>
+          <a:stretch/>
+        </p:blipFill>
+        <p:spPr>
+          <a:xfrm>
+            <a:off x="3302280" y="54360"/>
+            <a:ext cx="2630160" cy="4985640"/>
+          </a:xfrm>
+          <a:prstGeom prst="rect">
+            <a:avLst/>
+          </a:prstGeom>
+          <a:noFill/>
+          <a:ln w="0">
+            <a:noFill/>
+          </a:ln>
+        </p:spPr>
+      </p:pic>
+    </p:spTree>
+  </p:cSld>
+  <p:clrMapOvr>
+    <a:masterClrMapping/>
+  </p:clrMapOvr>
+</p:sld>
+</file>
+
+<file path=ppt/slides/slide15.xml><?xml version="1.0" encoding="utf-8"?>
+<p:sld xmlns:a="http://schemas.openxmlformats.org/drawingml/2006/main" xmlns:r="http://schemas.openxmlformats.org/officeDocument/2006/relationships" xmlns:p="http://schemas.openxmlformats.org/presentationml/2006/main">
+  <p:cSld>
+    <p:spTree>
+      <p:nvGrpSpPr>
+        <p:cNvPr id="1" name=""/>
+        <p:cNvGrpSpPr/>
+        <p:nvPr/>
+      </p:nvGrpSpPr>
+      <p:grpSpPr>
+        <a:xfrm>
+          <a:off x="0" y="0"/>
+          <a:ext cx="0" cy="0"/>
+          <a:chOff x="0" y="0"/>
+          <a:chExt cx="0" cy="0"/>
+        </a:xfrm>
+      </p:grpSpPr>
+      <p:sp>
+        <p:nvSpPr>
+          <p:cNvPr id="71" name="CaixaDeTexto 70"/>
+          <p:cNvSpPr txBox="1"/>
+          <p:nvPr/>
+        </p:nvSpPr>
+        <p:spPr>
+          <a:xfrm>
+            <a:off x="360000" y="360000"/>
+            <a:ext cx="2124000" cy="346680"/>
+          </a:xfrm>
+          <a:prstGeom prst="rect">
+            <a:avLst/>
+          </a:prstGeom>
+          <a:noFill/>
+          <a:ln w="0">
+            <a:noFill/>
+          </a:ln>
+        </p:spPr>
+        <p:txBody>
+          <a:bodyPr lIns="90000" tIns="45000" rIns="90000" bIns="45000" anchor="t">
+            <a:spAutoFit/>
+          </a:bodyPr>
+          <a:lstStyle/>
+          <a:p>
+            <a:r>
+              <a:rPr lang="pt-PT" sz="1800" b="1" u="none" strike="noStrike">
+                <a:solidFill>
+                  <a:schemeClr val="dk1"/>
+                </a:solidFill>
+                <a:effectLst/>
+                <a:uFillTx/>
+                <a:latin typeface="Arial"/>
+                <a:ea typeface="Arial"/>
+              </a:rPr>
+              <a:t>Arquitetura Física</a:t>
+            </a:r>
+            <a:endParaRPr lang="pt-PT" sz="1800" b="0" u="none" strike="noStrike">
+              <a:solidFill>
+                <a:srgbClr val="000000"/>
+              </a:solidFill>
+              <a:effectLst/>
+              <a:uFillTx/>
+              <a:latin typeface="Arial"/>
+            </a:endParaRPr>
+          </a:p>
+        </p:txBody>
+      </p:sp>
+      <p:pic>
+        <p:nvPicPr>
+          <p:cNvPr id="72" name="Imagem 71"/>
+          <p:cNvPicPr/>
+          <p:nvPr/>
+        </p:nvPicPr>
+        <p:blipFill>
+          <a:blip r:embed="rId2"/>
+          <a:stretch/>
+        </p:blipFill>
+        <p:spPr>
+          <a:xfrm>
+            <a:off x="2102760" y="900000"/>
+            <a:ext cx="5028840" cy="3600000"/>
+          </a:xfrm>
+          <a:prstGeom prst="rect">
+            <a:avLst/>
+          </a:prstGeom>
+          <a:noFill/>
+          <a:ln w="0">
+            <a:noFill/>
+          </a:ln>
+        </p:spPr>
+      </p:pic>
+    </p:spTree>
+  </p:cSld>
+  <p:clrMapOvr>
+    <a:masterClrMapping/>
+  </p:clrMapOvr>
+</p:sld>
+</file>
+
+<file path=ppt/slides/slide16.xml><?xml version="1.0" encoding="utf-8"?>
+<p:sld xmlns:a="http://schemas.openxmlformats.org/drawingml/2006/main" xmlns:r="http://schemas.openxmlformats.org/officeDocument/2006/relationships" xmlns:p="http://schemas.openxmlformats.org/presentationml/2006/main">
   <p:cSld>
     <p:spTree>
       <p:nvGrpSpPr>
@@ -5560,26 +5358,33 @@
           </a:ln>
         </p:spPr>
         <p:style>
-          <a:lnRef idx="0"/>
-          <a:fillRef idx="0"/>
-          <a:effectRef idx="0"/>
+          <a:lnRef idx="0">
+            <a:scrgbClr r="0" g="0" b="0"/>
+          </a:lnRef>
+          <a:fillRef idx="0">
+            <a:scrgbClr r="0" g="0" b="0"/>
+          </a:fillRef>
+          <a:effectRef idx="0">
+            <a:scrgbClr r="0" g="0" b="0"/>
+          </a:effectRef>
           <a:fontRef idx="minor"/>
         </p:style>
         <p:txBody>
-          <a:bodyPr lIns="90000" rIns="90000" tIns="91440" bIns="91440" anchor="t">
+          <a:bodyPr lIns="90000" tIns="91440" rIns="90000" bIns="91440" anchor="t">
             <a:spAutoFit/>
           </a:bodyPr>
+          <a:lstStyle/>
           <a:p>
             <a:pPr defTabSz="914400">
               <a:lnSpc>
                 <a:spcPct val="100000"/>
               </a:lnSpc>
               <a:tabLst>
-                <a:tab algn="l" pos="0"/>
+                <a:tab pos="0" algn="l"/>
               </a:tabLst>
             </a:pPr>
             <a:r>
-              <a:rPr b="1" lang="pt-PT" sz="1800" strike="noStrike" u="none">
+              <a:rPr lang="pt-PT" sz="1800" b="1" u="none" strike="noStrike">
                 <a:solidFill>
                   <a:schemeClr val="dk1"/>
                 </a:solidFill>
@@ -5590,7 +5395,7 @@
               </a:rPr>
               <a:t>Conclusão</a:t>
             </a:r>
-            <a:endParaRPr b="0" lang="pt-PT" sz="1800" strike="noStrike" u="none">
+            <a:endParaRPr lang="pt-PT" sz="1800" b="0" u="none" strike="noStrike">
               <a:solidFill>
                 <a:srgbClr val="000000"/>
               </a:solidFill>
@@ -5621,15 +5426,22 @@
           </a:ln>
         </p:spPr>
         <p:style>
-          <a:lnRef idx="0"/>
-          <a:fillRef idx="0"/>
-          <a:effectRef idx="0"/>
+          <a:lnRef idx="0">
+            <a:scrgbClr r="0" g="0" b="0"/>
+          </a:lnRef>
+          <a:fillRef idx="0">
+            <a:scrgbClr r="0" g="0" b="0"/>
+          </a:fillRef>
+          <a:effectRef idx="0">
+            <a:scrgbClr r="0" g="0" b="0"/>
+          </a:effectRef>
           <a:fontRef idx="minor"/>
         </p:style>
         <p:txBody>
-          <a:bodyPr lIns="90000" rIns="90000" tIns="91440" bIns="91440" anchor="t">
+          <a:bodyPr lIns="90000" tIns="91440" rIns="90000" bIns="91440" anchor="t">
             <a:noAutofit/>
           </a:bodyPr>
+          <a:lstStyle/>
           <a:p>
             <a:pPr defTabSz="914400">
               <a:lnSpc>
@@ -5639,11 +5451,11 @@
                 <a:spcPts val="1199"/>
               </a:spcBef>
               <a:tabLst>
-                <a:tab algn="l" pos="0"/>
+                <a:tab pos="0" algn="l"/>
               </a:tabLst>
             </a:pPr>
             <a:r>
-              <a:rPr b="0" lang="pt-PT" sz="1400" strike="noStrike" u="none">
+              <a:rPr lang="pt-PT" sz="1400" b="0" u="none" strike="noStrike">
                 <a:solidFill>
                   <a:schemeClr val="dk1"/>
                 </a:solidFill>
@@ -5654,7 +5466,7 @@
               </a:rPr>
               <a:t>A implementação do Sistema Integrado de Gestão e Processamento de Pagamentos representa um avanço significativo para o Colégio Mona Tower. O sistema reduz erros, melhora a eficiência dos processos, aumenta a transparência e facilita o acesso às informações financeiras.</a:t>
             </a:r>
-            <a:endParaRPr b="0" lang="pt-PT" sz="1400" strike="noStrike" u="none">
+            <a:endParaRPr lang="pt-PT" sz="1400" b="0" u="none" strike="noStrike">
               <a:solidFill>
                 <a:srgbClr val="000000"/>
               </a:solidFill>
@@ -5667,110 +5479,14 @@
       </p:sp>
     </p:spTree>
   </p:cSld>
-  <mc:AlternateContent>
-    <mc:Choice Requires="p14">
-      <p:transition spd="slow" p14:dur="2000"/>
-    </mc:Choice>
-    <mc:Fallback>
-      <p:transition spd="slow"/>
-    </mc:Fallback>
-  </mc:AlternateContent>
-</p:sld>
-</file>
-
-<file path=ppt/slides/slide18.xml><?xml version="1.0" encoding="utf-8"?>
-<p:sld xmlns:a="http://schemas.openxmlformats.org/drawingml/2006/main" xmlns:p="http://schemas.openxmlformats.org/presentationml/2006/main" xmlns:r="http://schemas.openxmlformats.org/officeDocument/2006/relationships" xmlns:p14="http://schemas.microsoft.com/office/powerpoint/2010/main" xmlns:p15="http://schemas.microsoft.com/office/powerpoint/2012/main" xmlns:mc="http://schemas.openxmlformats.org/markup-compatibility/2006">
-  <p:cSld>
-    <p:spTree>
-      <p:nvGrpSpPr>
-        <p:cNvPr id="1" name=""/>
-        <p:cNvGrpSpPr/>
-        <p:nvPr/>
-      </p:nvGrpSpPr>
-      <p:grpSpPr>
-        <a:xfrm>
-          <a:off x="0" y="0"/>
-          <a:ext cx="0" cy="0"/>
-          <a:chOff x="0" y="0"/>
-          <a:chExt cx="0" cy="0"/>
-        </a:xfrm>
-      </p:grpSpPr>
-      <p:sp>
-        <p:nvSpPr>
-          <p:cNvPr id="79" name="Google Shape;150;p27"/>
-          <p:cNvSpPr/>
-          <p:nvPr/>
-        </p:nvSpPr>
-        <p:spPr>
-          <a:xfrm>
-            <a:off x="3594960" y="2210040"/>
-            <a:ext cx="1950120" cy="716760"/>
-          </a:xfrm>
-          <a:prstGeom prst="rect">
-            <a:avLst/>
-          </a:prstGeom>
-          <a:noFill/>
-          <a:ln w="0">
-            <a:noFill/>
-          </a:ln>
-        </p:spPr>
-        <p:style>
-          <a:lnRef idx="0"/>
-          <a:fillRef idx="0"/>
-          <a:effectRef idx="0"/>
-          <a:fontRef idx="minor"/>
-        </p:style>
-        <p:txBody>
-          <a:bodyPr lIns="90000" rIns="90000" tIns="91440" bIns="91440" anchor="t">
-            <a:spAutoFit/>
-          </a:bodyPr>
-          <a:p>
-            <a:pPr algn="ctr" defTabSz="914400">
-              <a:lnSpc>
-                <a:spcPct val="100000"/>
-              </a:lnSpc>
-              <a:tabLst>
-                <a:tab algn="l" pos="0"/>
-              </a:tabLst>
-            </a:pPr>
-            <a:r>
-              <a:rPr b="1" lang="pt-PT" sz="3500" strike="noStrike" u="none">
-                <a:solidFill>
-                  <a:schemeClr val="dk1"/>
-                </a:solidFill>
-                <a:effectLst/>
-                <a:uFillTx/>
-                <a:latin typeface="Arial"/>
-                <a:ea typeface="Arial"/>
-              </a:rPr>
-              <a:t>Fim</a:t>
-            </a:r>
-            <a:endParaRPr b="0" lang="pt-PT" sz="3500" strike="noStrike" u="none">
-              <a:solidFill>
-                <a:srgbClr val="000000"/>
-              </a:solidFill>
-              <a:effectLst/>
-              <a:uFillTx/>
-              <a:latin typeface="Arial"/>
-            </a:endParaRPr>
-          </a:p>
-        </p:txBody>
-      </p:sp>
-    </p:spTree>
-  </p:cSld>
-  <mc:AlternateContent>
-    <mc:Choice Requires="p14">
-      <p:transition spd="slow" p14:dur="2000"/>
-    </mc:Choice>
-    <mc:Fallback>
-      <p:transition spd="slow"/>
-    </mc:Fallback>
-  </mc:AlternateContent>
+  <p:clrMapOvr>
+    <a:masterClrMapping/>
+  </p:clrMapOvr>
 </p:sld>
 </file>
 
 <file path=ppt/slides/slide2.xml><?xml version="1.0" encoding="utf-8"?>
-<p:sld xmlns:a="http://schemas.openxmlformats.org/drawingml/2006/main" xmlns:p="http://schemas.openxmlformats.org/presentationml/2006/main" xmlns:r="http://schemas.openxmlformats.org/officeDocument/2006/relationships" xmlns:p14="http://schemas.microsoft.com/office/powerpoint/2010/main" xmlns:p15="http://schemas.microsoft.com/office/powerpoint/2012/main" xmlns:mc="http://schemas.openxmlformats.org/markup-compatibility/2006">
+<p:sld xmlns:a="http://schemas.openxmlformats.org/drawingml/2006/main" xmlns:r="http://schemas.openxmlformats.org/officeDocument/2006/relationships" xmlns:p="http://schemas.openxmlformats.org/presentationml/2006/main">
   <p:cSld>
     <p:spTree>
       <p:nvGrpSpPr>
@@ -5806,26 +5522,33 @@
           </a:ln>
         </p:spPr>
         <p:style>
-          <a:lnRef idx="0"/>
-          <a:fillRef idx="0"/>
-          <a:effectRef idx="0"/>
+          <a:lnRef idx="0">
+            <a:scrgbClr r="0" g="0" b="0"/>
+          </a:lnRef>
+          <a:fillRef idx="0">
+            <a:scrgbClr r="0" g="0" b="0"/>
+          </a:fillRef>
+          <a:effectRef idx="0">
+            <a:scrgbClr r="0" g="0" b="0"/>
+          </a:effectRef>
           <a:fontRef idx="minor"/>
         </p:style>
         <p:txBody>
-          <a:bodyPr lIns="90000" rIns="90000" tIns="91440" bIns="91440" anchor="t">
+          <a:bodyPr lIns="90000" tIns="91440" rIns="90000" bIns="91440" anchor="t">
             <a:noAutofit/>
           </a:bodyPr>
+          <a:lstStyle/>
           <a:p>
             <a:pPr algn="ctr" defTabSz="914400">
               <a:lnSpc>
                 <a:spcPct val="100000"/>
               </a:lnSpc>
               <a:tabLst>
-                <a:tab algn="l" pos="0"/>
+                <a:tab pos="0" algn="l"/>
               </a:tabLst>
             </a:pPr>
             <a:r>
-              <a:rPr b="1" lang="pt-PT" sz="1400" strike="noStrike" u="none">
+              <a:rPr lang="pt-PT" sz="1400" b="1" u="none" strike="noStrike">
                 <a:solidFill>
                   <a:schemeClr val="dk1"/>
                 </a:solidFill>
@@ -5836,7 +5559,7 @@
               </a:rPr>
               <a:t>Cristiano Alexandre Kamati Glória</a:t>
             </a:r>
-            <a:endParaRPr b="0" lang="pt-PT" sz="1400" strike="noStrike" u="none">
+            <a:endParaRPr lang="pt-PT" sz="1400" b="0" u="none" strike="noStrike">
               <a:solidFill>
                 <a:srgbClr val="000000"/>
               </a:solidFill>
@@ -5851,17 +5574,17 @@
                 <a:spcPct val="100000"/>
               </a:lnSpc>
               <a:tabLst>
-                <a:tab algn="l" pos="0"/>
+                <a:tab pos="0" algn="l"/>
               </a:tabLst>
             </a:pPr>
             <a:r>
-              <a:rPr b="1" lang="pt-PT" sz="1400" strike="noStrike" u="none">
+              <a:rPr lang="pt-PT" sz="1400" b="1" u="none" strike="noStrike">
                 <a:solidFill>
                   <a:schemeClr val="dk1"/>
                 </a:solidFill>
                 <a:effectLst/>
                 <a:highlight>
-                  <a:srgbClr val="ffffff"/>
+                  <a:srgbClr val="FFFFFF"/>
                 </a:highlight>
                 <a:uFillTx/>
                 <a:latin typeface="Arial"/>
@@ -5869,7 +5592,7 @@
               </a:rPr>
               <a:t> José Emanuel Rosário Preto</a:t>
             </a:r>
-            <a:endParaRPr b="0" lang="pt-PT" sz="1400" strike="noStrike" u="none">
+            <a:endParaRPr lang="pt-PT" sz="1400" b="0" u="none" strike="noStrike">
               <a:solidFill>
                 <a:srgbClr val="000000"/>
               </a:solidFill>
@@ -5900,15 +5623,22 @@
           </a:ln>
         </p:spPr>
         <p:style>
-          <a:lnRef idx="0"/>
-          <a:fillRef idx="0"/>
-          <a:effectRef idx="0"/>
+          <a:lnRef idx="0">
+            <a:scrgbClr r="0" g="0" b="0"/>
+          </a:lnRef>
+          <a:fillRef idx="0">
+            <a:scrgbClr r="0" g="0" b="0"/>
+          </a:fillRef>
+          <a:effectRef idx="0">
+            <a:scrgbClr r="0" g="0" b="0"/>
+          </a:effectRef>
           <a:fontRef idx="minor"/>
         </p:style>
         <p:txBody>
-          <a:bodyPr lIns="90000" rIns="90000" tIns="91440" bIns="91440" anchor="t">
+          <a:bodyPr lIns="90000" tIns="91440" rIns="90000" bIns="91440" anchor="t">
             <a:noAutofit/>
           </a:bodyPr>
+          <a:lstStyle/>
           <a:p>
             <a:pPr algn="ctr" defTabSz="914400">
               <a:lnSpc>
@@ -5918,10 +5648,10 @@
                 <a:spcPts val="1199"/>
               </a:spcBef>
               <a:tabLst>
-                <a:tab algn="l" pos="0"/>
+                <a:tab pos="0" algn="l"/>
               </a:tabLst>
             </a:pPr>
-            <a:endParaRPr b="0" lang="pt-PT" sz="1200" strike="noStrike" u="none">
+            <a:endParaRPr lang="pt-PT" sz="1200" b="0" u="none" strike="noStrike">
               <a:solidFill>
                 <a:srgbClr val="000000"/>
               </a:solidFill>
@@ -5942,11 +5672,11 @@
                 <a:spcPts val="99"/>
               </a:spcAft>
               <a:tabLst>
-                <a:tab algn="l" pos="0"/>
+                <a:tab pos="0" algn="l"/>
               </a:tabLst>
             </a:pPr>
             <a:r>
-              <a:rPr b="1" lang="pt-PT" sz="1200" strike="noStrike" u="none">
+              <a:rPr lang="pt-PT" sz="1200" b="1" u="none" strike="noStrike">
                 <a:solidFill>
                   <a:schemeClr val="dk1"/>
                 </a:solidFill>
@@ -5957,7 +5687,7 @@
               </a:rPr>
               <a:t>SISTEMA INTEGRADO DE GESTÃO E PROCESSAMENTO DE PAGAMENTOS PARA O COLÉGIO MONA TOWER</a:t>
             </a:r>
-            <a:endParaRPr b="0" lang="pt-PT" sz="1200" strike="noStrike" u="none">
+            <a:endParaRPr lang="pt-PT" sz="1200" b="0" u="none" strike="noStrike">
               <a:solidFill>
                 <a:srgbClr val="000000"/>
               </a:solidFill>
@@ -5988,26 +5718,33 @@
           </a:ln>
         </p:spPr>
         <p:style>
-          <a:lnRef idx="0"/>
-          <a:fillRef idx="0"/>
-          <a:effectRef idx="0"/>
+          <a:lnRef idx="0">
+            <a:scrgbClr r="0" g="0" b="0"/>
+          </a:lnRef>
+          <a:fillRef idx="0">
+            <a:scrgbClr r="0" g="0" b="0"/>
+          </a:fillRef>
+          <a:effectRef idx="0">
+            <a:scrgbClr r="0" g="0" b="0"/>
+          </a:effectRef>
           <a:fontRef idx="minor"/>
         </p:style>
         <p:txBody>
-          <a:bodyPr lIns="90000" rIns="90000" tIns="91440" bIns="91440" anchor="t">
+          <a:bodyPr lIns="90000" tIns="91440" rIns="90000" bIns="91440" anchor="t">
             <a:noAutofit/>
           </a:bodyPr>
+          <a:lstStyle/>
           <a:p>
             <a:pPr algn="ctr" defTabSz="914400">
               <a:lnSpc>
                 <a:spcPct val="100000"/>
               </a:lnSpc>
               <a:tabLst>
-                <a:tab algn="l" pos="0"/>
+                <a:tab pos="0" algn="l"/>
               </a:tabLst>
             </a:pPr>
             <a:r>
-              <a:rPr b="0" lang="pt-PT" sz="1200" strike="noStrike" u="none">
+              <a:rPr lang="pt-PT" sz="1200" b="0" u="none" strike="noStrike">
                 <a:solidFill>
                   <a:srgbClr val="000000"/>
                 </a:solidFill>
@@ -6018,7 +5755,7 @@
               </a:rPr>
               <a:t>Luanda​</a:t>
             </a:r>
-            <a:endParaRPr b="0" lang="pt-PT" sz="1200" strike="noStrike" u="none">
+            <a:endParaRPr lang="pt-PT" sz="1200" b="0" u="none" strike="noStrike">
               <a:solidFill>
                 <a:srgbClr val="000000"/>
               </a:solidFill>
@@ -6033,11 +5770,11 @@
                 <a:spcPct val="100000"/>
               </a:lnSpc>
               <a:tabLst>
-                <a:tab algn="l" pos="0"/>
+                <a:tab pos="0" algn="l"/>
               </a:tabLst>
             </a:pPr>
             <a:r>
-              <a:rPr b="0" lang="pt-PT" sz="1200" strike="noStrike" u="none">
+              <a:rPr lang="pt-PT" sz="1200" b="0" u="none" strike="noStrike">
                 <a:solidFill>
                   <a:srgbClr val="000000"/>
                 </a:solidFill>
@@ -6048,7 +5785,7 @@
               </a:rPr>
               <a:t>2025/26</a:t>
             </a:r>
-            <a:endParaRPr b="0" lang="pt-PT" sz="1200" strike="noStrike" u="none">
+            <a:endParaRPr lang="pt-PT" sz="1200" b="0" u="none" strike="noStrike">
               <a:solidFill>
                 <a:srgbClr val="000000"/>
               </a:solidFill>
@@ -6061,19 +5798,14 @@
       </p:sp>
     </p:spTree>
   </p:cSld>
-  <mc:AlternateContent>
-    <mc:Choice Requires="p14">
-      <p:transition spd="slow" p14:dur="2000"/>
-    </mc:Choice>
-    <mc:Fallback>
-      <p:transition spd="slow"/>
-    </mc:Fallback>
-  </mc:AlternateContent>
+  <p:clrMapOvr>
+    <a:masterClrMapping/>
+  </p:clrMapOvr>
 </p:sld>
 </file>
 
 <file path=ppt/slides/slide3.xml><?xml version="1.0" encoding="utf-8"?>
-<p:sld xmlns:a="http://schemas.openxmlformats.org/drawingml/2006/main" xmlns:p="http://schemas.openxmlformats.org/presentationml/2006/main" xmlns:r="http://schemas.openxmlformats.org/officeDocument/2006/relationships" xmlns:p14="http://schemas.microsoft.com/office/powerpoint/2010/main" xmlns:p15="http://schemas.microsoft.com/office/powerpoint/2012/main" xmlns:mc="http://schemas.openxmlformats.org/markup-compatibility/2006">
+<p:sld xmlns:a="http://schemas.openxmlformats.org/drawingml/2006/main" xmlns:r="http://schemas.openxmlformats.org/officeDocument/2006/relationships" xmlns:p="http://schemas.openxmlformats.org/presentationml/2006/main">
   <p:cSld>
     <p:spTree>
       <p:nvGrpSpPr>
@@ -6109,26 +5841,33 @@
           </a:ln>
         </p:spPr>
         <p:style>
-          <a:lnRef idx="0"/>
-          <a:fillRef idx="0"/>
-          <a:effectRef idx="0"/>
+          <a:lnRef idx="0">
+            <a:scrgbClr r="0" g="0" b="0"/>
+          </a:lnRef>
+          <a:fillRef idx="0">
+            <a:scrgbClr r="0" g="0" b="0"/>
+          </a:fillRef>
+          <a:effectRef idx="0">
+            <a:scrgbClr r="0" g="0" b="0"/>
+          </a:effectRef>
           <a:fontRef idx="minor"/>
         </p:style>
         <p:txBody>
-          <a:bodyPr lIns="90000" rIns="90000" tIns="91440" bIns="91440" anchor="t">
+          <a:bodyPr lIns="90000" tIns="91440" rIns="90000" bIns="91440" anchor="t">
             <a:spAutoFit/>
           </a:bodyPr>
+          <a:lstStyle/>
           <a:p>
             <a:pPr defTabSz="914400">
               <a:lnSpc>
                 <a:spcPct val="100000"/>
               </a:lnSpc>
               <a:tabLst>
-                <a:tab algn="l" pos="0"/>
+                <a:tab pos="0" algn="l"/>
               </a:tabLst>
             </a:pPr>
             <a:r>
-              <a:rPr b="1" lang="pt-PT" sz="1800" strike="noStrike" u="none">
+              <a:rPr lang="pt-PT" sz="1800" b="1" u="none" strike="noStrike">
                 <a:solidFill>
                   <a:schemeClr val="dk1"/>
                 </a:solidFill>
@@ -6139,7 +5878,7 @@
               </a:rPr>
               <a:t>Situação Problemática</a:t>
             </a:r>
-            <a:endParaRPr b="0" lang="pt-PT" sz="1800" strike="noStrike" u="none">
+            <a:endParaRPr lang="pt-PT" sz="1800" b="0" u="none" strike="noStrike">
               <a:solidFill>
                 <a:srgbClr val="000000"/>
               </a:solidFill>
@@ -6170,15 +5909,22 @@
           </a:ln>
         </p:spPr>
         <p:style>
-          <a:lnRef idx="0"/>
-          <a:fillRef idx="0"/>
-          <a:effectRef idx="0"/>
+          <a:lnRef idx="0">
+            <a:scrgbClr r="0" g="0" b="0"/>
+          </a:lnRef>
+          <a:fillRef idx="0">
+            <a:scrgbClr r="0" g="0" b="0"/>
+          </a:fillRef>
+          <a:effectRef idx="0">
+            <a:scrgbClr r="0" g="0" b="0"/>
+          </a:effectRef>
           <a:fontRef idx="minor"/>
         </p:style>
         <p:txBody>
-          <a:bodyPr lIns="90000" rIns="90000" tIns="91440" bIns="91440" anchor="t">
+          <a:bodyPr lIns="90000" tIns="91440" rIns="90000" bIns="91440" anchor="t">
             <a:noAutofit/>
           </a:bodyPr>
+          <a:lstStyle/>
           <a:p>
             <a:pPr defTabSz="914400">
               <a:lnSpc>
@@ -6191,17 +5937,17 @@
                 <a:spcPts val="992"/>
               </a:spcAft>
               <a:tabLst>
-                <a:tab algn="l" pos="0"/>
+                <a:tab pos="0" algn="l"/>
               </a:tabLst>
             </a:pPr>
             <a:r>
-              <a:rPr b="0" lang="pt-PT" sz="1400" strike="noStrike" u="none">
-                <a:solidFill>
-                  <a:srgbClr val="0f1115"/>
+              <a:rPr lang="pt-PT" sz="1400" b="0" u="none" strike="noStrike">
+                <a:solidFill>
+                  <a:srgbClr val="0F1115"/>
                 </a:solidFill>
                 <a:effectLst/>
                 <a:highlight>
-                  <a:srgbClr val="ffffff"/>
+                  <a:srgbClr val="FFFFFF"/>
                 </a:highlight>
                 <a:uFillTx/>
                 <a:latin typeface="Arial"/>
@@ -6209,7 +5955,7 @@
               </a:rPr>
               <a:t>O Colégio Mona Tower enfrenta dificuldades financeiras devido a processos manuais e à falta de integração entre os setores. Esta fragmentação pode causar falhas no controlo de dívidas e inconsistência nos dados, comprometendo o fluxo de caixa e a tomada de decisão estratégica.</a:t>
             </a:r>
-            <a:endParaRPr b="0" lang="pt-PT" sz="1400" strike="noStrike" u="none">
+            <a:endParaRPr lang="pt-PT" sz="1400" b="0" u="none" strike="noStrike">
               <a:solidFill>
                 <a:srgbClr val="000000"/>
               </a:solidFill>
@@ -6222,19 +5968,14 @@
       </p:sp>
     </p:spTree>
   </p:cSld>
-  <mc:AlternateContent>
-    <mc:Choice Requires="p14">
-      <p:transition spd="slow" p14:dur="2000"/>
-    </mc:Choice>
-    <mc:Fallback>
-      <p:transition spd="slow"/>
-    </mc:Fallback>
-  </mc:AlternateContent>
+  <p:clrMapOvr>
+    <a:masterClrMapping/>
+  </p:clrMapOvr>
 </p:sld>
 </file>
 
 <file path=ppt/slides/slide4.xml><?xml version="1.0" encoding="utf-8"?>
-<p:sld xmlns:a="http://schemas.openxmlformats.org/drawingml/2006/main" xmlns:p="http://schemas.openxmlformats.org/presentationml/2006/main" xmlns:r="http://schemas.openxmlformats.org/officeDocument/2006/relationships" xmlns:p14="http://schemas.microsoft.com/office/powerpoint/2010/main" xmlns:p15="http://schemas.microsoft.com/office/powerpoint/2012/main" xmlns:mc="http://schemas.openxmlformats.org/markup-compatibility/2006">
+<p:sld xmlns:a="http://schemas.openxmlformats.org/drawingml/2006/main" xmlns:r="http://schemas.openxmlformats.org/officeDocument/2006/relationships" xmlns:p="http://schemas.openxmlformats.org/presentationml/2006/main">
   <p:cSld>
     <p:spTree>
       <p:nvGrpSpPr>
@@ -6270,26 +6011,33 @@
           </a:ln>
         </p:spPr>
         <p:style>
-          <a:lnRef idx="0"/>
-          <a:fillRef idx="0"/>
-          <a:effectRef idx="0"/>
+          <a:lnRef idx="0">
+            <a:scrgbClr r="0" g="0" b="0"/>
+          </a:lnRef>
+          <a:fillRef idx="0">
+            <a:scrgbClr r="0" g="0" b="0"/>
+          </a:fillRef>
+          <a:effectRef idx="0">
+            <a:scrgbClr r="0" g="0" b="0"/>
+          </a:effectRef>
           <a:fontRef idx="minor"/>
         </p:style>
         <p:txBody>
-          <a:bodyPr lIns="90000" rIns="90000" tIns="91440" bIns="91440" anchor="t">
+          <a:bodyPr lIns="90000" tIns="91440" rIns="90000" bIns="91440" anchor="t">
             <a:noAutofit/>
           </a:bodyPr>
+          <a:lstStyle/>
           <a:p>
             <a:pPr defTabSz="914400">
               <a:lnSpc>
                 <a:spcPct val="100000"/>
               </a:lnSpc>
               <a:tabLst>
-                <a:tab algn="l" pos="0"/>
+                <a:tab pos="0" algn="l"/>
               </a:tabLst>
             </a:pPr>
             <a:r>
-              <a:rPr b="1" lang="pt-PT" sz="1800" strike="noStrike" u="none">
+              <a:rPr lang="pt-PT" sz="1800" b="1" u="none" strike="noStrike">
                 <a:solidFill>
                   <a:schemeClr val="dk1"/>
                 </a:solidFill>
@@ -6300,7 +6048,7 @@
               </a:rPr>
               <a:t>Problema de Pesquisa</a:t>
             </a:r>
-            <a:endParaRPr b="0" lang="pt-PT" sz="1800" strike="noStrike" u="none">
+            <a:endParaRPr lang="pt-PT" sz="1800" b="0" u="none" strike="noStrike">
               <a:solidFill>
                 <a:srgbClr val="000000"/>
               </a:solidFill>
@@ -6331,15 +6079,22 @@
           </a:ln>
         </p:spPr>
         <p:style>
-          <a:lnRef idx="0"/>
-          <a:fillRef idx="0"/>
-          <a:effectRef idx="0"/>
+          <a:lnRef idx="0">
+            <a:scrgbClr r="0" g="0" b="0"/>
+          </a:lnRef>
+          <a:fillRef idx="0">
+            <a:scrgbClr r="0" g="0" b="0"/>
+          </a:fillRef>
+          <a:effectRef idx="0">
+            <a:scrgbClr r="0" g="0" b="0"/>
+          </a:effectRef>
           <a:fontRef idx="minor"/>
         </p:style>
         <p:txBody>
-          <a:bodyPr lIns="90000" rIns="90000" tIns="91440" bIns="91440" anchor="t">
+          <a:bodyPr lIns="90000" tIns="91440" rIns="90000" bIns="91440" anchor="t">
             <a:noAutofit/>
           </a:bodyPr>
+          <a:lstStyle/>
           <a:p>
             <a:pPr defTabSz="914400">
               <a:lnSpc>
@@ -6352,11 +6107,11 @@
                 <a:spcPts val="992"/>
               </a:spcAft>
               <a:tabLst>
-                <a:tab algn="l" pos="0"/>
+                <a:tab pos="0" algn="l"/>
               </a:tabLst>
             </a:pPr>
             <a:r>
-              <a:rPr b="0" lang="pt-PT" sz="1400" strike="noStrike" u="none">
+              <a:rPr lang="pt-PT" sz="1400" b="0" u="none" strike="noStrike">
                 <a:solidFill>
                   <a:schemeClr val="dk1"/>
                 </a:solidFill>
@@ -6367,7 +6122,7 @@
               </a:rPr>
               <a:t>Como tornar a gestão financeira do colégio Mona Tower mais fiável e eficiente? </a:t>
             </a:r>
-            <a:endParaRPr b="0" lang="pt-PT" sz="1400" strike="noStrike" u="none">
+            <a:endParaRPr lang="pt-PT" sz="1400" b="0" u="none" strike="noStrike">
               <a:solidFill>
                 <a:srgbClr val="000000"/>
               </a:solidFill>
@@ -6388,10 +6143,10 @@
                 <a:spcPts val="992"/>
               </a:spcAft>
               <a:tabLst>
-                <a:tab algn="l" pos="0"/>
+                <a:tab pos="0" algn="l"/>
               </a:tabLst>
             </a:pPr>
-            <a:endParaRPr b="0" lang="pt-PT" sz="1400" strike="noStrike" u="none">
+            <a:endParaRPr lang="pt-PT" sz="1400" b="0" u="none" strike="noStrike">
               <a:solidFill>
                 <a:srgbClr val="000000"/>
               </a:solidFill>
@@ -6404,19 +6159,14 @@
       </p:sp>
     </p:spTree>
   </p:cSld>
-  <mc:AlternateContent>
-    <mc:Choice Requires="p14">
-      <p:transition spd="slow" p14:dur="2000"/>
-    </mc:Choice>
-    <mc:Fallback>
-      <p:transition spd="slow"/>
-    </mc:Fallback>
-  </mc:AlternateContent>
+  <p:clrMapOvr>
+    <a:masterClrMapping/>
+  </p:clrMapOvr>
 </p:sld>
 </file>
 
 <file path=ppt/slides/slide5.xml><?xml version="1.0" encoding="utf-8"?>
-<p:sld xmlns:a="http://schemas.openxmlformats.org/drawingml/2006/main" xmlns:p="http://schemas.openxmlformats.org/presentationml/2006/main" xmlns:r="http://schemas.openxmlformats.org/officeDocument/2006/relationships" xmlns:p14="http://schemas.microsoft.com/office/powerpoint/2010/main" xmlns:p15="http://schemas.microsoft.com/office/powerpoint/2012/main" xmlns:mc="http://schemas.openxmlformats.org/markup-compatibility/2006">
+<p:sld xmlns:a="http://schemas.openxmlformats.org/drawingml/2006/main" xmlns:r="http://schemas.openxmlformats.org/officeDocument/2006/relationships" xmlns:p="http://schemas.openxmlformats.org/presentationml/2006/main">
   <p:cSld>
     <p:spTree>
       <p:nvGrpSpPr>
@@ -6452,26 +6202,33 @@
           </a:ln>
         </p:spPr>
         <p:style>
-          <a:lnRef idx="0"/>
-          <a:fillRef idx="0"/>
-          <a:effectRef idx="0"/>
+          <a:lnRef idx="0">
+            <a:scrgbClr r="0" g="0" b="0"/>
+          </a:lnRef>
+          <a:fillRef idx="0">
+            <a:scrgbClr r="0" g="0" b="0"/>
+          </a:fillRef>
+          <a:effectRef idx="0">
+            <a:scrgbClr r="0" g="0" b="0"/>
+          </a:effectRef>
           <a:fontRef idx="minor"/>
         </p:style>
         <p:txBody>
-          <a:bodyPr lIns="90000" rIns="90000" tIns="91440" bIns="91440" anchor="t">
+          <a:bodyPr lIns="90000" tIns="91440" rIns="90000" bIns="91440" anchor="t">
             <a:noAutofit/>
           </a:bodyPr>
+          <a:lstStyle/>
           <a:p>
             <a:pPr defTabSz="914400">
               <a:lnSpc>
                 <a:spcPct val="100000"/>
               </a:lnSpc>
               <a:tabLst>
-                <a:tab algn="l" pos="0"/>
+                <a:tab pos="0" algn="l"/>
               </a:tabLst>
             </a:pPr>
             <a:r>
-              <a:rPr b="1" lang="pt-PT" sz="1800" strike="noStrike" u="none">
+              <a:rPr lang="pt-PT" sz="1800" b="1" u="none" strike="noStrike">
                 <a:solidFill>
                   <a:schemeClr val="dk1"/>
                 </a:solidFill>
@@ -6482,7 +6239,7 @@
               </a:rPr>
               <a:t>Hipóteses</a:t>
             </a:r>
-            <a:endParaRPr b="0" lang="pt-PT" sz="1800" strike="noStrike" u="none">
+            <a:endParaRPr lang="pt-PT" sz="1800" b="0" u="none" strike="noStrike">
               <a:solidFill>
                 <a:srgbClr val="000000"/>
               </a:solidFill>
@@ -6513,15 +6270,22 @@
           </a:ln>
         </p:spPr>
         <p:style>
-          <a:lnRef idx="0"/>
-          <a:fillRef idx="0"/>
-          <a:effectRef idx="0"/>
+          <a:lnRef idx="0">
+            <a:scrgbClr r="0" g="0" b="0"/>
+          </a:lnRef>
+          <a:fillRef idx="0">
+            <a:scrgbClr r="0" g="0" b="0"/>
+          </a:fillRef>
+          <a:effectRef idx="0">
+            <a:scrgbClr r="0" g="0" b="0"/>
+          </a:effectRef>
           <a:fontRef idx="minor"/>
         </p:style>
         <p:txBody>
-          <a:bodyPr lIns="90000" rIns="90000" tIns="91440" bIns="91440" anchor="t">
+          <a:bodyPr lIns="90000" tIns="91440" rIns="90000" bIns="91440" anchor="t">
             <a:noAutofit/>
           </a:bodyPr>
+          <a:lstStyle/>
           <a:p>
             <a:pPr defTabSz="914400">
               <a:lnSpc>
@@ -6531,17 +6295,17 @@
                 <a:spcPts val="1199"/>
               </a:spcBef>
               <a:tabLst>
-                <a:tab algn="l" pos="0"/>
+                <a:tab pos="0" algn="l"/>
               </a:tabLst>
             </a:pPr>
             <a:r>
-              <a:rPr b="0" lang="pt-PT" sz="1400" strike="noStrike" u="none">
-                <a:solidFill>
-                  <a:srgbClr val="0f1115"/>
+              <a:rPr lang="pt-PT" sz="1400" b="0" u="none" strike="noStrike">
+                <a:solidFill>
+                  <a:srgbClr val="0F1115"/>
                 </a:solidFill>
                 <a:effectLst/>
                 <a:highlight>
-                  <a:srgbClr val="ffffff"/>
+                  <a:srgbClr val="FFFFFF"/>
                 </a:highlight>
                 <a:uFillTx/>
                 <a:latin typeface="Arial"/>
@@ -6549,7 +6313,7 @@
               </a:rPr>
               <a:t>1º Desenvolver um sistema integrado de gestão e processamento de pagamentos.</a:t>
             </a:r>
-            <a:endParaRPr b="0" lang="pt-PT" sz="1400" strike="noStrike" u="none">
+            <a:endParaRPr lang="pt-PT" sz="1400" b="0" u="none" strike="noStrike">
               <a:solidFill>
                 <a:srgbClr val="000000"/>
               </a:solidFill>
@@ -6567,17 +6331,17 @@
                 <a:spcPts val="1199"/>
               </a:spcBef>
               <a:tabLst>
-                <a:tab algn="l" pos="0"/>
+                <a:tab pos="0" algn="l"/>
               </a:tabLst>
             </a:pPr>
             <a:r>
-              <a:rPr b="0" lang="pt-PT" sz="1400" strike="noStrike" u="none">
-                <a:solidFill>
-                  <a:srgbClr val="0f1115"/>
+              <a:rPr lang="pt-PT" sz="1400" b="0" u="none" strike="noStrike">
+                <a:solidFill>
+                  <a:srgbClr val="0F1115"/>
                 </a:solidFill>
                 <a:effectLst/>
                 <a:highlight>
-                  <a:srgbClr val="ffffff"/>
+                  <a:srgbClr val="FFFFFF"/>
                 </a:highlight>
                 <a:uFillTx/>
                 <a:latin typeface="Arial"/>
@@ -6585,7 +6349,7 @@
               </a:rPr>
               <a:t>2º Adquirir um software comercial de gestão escolar com módulos financeiros pré-definidos.</a:t>
             </a:r>
-            <a:endParaRPr b="0" lang="pt-PT" sz="1400" strike="noStrike" u="none">
+            <a:endParaRPr lang="pt-PT" sz="1400" b="0" u="none" strike="noStrike">
               <a:solidFill>
                 <a:srgbClr val="000000"/>
               </a:solidFill>
@@ -6598,19 +6362,14 @@
       </p:sp>
     </p:spTree>
   </p:cSld>
-  <mc:AlternateContent>
-    <mc:Choice Requires="p14">
-      <p:transition spd="slow" p14:dur="2000"/>
-    </mc:Choice>
-    <mc:Fallback>
-      <p:transition spd="slow"/>
-    </mc:Fallback>
-  </mc:AlternateContent>
+  <p:clrMapOvr>
+    <a:masterClrMapping/>
+  </p:clrMapOvr>
 </p:sld>
 </file>
 
 <file path=ppt/slides/slide6.xml><?xml version="1.0" encoding="utf-8"?>
-<p:sld xmlns:a="http://schemas.openxmlformats.org/drawingml/2006/main" xmlns:p="http://schemas.openxmlformats.org/presentationml/2006/main" xmlns:r="http://schemas.openxmlformats.org/officeDocument/2006/relationships" xmlns:p14="http://schemas.microsoft.com/office/powerpoint/2010/main" xmlns:p15="http://schemas.microsoft.com/office/powerpoint/2012/main" xmlns:mc="http://schemas.openxmlformats.org/markup-compatibility/2006">
+<p:sld xmlns:a="http://schemas.openxmlformats.org/drawingml/2006/main" xmlns:r="http://schemas.openxmlformats.org/officeDocument/2006/relationships" xmlns:p="http://schemas.openxmlformats.org/presentationml/2006/main">
   <p:cSld>
     <p:spTree>
       <p:nvGrpSpPr>
@@ -6646,26 +6405,33 @@
           </a:ln>
         </p:spPr>
         <p:style>
-          <a:lnRef idx="0"/>
-          <a:fillRef idx="0"/>
-          <a:effectRef idx="0"/>
+          <a:lnRef idx="0">
+            <a:scrgbClr r="0" g="0" b="0"/>
+          </a:lnRef>
+          <a:fillRef idx="0">
+            <a:scrgbClr r="0" g="0" b="0"/>
+          </a:fillRef>
+          <a:effectRef idx="0">
+            <a:scrgbClr r="0" g="0" b="0"/>
+          </a:effectRef>
           <a:fontRef idx="minor"/>
         </p:style>
         <p:txBody>
-          <a:bodyPr lIns="90000" rIns="90000" tIns="91440" bIns="91440" anchor="t">
+          <a:bodyPr lIns="90000" tIns="91440" rIns="90000" bIns="91440" anchor="t">
             <a:spAutoFit/>
           </a:bodyPr>
+          <a:lstStyle/>
           <a:p>
             <a:pPr defTabSz="914400">
               <a:lnSpc>
                 <a:spcPct val="100000"/>
               </a:lnSpc>
               <a:tabLst>
-                <a:tab algn="l" pos="0"/>
+                <a:tab pos="0" algn="l"/>
               </a:tabLst>
             </a:pPr>
             <a:r>
-              <a:rPr b="1" lang="pt-PT" sz="1800" strike="noStrike" u="none">
+              <a:rPr lang="pt-PT" sz="1800" b="1" u="none" strike="noStrike">
                 <a:solidFill>
                   <a:schemeClr val="dk1"/>
                 </a:solidFill>
@@ -6676,7 +6442,7 @@
               </a:rPr>
               <a:t>Justificativa</a:t>
             </a:r>
-            <a:endParaRPr b="0" lang="pt-PT" sz="1800" strike="noStrike" u="none">
+            <a:endParaRPr lang="pt-PT" sz="1800" b="0" u="none" strike="noStrike">
               <a:solidFill>
                 <a:srgbClr val="000000"/>
               </a:solidFill>
@@ -6707,26 +6473,33 @@
           </a:ln>
         </p:spPr>
         <p:style>
-          <a:lnRef idx="0"/>
-          <a:fillRef idx="0"/>
-          <a:effectRef idx="0"/>
+          <a:lnRef idx="0">
+            <a:scrgbClr r="0" g="0" b="0"/>
+          </a:lnRef>
+          <a:fillRef idx="0">
+            <a:scrgbClr r="0" g="0" b="0"/>
+          </a:fillRef>
+          <a:effectRef idx="0">
+            <a:scrgbClr r="0" g="0" b="0"/>
+          </a:effectRef>
           <a:fontRef idx="minor"/>
         </p:style>
         <p:txBody>
-          <a:bodyPr lIns="90000" rIns="90000" tIns="91440" bIns="91440" anchor="t">
+          <a:bodyPr lIns="90000" tIns="91440" rIns="90000" bIns="91440" anchor="t">
             <a:noAutofit/>
           </a:bodyPr>
+          <a:lstStyle/>
           <a:p>
             <a:pPr defTabSz="914400">
               <a:lnSpc>
                 <a:spcPct val="100000"/>
               </a:lnSpc>
               <a:tabLst>
-                <a:tab algn="l" pos="0"/>
+                <a:tab pos="0" algn="l"/>
               </a:tabLst>
             </a:pPr>
             <a:r>
-              <a:rPr b="0" lang="pt-PT" sz="1400" strike="noStrike" u="none">
+              <a:rPr lang="pt-PT" sz="1400" b="0" u="none" strike="noStrike">
                 <a:solidFill>
                   <a:schemeClr val="dk1"/>
                 </a:solidFill>
@@ -6737,7 +6510,7 @@
               </a:rPr>
               <a:t>O sistema é necessário para modernizar a gestão financeira da instituição, reduzindo a dependência de processos manuais. A solução facilitará a comunicação entre encarregados e administração, garantindo simultaneamente segurança e rastreabilidade dos dados. Adicionalmente, permitirá aumentar significativamente a transparência e eficiência das operações financeiras do colégio.</a:t>
             </a:r>
-            <a:endParaRPr b="0" lang="pt-PT" sz="1400" strike="noStrike" u="none">
+            <a:endParaRPr lang="pt-PT" sz="1400" b="0" u="none" strike="noStrike">
               <a:solidFill>
                 <a:srgbClr val="000000"/>
               </a:solidFill>
@@ -6750,19 +6523,14 @@
       </p:sp>
     </p:spTree>
   </p:cSld>
-  <mc:AlternateContent>
-    <mc:Choice Requires="p14">
-      <p:transition spd="slow" p14:dur="2000"/>
-    </mc:Choice>
-    <mc:Fallback>
-      <p:transition spd="slow"/>
-    </mc:Fallback>
-  </mc:AlternateContent>
+  <p:clrMapOvr>
+    <a:masterClrMapping/>
+  </p:clrMapOvr>
 </p:sld>
 </file>
 
 <file path=ppt/slides/slide7.xml><?xml version="1.0" encoding="utf-8"?>
-<p:sld xmlns:a="http://schemas.openxmlformats.org/drawingml/2006/main" xmlns:p="http://schemas.openxmlformats.org/presentationml/2006/main" xmlns:r="http://schemas.openxmlformats.org/officeDocument/2006/relationships" xmlns:p14="http://schemas.microsoft.com/office/powerpoint/2010/main" xmlns:p15="http://schemas.microsoft.com/office/powerpoint/2012/main" xmlns:mc="http://schemas.openxmlformats.org/markup-compatibility/2006">
+<p:sld xmlns:a="http://schemas.openxmlformats.org/drawingml/2006/main" xmlns:r="http://schemas.openxmlformats.org/officeDocument/2006/relationships" xmlns:p="http://schemas.openxmlformats.org/presentationml/2006/main">
   <p:cSld>
     <p:spTree>
       <p:nvGrpSpPr>
@@ -6798,26 +6566,33 @@
           </a:ln>
         </p:spPr>
         <p:style>
-          <a:lnRef idx="0"/>
-          <a:fillRef idx="0"/>
-          <a:effectRef idx="0"/>
+          <a:lnRef idx="0">
+            <a:scrgbClr r="0" g="0" b="0"/>
+          </a:lnRef>
+          <a:fillRef idx="0">
+            <a:scrgbClr r="0" g="0" b="0"/>
+          </a:fillRef>
+          <a:effectRef idx="0">
+            <a:scrgbClr r="0" g="0" b="0"/>
+          </a:effectRef>
           <a:fontRef idx="minor"/>
         </p:style>
         <p:txBody>
-          <a:bodyPr lIns="90000" rIns="90000" tIns="91440" bIns="91440" anchor="t">
+          <a:bodyPr lIns="90000" tIns="91440" rIns="90000" bIns="91440" anchor="t">
             <a:spAutoFit/>
           </a:bodyPr>
+          <a:lstStyle/>
           <a:p>
             <a:pPr defTabSz="914400">
               <a:lnSpc>
                 <a:spcPct val="100000"/>
               </a:lnSpc>
               <a:tabLst>
-                <a:tab algn="l" pos="0"/>
+                <a:tab pos="0" algn="l"/>
               </a:tabLst>
             </a:pPr>
             <a:r>
-              <a:rPr b="1" lang="pt-PT" sz="1800" strike="noStrike" u="none">
+              <a:rPr lang="pt-PT" sz="1800" b="1" u="none" strike="noStrike">
                 <a:solidFill>
                   <a:schemeClr val="dk1"/>
                 </a:solidFill>
@@ -6828,7 +6603,7 @@
               </a:rPr>
               <a:t>Objetivos</a:t>
             </a:r>
-            <a:endParaRPr b="0" lang="pt-PT" sz="1800" strike="noStrike" u="none">
+            <a:endParaRPr lang="pt-PT" sz="1800" b="0" u="none" strike="noStrike">
               <a:solidFill>
                 <a:srgbClr val="000000"/>
               </a:solidFill>
@@ -6859,26 +6634,33 @@
           </a:ln>
         </p:spPr>
         <p:style>
-          <a:lnRef idx="0"/>
-          <a:fillRef idx="0"/>
-          <a:effectRef idx="0"/>
+          <a:lnRef idx="0">
+            <a:scrgbClr r="0" g="0" b="0"/>
+          </a:lnRef>
+          <a:fillRef idx="0">
+            <a:scrgbClr r="0" g="0" b="0"/>
+          </a:fillRef>
+          <a:effectRef idx="0">
+            <a:scrgbClr r="0" g="0" b="0"/>
+          </a:effectRef>
           <a:fontRef idx="minor"/>
         </p:style>
         <p:txBody>
-          <a:bodyPr lIns="90000" rIns="90000" tIns="91440" bIns="91440" anchor="t">
+          <a:bodyPr lIns="90000" tIns="91440" rIns="90000" bIns="91440" anchor="t">
             <a:spAutoFit/>
           </a:bodyPr>
+          <a:lstStyle/>
           <a:p>
             <a:pPr defTabSz="914400">
               <a:lnSpc>
                 <a:spcPct val="100000"/>
               </a:lnSpc>
               <a:tabLst>
-                <a:tab algn="l" pos="0"/>
+                <a:tab pos="0" algn="l"/>
               </a:tabLst>
             </a:pPr>
             <a:r>
-              <a:rPr b="1" lang="pt-PT" sz="1400" strike="noStrike" u="none">
+              <a:rPr lang="pt-PT" sz="1400" b="1" u="none" strike="noStrike">
                 <a:solidFill>
                   <a:schemeClr val="dk1"/>
                 </a:solidFill>
@@ -6889,7 +6671,7 @@
               </a:rPr>
               <a:t>Objetivo Geral</a:t>
             </a:r>
-            <a:endParaRPr b="0" lang="pt-PT" sz="1400" strike="noStrike" u="none">
+            <a:endParaRPr lang="pt-PT" sz="1400" b="0" u="none" strike="noStrike">
               <a:solidFill>
                 <a:srgbClr val="000000"/>
               </a:solidFill>
@@ -6920,15 +6702,22 @@
           </a:ln>
         </p:spPr>
         <p:style>
-          <a:lnRef idx="0"/>
-          <a:fillRef idx="0"/>
-          <a:effectRef idx="0"/>
+          <a:lnRef idx="0">
+            <a:scrgbClr r="0" g="0" b="0"/>
+          </a:lnRef>
+          <a:fillRef idx="0">
+            <a:scrgbClr r="0" g="0" b="0"/>
+          </a:fillRef>
+          <a:effectRef idx="0">
+            <a:scrgbClr r="0" g="0" b="0"/>
+          </a:effectRef>
           <a:fontRef idx="minor"/>
         </p:style>
         <p:txBody>
-          <a:bodyPr lIns="90000" rIns="90000" tIns="91440" bIns="91440" anchor="t">
+          <a:bodyPr lIns="90000" tIns="91440" rIns="90000" bIns="91440" anchor="t">
             <a:noAutofit/>
           </a:bodyPr>
+          <a:lstStyle/>
           <a:p>
             <a:pPr defTabSz="914400">
               <a:lnSpc>
@@ -6941,11 +6730,11 @@
                 <a:spcPts val="799"/>
               </a:spcAft>
               <a:tabLst>
-                <a:tab algn="l" pos="0"/>
+                <a:tab pos="0" algn="l"/>
               </a:tabLst>
             </a:pPr>
             <a:r>
-              <a:rPr b="0" lang="pt-PT" sz="1400" strike="noStrike" u="none">
+              <a:rPr lang="pt-PT" sz="1400" b="0" u="none" strike="noStrike">
                 <a:solidFill>
                   <a:schemeClr val="dk1"/>
                 </a:solidFill>
@@ -6956,7 +6745,7 @@
               </a:rPr>
               <a:t>Criar uma plataforma robusta, segura e eficiente que permita ao colégio melhorar o controlo financeiro.</a:t>
             </a:r>
-            <a:endParaRPr b="0" lang="pt-PT" sz="1400" strike="noStrike" u="none">
+            <a:endParaRPr lang="pt-PT" sz="1400" b="0" u="none" strike="noStrike">
               <a:solidFill>
                 <a:srgbClr val="000000"/>
               </a:solidFill>
@@ -6987,26 +6776,33 @@
           </a:ln>
         </p:spPr>
         <p:style>
-          <a:lnRef idx="0"/>
-          <a:fillRef idx="0"/>
-          <a:effectRef idx="0"/>
+          <a:lnRef idx="0">
+            <a:scrgbClr r="0" g="0" b="0"/>
+          </a:lnRef>
+          <a:fillRef idx="0">
+            <a:scrgbClr r="0" g="0" b="0"/>
+          </a:fillRef>
+          <a:effectRef idx="0">
+            <a:scrgbClr r="0" g="0" b="0"/>
+          </a:effectRef>
           <a:fontRef idx="minor"/>
         </p:style>
         <p:txBody>
-          <a:bodyPr lIns="90000" rIns="90000" tIns="91440" bIns="91440" anchor="t">
+          <a:bodyPr lIns="90000" tIns="91440" rIns="90000" bIns="91440" anchor="t">
             <a:noAutofit/>
           </a:bodyPr>
+          <a:lstStyle/>
           <a:p>
             <a:pPr defTabSz="914400">
               <a:lnSpc>
                 <a:spcPct val="100000"/>
               </a:lnSpc>
               <a:tabLst>
-                <a:tab algn="l" pos="0"/>
+                <a:tab pos="0" algn="l"/>
               </a:tabLst>
             </a:pPr>
             <a:r>
-              <a:rPr b="1" lang="pt-PT" sz="1400" strike="noStrike" u="none">
+              <a:rPr lang="pt-PT" sz="1400" b="1" u="none" strike="noStrike">
                 <a:solidFill>
                   <a:schemeClr val="dk1"/>
                 </a:solidFill>
@@ -7017,7 +6813,7 @@
               </a:rPr>
               <a:t>Objetivos Específicos</a:t>
             </a:r>
-            <a:endParaRPr b="0" lang="pt-PT" sz="1400" strike="noStrike" u="none">
+            <a:endParaRPr lang="pt-PT" sz="1400" b="0" u="none" strike="noStrike">
               <a:solidFill>
                 <a:srgbClr val="000000"/>
               </a:solidFill>
@@ -7048,15 +6844,22 @@
           </a:ln>
         </p:spPr>
         <p:style>
-          <a:lnRef idx="0"/>
-          <a:fillRef idx="0"/>
-          <a:effectRef idx="0"/>
+          <a:lnRef idx="0">
+            <a:scrgbClr r="0" g="0" b="0"/>
+          </a:lnRef>
+          <a:fillRef idx="0">
+            <a:scrgbClr r="0" g="0" b="0"/>
+          </a:fillRef>
+          <a:effectRef idx="0">
+            <a:scrgbClr r="0" g="0" b="0"/>
+          </a:effectRef>
           <a:fontRef idx="minor"/>
         </p:style>
         <p:txBody>
-          <a:bodyPr lIns="90000" rIns="90000" tIns="91440" bIns="91440" anchor="t">
+          <a:bodyPr lIns="90000" tIns="91440" rIns="90000" bIns="91440" anchor="t">
             <a:noAutofit/>
           </a:bodyPr>
+          <a:lstStyle/>
           <a:p>
             <a:pPr marL="457200" indent="-317520" defTabSz="914400">
               <a:lnSpc>
@@ -7066,19 +6869,19 @@
                 <a:spcPts val="1199"/>
               </a:spcBef>
               <a:buClr>
-                <a:srgbClr val="0f1115"/>
+                <a:srgbClr val="0F1115"/>
               </a:buClr>
               <a:buFont typeface="Arial"/>
               <a:buChar char="●"/>
             </a:pPr>
             <a:r>
-              <a:rPr b="0" lang="pt-PT" sz="1400" strike="noStrike" u="none">
-                <a:solidFill>
-                  <a:srgbClr val="0f1115"/>
+              <a:rPr lang="pt-PT" sz="1400" b="0" u="none" strike="noStrike">
+                <a:solidFill>
+                  <a:srgbClr val="0F1115"/>
                 </a:solidFill>
                 <a:effectLst/>
                 <a:highlight>
-                  <a:srgbClr val="ffffff"/>
+                  <a:srgbClr val="FFFFFF"/>
                 </a:highlight>
                 <a:uFillTx/>
                 <a:latin typeface="Arial"/>
@@ -7086,7 +6889,7 @@
               </a:rPr>
               <a:t>Modelar e criar o banco de dados</a:t>
             </a:r>
-            <a:endParaRPr b="0" lang="pt-PT" sz="1400" strike="noStrike" u="none">
+            <a:endParaRPr lang="pt-PT" sz="1400" b="0" u="none" strike="noStrike">
               <a:solidFill>
                 <a:srgbClr val="000000"/>
               </a:solidFill>
@@ -7104,19 +6907,19 @@
                 <a:spcPts val="1199"/>
               </a:spcBef>
               <a:buClr>
-                <a:srgbClr val="0f1115"/>
+                <a:srgbClr val="0F1115"/>
               </a:buClr>
               <a:buFont typeface="Arial"/>
               <a:buChar char="●"/>
             </a:pPr>
             <a:r>
-              <a:rPr b="0" lang="pt-PT" sz="1400" strike="noStrike" u="none">
-                <a:solidFill>
-                  <a:srgbClr val="0f1115"/>
+              <a:rPr lang="pt-PT" sz="1400" b="0" u="none" strike="noStrike">
+                <a:solidFill>
+                  <a:srgbClr val="0F1115"/>
                 </a:solidFill>
                 <a:effectLst/>
                 <a:highlight>
-                  <a:srgbClr val="ffffff"/>
+                  <a:srgbClr val="FFFFFF"/>
                 </a:highlight>
                 <a:uFillTx/>
                 <a:latin typeface="Arial"/>
@@ -7124,7 +6927,7 @@
               </a:rPr>
               <a:t>Automatizar a geração de facturas para todos os serviços.</a:t>
             </a:r>
-            <a:endParaRPr b="0" lang="pt-PT" sz="1400" strike="noStrike" u="none">
+            <a:endParaRPr lang="pt-PT" sz="1400" b="0" u="none" strike="noStrike">
               <a:solidFill>
                 <a:srgbClr val="000000"/>
               </a:solidFill>
@@ -7139,19 +6942,19 @@
                 <a:spcPct val="115000"/>
               </a:lnSpc>
               <a:buClr>
-                <a:srgbClr val="0f1115"/>
+                <a:srgbClr val="0F1115"/>
               </a:buClr>
               <a:buFont typeface="Arial"/>
               <a:buChar char="●"/>
             </a:pPr>
             <a:r>
-              <a:rPr b="0" lang="pt-PT" sz="1400" strike="noStrike" u="none">
-                <a:solidFill>
-                  <a:srgbClr val="0f1115"/>
+              <a:rPr lang="pt-PT" sz="1400" b="0" u="none" strike="noStrike">
+                <a:solidFill>
+                  <a:srgbClr val="0F1115"/>
                 </a:solidFill>
                 <a:effectLst/>
                 <a:highlight>
-                  <a:srgbClr val="ffffff"/>
+                  <a:srgbClr val="FFFFFF"/>
                 </a:highlight>
                 <a:uFillTx/>
                 <a:latin typeface="Arial"/>
@@ -7159,7 +6962,7 @@
               </a:rPr>
               <a:t>Criar um módulo de registo de pagamentos.</a:t>
             </a:r>
-            <a:endParaRPr b="0" lang="pt-PT" sz="1400" strike="noStrike" u="none">
+            <a:endParaRPr lang="pt-PT" sz="1400" b="0" u="none" strike="noStrike">
               <a:solidFill>
                 <a:srgbClr val="000000"/>
               </a:solidFill>
@@ -7174,19 +6977,19 @@
                 <a:spcPct val="115000"/>
               </a:lnSpc>
               <a:buClr>
-                <a:srgbClr val="0f1115"/>
+                <a:srgbClr val="0F1115"/>
               </a:buClr>
               <a:buFont typeface="Arial"/>
               <a:buChar char="●"/>
             </a:pPr>
             <a:r>
-              <a:rPr b="0" lang="pt-PT" sz="1400" strike="noStrike" u="none">
-                <a:solidFill>
-                  <a:srgbClr val="0f1115"/>
+              <a:rPr lang="pt-PT" sz="1400" b="0" u="none" strike="noStrike">
+                <a:solidFill>
+                  <a:srgbClr val="0F1115"/>
                 </a:solidFill>
                 <a:effectLst/>
                 <a:highlight>
-                  <a:srgbClr val="ffffff"/>
+                  <a:srgbClr val="FFFFFF"/>
                 </a:highlight>
                 <a:uFillTx/>
                 <a:latin typeface="Arial"/>
@@ -7194,7 +6997,7 @@
               </a:rPr>
               <a:t>Criar relatórios financeiros detalhados (mensais, anuais, por estudante, turma ou serviço)</a:t>
             </a:r>
-            <a:endParaRPr b="0" lang="pt-PT" sz="1400" strike="noStrike" u="none">
+            <a:endParaRPr lang="pt-PT" sz="1400" b="0" u="none" strike="noStrike">
               <a:solidFill>
                 <a:srgbClr val="000000"/>
               </a:solidFill>
@@ -7209,19 +7012,19 @@
                 <a:spcPct val="115000"/>
               </a:lnSpc>
               <a:buClr>
-                <a:srgbClr val="0f1115"/>
+                <a:srgbClr val="0F1115"/>
               </a:buClr>
               <a:buFont typeface="Arial"/>
               <a:buChar char="●"/>
             </a:pPr>
             <a:r>
-              <a:rPr b="0" lang="pt-PT" sz="1400" strike="noStrike" u="none">
-                <a:solidFill>
-                  <a:srgbClr val="0f1115"/>
+              <a:rPr lang="pt-PT" sz="1400" b="0" u="none" strike="noStrike">
+                <a:solidFill>
+                  <a:srgbClr val="0F1115"/>
                 </a:solidFill>
                 <a:effectLst/>
                 <a:highlight>
-                  <a:srgbClr val="ffffff"/>
+                  <a:srgbClr val="FFFFFF"/>
                 </a:highlight>
                 <a:uFillTx/>
                 <a:latin typeface="Arial"/>
@@ -7229,7 +7032,7 @@
               </a:rPr>
               <a:t>Criar um módulo de notificação automática para encarregados, sobre os status da mensalidade</a:t>
             </a:r>
-            <a:endParaRPr b="0" lang="pt-PT" sz="1400" strike="noStrike" u="none">
+            <a:endParaRPr lang="pt-PT" sz="1400" b="0" u="none" strike="noStrike">
               <a:solidFill>
                 <a:srgbClr val="000000"/>
               </a:solidFill>
@@ -7244,19 +7047,19 @@
                 <a:spcPct val="115000"/>
               </a:lnSpc>
               <a:buClr>
-                <a:srgbClr val="0f1115"/>
+                <a:srgbClr val="0F1115"/>
               </a:buClr>
               <a:buFont typeface="Arial"/>
               <a:buChar char="●"/>
             </a:pPr>
             <a:r>
-              <a:rPr b="0" lang="pt-PT" sz="1400" strike="noStrike" u="none">
-                <a:solidFill>
-                  <a:srgbClr val="0f1115"/>
+              <a:rPr lang="pt-PT" sz="1400" b="0" u="none" strike="noStrike">
+                <a:solidFill>
+                  <a:srgbClr val="0F1115"/>
                 </a:solidFill>
                 <a:effectLst/>
                 <a:highlight>
-                  <a:srgbClr val="ffffff"/>
+                  <a:srgbClr val="FFFFFF"/>
                 </a:highlight>
                 <a:uFillTx/>
                 <a:latin typeface="Arial"/>
@@ -7264,7 +7067,7 @@
               </a:rPr>
               <a:t>Garantir a segurança de dados e rastreabilidade através de logs de auditoria</a:t>
             </a:r>
-            <a:endParaRPr b="0" lang="pt-PT" sz="1400" strike="noStrike" u="none">
+            <a:endParaRPr lang="pt-PT" sz="1400" b="0" u="none" strike="noStrike">
               <a:solidFill>
                 <a:srgbClr val="000000"/>
               </a:solidFill>
@@ -7277,19 +7080,14 @@
       </p:sp>
     </p:spTree>
   </p:cSld>
-  <mc:AlternateContent>
-    <mc:Choice Requires="p14">
-      <p:transition spd="slow" p14:dur="2000"/>
-    </mc:Choice>
-    <mc:Fallback>
-      <p:transition spd="slow"/>
-    </mc:Fallback>
-  </mc:AlternateContent>
+  <p:clrMapOvr>
+    <a:masterClrMapping/>
+  </p:clrMapOvr>
 </p:sld>
 </file>
 
 <file path=ppt/slides/slide8.xml><?xml version="1.0" encoding="utf-8"?>
-<p:sld xmlns:a="http://schemas.openxmlformats.org/drawingml/2006/main" xmlns:p="http://schemas.openxmlformats.org/presentationml/2006/main" xmlns:r="http://schemas.openxmlformats.org/officeDocument/2006/relationships" xmlns:p14="http://schemas.microsoft.com/office/powerpoint/2010/main" xmlns:p15="http://schemas.microsoft.com/office/powerpoint/2012/main" xmlns:mc="http://schemas.openxmlformats.org/markup-compatibility/2006">
+<p:sld xmlns:a="http://schemas.openxmlformats.org/drawingml/2006/main" xmlns:r="http://schemas.openxmlformats.org/officeDocument/2006/relationships" xmlns:p="http://schemas.openxmlformats.org/presentationml/2006/main">
   <p:cSld>
     <p:spTree>
       <p:nvGrpSpPr>
@@ -7325,26 +7123,33 @@
           </a:ln>
         </p:spPr>
         <p:style>
-          <a:lnRef idx="0"/>
-          <a:fillRef idx="0"/>
-          <a:effectRef idx="0"/>
+          <a:lnRef idx="0">
+            <a:scrgbClr r="0" g="0" b="0"/>
+          </a:lnRef>
+          <a:fillRef idx="0">
+            <a:scrgbClr r="0" g="0" b="0"/>
+          </a:fillRef>
+          <a:effectRef idx="0">
+            <a:scrgbClr r="0" g="0" b="0"/>
+          </a:effectRef>
           <a:fontRef idx="minor"/>
         </p:style>
         <p:txBody>
-          <a:bodyPr lIns="90000" rIns="90000" tIns="91440" bIns="91440" anchor="t">
+          <a:bodyPr lIns="90000" tIns="91440" rIns="90000" bIns="91440" anchor="t">
             <a:noAutofit/>
           </a:bodyPr>
+          <a:lstStyle/>
           <a:p>
             <a:pPr defTabSz="914400">
               <a:lnSpc>
                 <a:spcPct val="100000"/>
               </a:lnSpc>
               <a:tabLst>
-                <a:tab algn="l" pos="0"/>
+                <a:tab pos="0" algn="l"/>
               </a:tabLst>
             </a:pPr>
             <a:r>
-              <a:rPr b="1" lang="pt-PT" sz="1800" strike="noStrike" u="none">
+              <a:rPr lang="pt-PT" sz="1800" b="1" u="none" strike="noStrike">
                 <a:solidFill>
                   <a:schemeClr val="dk1"/>
                 </a:solidFill>
@@ -7355,7 +7160,7 @@
               </a:rPr>
               <a:t>Metodologia de Investigação Cientifica</a:t>
             </a:r>
-            <a:endParaRPr b="0" lang="pt-PT" sz="1800" strike="noStrike" u="none">
+            <a:endParaRPr lang="pt-PT" sz="1800" b="0" u="none" strike="noStrike">
               <a:solidFill>
                 <a:srgbClr val="000000"/>
               </a:solidFill>
@@ -7386,26 +7191,33 @@
           </a:ln>
         </p:spPr>
         <p:style>
-          <a:lnRef idx="0"/>
-          <a:fillRef idx="0"/>
-          <a:effectRef idx="0"/>
+          <a:lnRef idx="0">
+            <a:scrgbClr r="0" g="0" b="0"/>
+          </a:lnRef>
+          <a:fillRef idx="0">
+            <a:scrgbClr r="0" g="0" b="0"/>
+          </a:fillRef>
+          <a:effectRef idx="0">
+            <a:scrgbClr r="0" g="0" b="0"/>
+          </a:effectRef>
           <a:fontRef idx="minor"/>
         </p:style>
         <p:txBody>
-          <a:bodyPr lIns="90000" rIns="90000" tIns="91440" bIns="91440" anchor="t">
+          <a:bodyPr lIns="90000" tIns="91440" rIns="90000" bIns="91440" anchor="t">
             <a:noAutofit/>
           </a:bodyPr>
+          <a:lstStyle/>
           <a:p>
             <a:pPr defTabSz="914400">
               <a:lnSpc>
                 <a:spcPct val="100000"/>
               </a:lnSpc>
               <a:tabLst>
-                <a:tab algn="l" pos="0"/>
+                <a:tab pos="0" algn="l"/>
               </a:tabLst>
             </a:pPr>
             <a:r>
-              <a:rPr b="1" lang="pt-PT" sz="1400" strike="noStrike" u="none">
+              <a:rPr lang="pt-PT" sz="1400" b="1" u="none" strike="noStrike">
                 <a:solidFill>
                   <a:schemeClr val="dk1"/>
                 </a:solidFill>
@@ -7416,7 +7228,7 @@
               </a:rPr>
               <a:t>Metodologia Quantitativa</a:t>
             </a:r>
-            <a:endParaRPr b="0" lang="pt-PT" sz="1400" strike="noStrike" u="none">
+            <a:endParaRPr lang="pt-PT" sz="1400" b="0" u="none" strike="noStrike">
               <a:solidFill>
                 <a:srgbClr val="000000"/>
               </a:solidFill>
@@ -7447,15 +7259,22 @@
           </a:ln>
         </p:spPr>
         <p:style>
-          <a:lnRef idx="0"/>
-          <a:fillRef idx="0"/>
-          <a:effectRef idx="0"/>
+          <a:lnRef idx="0">
+            <a:scrgbClr r="0" g="0" b="0"/>
+          </a:lnRef>
+          <a:fillRef idx="0">
+            <a:scrgbClr r="0" g="0" b="0"/>
+          </a:fillRef>
+          <a:effectRef idx="0">
+            <a:scrgbClr r="0" g="0" b="0"/>
+          </a:effectRef>
           <a:fontRef idx="minor"/>
         </p:style>
         <p:txBody>
-          <a:bodyPr lIns="90000" rIns="90000" tIns="91440" bIns="91440" anchor="t">
+          <a:bodyPr lIns="90000" tIns="91440" rIns="90000" bIns="91440" anchor="t">
             <a:noAutofit/>
           </a:bodyPr>
+          <a:lstStyle/>
           <a:p>
             <a:pPr defTabSz="914400">
               <a:lnSpc>
@@ -7465,11 +7284,11 @@
                 <a:spcPts val="1199"/>
               </a:spcBef>
               <a:tabLst>
-                <a:tab algn="l" pos="0"/>
+                <a:tab pos="0" algn="l"/>
               </a:tabLst>
             </a:pPr>
             <a:r>
-              <a:rPr b="0" lang="pt-PT" sz="1400" strike="noStrike" u="none">
+              <a:rPr lang="pt-PT" sz="1400" b="0" u="none" strike="noStrike">
                 <a:solidFill>
                   <a:schemeClr val="dk1"/>
                 </a:solidFill>
@@ -7480,7 +7299,7 @@
               </a:rPr>
               <a:t>A metodologia adoptada é a metodologia quantitativa que foca na recolha e análise de dados. </a:t>
             </a:r>
-            <a:endParaRPr b="0" lang="pt-PT" sz="1400" strike="noStrike" u="none">
+            <a:endParaRPr lang="pt-PT" sz="1400" b="0" u="none" strike="noStrike">
               <a:solidFill>
                 <a:srgbClr val="000000"/>
               </a:solidFill>
@@ -7493,19 +7312,14 @@
       </p:sp>
     </p:spTree>
   </p:cSld>
-  <mc:AlternateContent>
-    <mc:Choice Requires="p14">
-      <p:transition spd="slow" p14:dur="2000"/>
-    </mc:Choice>
-    <mc:Fallback>
-      <p:transition spd="slow"/>
-    </mc:Fallback>
-  </mc:AlternateContent>
+  <p:clrMapOvr>
+    <a:masterClrMapping/>
+  </p:clrMapOvr>
 </p:sld>
 </file>
 
 <file path=ppt/slides/slide9.xml><?xml version="1.0" encoding="utf-8"?>
-<p:sld xmlns:a="http://schemas.openxmlformats.org/drawingml/2006/main" xmlns:p="http://schemas.openxmlformats.org/presentationml/2006/main" xmlns:r="http://schemas.openxmlformats.org/officeDocument/2006/relationships" xmlns:p14="http://schemas.microsoft.com/office/powerpoint/2010/main" xmlns:p15="http://schemas.microsoft.com/office/powerpoint/2012/main" xmlns:mc="http://schemas.openxmlformats.org/markup-compatibility/2006">
+<p:sld xmlns:a="http://schemas.openxmlformats.org/drawingml/2006/main" xmlns:r="http://schemas.openxmlformats.org/officeDocument/2006/relationships" xmlns:p="http://schemas.openxmlformats.org/presentationml/2006/main">
   <p:cSld>
     <p:spTree>
       <p:nvGrpSpPr>
@@ -7541,26 +7355,33 @@
           </a:ln>
         </p:spPr>
         <p:style>
-          <a:lnRef idx="0"/>
-          <a:fillRef idx="0"/>
-          <a:effectRef idx="0"/>
+          <a:lnRef idx="0">
+            <a:scrgbClr r="0" g="0" b="0"/>
+          </a:lnRef>
+          <a:fillRef idx="0">
+            <a:scrgbClr r="0" g="0" b="0"/>
+          </a:fillRef>
+          <a:effectRef idx="0">
+            <a:scrgbClr r="0" g="0" b="0"/>
+          </a:effectRef>
           <a:fontRef idx="minor"/>
         </p:style>
         <p:txBody>
-          <a:bodyPr lIns="90000" rIns="90000" tIns="91440" bIns="91440" anchor="t">
+          <a:bodyPr lIns="90000" tIns="91440" rIns="90000" bIns="91440" anchor="t">
             <a:noAutofit/>
           </a:bodyPr>
+          <a:lstStyle/>
           <a:p>
             <a:pPr defTabSz="914400">
               <a:lnSpc>
                 <a:spcPct val="100000"/>
               </a:lnSpc>
               <a:tabLst>
-                <a:tab algn="l" pos="0"/>
+                <a:tab pos="0" algn="l"/>
               </a:tabLst>
             </a:pPr>
             <a:r>
-              <a:rPr b="1" lang="pt-PT" sz="1800" strike="noStrike" u="none">
+              <a:rPr lang="pt-PT" sz="1800" b="1" u="none" strike="noStrike">
                 <a:solidFill>
                   <a:schemeClr val="dk1"/>
                 </a:solidFill>
@@ -7571,7 +7392,7 @@
               </a:rPr>
               <a:t>Tecnologias</a:t>
             </a:r>
-            <a:endParaRPr b="0" lang="pt-PT" sz="1800" strike="noStrike" u="none">
+            <a:endParaRPr lang="pt-PT" sz="1800" b="0" u="none" strike="noStrike">
               <a:solidFill>
                 <a:srgbClr val="000000"/>
               </a:solidFill>
@@ -7589,7 +7410,7 @@
           <p:nvPr/>
         </p:nvPicPr>
         <p:blipFill>
-          <a:blip r:embed="rId1"/>
+          <a:blip r:embed="rId2"/>
           <a:stretch/>
         </p:blipFill>
         <p:spPr>
@@ -7613,8 +7434,8 @@
           <p:nvPr/>
         </p:nvPicPr>
         <p:blipFill>
-          <a:blip r:embed="rId2"/>
-          <a:srcRect l="0" t="-4284" r="-18212" b="-9629"/>
+          <a:blip r:embed="rId3"/>
+          <a:srcRect t="-4284" r="-18212" b="-9629"/>
           <a:stretch/>
         </p:blipFill>
         <p:spPr>
@@ -7628,7 +7449,7 @@
           <a:noFill/>
           <a:ln w="0">
             <a:solidFill>
-              <a:srgbClr val="ffffff"/>
+              <a:srgbClr val="FFFFFF"/>
             </a:solidFill>
           </a:ln>
         </p:spPr>
@@ -7640,7 +7461,7 @@
           <p:nvPr/>
         </p:nvPicPr>
         <p:blipFill>
-          <a:blip r:embed="rId3"/>
+          <a:blip r:embed="rId4"/>
           <a:stretch/>
         </p:blipFill>
         <p:spPr>
@@ -7664,7 +7485,7 @@
           <p:nvPr/>
         </p:nvPicPr>
         <p:blipFill>
-          <a:blip r:embed="rId4"/>
+          <a:blip r:embed="rId5"/>
           <a:stretch/>
         </p:blipFill>
         <p:spPr>
@@ -7688,7 +7509,7 @@
           <p:nvPr/>
         </p:nvPicPr>
         <p:blipFill>
-          <a:blip r:embed="rId5"/>
+          <a:blip r:embed="rId6"/>
           <a:stretch/>
         </p:blipFill>
         <p:spPr>
@@ -7707,66 +7528,61 @@
       </p:pic>
     </p:spTree>
   </p:cSld>
-  <mc:AlternateContent>
-    <mc:Choice Requires="p14">
-      <p:transition spd="slow" p14:dur="2000"/>
-    </mc:Choice>
-    <mc:Fallback>
-      <p:transition spd="slow"/>
-    </mc:Fallback>
-  </mc:AlternateContent>
+  <p:clrMapOvr>
+    <a:masterClrMapping/>
+  </p:clrMapOvr>
 </p:sld>
 </file>
 
 <file path=ppt/theme/theme1.xml><?xml version="1.0" encoding="utf-8"?>
-<a:theme xmlns:a="http://schemas.openxmlformats.org/drawingml/2006/main" xmlns:r="http://schemas.openxmlformats.org/officeDocument/2006/relationships" name="Simple Light">
+<a:theme xmlns:a="http://schemas.openxmlformats.org/drawingml/2006/main" name="Simple Light">
   <a:themeElements>
     <a:clrScheme name="Simple Light">
       <a:dk1>
         <a:srgbClr val="000000"/>
       </a:dk1>
       <a:lt1>
-        <a:srgbClr val="ffffff"/>
+        <a:srgbClr val="FFFFFF"/>
       </a:lt1>
       <a:dk2>
         <a:srgbClr val="595959"/>
       </a:dk2>
       <a:lt2>
-        <a:srgbClr val="eeeeee"/>
+        <a:srgbClr val="EEEEEE"/>
       </a:lt2>
       <a:accent1>
-        <a:srgbClr val="4285f4"/>
+        <a:srgbClr val="4285F4"/>
       </a:accent1>
       <a:accent2>
         <a:srgbClr val="212121"/>
       </a:accent2>
       <a:accent3>
-        <a:srgbClr val="78909c"/>
+        <a:srgbClr val="78909C"/>
       </a:accent3>
       <a:accent4>
-        <a:srgbClr val="ffab40"/>
+        <a:srgbClr val="FFAB40"/>
       </a:accent4>
       <a:accent5>
-        <a:srgbClr val="0097a7"/>
+        <a:srgbClr val="0097A7"/>
       </a:accent5>
       <a:accent6>
-        <a:srgbClr val="eeff41"/>
+        <a:srgbClr val="EEFF41"/>
       </a:accent6>
       <a:hlink>
-        <a:srgbClr val="0097a7"/>
+        <a:srgbClr val="0097A7"/>
       </a:hlink>
       <a:folHlink>
-        <a:srgbClr val="0097a7"/>
+        <a:srgbClr val="0097A7"/>
       </a:folHlink>
     </a:clrScheme>
     <a:fontScheme name="Office">
       <a:majorFont>
-        <a:latin typeface="Arial" pitchFamily="0" charset="1"/>
+        <a:latin typeface="Arial"/>
         <a:ea typeface=""/>
         <a:cs typeface=""/>
       </a:majorFont>
       <a:minorFont>
-        <a:latin typeface="Arial" pitchFamily="0" charset="1"/>
+        <a:latin typeface="Arial"/>
         <a:ea typeface=""/>
         <a:cs typeface=""/>
       </a:minorFont>
@@ -7795,7 +7611,7 @@
             </a:gs>
           </a:gsLst>
           <a:lin ang="16200000" scaled="1"/>
-          <a:tileRect l="0" t="0" r="0" b="0"/>
+          <a:tileRect/>
         </a:gradFill>
         <a:gradFill>
           <a:gsLst>
@@ -7813,7 +7629,7 @@
             </a:gs>
           </a:gsLst>
           <a:lin ang="16200000" scaled="0"/>
-          <a:tileRect l="0" t="0" r="0" b="0"/>
+          <a:tileRect/>
         </a:gradFill>
       </a:fillStyleLst>
       <a:lnStyleLst>
@@ -7864,7 +7680,7 @@
           <a:path path="circle">
             <a:fillToRect l="50000" t="-80000" r="50000" b="180000"/>
           </a:path>
-          <a:tileRect l="0" t="0" r="0" b="0"/>
+          <a:tileRect/>
         </a:gradFill>
         <a:gradFill>
           <a:gsLst>
@@ -7882,10 +7698,12 @@
           <a:path path="circle">
             <a:fillToRect l="50000" t="50000" r="50000" b="50000"/>
           </a:path>
-          <a:tileRect l="0" t="0" r="0" b="0"/>
+          <a:tileRect/>
         </a:gradFill>
       </a:bgFillStyleLst>
     </a:fmtScheme>
   </a:themeElements>
+  <a:objectDefaults/>
+  <a:extraClrSchemeLst/>
 </a:theme>
 </file>
--- a/Apresentação_Cristiano&José.pptx
+++ b/Apresentação_Cristiano&José.pptx
@@ -1,145 +1,42 @@
 
 <file path=ppt/presentation.xml><?xml version="1.0" encoding="utf-8"?>
-<p:presentation xmlns:a="http://schemas.openxmlformats.org/drawingml/2006/main" xmlns:r="http://schemas.openxmlformats.org/officeDocument/2006/relationships" xmlns:p="http://schemas.openxmlformats.org/presentationml/2006/main">
+<p:presentation xmlns:a="http://schemas.openxmlformats.org/drawingml/2006/main" xmlns:p="http://schemas.openxmlformats.org/presentationml/2006/main" xmlns:r="http://schemas.openxmlformats.org/officeDocument/2006/relationships" xmlns:p14="http://schemas.microsoft.com/office/powerpoint/2010/main" xmlns:p15="http://schemas.microsoft.com/office/powerpoint/2012/main" xmlns:mc="http://schemas.openxmlformats.org/markup-compatibility/2006">
   <p:sldMasterIdLst>
-    <p:sldMasterId id="2147483648" r:id="rId1"/>
+    <p:sldMasterId id="2147483648" r:id="rId2"/>
   </p:sldMasterIdLst>
   <p:sldIdLst>
-    <p:sldId id="256" r:id="rId2"/>
-    <p:sldId id="257" r:id="rId3"/>
-    <p:sldId id="258" r:id="rId4"/>
-    <p:sldId id="259" r:id="rId5"/>
-    <p:sldId id="260" r:id="rId6"/>
-    <p:sldId id="261" r:id="rId7"/>
-    <p:sldId id="262" r:id="rId8"/>
-    <p:sldId id="263" r:id="rId9"/>
-    <p:sldId id="264" r:id="rId10"/>
-    <p:sldId id="265" r:id="rId11"/>
-    <p:sldId id="270" r:id="rId12"/>
-    <p:sldId id="271" r:id="rId13"/>
+    <p:sldId id="256" r:id="rId3"/>
+    <p:sldId id="257" r:id="rId4"/>
+    <p:sldId id="258" r:id="rId5"/>
+    <p:sldId id="259" r:id="rId6"/>
+    <p:sldId id="260" r:id="rId7"/>
+    <p:sldId id="261" r:id="rId8"/>
+    <p:sldId id="262" r:id="rId9"/>
+    <p:sldId id="263" r:id="rId10"/>
+    <p:sldId id="264" r:id="rId11"/>
+    <p:sldId id="265" r:id="rId12"/>
+    <p:sldId id="266" r:id="rId13"/>
     <p:sldId id="267" r:id="rId14"/>
     <p:sldId id="268" r:id="rId15"/>
     <p:sldId id="269" r:id="rId16"/>
-    <p:sldId id="272" r:id="rId17"/>
+    <p:sldId id="270" r:id="rId17"/>
+    <p:sldId id="271" r:id="rId18"/>
+    <p:sldId id="272" r:id="rId19"/>
+    <p:sldId id="273" r:id="rId20"/>
   </p:sldIdLst>
-  <p:sldSz cx="9144000" cy="5143500" type="screen16x9"/>
+  <p:sldSz cx="9144000" cy="5143500"/>
   <p:notesSz cx="7559675" cy="10691813"/>
-  <p:defaultTextStyle>
-    <a:defPPr>
-      <a:defRPr lang="pt-PT"/>
-    </a:defPPr>
-    <a:lvl1pPr marL="0" algn="l" defTabSz="914400" rtl="0" eaLnBrk="1" latinLnBrk="0" hangingPunct="1">
-      <a:defRPr sz="1800" kern="1200">
-        <a:solidFill>
-          <a:schemeClr val="tx1"/>
-        </a:solidFill>
-        <a:latin typeface="+mn-lt"/>
-        <a:ea typeface="+mn-ea"/>
-        <a:cs typeface="+mn-cs"/>
-      </a:defRPr>
-    </a:lvl1pPr>
-    <a:lvl2pPr marL="457200" algn="l" defTabSz="914400" rtl="0" eaLnBrk="1" latinLnBrk="0" hangingPunct="1">
-      <a:defRPr sz="1800" kern="1200">
-        <a:solidFill>
-          <a:schemeClr val="tx1"/>
-        </a:solidFill>
-        <a:latin typeface="+mn-lt"/>
-        <a:ea typeface="+mn-ea"/>
-        <a:cs typeface="+mn-cs"/>
-      </a:defRPr>
-    </a:lvl2pPr>
-    <a:lvl3pPr marL="914400" algn="l" defTabSz="914400" rtl="0" eaLnBrk="1" latinLnBrk="0" hangingPunct="1">
-      <a:defRPr sz="1800" kern="1200">
-        <a:solidFill>
-          <a:schemeClr val="tx1"/>
-        </a:solidFill>
-        <a:latin typeface="+mn-lt"/>
-        <a:ea typeface="+mn-ea"/>
-        <a:cs typeface="+mn-cs"/>
-      </a:defRPr>
-    </a:lvl3pPr>
-    <a:lvl4pPr marL="1371600" algn="l" defTabSz="914400" rtl="0" eaLnBrk="1" latinLnBrk="0" hangingPunct="1">
-      <a:defRPr sz="1800" kern="1200">
-        <a:solidFill>
-          <a:schemeClr val="tx1"/>
-        </a:solidFill>
-        <a:latin typeface="+mn-lt"/>
-        <a:ea typeface="+mn-ea"/>
-        <a:cs typeface="+mn-cs"/>
-      </a:defRPr>
-    </a:lvl4pPr>
-    <a:lvl5pPr marL="1828800" algn="l" defTabSz="914400" rtl="0" eaLnBrk="1" latinLnBrk="0" hangingPunct="1">
-      <a:defRPr sz="1800" kern="1200">
-        <a:solidFill>
-          <a:schemeClr val="tx1"/>
-        </a:solidFill>
-        <a:latin typeface="+mn-lt"/>
-        <a:ea typeface="+mn-ea"/>
-        <a:cs typeface="+mn-cs"/>
-      </a:defRPr>
-    </a:lvl5pPr>
-    <a:lvl6pPr marL="2286000" algn="l" defTabSz="914400" rtl="0" eaLnBrk="1" latinLnBrk="0" hangingPunct="1">
-      <a:defRPr sz="1800" kern="1200">
-        <a:solidFill>
-          <a:schemeClr val="tx1"/>
-        </a:solidFill>
-        <a:latin typeface="+mn-lt"/>
-        <a:ea typeface="+mn-ea"/>
-        <a:cs typeface="+mn-cs"/>
-      </a:defRPr>
-    </a:lvl6pPr>
-    <a:lvl7pPr marL="2743200" algn="l" defTabSz="914400" rtl="0" eaLnBrk="1" latinLnBrk="0" hangingPunct="1">
-      <a:defRPr sz="1800" kern="1200">
-        <a:solidFill>
-          <a:schemeClr val="tx1"/>
-        </a:solidFill>
-        <a:latin typeface="+mn-lt"/>
-        <a:ea typeface="+mn-ea"/>
-        <a:cs typeface="+mn-cs"/>
-      </a:defRPr>
-    </a:lvl7pPr>
-    <a:lvl8pPr marL="3200400" algn="l" defTabSz="914400" rtl="0" eaLnBrk="1" latinLnBrk="0" hangingPunct="1">
-      <a:defRPr sz="1800" kern="1200">
-        <a:solidFill>
-          <a:schemeClr val="tx1"/>
-        </a:solidFill>
-        <a:latin typeface="+mn-lt"/>
-        <a:ea typeface="+mn-ea"/>
-        <a:cs typeface="+mn-cs"/>
-      </a:defRPr>
-    </a:lvl8pPr>
-    <a:lvl9pPr marL="3657600" algn="l" defTabSz="914400" rtl="0" eaLnBrk="1" latinLnBrk="0" hangingPunct="1">
-      <a:defRPr sz="1800" kern="1200">
-        <a:solidFill>
-          <a:schemeClr val="tx1"/>
-        </a:solidFill>
-        <a:latin typeface="+mn-lt"/>
-        <a:ea typeface="+mn-ea"/>
-        <a:cs typeface="+mn-cs"/>
-      </a:defRPr>
-    </a:lvl9pPr>
-  </p:defaultTextStyle>
 </p:presentation>
 </file>
 
-<file path=ppt/revisionInfo.xml><?xml version="1.0" encoding="utf-8"?>
-<p1510:revInfo xmlns:a="http://schemas.openxmlformats.org/drawingml/2006/main" xmlns:r="http://schemas.openxmlformats.org/officeDocument/2006/relationships" xmlns:p1510="http://schemas.microsoft.com/office/powerpoint/2015/10/main">
-  <p1510:revLst>
-    <p1510:client id="{440B71E5-B544-46A5-BD5E-838399FC70A4}" v="3" dt="2026-05-10T19:50:59.359"/>
-    <p1510:client id="{C4091688-A97B-4B0E-A795-1BA6403BB0FA}" v="1" dt="2026-05-10T19:58:17.791"/>
-  </p1510:revLst>
-</p1510:revInfo>
-</file>
-
 <file path=ppt/slideLayouts/slideLayout1.xml><?xml version="1.0" encoding="utf-8"?>
-<p:sldLayout xmlns:a="http://schemas.openxmlformats.org/drawingml/2006/main" xmlns:r="http://schemas.openxmlformats.org/officeDocument/2006/relationships" xmlns:p="http://schemas.openxmlformats.org/presentationml/2006/main" type="tx" preserve="1">
-  <p:cSld name="TITLE_AND_BODY">
+<p:sldLayout xmlns:a="http://schemas.openxmlformats.org/drawingml/2006/main" xmlns:p="http://schemas.openxmlformats.org/presentationml/2006/main" xmlns:r="http://schemas.openxmlformats.org/officeDocument/2006/relationships" xmlns:p14="http://schemas.microsoft.com/office/powerpoint/2010/main" xmlns:p15="http://schemas.microsoft.com/office/powerpoint/2012/main" xmlns:mc="http://schemas.openxmlformats.org/markup-compatibility/2006" type="blank" preserve="1">
+  <p:cSld name="SECTION_HEADER">
     <p:bg>
       <p:bgPr>
         <a:solidFill>
-          <a:srgbClr val="FFFFFF"/>
+          <a:srgbClr val="ffffff"/>
         </a:solidFill>
-        <a:effectLst/>
       </p:bgPr>
     </p:bg>
     <p:spTree>
@@ -158,7 +55,7 @@
       </p:grpSpPr>
       <p:sp>
         <p:nvSpPr>
-          <p:cNvPr id="3" name="PlaceHolder 1"/>
+          <p:cNvPr id="0" name="PlaceHolder 1"/>
           <p:cNvSpPr>
             <a:spLocks noGrp="1"/>
           </p:cNvSpPr>
@@ -168,8 +65,8 @@
         </p:nvSpPr>
         <p:spPr>
           <a:xfrm>
-            <a:off x="311760" y="444960"/>
-            <a:ext cx="8516520" cy="568800"/>
+            <a:off x="311760" y="2151000"/>
+            <a:ext cx="8515080" cy="836280"/>
           </a:xfrm>
           <a:prstGeom prst="rect">
             <a:avLst/>
@@ -180,10 +77,9 @@
           </a:ln>
         </p:spPr>
         <p:txBody>
-          <a:bodyPr lIns="91440" tIns="91440" rIns="91440" bIns="91440" anchor="t">
-            <a:normAutofit lnSpcReduction="9999"/>
+          <a:bodyPr lIns="91440" rIns="91440" tIns="91440" bIns="91440" anchor="ctr">
+            <a:normAutofit/>
           </a:bodyPr>
-          <a:lstStyle/>
           <a:p>
             <a:pPr indent="0" defTabSz="914400">
               <a:lnSpc>
@@ -191,11 +87,11 @@
               </a:lnSpc>
               <a:buNone/>
               <a:tabLst>
-                <a:tab pos="0" algn="l"/>
-              </a:tabLst>
-            </a:pPr>
-            <a:r>
-              <a:rPr lang="pt-PT" sz="2800" b="0" u="none" strike="noStrike">
+                <a:tab algn="l" pos="0"/>
+              </a:tabLst>
+            </a:pPr>
+            <a:r>
+              <a:rPr b="0" lang="pt-PT" sz="3600" strike="noStrike" u="none">
                 <a:solidFill>
                   <a:srgbClr val="000000"/>
                 </a:solidFill>
@@ -205,23 +101,31 @@
               </a:rPr>
               <a:t>Clique para editar o formato do título</a:t>
             </a:r>
+            <a:endParaRPr b="0" lang="pt-PT" sz="3600" strike="noStrike" u="none">
+              <a:solidFill>
+                <a:srgbClr val="000000"/>
+              </a:solidFill>
+              <a:effectLst/>
+              <a:uFillTx/>
+              <a:latin typeface="Arial"/>
+            </a:endParaRPr>
           </a:p>
         </p:txBody>
       </p:sp>
       <p:sp>
         <p:nvSpPr>
-          <p:cNvPr id="4" name="PlaceHolder 2"/>
+          <p:cNvPr id="1" name="PlaceHolder 2"/>
           <p:cNvSpPr>
             <a:spLocks noGrp="1"/>
           </p:cNvSpPr>
           <p:nvPr>
-            <p:ph type="body"/>
+            <p:ph type="sldNum" idx="1"/>
           </p:nvPr>
         </p:nvSpPr>
         <p:spPr>
           <a:xfrm>
-            <a:off x="311760" y="1152360"/>
-            <a:ext cx="8516520" cy="3412440"/>
+            <a:off x="8472600" y="4663080"/>
+            <a:ext cx="543240" cy="388080"/>
           </a:xfrm>
           <a:prstGeom prst="rect">
             <a:avLst/>
@@ -232,226 +136,7 @@
           </a:ln>
         </p:spPr>
         <p:txBody>
-          <a:bodyPr lIns="91440" tIns="91440" rIns="91440" bIns="91440" anchor="t">
-            <a:normAutofit/>
-          </a:bodyPr>
-          <a:lstStyle/>
-          <a:p>
-            <a:pPr marL="432000" indent="-324000" defTabSz="914400">
-              <a:lnSpc>
-                <a:spcPct val="100000"/>
-              </a:lnSpc>
-              <a:spcBef>
-                <a:spcPts val="1417"/>
-              </a:spcBef>
-              <a:buClr>
-                <a:srgbClr val="000000"/>
-              </a:buClr>
-              <a:buSzPct val="45000"/>
-              <a:buFont typeface="Wingdings" charset="2"/>
-              <a:buChar char=""/>
-            </a:pPr>
-            <a:r>
-              <a:rPr lang="pt-PT" sz="1800" b="0" u="none" strike="noStrike">
-                <a:solidFill>
-                  <a:srgbClr val="000000"/>
-                </a:solidFill>
-                <a:effectLst/>
-                <a:uFillTx/>
-                <a:latin typeface="Arial"/>
-              </a:rPr>
-              <a:t>Clique para editar o formato de texto dos tópicos</a:t>
-            </a:r>
-          </a:p>
-          <a:p>
-            <a:pPr marL="864000" lvl="1" indent="-324000" defTabSz="914400">
-              <a:lnSpc>
-                <a:spcPct val="100000"/>
-              </a:lnSpc>
-              <a:spcBef>
-                <a:spcPts val="1134"/>
-              </a:spcBef>
-              <a:buClr>
-                <a:srgbClr val="000000"/>
-              </a:buClr>
-              <a:buSzPct val="75000"/>
-              <a:buFont typeface="Symbol" charset="2"/>
-              <a:buChar char=""/>
-            </a:pPr>
-            <a:r>
-              <a:rPr lang="pt-PT" sz="1800" b="0" u="none" strike="noStrike">
-                <a:solidFill>
-                  <a:srgbClr val="000000"/>
-                </a:solidFill>
-                <a:effectLst/>
-                <a:uFillTx/>
-                <a:latin typeface="Arial"/>
-              </a:rPr>
-              <a:t>Segundo nível de tópicos</a:t>
-            </a:r>
-          </a:p>
-          <a:p>
-            <a:pPr marL="1296000" lvl="2" indent="-288000" defTabSz="914400">
-              <a:lnSpc>
-                <a:spcPct val="100000"/>
-              </a:lnSpc>
-              <a:spcBef>
-                <a:spcPts val="850"/>
-              </a:spcBef>
-              <a:buClr>
-                <a:srgbClr val="000000"/>
-              </a:buClr>
-              <a:buSzPct val="45000"/>
-              <a:buFont typeface="Wingdings" charset="2"/>
-              <a:buChar char=""/>
-            </a:pPr>
-            <a:r>
-              <a:rPr lang="pt-PT" sz="1800" b="0" u="none" strike="noStrike">
-                <a:solidFill>
-                  <a:srgbClr val="000000"/>
-                </a:solidFill>
-                <a:effectLst/>
-                <a:uFillTx/>
-                <a:latin typeface="Arial"/>
-              </a:rPr>
-              <a:t>Terceiro nível de tópicos</a:t>
-            </a:r>
-          </a:p>
-          <a:p>
-            <a:pPr marL="1728000" lvl="3" indent="-216000" defTabSz="914400">
-              <a:lnSpc>
-                <a:spcPct val="100000"/>
-              </a:lnSpc>
-              <a:spcBef>
-                <a:spcPts val="567"/>
-              </a:spcBef>
-              <a:buClr>
-                <a:srgbClr val="000000"/>
-              </a:buClr>
-              <a:buSzPct val="75000"/>
-              <a:buFont typeface="Symbol" charset="2"/>
-              <a:buChar char=""/>
-            </a:pPr>
-            <a:r>
-              <a:rPr lang="pt-PT" sz="1800" b="0" u="none" strike="noStrike">
-                <a:solidFill>
-                  <a:srgbClr val="000000"/>
-                </a:solidFill>
-                <a:effectLst/>
-                <a:uFillTx/>
-                <a:latin typeface="Arial"/>
-              </a:rPr>
-              <a:t>Quarto nível de tópicos</a:t>
-            </a:r>
-          </a:p>
-          <a:p>
-            <a:pPr marL="2160000" lvl="4" indent="-216000" defTabSz="914400">
-              <a:lnSpc>
-                <a:spcPct val="100000"/>
-              </a:lnSpc>
-              <a:spcBef>
-                <a:spcPts val="283"/>
-              </a:spcBef>
-              <a:buClr>
-                <a:srgbClr val="000000"/>
-              </a:buClr>
-              <a:buSzPct val="45000"/>
-              <a:buFont typeface="Wingdings" charset="2"/>
-              <a:buChar char=""/>
-            </a:pPr>
-            <a:r>
-              <a:rPr lang="pt-PT" sz="1800" b="0" u="none" strike="noStrike">
-                <a:solidFill>
-                  <a:srgbClr val="000000"/>
-                </a:solidFill>
-                <a:effectLst/>
-                <a:uFillTx/>
-                <a:latin typeface="Arial"/>
-              </a:rPr>
-              <a:t>Quinto nível de tópicos</a:t>
-            </a:r>
-          </a:p>
-          <a:p>
-            <a:pPr marL="2592000" lvl="5" indent="-216000" defTabSz="914400">
-              <a:lnSpc>
-                <a:spcPct val="100000"/>
-              </a:lnSpc>
-              <a:spcBef>
-                <a:spcPts val="283"/>
-              </a:spcBef>
-              <a:buClr>
-                <a:srgbClr val="000000"/>
-              </a:buClr>
-              <a:buSzPct val="45000"/>
-              <a:buFont typeface="Wingdings" charset="2"/>
-              <a:buChar char=""/>
-            </a:pPr>
-            <a:r>
-              <a:rPr lang="pt-PT" sz="1800" b="0" u="none" strike="noStrike">
-                <a:solidFill>
-                  <a:srgbClr val="000000"/>
-                </a:solidFill>
-                <a:effectLst/>
-                <a:uFillTx/>
-                <a:latin typeface="Arial"/>
-              </a:rPr>
-              <a:t>Sexto nível de tópicos</a:t>
-            </a:r>
-          </a:p>
-          <a:p>
-            <a:pPr marL="3024000" lvl="6" indent="-216000" defTabSz="914400">
-              <a:lnSpc>
-                <a:spcPct val="100000"/>
-              </a:lnSpc>
-              <a:spcBef>
-                <a:spcPts val="283"/>
-              </a:spcBef>
-              <a:buClr>
-                <a:srgbClr val="000000"/>
-              </a:buClr>
-              <a:buSzPct val="45000"/>
-              <a:buFont typeface="Wingdings" charset="2"/>
-              <a:buChar char=""/>
-            </a:pPr>
-            <a:r>
-              <a:rPr lang="pt-PT" sz="1800" b="0" u="none" strike="noStrike">
-                <a:solidFill>
-                  <a:srgbClr val="000000"/>
-                </a:solidFill>
-                <a:effectLst/>
-                <a:uFillTx/>
-                <a:latin typeface="Arial"/>
-              </a:rPr>
-              <a:t>Sétimo nível de tópicos</a:t>
-            </a:r>
-          </a:p>
-        </p:txBody>
-      </p:sp>
-      <p:sp>
-        <p:nvSpPr>
-          <p:cNvPr id="2" name="PlaceHolder 3"/>
-          <p:cNvSpPr>
-            <a:spLocks noGrp="1"/>
-          </p:cNvSpPr>
-          <p:nvPr>
-            <p:ph type="sldNum" idx="1"/>
-          </p:nvPr>
-        </p:nvSpPr>
-        <p:spPr>
-          <a:xfrm>
-            <a:off x="8472600" y="4663080"/>
-            <a:ext cx="544680" cy="389520"/>
-          </a:xfrm>
-          <a:prstGeom prst="rect">
-            <a:avLst/>
-          </a:prstGeom>
-          <a:noFill/>
-          <a:ln w="0">
-            <a:noFill/>
-          </a:ln>
-        </p:spPr>
-        <p:txBody>
-          <a:bodyPr lIns="91440" tIns="91440" rIns="91440" bIns="91440" anchor="ctr">
+          <a:bodyPr lIns="91440" rIns="91440" tIns="91440" bIns="91440" anchor="ctr">
             <a:normAutofit/>
           </a:bodyPr>
           <a:lstStyle>
@@ -461,9 +146,9 @@
               </a:lnSpc>
               <a:buNone/>
               <a:tabLst>
-                <a:tab pos="0" algn="l"/>
-              </a:tabLst>
-              <a:defRPr lang="pt-PT" sz="1000" b="0" u="none" strike="noStrike">
+                <a:tab algn="l" pos="0"/>
+              </a:tabLst>
+              <a:defRPr b="0" lang="pt-PT" sz="1000" strike="noStrike" u="none">
                 <a:solidFill>
                   <a:schemeClr val="dk2"/>
                 </a:solidFill>
@@ -481,11 +166,11 @@
               </a:lnSpc>
               <a:buNone/>
               <a:tabLst>
-                <a:tab pos="0" algn="l"/>
-              </a:tabLst>
-            </a:pPr>
-            <a:fld id="{F3000015-3E70-4F48-A467-7F09F34F656F}" type="slidenum">
-              <a:rPr lang="pt-PT" sz="1000" b="0" u="none" strike="noStrike">
+                <a:tab algn="l" pos="0"/>
+              </a:tabLst>
+            </a:pPr>
+            <a:fld id="{1F932AA2-BF14-4938-A860-88E91011E041}" type="slidenum">
+              <a:rPr b="0" lang="pt-PT" sz="1000" strike="noStrike" u="none">
                 <a:solidFill>
                   <a:schemeClr val="dk2"/>
                 </a:solidFill>
@@ -494,9 +179,9 @@
                 <a:latin typeface="Arial"/>
                 <a:ea typeface="Arial"/>
               </a:rPr>
-              <a:t>‹nº›</a:t>
+              <a:t>&lt;número&gt;</a:t>
             </a:fld>
-            <a:endParaRPr lang="pt-PT" sz="1000" b="0" u="none" strike="noStrike">
+            <a:endParaRPr b="0" lang="pt-PT" sz="1000" strike="noStrike" u="none">
               <a:solidFill>
                 <a:srgbClr val="000000"/>
               </a:solidFill>
@@ -509,21 +194,17 @@
       </p:sp>
     </p:spTree>
   </p:cSld>
-  <p:clrMapOvr>
-    <a:masterClrMapping/>
-  </p:clrMapOvr>
 </p:sldLayout>
 </file>
 
 <file path=ppt/slideLayouts/slideLayout10.xml><?xml version="1.0" encoding="utf-8"?>
-<p:sldLayout xmlns:a="http://schemas.openxmlformats.org/drawingml/2006/main" xmlns:r="http://schemas.openxmlformats.org/officeDocument/2006/relationships" xmlns:p="http://schemas.openxmlformats.org/presentationml/2006/main" type="blank" preserve="1">
-  <p:cSld name="BLANK">
+<p:sldLayout xmlns:a="http://schemas.openxmlformats.org/drawingml/2006/main" xmlns:p="http://schemas.openxmlformats.org/presentationml/2006/main" xmlns:r="http://schemas.openxmlformats.org/officeDocument/2006/relationships" xmlns:p14="http://schemas.microsoft.com/office/powerpoint/2010/main" xmlns:p15="http://schemas.microsoft.com/office/powerpoint/2012/main" xmlns:mc="http://schemas.openxmlformats.org/markup-compatibility/2006" type="tx" preserve="1">
+  <p:cSld name="TITLE_AND_BODY">
     <p:bg>
       <p:bgPr>
         <a:solidFill>
-          <a:srgbClr val="FFFFFF"/>
+          <a:srgbClr val="ffffff"/>
         </a:solidFill>
-        <a:effectLst/>
       </p:bgPr>
     </p:bg>
     <p:spTree>
@@ -542,7 +223,340 @@
       </p:grpSpPr>
       <p:sp>
         <p:nvSpPr>
-          <p:cNvPr id="25" name="PlaceHolder 1"/>
+          <p:cNvPr id="24" name="PlaceHolder 1"/>
+          <p:cNvSpPr>
+            <a:spLocks noGrp="1"/>
+          </p:cNvSpPr>
+          <p:nvPr>
+            <p:ph type="title"/>
+          </p:nvPr>
+        </p:nvSpPr>
+        <p:spPr>
+          <a:xfrm>
+            <a:off x="311760" y="444960"/>
+            <a:ext cx="8515080" cy="567360"/>
+          </a:xfrm>
+          <a:prstGeom prst="rect">
+            <a:avLst/>
+          </a:prstGeom>
+          <a:noFill/>
+          <a:ln w="0">
+            <a:noFill/>
+          </a:ln>
+        </p:spPr>
+        <p:txBody>
+          <a:bodyPr lIns="91440" rIns="91440" tIns="91440" bIns="91440" anchor="t">
+            <a:normAutofit lnSpcReduction="9999"/>
+          </a:bodyPr>
+          <a:p>
+            <a:pPr indent="0" defTabSz="914400">
+              <a:lnSpc>
+                <a:spcPct val="100000"/>
+              </a:lnSpc>
+              <a:buNone/>
+              <a:tabLst>
+                <a:tab algn="l" pos="0"/>
+              </a:tabLst>
+            </a:pPr>
+            <a:r>
+              <a:rPr b="0" lang="pt-PT" sz="2800" strike="noStrike" u="none">
+                <a:solidFill>
+                  <a:srgbClr val="000000"/>
+                </a:solidFill>
+                <a:effectLst/>
+                <a:uFillTx/>
+                <a:latin typeface="Arial"/>
+              </a:rPr>
+              <a:t>Clique para editar o formato do título</a:t>
+            </a:r>
+            <a:endParaRPr b="0" lang="pt-PT" sz="2800" strike="noStrike" u="none">
+              <a:solidFill>
+                <a:srgbClr val="000000"/>
+              </a:solidFill>
+              <a:effectLst/>
+              <a:uFillTx/>
+              <a:latin typeface="Arial"/>
+            </a:endParaRPr>
+          </a:p>
+        </p:txBody>
+      </p:sp>
+      <p:sp>
+        <p:nvSpPr>
+          <p:cNvPr id="25" name="PlaceHolder 2"/>
+          <p:cNvSpPr>
+            <a:spLocks noGrp="1"/>
+          </p:cNvSpPr>
+          <p:nvPr>
+            <p:ph type="body"/>
+          </p:nvPr>
+        </p:nvSpPr>
+        <p:spPr>
+          <a:xfrm>
+            <a:off x="311760" y="1152360"/>
+            <a:ext cx="8515080" cy="3411000"/>
+          </a:xfrm>
+          <a:prstGeom prst="rect">
+            <a:avLst/>
+          </a:prstGeom>
+          <a:noFill/>
+          <a:ln w="0">
+            <a:noFill/>
+          </a:ln>
+        </p:spPr>
+        <p:txBody>
+          <a:bodyPr lIns="91440" rIns="91440" tIns="91440" bIns="91440" anchor="t">
+            <a:normAutofit/>
+          </a:bodyPr>
+          <a:p>
+            <a:pPr marL="432000" indent="-324000" defTabSz="914400">
+              <a:lnSpc>
+                <a:spcPct val="100000"/>
+              </a:lnSpc>
+              <a:spcBef>
+                <a:spcPts val="1417"/>
+              </a:spcBef>
+              <a:buClr>
+                <a:srgbClr val="000000"/>
+              </a:buClr>
+              <a:buSzPct val="45000"/>
+              <a:buFont typeface="Wingdings" charset="2"/>
+              <a:buChar char=""/>
+            </a:pPr>
+            <a:r>
+              <a:rPr b="0" lang="pt-PT" sz="1800" strike="noStrike" u="none">
+                <a:solidFill>
+                  <a:srgbClr val="000000"/>
+                </a:solidFill>
+                <a:effectLst/>
+                <a:uFillTx/>
+                <a:latin typeface="Arial"/>
+              </a:rPr>
+              <a:t>Clique para editar o formato de texto dos tópicos</a:t>
+            </a:r>
+            <a:endParaRPr b="0" lang="pt-PT" sz="1800" strike="noStrike" u="none">
+              <a:solidFill>
+                <a:srgbClr val="000000"/>
+              </a:solidFill>
+              <a:effectLst/>
+              <a:uFillTx/>
+              <a:latin typeface="Arial"/>
+            </a:endParaRPr>
+          </a:p>
+          <a:p>
+            <a:pPr lvl="1" marL="864000" indent="-324000" defTabSz="914400">
+              <a:lnSpc>
+                <a:spcPct val="100000"/>
+              </a:lnSpc>
+              <a:spcBef>
+                <a:spcPts val="1134"/>
+              </a:spcBef>
+              <a:buClr>
+                <a:srgbClr val="000000"/>
+              </a:buClr>
+              <a:buSzPct val="75000"/>
+              <a:buFont typeface="Symbol" charset="2"/>
+              <a:buChar char=""/>
+            </a:pPr>
+            <a:r>
+              <a:rPr b="0" lang="pt-PT" sz="1800" strike="noStrike" u="none">
+                <a:solidFill>
+                  <a:srgbClr val="000000"/>
+                </a:solidFill>
+                <a:effectLst/>
+                <a:uFillTx/>
+                <a:latin typeface="Arial"/>
+              </a:rPr>
+              <a:t>Segundo nível de tópicos</a:t>
+            </a:r>
+            <a:endParaRPr b="0" lang="pt-PT" sz="1800" strike="noStrike" u="none">
+              <a:solidFill>
+                <a:srgbClr val="000000"/>
+              </a:solidFill>
+              <a:effectLst/>
+              <a:uFillTx/>
+              <a:latin typeface="Arial"/>
+            </a:endParaRPr>
+          </a:p>
+          <a:p>
+            <a:pPr lvl="2" marL="1296000" indent="-288000" defTabSz="914400">
+              <a:lnSpc>
+                <a:spcPct val="100000"/>
+              </a:lnSpc>
+              <a:spcBef>
+                <a:spcPts val="850"/>
+              </a:spcBef>
+              <a:buClr>
+                <a:srgbClr val="000000"/>
+              </a:buClr>
+              <a:buSzPct val="45000"/>
+              <a:buFont typeface="Wingdings" charset="2"/>
+              <a:buChar char=""/>
+            </a:pPr>
+            <a:r>
+              <a:rPr b="0" lang="pt-PT" sz="1800" strike="noStrike" u="none">
+                <a:solidFill>
+                  <a:srgbClr val="000000"/>
+                </a:solidFill>
+                <a:effectLst/>
+                <a:uFillTx/>
+                <a:latin typeface="Arial"/>
+              </a:rPr>
+              <a:t>Terceiro nível de tópicos</a:t>
+            </a:r>
+            <a:endParaRPr b="0" lang="pt-PT" sz="1800" strike="noStrike" u="none">
+              <a:solidFill>
+                <a:srgbClr val="000000"/>
+              </a:solidFill>
+              <a:effectLst/>
+              <a:uFillTx/>
+              <a:latin typeface="Arial"/>
+            </a:endParaRPr>
+          </a:p>
+          <a:p>
+            <a:pPr lvl="3" marL="1728000" indent="-216000" defTabSz="914400">
+              <a:lnSpc>
+                <a:spcPct val="100000"/>
+              </a:lnSpc>
+              <a:spcBef>
+                <a:spcPts val="567"/>
+              </a:spcBef>
+              <a:buClr>
+                <a:srgbClr val="000000"/>
+              </a:buClr>
+              <a:buSzPct val="75000"/>
+              <a:buFont typeface="Symbol" charset="2"/>
+              <a:buChar char=""/>
+            </a:pPr>
+            <a:r>
+              <a:rPr b="0" lang="pt-PT" sz="1800" strike="noStrike" u="none">
+                <a:solidFill>
+                  <a:srgbClr val="000000"/>
+                </a:solidFill>
+                <a:effectLst/>
+                <a:uFillTx/>
+                <a:latin typeface="Arial"/>
+              </a:rPr>
+              <a:t>Quarto nível de tópicos</a:t>
+            </a:r>
+            <a:endParaRPr b="0" lang="pt-PT" sz="1800" strike="noStrike" u="none">
+              <a:solidFill>
+                <a:srgbClr val="000000"/>
+              </a:solidFill>
+              <a:effectLst/>
+              <a:uFillTx/>
+              <a:latin typeface="Arial"/>
+            </a:endParaRPr>
+          </a:p>
+          <a:p>
+            <a:pPr lvl="4" marL="2160000" indent="-216000" defTabSz="914400">
+              <a:lnSpc>
+                <a:spcPct val="100000"/>
+              </a:lnSpc>
+              <a:spcBef>
+                <a:spcPts val="283"/>
+              </a:spcBef>
+              <a:buClr>
+                <a:srgbClr val="000000"/>
+              </a:buClr>
+              <a:buSzPct val="45000"/>
+              <a:buFont typeface="Wingdings" charset="2"/>
+              <a:buChar char=""/>
+            </a:pPr>
+            <a:r>
+              <a:rPr b="0" lang="pt-PT" sz="1800" strike="noStrike" u="none">
+                <a:solidFill>
+                  <a:srgbClr val="000000"/>
+                </a:solidFill>
+                <a:effectLst/>
+                <a:uFillTx/>
+                <a:latin typeface="Arial"/>
+              </a:rPr>
+              <a:t>Quinto nível de tópicos</a:t>
+            </a:r>
+            <a:endParaRPr b="0" lang="pt-PT" sz="1800" strike="noStrike" u="none">
+              <a:solidFill>
+                <a:srgbClr val="000000"/>
+              </a:solidFill>
+              <a:effectLst/>
+              <a:uFillTx/>
+              <a:latin typeface="Arial"/>
+            </a:endParaRPr>
+          </a:p>
+          <a:p>
+            <a:pPr lvl="5" marL="2592000" indent="-216000" defTabSz="914400">
+              <a:lnSpc>
+                <a:spcPct val="100000"/>
+              </a:lnSpc>
+              <a:spcBef>
+                <a:spcPts val="283"/>
+              </a:spcBef>
+              <a:buClr>
+                <a:srgbClr val="000000"/>
+              </a:buClr>
+              <a:buSzPct val="45000"/>
+              <a:buFont typeface="Wingdings" charset="2"/>
+              <a:buChar char=""/>
+            </a:pPr>
+            <a:r>
+              <a:rPr b="0" lang="pt-PT" sz="1800" strike="noStrike" u="none">
+                <a:solidFill>
+                  <a:srgbClr val="000000"/>
+                </a:solidFill>
+                <a:effectLst/>
+                <a:uFillTx/>
+                <a:latin typeface="Arial"/>
+              </a:rPr>
+              <a:t>Sexto nível de tópicos</a:t>
+            </a:r>
+            <a:endParaRPr b="0" lang="pt-PT" sz="1800" strike="noStrike" u="none">
+              <a:solidFill>
+                <a:srgbClr val="000000"/>
+              </a:solidFill>
+              <a:effectLst/>
+              <a:uFillTx/>
+              <a:latin typeface="Arial"/>
+            </a:endParaRPr>
+          </a:p>
+          <a:p>
+            <a:pPr lvl="6" marL="3024000" indent="-216000" defTabSz="914400">
+              <a:lnSpc>
+                <a:spcPct val="100000"/>
+              </a:lnSpc>
+              <a:spcBef>
+                <a:spcPts val="283"/>
+              </a:spcBef>
+              <a:buClr>
+                <a:srgbClr val="000000"/>
+              </a:buClr>
+              <a:buSzPct val="45000"/>
+              <a:buFont typeface="Wingdings" charset="2"/>
+              <a:buChar char=""/>
+            </a:pPr>
+            <a:r>
+              <a:rPr b="0" lang="pt-PT" sz="1800" strike="noStrike" u="none">
+                <a:solidFill>
+                  <a:srgbClr val="000000"/>
+                </a:solidFill>
+                <a:effectLst/>
+                <a:uFillTx/>
+                <a:latin typeface="Arial"/>
+              </a:rPr>
+              <a:t>Sétimo nível de tópicos</a:t>
+            </a:r>
+            <a:endParaRPr b="0" lang="pt-PT" sz="1800" strike="noStrike" u="none">
+              <a:solidFill>
+                <a:srgbClr val="000000"/>
+              </a:solidFill>
+              <a:effectLst/>
+              <a:uFillTx/>
+              <a:latin typeface="Arial"/>
+            </a:endParaRPr>
+          </a:p>
+        </p:txBody>
+      </p:sp>
+      <p:sp>
+        <p:nvSpPr>
+          <p:cNvPr id="26" name="PlaceHolder 3"/>
           <p:cNvSpPr>
             <a:spLocks noGrp="1"/>
           </p:cNvSpPr>
@@ -553,7 +567,7 @@
         <p:spPr>
           <a:xfrm>
             <a:off x="8472600" y="4663080"/>
-            <a:ext cx="544680" cy="389520"/>
+            <a:ext cx="543240" cy="388080"/>
           </a:xfrm>
           <a:prstGeom prst="rect">
             <a:avLst/>
@@ -564,7 +578,7 @@
           </a:ln>
         </p:spPr>
         <p:txBody>
-          <a:bodyPr lIns="91440" tIns="91440" rIns="91440" bIns="91440" anchor="ctr">
+          <a:bodyPr lIns="91440" rIns="91440" tIns="91440" bIns="91440" anchor="ctr">
             <a:normAutofit/>
           </a:bodyPr>
           <a:lstStyle>
@@ -574,9 +588,9 @@
               </a:lnSpc>
               <a:buNone/>
               <a:tabLst>
-                <a:tab pos="0" algn="l"/>
-              </a:tabLst>
-              <a:defRPr lang="pt-PT" sz="1000" b="0" u="none" strike="noStrike">
+                <a:tab algn="l" pos="0"/>
+              </a:tabLst>
+              <a:defRPr b="0" lang="pt-PT" sz="1000" strike="noStrike" u="none">
                 <a:solidFill>
                   <a:schemeClr val="dk2"/>
                 </a:solidFill>
@@ -594,11 +608,11 @@
               </a:lnSpc>
               <a:buNone/>
               <a:tabLst>
-                <a:tab pos="0" algn="l"/>
-              </a:tabLst>
-            </a:pPr>
-            <a:fld id="{077D5153-3E4B-454F-A086-B93E3CFAECDF}" type="slidenum">
-              <a:rPr lang="pt-PT" sz="1000" b="0" u="none" strike="noStrike">
+                <a:tab algn="l" pos="0"/>
+              </a:tabLst>
+            </a:pPr>
+            <a:fld id="{698E3D64-98C1-41BC-A255-9EE386B9E09D}" type="slidenum">
+              <a:rPr b="0" lang="pt-PT" sz="1000" strike="noStrike" u="none">
                 <a:solidFill>
                   <a:schemeClr val="dk2"/>
                 </a:solidFill>
@@ -607,9 +621,9 @@
                 <a:latin typeface="Arial"/>
                 <a:ea typeface="Arial"/>
               </a:rPr>
-              <a:t>‹nº›</a:t>
+              <a:t>&lt;número&gt;</a:t>
             </a:fld>
-            <a:endParaRPr lang="pt-PT" sz="1000" b="0" u="none" strike="noStrike">
+            <a:endParaRPr b="0" lang="pt-PT" sz="1000" strike="noStrike" u="none">
               <a:solidFill>
                 <a:srgbClr val="000000"/>
               </a:solidFill>
@@ -617,297 +631,22 @@
               <a:uFillTx/>
               <a:latin typeface="Times New Roman"/>
             </a:endParaRPr>
-          </a:p>
-        </p:txBody>
-      </p:sp>
-      <p:sp>
-        <p:nvSpPr>
-          <p:cNvPr id="26" name="PlaceHolder 2"/>
-          <p:cNvSpPr>
-            <a:spLocks noGrp="1"/>
-          </p:cNvSpPr>
-          <p:nvPr>
-            <p:ph type="title"/>
-          </p:nvPr>
-        </p:nvSpPr>
-        <p:spPr>
-          <a:xfrm>
-            <a:off x="457200" y="205200"/>
-            <a:ext cx="8225640" cy="855000"/>
-          </a:xfrm>
-          <a:prstGeom prst="rect">
-            <a:avLst/>
-          </a:prstGeom>
-          <a:noFill/>
-          <a:ln w="0">
-            <a:noFill/>
-          </a:ln>
-        </p:spPr>
-        <p:txBody>
-          <a:bodyPr lIns="0" tIns="0" rIns="0" bIns="0" anchor="ctr">
-            <a:noAutofit/>
-          </a:bodyPr>
-          <a:lstStyle/>
-          <a:p>
-            <a:pPr indent="0" defTabSz="914400">
-              <a:lnSpc>
-                <a:spcPct val="100000"/>
-              </a:lnSpc>
-              <a:buNone/>
-              <a:tabLst>
-                <a:tab pos="0" algn="l"/>
-              </a:tabLst>
-            </a:pPr>
-            <a:r>
-              <a:rPr lang="pt-PT" sz="1400" b="0" u="none" strike="noStrike">
-                <a:solidFill>
-                  <a:srgbClr val="000000"/>
-                </a:solidFill>
-                <a:effectLst/>
-                <a:uFillTx/>
-                <a:latin typeface="Arial"/>
-              </a:rPr>
-              <a:t>Clique para editar o formato do título</a:t>
-            </a:r>
-          </a:p>
-        </p:txBody>
-      </p:sp>
-      <p:sp>
-        <p:nvSpPr>
-          <p:cNvPr id="27" name="PlaceHolder 3"/>
-          <p:cNvSpPr>
-            <a:spLocks noGrp="1"/>
-          </p:cNvSpPr>
-          <p:nvPr>
-            <p:ph type="body"/>
-          </p:nvPr>
-        </p:nvSpPr>
-        <p:spPr>
-          <a:xfrm>
-            <a:off x="457200" y="1203480"/>
-            <a:ext cx="8225640" cy="2979360"/>
-          </a:xfrm>
-          <a:prstGeom prst="rect">
-            <a:avLst/>
-          </a:prstGeom>
-          <a:noFill/>
-          <a:ln w="0">
-            <a:noFill/>
-          </a:ln>
-        </p:spPr>
-        <p:txBody>
-          <a:bodyPr lIns="0" tIns="0" rIns="0" bIns="0" anchor="t">
-            <a:normAutofit/>
-          </a:bodyPr>
-          <a:lstStyle/>
-          <a:p>
-            <a:pPr marL="432000" indent="-324000" defTabSz="914400">
-              <a:lnSpc>
-                <a:spcPct val="100000"/>
-              </a:lnSpc>
-              <a:spcBef>
-                <a:spcPts val="1417"/>
-              </a:spcBef>
-              <a:buClr>
-                <a:srgbClr val="000000"/>
-              </a:buClr>
-              <a:buSzPct val="45000"/>
-              <a:buFont typeface="Wingdings" charset="2"/>
-              <a:buChar char=""/>
-            </a:pPr>
-            <a:r>
-              <a:rPr lang="pt-PT" sz="1400" b="0" u="none" strike="noStrike">
-                <a:solidFill>
-                  <a:srgbClr val="000000"/>
-                </a:solidFill>
-                <a:effectLst/>
-                <a:uFillTx/>
-                <a:latin typeface="Arial"/>
-              </a:rPr>
-              <a:t>Clique para editar o formato de texto dos tópicos</a:t>
-            </a:r>
-          </a:p>
-          <a:p>
-            <a:pPr marL="864000" lvl="1" indent="-324000" defTabSz="914400">
-              <a:lnSpc>
-                <a:spcPct val="100000"/>
-              </a:lnSpc>
-              <a:spcBef>
-                <a:spcPts val="1134"/>
-              </a:spcBef>
-              <a:buClr>
-                <a:srgbClr val="000000"/>
-              </a:buClr>
-              <a:buSzPct val="75000"/>
-              <a:buFont typeface="Symbol" charset="2"/>
-              <a:buChar char=""/>
-            </a:pPr>
-            <a:r>
-              <a:rPr lang="pt-PT" sz="1400" b="0" u="none" strike="noStrike">
-                <a:solidFill>
-                  <a:srgbClr val="000000"/>
-                </a:solidFill>
-                <a:effectLst/>
-                <a:uFillTx/>
-                <a:latin typeface="Arial"/>
-              </a:rPr>
-              <a:t>Segundo nível de tópicos</a:t>
-            </a:r>
-          </a:p>
-          <a:p>
-            <a:pPr marL="1296000" lvl="2" indent="-288000" defTabSz="914400">
-              <a:lnSpc>
-                <a:spcPct val="100000"/>
-              </a:lnSpc>
-              <a:spcBef>
-                <a:spcPts val="850"/>
-              </a:spcBef>
-              <a:buClr>
-                <a:srgbClr val="000000"/>
-              </a:buClr>
-              <a:buSzPct val="45000"/>
-              <a:buFont typeface="Wingdings" charset="2"/>
-              <a:buChar char=""/>
-            </a:pPr>
-            <a:r>
-              <a:rPr lang="pt-PT" sz="1400" b="0" u="none" strike="noStrike">
-                <a:solidFill>
-                  <a:srgbClr val="000000"/>
-                </a:solidFill>
-                <a:effectLst/>
-                <a:uFillTx/>
-                <a:latin typeface="Arial"/>
-              </a:rPr>
-              <a:t>Terceiro nível de tópicos</a:t>
-            </a:r>
-          </a:p>
-          <a:p>
-            <a:pPr marL="1728000" lvl="3" indent="-216000" defTabSz="914400">
-              <a:lnSpc>
-                <a:spcPct val="100000"/>
-              </a:lnSpc>
-              <a:spcBef>
-                <a:spcPts val="567"/>
-              </a:spcBef>
-              <a:buClr>
-                <a:srgbClr val="000000"/>
-              </a:buClr>
-              <a:buSzPct val="75000"/>
-              <a:buFont typeface="Symbol" charset="2"/>
-              <a:buChar char=""/>
-            </a:pPr>
-            <a:r>
-              <a:rPr lang="pt-PT" sz="1400" b="0" u="none" strike="noStrike">
-                <a:solidFill>
-                  <a:srgbClr val="000000"/>
-                </a:solidFill>
-                <a:effectLst/>
-                <a:uFillTx/>
-                <a:latin typeface="Arial"/>
-              </a:rPr>
-              <a:t>Quarto nível de tópicos</a:t>
-            </a:r>
-          </a:p>
-          <a:p>
-            <a:pPr marL="2160000" lvl="4" indent="-216000" defTabSz="914400">
-              <a:lnSpc>
-                <a:spcPct val="100000"/>
-              </a:lnSpc>
-              <a:spcBef>
-                <a:spcPts val="283"/>
-              </a:spcBef>
-              <a:buClr>
-                <a:srgbClr val="000000"/>
-              </a:buClr>
-              <a:buSzPct val="45000"/>
-              <a:buFont typeface="Wingdings" charset="2"/>
-              <a:buChar char=""/>
-            </a:pPr>
-            <a:r>
-              <a:rPr lang="pt-PT" sz="2000" b="0" u="none" strike="noStrike">
-                <a:solidFill>
-                  <a:srgbClr val="000000"/>
-                </a:solidFill>
-                <a:effectLst/>
-                <a:uFillTx/>
-                <a:latin typeface="Arial"/>
-              </a:rPr>
-              <a:t>Quinto nível de tópicos</a:t>
-            </a:r>
-          </a:p>
-          <a:p>
-            <a:pPr marL="2592000" lvl="5" indent="-216000" defTabSz="914400">
-              <a:lnSpc>
-                <a:spcPct val="100000"/>
-              </a:lnSpc>
-              <a:spcBef>
-                <a:spcPts val="283"/>
-              </a:spcBef>
-              <a:buClr>
-                <a:srgbClr val="000000"/>
-              </a:buClr>
-              <a:buSzPct val="45000"/>
-              <a:buFont typeface="Wingdings" charset="2"/>
-              <a:buChar char=""/>
-            </a:pPr>
-            <a:r>
-              <a:rPr lang="pt-PT" sz="2000" b="0" u="none" strike="noStrike">
-                <a:solidFill>
-                  <a:srgbClr val="000000"/>
-                </a:solidFill>
-                <a:effectLst/>
-                <a:uFillTx/>
-                <a:latin typeface="Arial"/>
-              </a:rPr>
-              <a:t>Sexto nível de tópicos</a:t>
-            </a:r>
-          </a:p>
-          <a:p>
-            <a:pPr marL="3024000" lvl="6" indent="-216000" defTabSz="914400">
-              <a:lnSpc>
-                <a:spcPct val="100000"/>
-              </a:lnSpc>
-              <a:spcBef>
-                <a:spcPts val="283"/>
-              </a:spcBef>
-              <a:buClr>
-                <a:srgbClr val="000000"/>
-              </a:buClr>
-              <a:buSzPct val="45000"/>
-              <a:buFont typeface="Wingdings" charset="2"/>
-              <a:buChar char=""/>
-            </a:pPr>
-            <a:r>
-              <a:rPr lang="pt-PT" sz="2000" b="0" u="none" strike="noStrike">
-                <a:solidFill>
-                  <a:srgbClr val="000000"/>
-                </a:solidFill>
-                <a:effectLst/>
-                <a:uFillTx/>
-                <a:latin typeface="Arial"/>
-              </a:rPr>
-              <a:t>Sétimo nível de tópicos</a:t>
-            </a:r>
           </a:p>
         </p:txBody>
       </p:sp>
     </p:spTree>
   </p:cSld>
-  <p:clrMapOvr>
-    <a:masterClrMapping/>
-  </p:clrMapOvr>
 </p:sldLayout>
 </file>
 
 <file path=ppt/slideLayouts/slideLayout11.xml><?xml version="1.0" encoding="utf-8"?>
-<p:sldLayout xmlns:a="http://schemas.openxmlformats.org/drawingml/2006/main" xmlns:r="http://schemas.openxmlformats.org/officeDocument/2006/relationships" xmlns:p="http://schemas.openxmlformats.org/presentationml/2006/main" type="blank" preserve="1">
-  <p:cSld name="SECTION_HEADER">
+<p:sldLayout xmlns:a="http://schemas.openxmlformats.org/drawingml/2006/main" xmlns:p="http://schemas.openxmlformats.org/presentationml/2006/main" xmlns:r="http://schemas.openxmlformats.org/officeDocument/2006/relationships" xmlns:p14="http://schemas.microsoft.com/office/powerpoint/2010/main" xmlns:p15="http://schemas.microsoft.com/office/powerpoint/2012/main" xmlns:mc="http://schemas.openxmlformats.org/markup-compatibility/2006" type="blank" preserve="1">
+  <p:cSld name="BLANK">
     <p:bg>
       <p:bgPr>
         <a:solidFill>
-          <a:srgbClr val="FFFFFF"/>
+          <a:srgbClr val="ffffff"/>
         </a:solidFill>
-        <a:effectLst/>
       </p:bgPr>
     </p:bg>
     <p:spTree>
@@ -926,18 +665,18 @@
       </p:grpSpPr>
       <p:sp>
         <p:nvSpPr>
-          <p:cNvPr id="28" name="PlaceHolder 1"/>
+          <p:cNvPr id="27" name="PlaceHolder 1"/>
           <p:cNvSpPr>
             <a:spLocks noGrp="1"/>
           </p:cNvSpPr>
           <p:nvPr>
-            <p:ph type="title"/>
+            <p:ph type="sldNum" idx="11"/>
           </p:nvPr>
         </p:nvSpPr>
         <p:spPr>
           <a:xfrm>
-            <a:off x="311760" y="2151000"/>
-            <a:ext cx="8516520" cy="837720"/>
+            <a:off x="8472600" y="4663080"/>
+            <a:ext cx="543240" cy="388080"/>
           </a:xfrm>
           <a:prstGeom prst="rect">
             <a:avLst/>
@@ -948,48 +687,76 @@
           </a:ln>
         </p:spPr>
         <p:txBody>
-          <a:bodyPr lIns="91440" tIns="91440" rIns="91440" bIns="91440" anchor="ctr">
+          <a:bodyPr lIns="91440" rIns="91440" tIns="91440" bIns="91440" anchor="ctr">
             <a:normAutofit/>
           </a:bodyPr>
-          <a:lstStyle/>
-          <a:p>
-            <a:pPr indent="0" defTabSz="914400">
+          <a:lstStyle>
+            <a:lvl1pPr indent="0" algn="r" defTabSz="914400">
               <a:lnSpc>
                 <a:spcPct val="100000"/>
               </a:lnSpc>
               <a:buNone/>
               <a:tabLst>
-                <a:tab pos="0" algn="l"/>
-              </a:tabLst>
-            </a:pPr>
-            <a:r>
-              <a:rPr lang="pt-PT" sz="3600" b="0" u="none" strike="noStrike">
-                <a:solidFill>
-                  <a:srgbClr val="000000"/>
-                </a:solidFill>
-                <a:effectLst/>
-                <a:uFillTx/>
-                <a:latin typeface="Arial"/>
-              </a:rPr>
-              <a:t>Clique para editar o formato do título</a:t>
-            </a:r>
+                <a:tab algn="l" pos="0"/>
+              </a:tabLst>
+              <a:defRPr b="0" lang="pt-PT" sz="1000" strike="noStrike" u="none">
+                <a:solidFill>
+                  <a:schemeClr val="dk2"/>
+                </a:solidFill>
+                <a:effectLst/>
+                <a:uFillTx/>
+                <a:latin typeface="Arial"/>
+                <a:ea typeface="Arial"/>
+              </a:defRPr>
+            </a:lvl1pPr>
+          </a:lstStyle>
+          <a:p>
+            <a:pPr indent="0" algn="r" defTabSz="914400">
+              <a:lnSpc>
+                <a:spcPct val="100000"/>
+              </a:lnSpc>
+              <a:buNone/>
+              <a:tabLst>
+                <a:tab algn="l" pos="0"/>
+              </a:tabLst>
+            </a:pPr>
+            <a:fld id="{FCB33AA9-DF5D-4C4F-80AB-4BA29B5B1E71}" type="slidenum">
+              <a:rPr b="0" lang="pt-PT" sz="1000" strike="noStrike" u="none">
+                <a:solidFill>
+                  <a:schemeClr val="dk2"/>
+                </a:solidFill>
+                <a:effectLst/>
+                <a:uFillTx/>
+                <a:latin typeface="Arial"/>
+                <a:ea typeface="Arial"/>
+              </a:rPr>
+              <a:t>&lt;número&gt;</a:t>
+            </a:fld>
+            <a:endParaRPr b="0" lang="pt-PT" sz="1000" strike="noStrike" u="none">
+              <a:solidFill>
+                <a:srgbClr val="000000"/>
+              </a:solidFill>
+              <a:effectLst/>
+              <a:uFillTx/>
+              <a:latin typeface="Times New Roman"/>
+            </a:endParaRPr>
           </a:p>
         </p:txBody>
       </p:sp>
       <p:sp>
         <p:nvSpPr>
-          <p:cNvPr id="29" name="PlaceHolder 2"/>
+          <p:cNvPr id="28" name="PlaceHolder 2"/>
           <p:cNvSpPr>
             <a:spLocks noGrp="1"/>
           </p:cNvSpPr>
           <p:nvPr>
-            <p:ph type="sldNum" idx="11"/>
+            <p:ph type="title"/>
           </p:nvPr>
         </p:nvSpPr>
         <p:spPr>
           <a:xfrm>
-            <a:off x="8472600" y="4663080"/>
-            <a:ext cx="544680" cy="389520"/>
+            <a:off x="457200" y="205200"/>
+            <a:ext cx="8224200" cy="853560"/>
           </a:xfrm>
           <a:prstGeom prst="rect">
             <a:avLst/>
@@ -1000,79 +767,328 @@
           </a:ln>
         </p:spPr>
         <p:txBody>
-          <a:bodyPr lIns="91440" tIns="91440" rIns="91440" bIns="91440" anchor="ctr">
+          <a:bodyPr lIns="0" rIns="0" tIns="0" bIns="0" anchor="ctr">
+            <a:noAutofit/>
+          </a:bodyPr>
+          <a:p>
+            <a:pPr indent="0" defTabSz="914400">
+              <a:lnSpc>
+                <a:spcPct val="100000"/>
+              </a:lnSpc>
+              <a:buNone/>
+              <a:tabLst>
+                <a:tab algn="l" pos="0"/>
+              </a:tabLst>
+            </a:pPr>
+            <a:r>
+              <a:rPr b="0" lang="pt-PT" sz="1400" strike="noStrike" u="none">
+                <a:solidFill>
+                  <a:srgbClr val="000000"/>
+                </a:solidFill>
+                <a:effectLst/>
+                <a:uFillTx/>
+                <a:latin typeface="Arial"/>
+              </a:rPr>
+              <a:t>Clique para editar o formato do título</a:t>
+            </a:r>
+            <a:endParaRPr b="0" lang="pt-PT" sz="1400" strike="noStrike" u="none">
+              <a:solidFill>
+                <a:srgbClr val="000000"/>
+              </a:solidFill>
+              <a:effectLst/>
+              <a:uFillTx/>
+              <a:latin typeface="Arial"/>
+            </a:endParaRPr>
+          </a:p>
+        </p:txBody>
+      </p:sp>
+      <p:sp>
+        <p:nvSpPr>
+          <p:cNvPr id="29" name="PlaceHolder 3"/>
+          <p:cNvSpPr>
+            <a:spLocks noGrp="1"/>
+          </p:cNvSpPr>
+          <p:nvPr>
+            <p:ph type="body"/>
+          </p:nvPr>
+        </p:nvSpPr>
+        <p:spPr>
+          <a:xfrm>
+            <a:off x="457200" y="1203480"/>
+            <a:ext cx="8224200" cy="2977920"/>
+          </a:xfrm>
+          <a:prstGeom prst="rect">
+            <a:avLst/>
+          </a:prstGeom>
+          <a:noFill/>
+          <a:ln w="0">
+            <a:noFill/>
+          </a:ln>
+        </p:spPr>
+        <p:txBody>
+          <a:bodyPr lIns="0" rIns="0" tIns="0" bIns="0" anchor="t">
             <a:normAutofit/>
           </a:bodyPr>
-          <a:lstStyle>
-            <a:lvl1pPr indent="0" algn="r" defTabSz="914400">
-              <a:lnSpc>
-                <a:spcPct val="100000"/>
-              </a:lnSpc>
-              <a:buNone/>
-              <a:tabLst>
-                <a:tab pos="0" algn="l"/>
-              </a:tabLst>
-              <a:defRPr lang="pt-PT" sz="1000" b="0" u="none" strike="noStrike">
-                <a:solidFill>
-                  <a:schemeClr val="dk2"/>
-                </a:solidFill>
-                <a:effectLst/>
-                <a:uFillTx/>
-                <a:latin typeface="Arial"/>
-                <a:ea typeface="Arial"/>
-              </a:defRPr>
-            </a:lvl1pPr>
-          </a:lstStyle>
-          <a:p>
-            <a:pPr indent="0" algn="r" defTabSz="914400">
-              <a:lnSpc>
-                <a:spcPct val="100000"/>
-              </a:lnSpc>
-              <a:buNone/>
-              <a:tabLst>
-                <a:tab pos="0" algn="l"/>
-              </a:tabLst>
-            </a:pPr>
-            <a:fld id="{C92D7670-D5D9-4FC0-B716-86CF49F97A47}" type="slidenum">
-              <a:rPr lang="pt-PT" sz="1000" b="0" u="none" strike="noStrike">
-                <a:solidFill>
-                  <a:schemeClr val="dk2"/>
-                </a:solidFill>
-                <a:effectLst/>
-                <a:uFillTx/>
-                <a:latin typeface="Arial"/>
-                <a:ea typeface="Arial"/>
-              </a:rPr>
-              <a:t>‹nº›</a:t>
-            </a:fld>
-            <a:endParaRPr lang="pt-PT" sz="1000" b="0" u="none" strike="noStrike">
-              <a:solidFill>
-                <a:srgbClr val="000000"/>
-              </a:solidFill>
-              <a:effectLst/>
-              <a:uFillTx/>
-              <a:latin typeface="Times New Roman"/>
+          <a:p>
+            <a:pPr marL="432000" indent="-324000" defTabSz="914400">
+              <a:lnSpc>
+                <a:spcPct val="100000"/>
+              </a:lnSpc>
+              <a:spcBef>
+                <a:spcPts val="1417"/>
+              </a:spcBef>
+              <a:buClr>
+                <a:srgbClr val="000000"/>
+              </a:buClr>
+              <a:buSzPct val="45000"/>
+              <a:buFont typeface="Wingdings" charset="2"/>
+              <a:buChar char=""/>
+            </a:pPr>
+            <a:r>
+              <a:rPr b="0" lang="pt-PT" sz="1400" strike="noStrike" u="none">
+                <a:solidFill>
+                  <a:srgbClr val="000000"/>
+                </a:solidFill>
+                <a:effectLst/>
+                <a:uFillTx/>
+                <a:latin typeface="Arial"/>
+              </a:rPr>
+              <a:t>Clique para editar o formato de texto dos tópicos</a:t>
+            </a:r>
+            <a:endParaRPr b="0" lang="pt-PT" sz="1400" strike="noStrike" u="none">
+              <a:solidFill>
+                <a:srgbClr val="000000"/>
+              </a:solidFill>
+              <a:effectLst/>
+              <a:uFillTx/>
+              <a:latin typeface="Arial"/>
+            </a:endParaRPr>
+          </a:p>
+          <a:p>
+            <a:pPr lvl="1" marL="864000" indent="-324000" defTabSz="914400">
+              <a:lnSpc>
+                <a:spcPct val="100000"/>
+              </a:lnSpc>
+              <a:spcBef>
+                <a:spcPts val="1134"/>
+              </a:spcBef>
+              <a:buClr>
+                <a:srgbClr val="000000"/>
+              </a:buClr>
+              <a:buSzPct val="75000"/>
+              <a:buFont typeface="Symbol" charset="2"/>
+              <a:buChar char=""/>
+            </a:pPr>
+            <a:r>
+              <a:rPr b="0" lang="pt-PT" sz="1400" strike="noStrike" u="none">
+                <a:solidFill>
+                  <a:srgbClr val="000000"/>
+                </a:solidFill>
+                <a:effectLst/>
+                <a:uFillTx/>
+                <a:latin typeface="Arial"/>
+              </a:rPr>
+              <a:t>Segundo nível de tópicos</a:t>
+            </a:r>
+            <a:endParaRPr b="0" lang="pt-PT" sz="1400" strike="noStrike" u="none">
+              <a:solidFill>
+                <a:srgbClr val="000000"/>
+              </a:solidFill>
+              <a:effectLst/>
+              <a:uFillTx/>
+              <a:latin typeface="Arial"/>
+            </a:endParaRPr>
+          </a:p>
+          <a:p>
+            <a:pPr lvl="2" marL="1296000" indent="-288000" defTabSz="914400">
+              <a:lnSpc>
+                <a:spcPct val="100000"/>
+              </a:lnSpc>
+              <a:spcBef>
+                <a:spcPts val="850"/>
+              </a:spcBef>
+              <a:buClr>
+                <a:srgbClr val="000000"/>
+              </a:buClr>
+              <a:buSzPct val="45000"/>
+              <a:buFont typeface="Wingdings" charset="2"/>
+              <a:buChar char=""/>
+            </a:pPr>
+            <a:r>
+              <a:rPr b="0" lang="pt-PT" sz="1400" strike="noStrike" u="none">
+                <a:solidFill>
+                  <a:srgbClr val="000000"/>
+                </a:solidFill>
+                <a:effectLst/>
+                <a:uFillTx/>
+                <a:latin typeface="Arial"/>
+              </a:rPr>
+              <a:t>Terceiro nível de tópicos</a:t>
+            </a:r>
+            <a:endParaRPr b="0" lang="pt-PT" sz="1400" strike="noStrike" u="none">
+              <a:solidFill>
+                <a:srgbClr val="000000"/>
+              </a:solidFill>
+              <a:effectLst/>
+              <a:uFillTx/>
+              <a:latin typeface="Arial"/>
+            </a:endParaRPr>
+          </a:p>
+          <a:p>
+            <a:pPr lvl="3" marL="1728000" indent="-216000" defTabSz="914400">
+              <a:lnSpc>
+                <a:spcPct val="100000"/>
+              </a:lnSpc>
+              <a:spcBef>
+                <a:spcPts val="567"/>
+              </a:spcBef>
+              <a:buClr>
+                <a:srgbClr val="000000"/>
+              </a:buClr>
+              <a:buSzPct val="75000"/>
+              <a:buFont typeface="Symbol" charset="2"/>
+              <a:buChar char=""/>
+            </a:pPr>
+            <a:r>
+              <a:rPr b="0" lang="pt-PT" sz="1400" strike="noStrike" u="none">
+                <a:solidFill>
+                  <a:srgbClr val="000000"/>
+                </a:solidFill>
+                <a:effectLst/>
+                <a:uFillTx/>
+                <a:latin typeface="Arial"/>
+              </a:rPr>
+              <a:t>Quarto nível de tópicos</a:t>
+            </a:r>
+            <a:endParaRPr b="0" lang="pt-PT" sz="1400" strike="noStrike" u="none">
+              <a:solidFill>
+                <a:srgbClr val="000000"/>
+              </a:solidFill>
+              <a:effectLst/>
+              <a:uFillTx/>
+              <a:latin typeface="Arial"/>
+            </a:endParaRPr>
+          </a:p>
+          <a:p>
+            <a:pPr lvl="4" marL="2160000" indent="-216000" defTabSz="914400">
+              <a:lnSpc>
+                <a:spcPct val="100000"/>
+              </a:lnSpc>
+              <a:spcBef>
+                <a:spcPts val="283"/>
+              </a:spcBef>
+              <a:buClr>
+                <a:srgbClr val="000000"/>
+              </a:buClr>
+              <a:buSzPct val="45000"/>
+              <a:buFont typeface="Wingdings" charset="2"/>
+              <a:buChar char=""/>
+            </a:pPr>
+            <a:r>
+              <a:rPr b="0" lang="pt-PT" sz="2000" strike="noStrike" u="none">
+                <a:solidFill>
+                  <a:srgbClr val="000000"/>
+                </a:solidFill>
+                <a:effectLst/>
+                <a:uFillTx/>
+                <a:latin typeface="Arial"/>
+              </a:rPr>
+              <a:t>Quinto nível de tópicos</a:t>
+            </a:r>
+            <a:endParaRPr b="0" lang="pt-PT" sz="2000" strike="noStrike" u="none">
+              <a:solidFill>
+                <a:srgbClr val="000000"/>
+              </a:solidFill>
+              <a:effectLst/>
+              <a:uFillTx/>
+              <a:latin typeface="Arial"/>
+            </a:endParaRPr>
+          </a:p>
+          <a:p>
+            <a:pPr lvl="5" marL="2592000" indent="-216000" defTabSz="914400">
+              <a:lnSpc>
+                <a:spcPct val="100000"/>
+              </a:lnSpc>
+              <a:spcBef>
+                <a:spcPts val="283"/>
+              </a:spcBef>
+              <a:buClr>
+                <a:srgbClr val="000000"/>
+              </a:buClr>
+              <a:buSzPct val="45000"/>
+              <a:buFont typeface="Wingdings" charset="2"/>
+              <a:buChar char=""/>
+            </a:pPr>
+            <a:r>
+              <a:rPr b="0" lang="pt-PT" sz="2000" strike="noStrike" u="none">
+                <a:solidFill>
+                  <a:srgbClr val="000000"/>
+                </a:solidFill>
+                <a:effectLst/>
+                <a:uFillTx/>
+                <a:latin typeface="Arial"/>
+              </a:rPr>
+              <a:t>Sexto nível de tópicos</a:t>
+            </a:r>
+            <a:endParaRPr b="0" lang="pt-PT" sz="2000" strike="noStrike" u="none">
+              <a:solidFill>
+                <a:srgbClr val="000000"/>
+              </a:solidFill>
+              <a:effectLst/>
+              <a:uFillTx/>
+              <a:latin typeface="Arial"/>
+            </a:endParaRPr>
+          </a:p>
+          <a:p>
+            <a:pPr lvl="6" marL="3024000" indent="-216000" defTabSz="914400">
+              <a:lnSpc>
+                <a:spcPct val="100000"/>
+              </a:lnSpc>
+              <a:spcBef>
+                <a:spcPts val="283"/>
+              </a:spcBef>
+              <a:buClr>
+                <a:srgbClr val="000000"/>
+              </a:buClr>
+              <a:buSzPct val="45000"/>
+              <a:buFont typeface="Wingdings" charset="2"/>
+              <a:buChar char=""/>
+            </a:pPr>
+            <a:r>
+              <a:rPr b="0" lang="pt-PT" sz="2000" strike="noStrike" u="none">
+                <a:solidFill>
+                  <a:srgbClr val="000000"/>
+                </a:solidFill>
+                <a:effectLst/>
+                <a:uFillTx/>
+                <a:latin typeface="Arial"/>
+              </a:rPr>
+              <a:t>Sétimo nível de tópicos</a:t>
+            </a:r>
+            <a:endParaRPr b="0" lang="pt-PT" sz="2000" strike="noStrike" u="none">
+              <a:solidFill>
+                <a:srgbClr val="000000"/>
+              </a:solidFill>
+              <a:effectLst/>
+              <a:uFillTx/>
+              <a:latin typeface="Arial"/>
             </a:endParaRPr>
           </a:p>
         </p:txBody>
       </p:sp>
     </p:spTree>
   </p:cSld>
-  <p:clrMapOvr>
-    <a:masterClrMapping/>
-  </p:clrMapOvr>
 </p:sldLayout>
 </file>
 
 <file path=ppt/slideLayouts/slideLayout2.xml><?xml version="1.0" encoding="utf-8"?>
-<p:sldLayout xmlns:a="http://schemas.openxmlformats.org/drawingml/2006/main" xmlns:r="http://schemas.openxmlformats.org/officeDocument/2006/relationships" xmlns:p="http://schemas.openxmlformats.org/presentationml/2006/main" type="blank" preserve="1">
+<p:sldLayout xmlns:a="http://schemas.openxmlformats.org/drawingml/2006/main" xmlns:p="http://schemas.openxmlformats.org/presentationml/2006/main" xmlns:r="http://schemas.openxmlformats.org/officeDocument/2006/relationships" xmlns:p14="http://schemas.microsoft.com/office/powerpoint/2010/main" xmlns:p15="http://schemas.microsoft.com/office/powerpoint/2012/main" xmlns:mc="http://schemas.openxmlformats.org/markup-compatibility/2006" type="blank" preserve="1">
   <p:cSld name="ONE_COLUMN_TEXT">
     <p:bg>
       <p:bgPr>
         <a:solidFill>
-          <a:srgbClr val="FFFFFF"/>
+          <a:srgbClr val="ffffff"/>
         </a:solidFill>
-        <a:effectLst/>
       </p:bgPr>
     </p:bg>
     <p:spTree>
@@ -1091,7 +1107,7 @@
       </p:grpSpPr>
       <p:sp>
         <p:nvSpPr>
-          <p:cNvPr id="3" name="PlaceHolder 1"/>
+          <p:cNvPr id="2" name="PlaceHolder 1"/>
           <p:cNvSpPr>
             <a:spLocks noGrp="1"/>
           </p:cNvSpPr>
@@ -1102,7 +1118,7 @@
         <p:spPr>
           <a:xfrm>
             <a:off x="311760" y="555480"/>
-            <a:ext cx="2804040" cy="751680"/>
+            <a:ext cx="2802600" cy="750240"/>
           </a:xfrm>
           <a:prstGeom prst="rect">
             <a:avLst/>
@@ -1113,10 +1129,9 @@
           </a:ln>
         </p:spPr>
         <p:txBody>
-          <a:bodyPr lIns="91440" tIns="91440" rIns="91440" bIns="91440" anchor="b">
+          <a:bodyPr lIns="91440" rIns="91440" tIns="91440" bIns="91440" anchor="b">
             <a:normAutofit fontScale="92500" lnSpcReduction="19999"/>
           </a:bodyPr>
-          <a:lstStyle/>
           <a:p>
             <a:pPr indent="0" defTabSz="914400">
               <a:lnSpc>
@@ -1124,11 +1139,11 @@
               </a:lnSpc>
               <a:buNone/>
               <a:tabLst>
-                <a:tab pos="0" algn="l"/>
-              </a:tabLst>
-            </a:pPr>
-            <a:r>
-              <a:rPr lang="pt-PT" sz="2400" b="0" u="none" strike="noStrike">
+                <a:tab algn="l" pos="0"/>
+              </a:tabLst>
+            </a:pPr>
+            <a:r>
+              <a:rPr b="0" lang="pt-PT" sz="2400" strike="noStrike" u="none">
                 <a:solidFill>
                   <a:srgbClr val="000000"/>
                 </a:solidFill>
@@ -1138,12 +1153,20 @@
               </a:rPr>
               <a:t>Clique para editar o formato do título</a:t>
             </a:r>
+            <a:endParaRPr b="0" lang="pt-PT" sz="2400" strike="noStrike" u="none">
+              <a:solidFill>
+                <a:srgbClr val="000000"/>
+              </a:solidFill>
+              <a:effectLst/>
+              <a:uFillTx/>
+              <a:latin typeface="Arial"/>
+            </a:endParaRPr>
           </a:p>
         </p:txBody>
       </p:sp>
       <p:sp>
         <p:nvSpPr>
-          <p:cNvPr id="4" name="PlaceHolder 2"/>
+          <p:cNvPr id="3" name="PlaceHolder 2"/>
           <p:cNvSpPr>
             <a:spLocks noGrp="1"/>
           </p:cNvSpPr>
@@ -1154,7 +1177,7 @@
         <p:spPr>
           <a:xfrm>
             <a:off x="311760" y="1389600"/>
-            <a:ext cx="2804040" cy="3175560"/>
+            <a:ext cx="2802600" cy="3174120"/>
           </a:xfrm>
           <a:prstGeom prst="rect">
             <a:avLst/>
@@ -1165,10 +1188,9 @@
           </a:ln>
         </p:spPr>
         <p:txBody>
-          <a:bodyPr lIns="91440" tIns="91440" rIns="91440" bIns="91440" anchor="t">
+          <a:bodyPr lIns="91440" rIns="91440" tIns="91440" bIns="91440" anchor="t">
             <a:normAutofit fontScale="32500" lnSpcReduction="19999"/>
           </a:bodyPr>
-          <a:lstStyle/>
           <a:p>
             <a:pPr marL="432000" indent="-324000" defTabSz="914400">
               <a:lnSpc>
@@ -1185,7 +1207,7 @@
               <a:buChar char=""/>
             </a:pPr>
             <a:r>
-              <a:rPr lang="pt-PT" sz="1200" b="0" u="none" strike="noStrike">
+              <a:rPr b="0" lang="pt-PT" sz="1200" strike="noStrike" u="none">
                 <a:solidFill>
                   <a:srgbClr val="000000"/>
                 </a:solidFill>
@@ -1195,9 +1217,17 @@
               </a:rPr>
               <a:t>Clique para editar o formato de texto dos tópicos</a:t>
             </a:r>
-          </a:p>
-          <a:p>
-            <a:pPr marL="864000" lvl="1" indent="-324000" defTabSz="914400">
+            <a:endParaRPr b="0" lang="pt-PT" sz="1200" strike="noStrike" u="none">
+              <a:solidFill>
+                <a:srgbClr val="000000"/>
+              </a:solidFill>
+              <a:effectLst/>
+              <a:uFillTx/>
+              <a:latin typeface="Arial"/>
+            </a:endParaRPr>
+          </a:p>
+          <a:p>
+            <a:pPr lvl="1" marL="864000" indent="-324000" defTabSz="914400">
               <a:lnSpc>
                 <a:spcPct val="100000"/>
               </a:lnSpc>
@@ -1212,7 +1242,7 @@
               <a:buChar char=""/>
             </a:pPr>
             <a:r>
-              <a:rPr lang="pt-PT" sz="1200" b="0" u="none" strike="noStrike">
+              <a:rPr b="0" lang="pt-PT" sz="1200" strike="noStrike" u="none">
                 <a:solidFill>
                   <a:srgbClr val="000000"/>
                 </a:solidFill>
@@ -1222,9 +1252,17 @@
               </a:rPr>
               <a:t>Segundo nível de tópicos</a:t>
             </a:r>
-          </a:p>
-          <a:p>
-            <a:pPr marL="1296000" lvl="2" indent="-288000" defTabSz="914400">
+            <a:endParaRPr b="0" lang="pt-PT" sz="1200" strike="noStrike" u="none">
+              <a:solidFill>
+                <a:srgbClr val="000000"/>
+              </a:solidFill>
+              <a:effectLst/>
+              <a:uFillTx/>
+              <a:latin typeface="Arial"/>
+            </a:endParaRPr>
+          </a:p>
+          <a:p>
+            <a:pPr lvl="2" marL="1296000" indent="-288000" defTabSz="914400">
               <a:lnSpc>
                 <a:spcPct val="100000"/>
               </a:lnSpc>
@@ -1239,7 +1277,7 @@
               <a:buChar char=""/>
             </a:pPr>
             <a:r>
-              <a:rPr lang="pt-PT" sz="1200" b="0" u="none" strike="noStrike">
+              <a:rPr b="0" lang="pt-PT" sz="1200" strike="noStrike" u="none">
                 <a:solidFill>
                   <a:srgbClr val="000000"/>
                 </a:solidFill>
@@ -1249,9 +1287,17 @@
               </a:rPr>
               <a:t>Terceiro nível de tópicos</a:t>
             </a:r>
-          </a:p>
-          <a:p>
-            <a:pPr marL="1728000" lvl="3" indent="-216000" defTabSz="914400">
+            <a:endParaRPr b="0" lang="pt-PT" sz="1200" strike="noStrike" u="none">
+              <a:solidFill>
+                <a:srgbClr val="000000"/>
+              </a:solidFill>
+              <a:effectLst/>
+              <a:uFillTx/>
+              <a:latin typeface="Arial"/>
+            </a:endParaRPr>
+          </a:p>
+          <a:p>
+            <a:pPr lvl="3" marL="1728000" indent="-216000" defTabSz="914400">
               <a:lnSpc>
                 <a:spcPct val="100000"/>
               </a:lnSpc>
@@ -1266,7 +1312,7 @@
               <a:buChar char=""/>
             </a:pPr>
             <a:r>
-              <a:rPr lang="pt-PT" sz="1200" b="0" u="none" strike="noStrike">
+              <a:rPr b="0" lang="pt-PT" sz="1200" strike="noStrike" u="none">
                 <a:solidFill>
                   <a:srgbClr val="000000"/>
                 </a:solidFill>
@@ -1276,9 +1322,17 @@
               </a:rPr>
               <a:t>Quarto nível de tópicos</a:t>
             </a:r>
-          </a:p>
-          <a:p>
-            <a:pPr marL="2160000" lvl="4" indent="-216000" defTabSz="914400">
+            <a:endParaRPr b="0" lang="pt-PT" sz="1200" strike="noStrike" u="none">
+              <a:solidFill>
+                <a:srgbClr val="000000"/>
+              </a:solidFill>
+              <a:effectLst/>
+              <a:uFillTx/>
+              <a:latin typeface="Arial"/>
+            </a:endParaRPr>
+          </a:p>
+          <a:p>
+            <a:pPr lvl="4" marL="2160000" indent="-216000" defTabSz="914400">
               <a:lnSpc>
                 <a:spcPct val="100000"/>
               </a:lnSpc>
@@ -1293,7 +1347,7 @@
               <a:buChar char=""/>
             </a:pPr>
             <a:r>
-              <a:rPr lang="pt-PT" sz="1200" b="0" u="none" strike="noStrike">
+              <a:rPr b="0" lang="pt-PT" sz="1200" strike="noStrike" u="none">
                 <a:solidFill>
                   <a:srgbClr val="000000"/>
                 </a:solidFill>
@@ -1303,9 +1357,17 @@
               </a:rPr>
               <a:t>Quinto nível de tópicos</a:t>
             </a:r>
-          </a:p>
-          <a:p>
-            <a:pPr marL="2592000" lvl="5" indent="-216000" defTabSz="914400">
+            <a:endParaRPr b="0" lang="pt-PT" sz="1200" strike="noStrike" u="none">
+              <a:solidFill>
+                <a:srgbClr val="000000"/>
+              </a:solidFill>
+              <a:effectLst/>
+              <a:uFillTx/>
+              <a:latin typeface="Arial"/>
+            </a:endParaRPr>
+          </a:p>
+          <a:p>
+            <a:pPr lvl="5" marL="2592000" indent="-216000" defTabSz="914400">
               <a:lnSpc>
                 <a:spcPct val="100000"/>
               </a:lnSpc>
@@ -1320,7 +1382,7 @@
               <a:buChar char=""/>
             </a:pPr>
             <a:r>
-              <a:rPr lang="pt-PT" sz="1200" b="0" u="none" strike="noStrike">
+              <a:rPr b="0" lang="pt-PT" sz="1200" strike="noStrike" u="none">
                 <a:solidFill>
                   <a:srgbClr val="000000"/>
                 </a:solidFill>
@@ -1330,9 +1392,17 @@
               </a:rPr>
               <a:t>Sexto nível de tópicos</a:t>
             </a:r>
-          </a:p>
-          <a:p>
-            <a:pPr marL="3024000" lvl="6" indent="-216000" defTabSz="914400">
+            <a:endParaRPr b="0" lang="pt-PT" sz="1200" strike="noStrike" u="none">
+              <a:solidFill>
+                <a:srgbClr val="000000"/>
+              </a:solidFill>
+              <a:effectLst/>
+              <a:uFillTx/>
+              <a:latin typeface="Arial"/>
+            </a:endParaRPr>
+          </a:p>
+          <a:p>
+            <a:pPr lvl="6" marL="3024000" indent="-216000" defTabSz="914400">
               <a:lnSpc>
                 <a:spcPct val="100000"/>
               </a:lnSpc>
@@ -1347,7 +1417,7 @@
               <a:buChar char=""/>
             </a:pPr>
             <a:r>
-              <a:rPr lang="pt-PT" sz="1200" b="0" u="none" strike="noStrike">
+              <a:rPr b="0" lang="pt-PT" sz="1200" strike="noStrike" u="none">
                 <a:solidFill>
                   <a:srgbClr val="000000"/>
                 </a:solidFill>
@@ -1357,12 +1427,20 @@
               </a:rPr>
               <a:t>Sétimo nível de tópicos</a:t>
             </a:r>
+            <a:endParaRPr b="0" lang="pt-PT" sz="1200" strike="noStrike" u="none">
+              <a:solidFill>
+                <a:srgbClr val="000000"/>
+              </a:solidFill>
+              <a:effectLst/>
+              <a:uFillTx/>
+              <a:latin typeface="Arial"/>
+            </a:endParaRPr>
           </a:p>
         </p:txBody>
       </p:sp>
       <p:sp>
         <p:nvSpPr>
-          <p:cNvPr id="5" name="PlaceHolder 3"/>
+          <p:cNvPr id="4" name="PlaceHolder 3"/>
           <p:cNvSpPr>
             <a:spLocks noGrp="1"/>
           </p:cNvSpPr>
@@ -1373,7 +1451,7 @@
         <p:spPr>
           <a:xfrm>
             <a:off x="8472600" y="4663080"/>
-            <a:ext cx="544680" cy="389520"/>
+            <a:ext cx="543240" cy="388080"/>
           </a:xfrm>
           <a:prstGeom prst="rect">
             <a:avLst/>
@@ -1384,7 +1462,7 @@
           </a:ln>
         </p:spPr>
         <p:txBody>
-          <a:bodyPr lIns="91440" tIns="91440" rIns="91440" bIns="91440" anchor="ctr">
+          <a:bodyPr lIns="91440" rIns="91440" tIns="91440" bIns="91440" anchor="ctr">
             <a:normAutofit/>
           </a:bodyPr>
           <a:lstStyle>
@@ -1394,9 +1472,9 @@
               </a:lnSpc>
               <a:buNone/>
               <a:tabLst>
-                <a:tab pos="0" algn="l"/>
-              </a:tabLst>
-              <a:defRPr lang="pt-PT" sz="1000" b="0" u="none" strike="noStrike">
+                <a:tab algn="l" pos="0"/>
+              </a:tabLst>
+              <a:defRPr b="0" lang="pt-PT" sz="1000" strike="noStrike" u="none">
                 <a:solidFill>
                   <a:schemeClr val="dk2"/>
                 </a:solidFill>
@@ -1414,11 +1492,11 @@
               </a:lnSpc>
               <a:buNone/>
               <a:tabLst>
-                <a:tab pos="0" algn="l"/>
-              </a:tabLst>
-            </a:pPr>
-            <a:fld id="{2F91DB5A-382D-44B9-929D-831FF6AF1E01}" type="slidenum">
-              <a:rPr lang="pt-PT" sz="1000" b="0" u="none" strike="noStrike">
+                <a:tab algn="l" pos="0"/>
+              </a:tabLst>
+            </a:pPr>
+            <a:fld id="{E22246EB-EC83-493D-9055-FE199AC18138}" type="slidenum">
+              <a:rPr b="0" lang="pt-PT" sz="1000" strike="noStrike" u="none">
                 <a:solidFill>
                   <a:schemeClr val="dk2"/>
                 </a:solidFill>
@@ -1427,9 +1505,9 @@
                 <a:latin typeface="Arial"/>
                 <a:ea typeface="Arial"/>
               </a:rPr>
-              <a:t>‹nº›</a:t>
+              <a:t>&lt;número&gt;</a:t>
             </a:fld>
-            <a:endParaRPr lang="pt-PT" sz="1000" b="0" u="none" strike="noStrike">
+            <a:endParaRPr b="0" lang="pt-PT" sz="1000" strike="noStrike" u="none">
               <a:solidFill>
                 <a:srgbClr val="000000"/>
               </a:solidFill>
@@ -1442,21 +1520,17 @@
       </p:sp>
     </p:spTree>
   </p:cSld>
-  <p:clrMapOvr>
-    <a:masterClrMapping/>
-  </p:clrMapOvr>
 </p:sldLayout>
 </file>
 
 <file path=ppt/slideLayouts/slideLayout3.xml><?xml version="1.0" encoding="utf-8"?>
-<p:sldLayout xmlns:a="http://schemas.openxmlformats.org/drawingml/2006/main" xmlns:r="http://schemas.openxmlformats.org/officeDocument/2006/relationships" xmlns:p="http://schemas.openxmlformats.org/presentationml/2006/main" type="twoObj" preserve="1">
+<p:sldLayout xmlns:a="http://schemas.openxmlformats.org/drawingml/2006/main" xmlns:p="http://schemas.openxmlformats.org/presentationml/2006/main" xmlns:r="http://schemas.openxmlformats.org/officeDocument/2006/relationships" xmlns:p14="http://schemas.microsoft.com/office/powerpoint/2010/main" xmlns:p15="http://schemas.microsoft.com/office/powerpoint/2012/main" xmlns:mc="http://schemas.openxmlformats.org/markup-compatibility/2006" type="twoObj" preserve="1">
   <p:cSld name="TITLE_AND_TWO_COLUMNS">
     <p:bg>
       <p:bgPr>
         <a:solidFill>
-          <a:srgbClr val="FFFFFF"/>
+          <a:srgbClr val="ffffff"/>
         </a:solidFill>
-        <a:effectLst/>
       </p:bgPr>
     </p:bg>
     <p:spTree>
@@ -1475,7 +1549,7 @@
       </p:grpSpPr>
       <p:sp>
         <p:nvSpPr>
-          <p:cNvPr id="6" name="PlaceHolder 1"/>
+          <p:cNvPr id="5" name="PlaceHolder 1"/>
           <p:cNvSpPr>
             <a:spLocks noGrp="1"/>
           </p:cNvSpPr>
@@ -1486,7 +1560,7 @@
         <p:spPr>
           <a:xfrm>
             <a:off x="311760" y="444960"/>
-            <a:ext cx="8516520" cy="568800"/>
+            <a:ext cx="8515080" cy="567360"/>
           </a:xfrm>
           <a:prstGeom prst="rect">
             <a:avLst/>
@@ -1497,10 +1571,9 @@
           </a:ln>
         </p:spPr>
         <p:txBody>
-          <a:bodyPr lIns="91440" tIns="91440" rIns="91440" bIns="91440" anchor="t">
+          <a:bodyPr lIns="91440" rIns="91440" tIns="91440" bIns="91440" anchor="t">
             <a:normAutofit lnSpcReduction="9999"/>
           </a:bodyPr>
-          <a:lstStyle/>
           <a:p>
             <a:pPr indent="0" defTabSz="914400">
               <a:lnSpc>
@@ -1508,11 +1581,11 @@
               </a:lnSpc>
               <a:buNone/>
               <a:tabLst>
-                <a:tab pos="0" algn="l"/>
-              </a:tabLst>
-            </a:pPr>
-            <a:r>
-              <a:rPr lang="pt-PT" sz="2800" b="0" u="none" strike="noStrike">
+                <a:tab algn="l" pos="0"/>
+              </a:tabLst>
+            </a:pPr>
+            <a:r>
+              <a:rPr b="0" lang="pt-PT" sz="2800" strike="noStrike" u="none">
                 <a:solidFill>
                   <a:srgbClr val="000000"/>
                 </a:solidFill>
@@ -1522,12 +1595,20 @@
               </a:rPr>
               <a:t>Clique para editar o formato do título</a:t>
             </a:r>
+            <a:endParaRPr b="0" lang="pt-PT" sz="2800" strike="noStrike" u="none">
+              <a:solidFill>
+                <a:srgbClr val="000000"/>
+              </a:solidFill>
+              <a:effectLst/>
+              <a:uFillTx/>
+              <a:latin typeface="Arial"/>
+            </a:endParaRPr>
           </a:p>
         </p:txBody>
       </p:sp>
       <p:sp>
         <p:nvSpPr>
-          <p:cNvPr id="7" name="PlaceHolder 2"/>
+          <p:cNvPr id="6" name="PlaceHolder 2"/>
           <p:cNvSpPr>
             <a:spLocks noGrp="1"/>
           </p:cNvSpPr>
@@ -1538,7 +1619,7 @@
         <p:spPr>
           <a:xfrm>
             <a:off x="311760" y="1152360"/>
-            <a:ext cx="3996000" cy="3412440"/>
+            <a:ext cx="3994560" cy="3411000"/>
           </a:xfrm>
           <a:prstGeom prst="rect">
             <a:avLst/>
@@ -1549,10 +1630,9 @@
           </a:ln>
         </p:spPr>
         <p:txBody>
-          <a:bodyPr lIns="91440" tIns="91440" rIns="91440" bIns="91440" anchor="t">
+          <a:bodyPr lIns="91440" rIns="91440" tIns="91440" bIns="91440" anchor="t">
             <a:normAutofit/>
           </a:bodyPr>
-          <a:lstStyle/>
           <a:p>
             <a:pPr marL="432000" indent="-324000" defTabSz="914400">
               <a:lnSpc>
@@ -1569,7 +1649,7 @@
               <a:buChar char=""/>
             </a:pPr>
             <a:r>
-              <a:rPr lang="pt-PT" sz="1400" b="0" u="none" strike="noStrike">
+              <a:rPr b="0" lang="pt-PT" sz="1400" strike="noStrike" u="none">
                 <a:solidFill>
                   <a:srgbClr val="000000"/>
                 </a:solidFill>
@@ -1579,9 +1659,17 @@
               </a:rPr>
               <a:t>Clique para editar o formato de texto dos tópicos</a:t>
             </a:r>
-          </a:p>
-          <a:p>
-            <a:pPr marL="864000" lvl="1" indent="-324000" defTabSz="914400">
+            <a:endParaRPr b="0" lang="pt-PT" sz="1400" strike="noStrike" u="none">
+              <a:solidFill>
+                <a:srgbClr val="000000"/>
+              </a:solidFill>
+              <a:effectLst/>
+              <a:uFillTx/>
+              <a:latin typeface="Arial"/>
+            </a:endParaRPr>
+          </a:p>
+          <a:p>
+            <a:pPr lvl="1" marL="864000" indent="-324000" defTabSz="914400">
               <a:lnSpc>
                 <a:spcPct val="100000"/>
               </a:lnSpc>
@@ -1596,7 +1684,7 @@
               <a:buChar char=""/>
             </a:pPr>
             <a:r>
-              <a:rPr lang="pt-PT" sz="1400" b="0" u="none" strike="noStrike">
+              <a:rPr b="0" lang="pt-PT" sz="1400" strike="noStrike" u="none">
                 <a:solidFill>
                   <a:srgbClr val="000000"/>
                 </a:solidFill>
@@ -1606,9 +1694,17 @@
               </a:rPr>
               <a:t>Segundo nível de tópicos</a:t>
             </a:r>
-          </a:p>
-          <a:p>
-            <a:pPr marL="1296000" lvl="2" indent="-288000" defTabSz="914400">
+            <a:endParaRPr b="0" lang="pt-PT" sz="1400" strike="noStrike" u="none">
+              <a:solidFill>
+                <a:srgbClr val="000000"/>
+              </a:solidFill>
+              <a:effectLst/>
+              <a:uFillTx/>
+              <a:latin typeface="Arial"/>
+            </a:endParaRPr>
+          </a:p>
+          <a:p>
+            <a:pPr lvl="2" marL="1296000" indent="-288000" defTabSz="914400">
               <a:lnSpc>
                 <a:spcPct val="100000"/>
               </a:lnSpc>
@@ -1623,7 +1719,7 @@
               <a:buChar char=""/>
             </a:pPr>
             <a:r>
-              <a:rPr lang="pt-PT" sz="1400" b="0" u="none" strike="noStrike">
+              <a:rPr b="0" lang="pt-PT" sz="1400" strike="noStrike" u="none">
                 <a:solidFill>
                   <a:srgbClr val="000000"/>
                 </a:solidFill>
@@ -1633,9 +1729,17 @@
               </a:rPr>
               <a:t>Terceiro nível de tópicos</a:t>
             </a:r>
-          </a:p>
-          <a:p>
-            <a:pPr marL="1728000" lvl="3" indent="-216000" defTabSz="914400">
+            <a:endParaRPr b="0" lang="pt-PT" sz="1400" strike="noStrike" u="none">
+              <a:solidFill>
+                <a:srgbClr val="000000"/>
+              </a:solidFill>
+              <a:effectLst/>
+              <a:uFillTx/>
+              <a:latin typeface="Arial"/>
+            </a:endParaRPr>
+          </a:p>
+          <a:p>
+            <a:pPr lvl="3" marL="1728000" indent="-216000" defTabSz="914400">
               <a:lnSpc>
                 <a:spcPct val="100000"/>
               </a:lnSpc>
@@ -1650,7 +1754,7 @@
               <a:buChar char=""/>
             </a:pPr>
             <a:r>
-              <a:rPr lang="pt-PT" sz="1400" b="0" u="none" strike="noStrike">
+              <a:rPr b="0" lang="pt-PT" sz="1400" strike="noStrike" u="none">
                 <a:solidFill>
                   <a:srgbClr val="000000"/>
                 </a:solidFill>
@@ -1660,9 +1764,17 @@
               </a:rPr>
               <a:t>Quarto nível de tópicos</a:t>
             </a:r>
-          </a:p>
-          <a:p>
-            <a:pPr marL="2160000" lvl="4" indent="-216000" defTabSz="914400">
+            <a:endParaRPr b="0" lang="pt-PT" sz="1400" strike="noStrike" u="none">
+              <a:solidFill>
+                <a:srgbClr val="000000"/>
+              </a:solidFill>
+              <a:effectLst/>
+              <a:uFillTx/>
+              <a:latin typeface="Arial"/>
+            </a:endParaRPr>
+          </a:p>
+          <a:p>
+            <a:pPr lvl="4" marL="2160000" indent="-216000" defTabSz="914400">
               <a:lnSpc>
                 <a:spcPct val="100000"/>
               </a:lnSpc>
@@ -1677,7 +1789,7 @@
               <a:buChar char=""/>
             </a:pPr>
             <a:r>
-              <a:rPr lang="pt-PT" sz="1400" b="0" u="none" strike="noStrike">
+              <a:rPr b="0" lang="pt-PT" sz="1400" strike="noStrike" u="none">
                 <a:solidFill>
                   <a:srgbClr val="000000"/>
                 </a:solidFill>
@@ -1687,9 +1799,17 @@
               </a:rPr>
               <a:t>Quinto nível de tópicos</a:t>
             </a:r>
-          </a:p>
-          <a:p>
-            <a:pPr marL="2592000" lvl="5" indent="-216000" defTabSz="914400">
+            <a:endParaRPr b="0" lang="pt-PT" sz="1400" strike="noStrike" u="none">
+              <a:solidFill>
+                <a:srgbClr val="000000"/>
+              </a:solidFill>
+              <a:effectLst/>
+              <a:uFillTx/>
+              <a:latin typeface="Arial"/>
+            </a:endParaRPr>
+          </a:p>
+          <a:p>
+            <a:pPr lvl="5" marL="2592000" indent="-216000" defTabSz="914400">
               <a:lnSpc>
                 <a:spcPct val="100000"/>
               </a:lnSpc>
@@ -1704,7 +1824,7 @@
               <a:buChar char=""/>
             </a:pPr>
             <a:r>
-              <a:rPr lang="pt-PT" sz="1400" b="0" u="none" strike="noStrike">
+              <a:rPr b="0" lang="pt-PT" sz="1400" strike="noStrike" u="none">
                 <a:solidFill>
                   <a:srgbClr val="000000"/>
                 </a:solidFill>
@@ -1714,9 +1834,17 @@
               </a:rPr>
               <a:t>Sexto nível de tópicos</a:t>
             </a:r>
-          </a:p>
-          <a:p>
-            <a:pPr marL="3024000" lvl="6" indent="-216000" defTabSz="914400">
+            <a:endParaRPr b="0" lang="pt-PT" sz="1400" strike="noStrike" u="none">
+              <a:solidFill>
+                <a:srgbClr val="000000"/>
+              </a:solidFill>
+              <a:effectLst/>
+              <a:uFillTx/>
+              <a:latin typeface="Arial"/>
+            </a:endParaRPr>
+          </a:p>
+          <a:p>
+            <a:pPr lvl="6" marL="3024000" indent="-216000" defTabSz="914400">
               <a:lnSpc>
                 <a:spcPct val="100000"/>
               </a:lnSpc>
@@ -1731,7 +1859,7 @@
               <a:buChar char=""/>
             </a:pPr>
             <a:r>
-              <a:rPr lang="pt-PT" sz="1400" b="0" u="none" strike="noStrike">
+              <a:rPr b="0" lang="pt-PT" sz="1400" strike="noStrike" u="none">
                 <a:solidFill>
                   <a:srgbClr val="000000"/>
                 </a:solidFill>
@@ -1741,12 +1869,20 @@
               </a:rPr>
               <a:t>Sétimo nível de tópicos</a:t>
             </a:r>
+            <a:endParaRPr b="0" lang="pt-PT" sz="1400" strike="noStrike" u="none">
+              <a:solidFill>
+                <a:srgbClr val="000000"/>
+              </a:solidFill>
+              <a:effectLst/>
+              <a:uFillTx/>
+              <a:latin typeface="Arial"/>
+            </a:endParaRPr>
           </a:p>
         </p:txBody>
       </p:sp>
       <p:sp>
         <p:nvSpPr>
-          <p:cNvPr id="8" name="PlaceHolder 3"/>
+          <p:cNvPr id="7" name="PlaceHolder 3"/>
           <p:cNvSpPr>
             <a:spLocks noGrp="1"/>
           </p:cNvSpPr>
@@ -1757,7 +1893,7 @@
         <p:spPr>
           <a:xfrm>
             <a:off x="4832280" y="1152360"/>
-            <a:ext cx="3996000" cy="3412440"/>
+            <a:ext cx="3994560" cy="3411000"/>
           </a:xfrm>
           <a:prstGeom prst="rect">
             <a:avLst/>
@@ -1768,10 +1904,9 @@
           </a:ln>
         </p:spPr>
         <p:txBody>
-          <a:bodyPr lIns="91440" tIns="91440" rIns="91440" bIns="91440" anchor="t">
+          <a:bodyPr lIns="91440" rIns="91440" tIns="91440" bIns="91440" anchor="t">
             <a:normAutofit/>
           </a:bodyPr>
-          <a:lstStyle/>
           <a:p>
             <a:pPr marL="432000" indent="-324000" defTabSz="914400">
               <a:lnSpc>
@@ -1788,7 +1923,7 @@
               <a:buChar char=""/>
             </a:pPr>
             <a:r>
-              <a:rPr lang="pt-PT" sz="1400" b="0" u="none" strike="noStrike">
+              <a:rPr b="0" lang="pt-PT" sz="1400" strike="noStrike" u="none">
                 <a:solidFill>
                   <a:srgbClr val="000000"/>
                 </a:solidFill>
@@ -1798,9 +1933,17 @@
               </a:rPr>
               <a:t>Clique para editar o formato de texto dos tópicos</a:t>
             </a:r>
-          </a:p>
-          <a:p>
-            <a:pPr marL="864000" lvl="1" indent="-324000" defTabSz="914400">
+            <a:endParaRPr b="0" lang="pt-PT" sz="1400" strike="noStrike" u="none">
+              <a:solidFill>
+                <a:srgbClr val="000000"/>
+              </a:solidFill>
+              <a:effectLst/>
+              <a:uFillTx/>
+              <a:latin typeface="Arial"/>
+            </a:endParaRPr>
+          </a:p>
+          <a:p>
+            <a:pPr lvl="1" marL="864000" indent="-324000" defTabSz="914400">
               <a:lnSpc>
                 <a:spcPct val="100000"/>
               </a:lnSpc>
@@ -1815,7 +1958,7 @@
               <a:buChar char=""/>
             </a:pPr>
             <a:r>
-              <a:rPr lang="pt-PT" sz="1400" b="0" u="none" strike="noStrike">
+              <a:rPr b="0" lang="pt-PT" sz="1400" strike="noStrike" u="none">
                 <a:solidFill>
                   <a:srgbClr val="000000"/>
                 </a:solidFill>
@@ -1825,9 +1968,17 @@
               </a:rPr>
               <a:t>Segundo nível de tópicos</a:t>
             </a:r>
-          </a:p>
-          <a:p>
-            <a:pPr marL="1296000" lvl="2" indent="-288000" defTabSz="914400">
+            <a:endParaRPr b="0" lang="pt-PT" sz="1400" strike="noStrike" u="none">
+              <a:solidFill>
+                <a:srgbClr val="000000"/>
+              </a:solidFill>
+              <a:effectLst/>
+              <a:uFillTx/>
+              <a:latin typeface="Arial"/>
+            </a:endParaRPr>
+          </a:p>
+          <a:p>
+            <a:pPr lvl="2" marL="1296000" indent="-288000" defTabSz="914400">
               <a:lnSpc>
                 <a:spcPct val="100000"/>
               </a:lnSpc>
@@ -1842,7 +1993,7 @@
               <a:buChar char=""/>
             </a:pPr>
             <a:r>
-              <a:rPr lang="pt-PT" sz="1400" b="0" u="none" strike="noStrike">
+              <a:rPr b="0" lang="pt-PT" sz="1400" strike="noStrike" u="none">
                 <a:solidFill>
                   <a:srgbClr val="000000"/>
                 </a:solidFill>
@@ -1852,9 +2003,17 @@
               </a:rPr>
               <a:t>Terceiro nível de tópicos</a:t>
             </a:r>
-          </a:p>
-          <a:p>
-            <a:pPr marL="1728000" lvl="3" indent="-216000" defTabSz="914400">
+            <a:endParaRPr b="0" lang="pt-PT" sz="1400" strike="noStrike" u="none">
+              <a:solidFill>
+                <a:srgbClr val="000000"/>
+              </a:solidFill>
+              <a:effectLst/>
+              <a:uFillTx/>
+              <a:latin typeface="Arial"/>
+            </a:endParaRPr>
+          </a:p>
+          <a:p>
+            <a:pPr lvl="3" marL="1728000" indent="-216000" defTabSz="914400">
               <a:lnSpc>
                 <a:spcPct val="100000"/>
               </a:lnSpc>
@@ -1869,7 +2028,7 @@
               <a:buChar char=""/>
             </a:pPr>
             <a:r>
-              <a:rPr lang="pt-PT" sz="1400" b="0" u="none" strike="noStrike">
+              <a:rPr b="0" lang="pt-PT" sz="1400" strike="noStrike" u="none">
                 <a:solidFill>
                   <a:srgbClr val="000000"/>
                 </a:solidFill>
@@ -1879,9 +2038,17 @@
               </a:rPr>
               <a:t>Quarto nível de tópicos</a:t>
             </a:r>
-          </a:p>
-          <a:p>
-            <a:pPr marL="2160000" lvl="4" indent="-216000" defTabSz="914400">
+            <a:endParaRPr b="0" lang="pt-PT" sz="1400" strike="noStrike" u="none">
+              <a:solidFill>
+                <a:srgbClr val="000000"/>
+              </a:solidFill>
+              <a:effectLst/>
+              <a:uFillTx/>
+              <a:latin typeface="Arial"/>
+            </a:endParaRPr>
+          </a:p>
+          <a:p>
+            <a:pPr lvl="4" marL="2160000" indent="-216000" defTabSz="914400">
               <a:lnSpc>
                 <a:spcPct val="100000"/>
               </a:lnSpc>
@@ -1896,7 +2063,7 @@
               <a:buChar char=""/>
             </a:pPr>
             <a:r>
-              <a:rPr lang="pt-PT" sz="1400" b="0" u="none" strike="noStrike">
+              <a:rPr b="0" lang="pt-PT" sz="1400" strike="noStrike" u="none">
                 <a:solidFill>
                   <a:srgbClr val="000000"/>
                 </a:solidFill>
@@ -1906,9 +2073,17 @@
               </a:rPr>
               <a:t>Quinto nível de tópicos</a:t>
             </a:r>
-          </a:p>
-          <a:p>
-            <a:pPr marL="2592000" lvl="5" indent="-216000" defTabSz="914400">
+            <a:endParaRPr b="0" lang="pt-PT" sz="1400" strike="noStrike" u="none">
+              <a:solidFill>
+                <a:srgbClr val="000000"/>
+              </a:solidFill>
+              <a:effectLst/>
+              <a:uFillTx/>
+              <a:latin typeface="Arial"/>
+            </a:endParaRPr>
+          </a:p>
+          <a:p>
+            <a:pPr lvl="5" marL="2592000" indent="-216000" defTabSz="914400">
               <a:lnSpc>
                 <a:spcPct val="100000"/>
               </a:lnSpc>
@@ -1923,7 +2098,7 @@
               <a:buChar char=""/>
             </a:pPr>
             <a:r>
-              <a:rPr lang="pt-PT" sz="1400" b="0" u="none" strike="noStrike">
+              <a:rPr b="0" lang="pt-PT" sz="1400" strike="noStrike" u="none">
                 <a:solidFill>
                   <a:srgbClr val="000000"/>
                 </a:solidFill>
@@ -1933,9 +2108,17 @@
               </a:rPr>
               <a:t>Sexto nível de tópicos</a:t>
             </a:r>
-          </a:p>
-          <a:p>
-            <a:pPr marL="3024000" lvl="6" indent="-216000" defTabSz="914400">
+            <a:endParaRPr b="0" lang="pt-PT" sz="1400" strike="noStrike" u="none">
+              <a:solidFill>
+                <a:srgbClr val="000000"/>
+              </a:solidFill>
+              <a:effectLst/>
+              <a:uFillTx/>
+              <a:latin typeface="Arial"/>
+            </a:endParaRPr>
+          </a:p>
+          <a:p>
+            <a:pPr lvl="6" marL="3024000" indent="-216000" defTabSz="914400">
               <a:lnSpc>
                 <a:spcPct val="100000"/>
               </a:lnSpc>
@@ -1950,7 +2133,7 @@
               <a:buChar char=""/>
             </a:pPr>
             <a:r>
-              <a:rPr lang="pt-PT" sz="1400" b="0" u="none" strike="noStrike">
+              <a:rPr b="0" lang="pt-PT" sz="1400" strike="noStrike" u="none">
                 <a:solidFill>
                   <a:srgbClr val="000000"/>
                 </a:solidFill>
@@ -1960,12 +2143,20 @@
               </a:rPr>
               <a:t>Sétimo nível de tópicos</a:t>
             </a:r>
+            <a:endParaRPr b="0" lang="pt-PT" sz="1400" strike="noStrike" u="none">
+              <a:solidFill>
+                <a:srgbClr val="000000"/>
+              </a:solidFill>
+              <a:effectLst/>
+              <a:uFillTx/>
+              <a:latin typeface="Arial"/>
+            </a:endParaRPr>
           </a:p>
         </p:txBody>
       </p:sp>
       <p:sp>
         <p:nvSpPr>
-          <p:cNvPr id="9" name="PlaceHolder 4"/>
+          <p:cNvPr id="8" name="PlaceHolder 4"/>
           <p:cNvSpPr>
             <a:spLocks noGrp="1"/>
           </p:cNvSpPr>
@@ -1976,7 +2167,7 @@
         <p:spPr>
           <a:xfrm>
             <a:off x="8472600" y="4663080"/>
-            <a:ext cx="544680" cy="389520"/>
+            <a:ext cx="543240" cy="388080"/>
           </a:xfrm>
           <a:prstGeom prst="rect">
             <a:avLst/>
@@ -1987,7 +2178,7 @@
           </a:ln>
         </p:spPr>
         <p:txBody>
-          <a:bodyPr lIns="91440" tIns="91440" rIns="91440" bIns="91440" anchor="ctr">
+          <a:bodyPr lIns="91440" rIns="91440" tIns="91440" bIns="91440" anchor="ctr">
             <a:normAutofit/>
           </a:bodyPr>
           <a:lstStyle>
@@ -1997,9 +2188,9 @@
               </a:lnSpc>
               <a:buNone/>
               <a:tabLst>
-                <a:tab pos="0" algn="l"/>
-              </a:tabLst>
-              <a:defRPr lang="pt-PT" sz="1000" b="0" u="none" strike="noStrike">
+                <a:tab algn="l" pos="0"/>
+              </a:tabLst>
+              <a:defRPr b="0" lang="pt-PT" sz="1000" strike="noStrike" u="none">
                 <a:solidFill>
                   <a:schemeClr val="dk2"/>
                 </a:solidFill>
@@ -2017,11 +2208,11 @@
               </a:lnSpc>
               <a:buNone/>
               <a:tabLst>
-                <a:tab pos="0" algn="l"/>
-              </a:tabLst>
-            </a:pPr>
-            <a:fld id="{5DBDFBE8-8F24-49BB-A894-1574CF71BACC}" type="slidenum">
-              <a:rPr lang="pt-PT" sz="1000" b="0" u="none" strike="noStrike">
+                <a:tab algn="l" pos="0"/>
+              </a:tabLst>
+            </a:pPr>
+            <a:fld id="{9488AEAC-9BD8-48E2-B987-9B00A38B9CA9}" type="slidenum">
+              <a:rPr b="0" lang="pt-PT" sz="1000" strike="noStrike" u="none">
                 <a:solidFill>
                   <a:schemeClr val="dk2"/>
                 </a:solidFill>
@@ -2030,9 +2221,9 @@
                 <a:latin typeface="Arial"/>
                 <a:ea typeface="Arial"/>
               </a:rPr>
-              <a:t>‹nº›</a:t>
+              <a:t>&lt;número&gt;</a:t>
             </a:fld>
-            <a:endParaRPr lang="pt-PT" sz="1000" b="0" u="none" strike="noStrike">
+            <a:endParaRPr b="0" lang="pt-PT" sz="1000" strike="noStrike" u="none">
               <a:solidFill>
                 <a:srgbClr val="000000"/>
               </a:solidFill>
@@ -2045,21 +2236,17 @@
       </p:sp>
     </p:spTree>
   </p:cSld>
-  <p:clrMapOvr>
-    <a:masterClrMapping/>
-  </p:clrMapOvr>
 </p:sldLayout>
 </file>
 
 <file path=ppt/slideLayouts/slideLayout4.xml><?xml version="1.0" encoding="utf-8"?>
-<p:sldLayout xmlns:a="http://schemas.openxmlformats.org/drawingml/2006/main" xmlns:r="http://schemas.openxmlformats.org/officeDocument/2006/relationships" xmlns:p="http://schemas.openxmlformats.org/presentationml/2006/main" type="titleOnly" preserve="1">
+<p:sldLayout xmlns:a="http://schemas.openxmlformats.org/drawingml/2006/main" xmlns:p="http://schemas.openxmlformats.org/presentationml/2006/main" xmlns:r="http://schemas.openxmlformats.org/officeDocument/2006/relationships" xmlns:p14="http://schemas.microsoft.com/office/powerpoint/2010/main" xmlns:p15="http://schemas.microsoft.com/office/powerpoint/2012/main" xmlns:mc="http://schemas.openxmlformats.org/markup-compatibility/2006" type="titleOnly" preserve="1">
   <p:cSld name="TITLE_ONLY">
     <p:bg>
       <p:bgPr>
         <a:solidFill>
-          <a:srgbClr val="FFFFFF"/>
+          <a:srgbClr val="ffffff"/>
         </a:solidFill>
-        <a:effectLst/>
       </p:bgPr>
     </p:bg>
     <p:spTree>
@@ -2078,7 +2265,7 @@
       </p:grpSpPr>
       <p:sp>
         <p:nvSpPr>
-          <p:cNvPr id="10" name="PlaceHolder 1"/>
+          <p:cNvPr id="9" name="PlaceHolder 1"/>
           <p:cNvSpPr>
             <a:spLocks noGrp="1"/>
           </p:cNvSpPr>
@@ -2089,7 +2276,7 @@
         <p:spPr>
           <a:xfrm>
             <a:off x="311760" y="444960"/>
-            <a:ext cx="8516520" cy="568800"/>
+            <a:ext cx="8515080" cy="567360"/>
           </a:xfrm>
           <a:prstGeom prst="rect">
             <a:avLst/>
@@ -2100,10 +2287,9 @@
           </a:ln>
         </p:spPr>
         <p:txBody>
-          <a:bodyPr lIns="91440" tIns="91440" rIns="91440" bIns="91440" anchor="t">
+          <a:bodyPr lIns="91440" rIns="91440" tIns="91440" bIns="91440" anchor="t">
             <a:normAutofit lnSpcReduction="9999"/>
           </a:bodyPr>
-          <a:lstStyle/>
           <a:p>
             <a:pPr indent="0" defTabSz="914400">
               <a:lnSpc>
@@ -2111,11 +2297,11 @@
               </a:lnSpc>
               <a:buNone/>
               <a:tabLst>
-                <a:tab pos="0" algn="l"/>
-              </a:tabLst>
-            </a:pPr>
-            <a:r>
-              <a:rPr lang="pt-PT" sz="2800" b="0" u="none" strike="noStrike">
+                <a:tab algn="l" pos="0"/>
+              </a:tabLst>
+            </a:pPr>
+            <a:r>
+              <a:rPr b="0" lang="pt-PT" sz="2800" strike="noStrike" u="none">
                 <a:solidFill>
                   <a:srgbClr val="000000"/>
                 </a:solidFill>
@@ -2125,12 +2311,20 @@
               </a:rPr>
               <a:t>Clique para editar o formato do título</a:t>
             </a:r>
+            <a:endParaRPr b="0" lang="pt-PT" sz="2800" strike="noStrike" u="none">
+              <a:solidFill>
+                <a:srgbClr val="000000"/>
+              </a:solidFill>
+              <a:effectLst/>
+              <a:uFillTx/>
+              <a:latin typeface="Arial"/>
+            </a:endParaRPr>
           </a:p>
         </p:txBody>
       </p:sp>
       <p:sp>
         <p:nvSpPr>
-          <p:cNvPr id="11" name="PlaceHolder 2"/>
+          <p:cNvPr id="10" name="PlaceHolder 2"/>
           <p:cNvSpPr>
             <a:spLocks noGrp="1"/>
           </p:cNvSpPr>
@@ -2141,7 +2335,7 @@
         <p:spPr>
           <a:xfrm>
             <a:off x="8472600" y="4663080"/>
-            <a:ext cx="544680" cy="389520"/>
+            <a:ext cx="543240" cy="388080"/>
           </a:xfrm>
           <a:prstGeom prst="rect">
             <a:avLst/>
@@ -2152,7 +2346,7 @@
           </a:ln>
         </p:spPr>
         <p:txBody>
-          <a:bodyPr lIns="91440" tIns="91440" rIns="91440" bIns="91440" anchor="ctr">
+          <a:bodyPr lIns="91440" rIns="91440" tIns="91440" bIns="91440" anchor="ctr">
             <a:normAutofit/>
           </a:bodyPr>
           <a:lstStyle>
@@ -2162,9 +2356,9 @@
               </a:lnSpc>
               <a:buNone/>
               <a:tabLst>
-                <a:tab pos="0" algn="l"/>
-              </a:tabLst>
-              <a:defRPr lang="pt-PT" sz="1000" b="0" u="none" strike="noStrike">
+                <a:tab algn="l" pos="0"/>
+              </a:tabLst>
+              <a:defRPr b="0" lang="pt-PT" sz="1000" strike="noStrike" u="none">
                 <a:solidFill>
                   <a:schemeClr val="dk2"/>
                 </a:solidFill>
@@ -2182,11 +2376,11 @@
               </a:lnSpc>
               <a:buNone/>
               <a:tabLst>
-                <a:tab pos="0" algn="l"/>
-              </a:tabLst>
-            </a:pPr>
-            <a:fld id="{9CB8D008-DCD2-49B8-9380-2A994B49347F}" type="slidenum">
-              <a:rPr lang="pt-PT" sz="1000" b="0" u="none" strike="noStrike">
+                <a:tab algn="l" pos="0"/>
+              </a:tabLst>
+            </a:pPr>
+            <a:fld id="{DB3234E1-F3F8-4360-BE0A-4ADFA261CCF6}" type="slidenum">
+              <a:rPr b="0" lang="pt-PT" sz="1000" strike="noStrike" u="none">
                 <a:solidFill>
                   <a:schemeClr val="dk2"/>
                 </a:solidFill>
@@ -2195,9 +2389,9 @@
                 <a:latin typeface="Arial"/>
                 <a:ea typeface="Arial"/>
               </a:rPr>
-              <a:t>‹nº›</a:t>
+              <a:t>&lt;número&gt;</a:t>
             </a:fld>
-            <a:endParaRPr lang="pt-PT" sz="1000" b="0" u="none" strike="noStrike">
+            <a:endParaRPr b="0" lang="pt-PT" sz="1000" strike="noStrike" u="none">
               <a:solidFill>
                 <a:srgbClr val="000000"/>
               </a:solidFill>
@@ -2210,21 +2404,17 @@
       </p:sp>
     </p:spTree>
   </p:cSld>
-  <p:clrMapOvr>
-    <a:masterClrMapping/>
-  </p:clrMapOvr>
 </p:sldLayout>
 </file>
 
 <file path=ppt/slideLayouts/slideLayout5.xml><?xml version="1.0" encoding="utf-8"?>
-<p:sldLayout xmlns:a="http://schemas.openxmlformats.org/drawingml/2006/main" xmlns:r="http://schemas.openxmlformats.org/officeDocument/2006/relationships" xmlns:p="http://schemas.openxmlformats.org/presentationml/2006/main" type="blank" preserve="1">
+<p:sldLayout xmlns:a="http://schemas.openxmlformats.org/drawingml/2006/main" xmlns:p="http://schemas.openxmlformats.org/presentationml/2006/main" xmlns:r="http://schemas.openxmlformats.org/officeDocument/2006/relationships" xmlns:p14="http://schemas.microsoft.com/office/powerpoint/2010/main" xmlns:p15="http://schemas.microsoft.com/office/powerpoint/2012/main" xmlns:mc="http://schemas.openxmlformats.org/markup-compatibility/2006" type="blank" preserve="1">
   <p:cSld name="MAIN_POINT">
     <p:bg>
       <p:bgPr>
         <a:solidFill>
-          <a:srgbClr val="FFFFFF"/>
+          <a:srgbClr val="ffffff"/>
         </a:solidFill>
-        <a:effectLst/>
       </p:bgPr>
     </p:bg>
     <p:spTree>
@@ -2243,7 +2433,7 @@
       </p:grpSpPr>
       <p:sp>
         <p:nvSpPr>
-          <p:cNvPr id="12" name="PlaceHolder 1"/>
+          <p:cNvPr id="11" name="PlaceHolder 1"/>
           <p:cNvSpPr>
             <a:spLocks noGrp="1"/>
           </p:cNvSpPr>
@@ -2254,7 +2444,7 @@
         <p:spPr>
           <a:xfrm>
             <a:off x="490320" y="450000"/>
-            <a:ext cx="6363720" cy="4086720"/>
+            <a:ext cx="6362280" cy="4085280"/>
           </a:xfrm>
           <a:prstGeom prst="rect">
             <a:avLst/>
@@ -2265,10 +2455,9 @@
           </a:ln>
         </p:spPr>
         <p:txBody>
-          <a:bodyPr lIns="91440" tIns="91440" rIns="91440" bIns="91440" anchor="ctr">
+          <a:bodyPr lIns="91440" rIns="91440" tIns="91440" bIns="91440" anchor="ctr">
             <a:normAutofit/>
           </a:bodyPr>
-          <a:lstStyle/>
           <a:p>
             <a:pPr indent="0" defTabSz="914400">
               <a:lnSpc>
@@ -2276,11 +2465,11 @@
               </a:lnSpc>
               <a:buNone/>
               <a:tabLst>
-                <a:tab pos="0" algn="l"/>
-              </a:tabLst>
-            </a:pPr>
-            <a:r>
-              <a:rPr lang="pt-PT" sz="4800" b="0" u="none" strike="noStrike">
+                <a:tab algn="l" pos="0"/>
+              </a:tabLst>
+            </a:pPr>
+            <a:r>
+              <a:rPr b="0" lang="pt-PT" sz="4800" strike="noStrike" u="none">
                 <a:solidFill>
                   <a:srgbClr val="000000"/>
                 </a:solidFill>
@@ -2290,12 +2479,20 @@
               </a:rPr>
               <a:t>Clique para editar o formato do título</a:t>
             </a:r>
+            <a:endParaRPr b="0" lang="pt-PT" sz="4800" strike="noStrike" u="none">
+              <a:solidFill>
+                <a:srgbClr val="000000"/>
+              </a:solidFill>
+              <a:effectLst/>
+              <a:uFillTx/>
+              <a:latin typeface="Arial"/>
+            </a:endParaRPr>
           </a:p>
         </p:txBody>
       </p:sp>
       <p:sp>
         <p:nvSpPr>
-          <p:cNvPr id="13" name="PlaceHolder 2"/>
+          <p:cNvPr id="12" name="PlaceHolder 2"/>
           <p:cNvSpPr>
             <a:spLocks noGrp="1"/>
           </p:cNvSpPr>
@@ -2306,7 +2503,7 @@
         <p:spPr>
           <a:xfrm>
             <a:off x="8472600" y="4663080"/>
-            <a:ext cx="544680" cy="389520"/>
+            <a:ext cx="543240" cy="388080"/>
           </a:xfrm>
           <a:prstGeom prst="rect">
             <a:avLst/>
@@ -2317,7 +2514,7 @@
           </a:ln>
         </p:spPr>
         <p:txBody>
-          <a:bodyPr lIns="91440" tIns="91440" rIns="91440" bIns="91440" anchor="ctr">
+          <a:bodyPr lIns="91440" rIns="91440" tIns="91440" bIns="91440" anchor="ctr">
             <a:normAutofit/>
           </a:bodyPr>
           <a:lstStyle>
@@ -2327,9 +2524,9 @@
               </a:lnSpc>
               <a:buNone/>
               <a:tabLst>
-                <a:tab pos="0" algn="l"/>
-              </a:tabLst>
-              <a:defRPr lang="pt-PT" sz="1000" b="0" u="none" strike="noStrike">
+                <a:tab algn="l" pos="0"/>
+              </a:tabLst>
+              <a:defRPr b="0" lang="pt-PT" sz="1000" strike="noStrike" u="none">
                 <a:solidFill>
                   <a:schemeClr val="dk2"/>
                 </a:solidFill>
@@ -2347,11 +2544,11 @@
               </a:lnSpc>
               <a:buNone/>
               <a:tabLst>
-                <a:tab pos="0" algn="l"/>
-              </a:tabLst>
-            </a:pPr>
-            <a:fld id="{D488047E-F97E-418C-8D63-9634AE684AD0}" type="slidenum">
-              <a:rPr lang="pt-PT" sz="1000" b="0" u="none" strike="noStrike">
+                <a:tab algn="l" pos="0"/>
+              </a:tabLst>
+            </a:pPr>
+            <a:fld id="{3229AAEC-0B0F-4D29-93DB-7A4EFFC1AB43}" type="slidenum">
+              <a:rPr b="0" lang="pt-PT" sz="1000" strike="noStrike" u="none">
                 <a:solidFill>
                   <a:schemeClr val="dk2"/>
                 </a:solidFill>
@@ -2360,9 +2557,9 @@
                 <a:latin typeface="Arial"/>
                 <a:ea typeface="Arial"/>
               </a:rPr>
-              <a:t>‹nº›</a:t>
+              <a:t>&lt;número&gt;</a:t>
             </a:fld>
-            <a:endParaRPr lang="pt-PT" sz="1000" b="0" u="none" strike="noStrike">
+            <a:endParaRPr b="0" lang="pt-PT" sz="1000" strike="noStrike" u="none">
               <a:solidFill>
                 <a:srgbClr val="000000"/>
               </a:solidFill>
@@ -2375,21 +2572,17 @@
       </p:sp>
     </p:spTree>
   </p:cSld>
-  <p:clrMapOvr>
-    <a:masterClrMapping/>
-  </p:clrMapOvr>
 </p:sldLayout>
 </file>
 
 <file path=ppt/slideLayouts/slideLayout6.xml><?xml version="1.0" encoding="utf-8"?>
-<p:sldLayout xmlns:a="http://schemas.openxmlformats.org/drawingml/2006/main" xmlns:r="http://schemas.openxmlformats.org/officeDocument/2006/relationships" xmlns:p="http://schemas.openxmlformats.org/presentationml/2006/main" type="blank" preserve="1">
+<p:sldLayout xmlns:a="http://schemas.openxmlformats.org/drawingml/2006/main" xmlns:p="http://schemas.openxmlformats.org/presentationml/2006/main" xmlns:r="http://schemas.openxmlformats.org/officeDocument/2006/relationships" xmlns:p14="http://schemas.microsoft.com/office/powerpoint/2010/main" xmlns:p15="http://schemas.microsoft.com/office/powerpoint/2012/main" xmlns:mc="http://schemas.openxmlformats.org/markup-compatibility/2006" type="blank" preserve="1">
   <p:cSld name="SECTION_TITLE_AND_DESCRIPTION">
     <p:bg>
       <p:bgPr>
         <a:solidFill>
-          <a:srgbClr val="FFFFFF"/>
+          <a:srgbClr val="ffffff"/>
         </a:solidFill>
-        <a:effectLst/>
       </p:bgPr>
     </p:bg>
     <p:spTree>
@@ -2408,14 +2601,14 @@
       </p:grpSpPr>
       <p:sp>
         <p:nvSpPr>
-          <p:cNvPr id="14" name="Google Shape;36;p9"/>
+          <p:cNvPr id="13" name="Google Shape;36;p9"/>
           <p:cNvSpPr/>
           <p:nvPr/>
         </p:nvSpPr>
         <p:spPr>
           <a:xfrm>
             <a:off x="4572000" y="0"/>
-            <a:ext cx="4568040" cy="5139720"/>
+            <a:ext cx="4566600" cy="5138280"/>
           </a:xfrm>
           <a:prstGeom prst="rect">
             <a:avLst/>
@@ -2428,32 +2621,25 @@
           </a:ln>
         </p:spPr>
         <p:style>
-          <a:lnRef idx="0">
-            <a:scrgbClr r="0" g="0" b="0"/>
-          </a:lnRef>
-          <a:fillRef idx="0">
-            <a:scrgbClr r="0" g="0" b="0"/>
-          </a:fillRef>
-          <a:effectRef idx="0">
-            <a:scrgbClr r="0" g="0" b="0"/>
-          </a:effectRef>
+          <a:lnRef idx="0"/>
+          <a:fillRef idx="0"/>
+          <a:effectRef idx="0"/>
           <a:fontRef idx="minor"/>
         </p:style>
         <p:txBody>
-          <a:bodyPr lIns="90000" tIns="91440" rIns="90000" bIns="91440" anchor="ctr">
+          <a:bodyPr lIns="90000" rIns="90000" tIns="91440" bIns="91440" anchor="ctr">
             <a:noAutofit/>
           </a:bodyPr>
-          <a:lstStyle/>
           <a:p>
             <a:pPr defTabSz="914400">
               <a:lnSpc>
                 <a:spcPct val="100000"/>
               </a:lnSpc>
               <a:tabLst>
-                <a:tab pos="0" algn="l"/>
-              </a:tabLst>
-            </a:pPr>
-            <a:endParaRPr lang="pt-PT" sz="1400" b="0" u="none" strike="noStrike">
+                <a:tab algn="l" pos="0"/>
+              </a:tabLst>
+            </a:pPr>
+            <a:endParaRPr b="0" lang="pt-PT" sz="1400" strike="noStrike" u="none">
               <a:solidFill>
                 <a:srgbClr val="000000"/>
               </a:solidFill>
@@ -2466,7 +2652,7 @@
       </p:sp>
       <p:sp>
         <p:nvSpPr>
-          <p:cNvPr id="15" name="PlaceHolder 1"/>
+          <p:cNvPr id="14" name="PlaceHolder 1"/>
           <p:cNvSpPr>
             <a:spLocks noGrp="1"/>
           </p:cNvSpPr>
@@ -2477,7 +2663,7 @@
         <p:spPr>
           <a:xfrm>
             <a:off x="265680" y="1233000"/>
-            <a:ext cx="4041360" cy="1478520"/>
+            <a:ext cx="4039920" cy="1477080"/>
           </a:xfrm>
           <a:prstGeom prst="rect">
             <a:avLst/>
@@ -2488,10 +2674,9 @@
           </a:ln>
         </p:spPr>
         <p:txBody>
-          <a:bodyPr lIns="91440" tIns="91440" rIns="91440" bIns="91440" anchor="b">
+          <a:bodyPr lIns="91440" rIns="91440" tIns="91440" bIns="91440" anchor="b">
             <a:normAutofit fontScale="85000" lnSpcReduction="9999"/>
           </a:bodyPr>
-          <a:lstStyle/>
           <a:p>
             <a:pPr indent="0" defTabSz="914400">
               <a:lnSpc>
@@ -2499,11 +2684,11 @@
               </a:lnSpc>
               <a:buNone/>
               <a:tabLst>
-                <a:tab pos="0" algn="l"/>
-              </a:tabLst>
-            </a:pPr>
-            <a:r>
-              <a:rPr lang="pt-PT" sz="4200" b="0" u="none" strike="noStrike">
+                <a:tab algn="l" pos="0"/>
+              </a:tabLst>
+            </a:pPr>
+            <a:r>
+              <a:rPr b="0" lang="pt-PT" sz="4200" strike="noStrike" u="none">
                 <a:solidFill>
                   <a:srgbClr val="000000"/>
                 </a:solidFill>
@@ -2513,12 +2698,20 @@
               </a:rPr>
               <a:t>Clique para editar o formato do título</a:t>
             </a:r>
+            <a:endParaRPr b="0" lang="pt-PT" sz="4200" strike="noStrike" u="none">
+              <a:solidFill>
+                <a:srgbClr val="000000"/>
+              </a:solidFill>
+              <a:effectLst/>
+              <a:uFillTx/>
+              <a:latin typeface="Arial"/>
+            </a:endParaRPr>
           </a:p>
         </p:txBody>
       </p:sp>
       <p:sp>
         <p:nvSpPr>
-          <p:cNvPr id="16" name="PlaceHolder 2"/>
+          <p:cNvPr id="15" name="PlaceHolder 2"/>
           <p:cNvSpPr>
             <a:spLocks noGrp="1"/>
           </p:cNvSpPr>
@@ -2529,7 +2722,7 @@
         <p:spPr>
           <a:xfrm>
             <a:off x="4939560" y="723960"/>
-            <a:ext cx="3832920" cy="3691080"/>
+            <a:ext cx="3831480" cy="3689640"/>
           </a:xfrm>
           <a:prstGeom prst="rect">
             <a:avLst/>
@@ -2540,10 +2733,9 @@
           </a:ln>
         </p:spPr>
         <p:txBody>
-          <a:bodyPr lIns="91440" tIns="91440" rIns="91440" bIns="91440" anchor="ctr">
+          <a:bodyPr lIns="91440" rIns="91440" tIns="91440" bIns="91440" anchor="ctr">
             <a:normAutofit fontScale="85000" lnSpcReduction="9999"/>
           </a:bodyPr>
-          <a:lstStyle/>
           <a:p>
             <a:pPr marL="432000" indent="-324000" defTabSz="914400">
               <a:lnSpc>
@@ -2560,7 +2752,7 @@
               <a:buChar char=""/>
             </a:pPr>
             <a:r>
-              <a:rPr lang="pt-PT" sz="1800" b="0" u="none" strike="noStrike">
+              <a:rPr b="0" lang="pt-PT" sz="1800" strike="noStrike" u="none">
                 <a:solidFill>
                   <a:srgbClr val="000000"/>
                 </a:solidFill>
@@ -2570,9 +2762,17 @@
               </a:rPr>
               <a:t>Clique para editar o formato de texto dos tópicos</a:t>
             </a:r>
-          </a:p>
-          <a:p>
-            <a:pPr marL="864000" lvl="1" indent="-324000" defTabSz="914400">
+            <a:endParaRPr b="0" lang="pt-PT" sz="1800" strike="noStrike" u="none">
+              <a:solidFill>
+                <a:srgbClr val="000000"/>
+              </a:solidFill>
+              <a:effectLst/>
+              <a:uFillTx/>
+              <a:latin typeface="Arial"/>
+            </a:endParaRPr>
+          </a:p>
+          <a:p>
+            <a:pPr lvl="1" marL="864000" indent="-324000" defTabSz="914400">
               <a:lnSpc>
                 <a:spcPct val="100000"/>
               </a:lnSpc>
@@ -2587,7 +2787,7 @@
               <a:buChar char=""/>
             </a:pPr>
             <a:r>
-              <a:rPr lang="pt-PT" sz="1800" b="0" u="none" strike="noStrike">
+              <a:rPr b="0" lang="pt-PT" sz="1800" strike="noStrike" u="none">
                 <a:solidFill>
                   <a:srgbClr val="000000"/>
                 </a:solidFill>
@@ -2597,9 +2797,17 @@
               </a:rPr>
               <a:t>Segundo nível de tópicos</a:t>
             </a:r>
-          </a:p>
-          <a:p>
-            <a:pPr marL="1296000" lvl="2" indent="-288000" defTabSz="914400">
+            <a:endParaRPr b="0" lang="pt-PT" sz="1800" strike="noStrike" u="none">
+              <a:solidFill>
+                <a:srgbClr val="000000"/>
+              </a:solidFill>
+              <a:effectLst/>
+              <a:uFillTx/>
+              <a:latin typeface="Arial"/>
+            </a:endParaRPr>
+          </a:p>
+          <a:p>
+            <a:pPr lvl="2" marL="1296000" indent="-288000" defTabSz="914400">
               <a:lnSpc>
                 <a:spcPct val="100000"/>
               </a:lnSpc>
@@ -2614,7 +2822,7 @@
               <a:buChar char=""/>
             </a:pPr>
             <a:r>
-              <a:rPr lang="pt-PT" sz="1800" b="0" u="none" strike="noStrike">
+              <a:rPr b="0" lang="pt-PT" sz="1800" strike="noStrike" u="none">
                 <a:solidFill>
                   <a:srgbClr val="000000"/>
                 </a:solidFill>
@@ -2624,9 +2832,17 @@
               </a:rPr>
               <a:t>Terceiro nível de tópicos</a:t>
             </a:r>
-          </a:p>
-          <a:p>
-            <a:pPr marL="1728000" lvl="3" indent="-216000" defTabSz="914400">
+            <a:endParaRPr b="0" lang="pt-PT" sz="1800" strike="noStrike" u="none">
+              <a:solidFill>
+                <a:srgbClr val="000000"/>
+              </a:solidFill>
+              <a:effectLst/>
+              <a:uFillTx/>
+              <a:latin typeface="Arial"/>
+            </a:endParaRPr>
+          </a:p>
+          <a:p>
+            <a:pPr lvl="3" marL="1728000" indent="-216000" defTabSz="914400">
               <a:lnSpc>
                 <a:spcPct val="100000"/>
               </a:lnSpc>
@@ -2641,7 +2857,7 @@
               <a:buChar char=""/>
             </a:pPr>
             <a:r>
-              <a:rPr lang="pt-PT" sz="1800" b="0" u="none" strike="noStrike">
+              <a:rPr b="0" lang="pt-PT" sz="1800" strike="noStrike" u="none">
                 <a:solidFill>
                   <a:srgbClr val="000000"/>
                 </a:solidFill>
@@ -2651,9 +2867,17 @@
               </a:rPr>
               <a:t>Quarto nível de tópicos</a:t>
             </a:r>
-          </a:p>
-          <a:p>
-            <a:pPr marL="2160000" lvl="4" indent="-216000" defTabSz="914400">
+            <a:endParaRPr b="0" lang="pt-PT" sz="1800" strike="noStrike" u="none">
+              <a:solidFill>
+                <a:srgbClr val="000000"/>
+              </a:solidFill>
+              <a:effectLst/>
+              <a:uFillTx/>
+              <a:latin typeface="Arial"/>
+            </a:endParaRPr>
+          </a:p>
+          <a:p>
+            <a:pPr lvl="4" marL="2160000" indent="-216000" defTabSz="914400">
               <a:lnSpc>
                 <a:spcPct val="100000"/>
               </a:lnSpc>
@@ -2668,7 +2892,7 @@
               <a:buChar char=""/>
             </a:pPr>
             <a:r>
-              <a:rPr lang="pt-PT" sz="1800" b="0" u="none" strike="noStrike">
+              <a:rPr b="0" lang="pt-PT" sz="1800" strike="noStrike" u="none">
                 <a:solidFill>
                   <a:srgbClr val="000000"/>
                 </a:solidFill>
@@ -2678,9 +2902,17 @@
               </a:rPr>
               <a:t>Quinto nível de tópicos</a:t>
             </a:r>
-          </a:p>
-          <a:p>
-            <a:pPr marL="2592000" lvl="5" indent="-216000" defTabSz="914400">
+            <a:endParaRPr b="0" lang="pt-PT" sz="1800" strike="noStrike" u="none">
+              <a:solidFill>
+                <a:srgbClr val="000000"/>
+              </a:solidFill>
+              <a:effectLst/>
+              <a:uFillTx/>
+              <a:latin typeface="Arial"/>
+            </a:endParaRPr>
+          </a:p>
+          <a:p>
+            <a:pPr lvl="5" marL="2592000" indent="-216000" defTabSz="914400">
               <a:lnSpc>
                 <a:spcPct val="100000"/>
               </a:lnSpc>
@@ -2695,7 +2927,7 @@
               <a:buChar char=""/>
             </a:pPr>
             <a:r>
-              <a:rPr lang="pt-PT" sz="1800" b="0" u="none" strike="noStrike">
+              <a:rPr b="0" lang="pt-PT" sz="1800" strike="noStrike" u="none">
                 <a:solidFill>
                   <a:srgbClr val="000000"/>
                 </a:solidFill>
@@ -2705,9 +2937,17 @@
               </a:rPr>
               <a:t>Sexto nível de tópicos</a:t>
             </a:r>
-          </a:p>
-          <a:p>
-            <a:pPr marL="3024000" lvl="6" indent="-216000" defTabSz="914400">
+            <a:endParaRPr b="0" lang="pt-PT" sz="1800" strike="noStrike" u="none">
+              <a:solidFill>
+                <a:srgbClr val="000000"/>
+              </a:solidFill>
+              <a:effectLst/>
+              <a:uFillTx/>
+              <a:latin typeface="Arial"/>
+            </a:endParaRPr>
+          </a:p>
+          <a:p>
+            <a:pPr lvl="6" marL="3024000" indent="-216000" defTabSz="914400">
               <a:lnSpc>
                 <a:spcPct val="100000"/>
               </a:lnSpc>
@@ -2722,7 +2962,7 @@
               <a:buChar char=""/>
             </a:pPr>
             <a:r>
-              <a:rPr lang="pt-PT" sz="1800" b="0" u="none" strike="noStrike">
+              <a:rPr b="0" lang="pt-PT" sz="1800" strike="noStrike" u="none">
                 <a:solidFill>
                   <a:srgbClr val="000000"/>
                 </a:solidFill>
@@ -2732,12 +2972,20 @@
               </a:rPr>
               <a:t>Sétimo nível de tópicos</a:t>
             </a:r>
+            <a:endParaRPr b="0" lang="pt-PT" sz="1800" strike="noStrike" u="none">
+              <a:solidFill>
+                <a:srgbClr val="000000"/>
+              </a:solidFill>
+              <a:effectLst/>
+              <a:uFillTx/>
+              <a:latin typeface="Arial"/>
+            </a:endParaRPr>
           </a:p>
         </p:txBody>
       </p:sp>
       <p:sp>
         <p:nvSpPr>
-          <p:cNvPr id="17" name="PlaceHolder 3"/>
+          <p:cNvPr id="16" name="PlaceHolder 3"/>
           <p:cNvSpPr>
             <a:spLocks noGrp="1"/>
           </p:cNvSpPr>
@@ -2748,7 +2996,7 @@
         <p:spPr>
           <a:xfrm>
             <a:off x="8472600" y="4663080"/>
-            <a:ext cx="544680" cy="389520"/>
+            <a:ext cx="543240" cy="388080"/>
           </a:xfrm>
           <a:prstGeom prst="rect">
             <a:avLst/>
@@ -2759,7 +3007,7 @@
           </a:ln>
         </p:spPr>
         <p:txBody>
-          <a:bodyPr lIns="91440" tIns="91440" rIns="91440" bIns="91440" anchor="ctr">
+          <a:bodyPr lIns="91440" rIns="91440" tIns="91440" bIns="91440" anchor="ctr">
             <a:normAutofit/>
           </a:bodyPr>
           <a:lstStyle>
@@ -2769,9 +3017,9 @@
               </a:lnSpc>
               <a:buNone/>
               <a:tabLst>
-                <a:tab pos="0" algn="l"/>
-              </a:tabLst>
-              <a:defRPr lang="pt-PT" sz="1000" b="0" u="none" strike="noStrike">
+                <a:tab algn="l" pos="0"/>
+              </a:tabLst>
+              <a:defRPr b="0" lang="pt-PT" sz="1000" strike="noStrike" u="none">
                 <a:solidFill>
                   <a:schemeClr val="dk2"/>
                 </a:solidFill>
@@ -2789,11 +3037,11 @@
               </a:lnSpc>
               <a:buNone/>
               <a:tabLst>
-                <a:tab pos="0" algn="l"/>
-              </a:tabLst>
-            </a:pPr>
-            <a:fld id="{471DE023-3390-435A-BB06-D1F4BAE926AD}" type="slidenum">
-              <a:rPr lang="pt-PT" sz="1000" b="0" u="none" strike="noStrike">
+                <a:tab algn="l" pos="0"/>
+              </a:tabLst>
+            </a:pPr>
+            <a:fld id="{964B177C-1115-4582-955E-C4EFE7306797}" type="slidenum">
+              <a:rPr b="0" lang="pt-PT" sz="1000" strike="noStrike" u="none">
                 <a:solidFill>
                   <a:schemeClr val="dk2"/>
                 </a:solidFill>
@@ -2802,9 +3050,9 @@
                 <a:latin typeface="Arial"/>
                 <a:ea typeface="Arial"/>
               </a:rPr>
-              <a:t>‹nº›</a:t>
+              <a:t>&lt;número&gt;</a:t>
             </a:fld>
-            <a:endParaRPr lang="pt-PT" sz="1000" b="0" u="none" strike="noStrike">
+            <a:endParaRPr b="0" lang="pt-PT" sz="1000" strike="noStrike" u="none">
               <a:solidFill>
                 <a:srgbClr val="000000"/>
               </a:solidFill>
@@ -2817,21 +3065,17 @@
       </p:sp>
     </p:spTree>
   </p:cSld>
-  <p:clrMapOvr>
-    <a:masterClrMapping/>
-  </p:clrMapOvr>
 </p:sldLayout>
 </file>
 
 <file path=ppt/slideLayouts/slideLayout7.xml><?xml version="1.0" encoding="utf-8"?>
-<p:sldLayout xmlns:a="http://schemas.openxmlformats.org/drawingml/2006/main" xmlns:r="http://schemas.openxmlformats.org/officeDocument/2006/relationships" xmlns:p="http://schemas.openxmlformats.org/presentationml/2006/main" type="blank" preserve="1">
+<p:sldLayout xmlns:a="http://schemas.openxmlformats.org/drawingml/2006/main" xmlns:p="http://schemas.openxmlformats.org/presentationml/2006/main" xmlns:r="http://schemas.openxmlformats.org/officeDocument/2006/relationships" xmlns:p14="http://schemas.microsoft.com/office/powerpoint/2010/main" xmlns:p15="http://schemas.microsoft.com/office/powerpoint/2012/main" xmlns:mc="http://schemas.openxmlformats.org/markup-compatibility/2006" type="blank" preserve="1">
   <p:cSld name="CAPTION_ONLY">
     <p:bg>
       <p:bgPr>
         <a:solidFill>
-          <a:srgbClr val="FFFFFF"/>
+          <a:srgbClr val="ffffff"/>
         </a:solidFill>
-        <a:effectLst/>
       </p:bgPr>
     </p:bg>
     <p:spTree>
@@ -2850,7 +3094,7 @@
       </p:grpSpPr>
       <p:sp>
         <p:nvSpPr>
-          <p:cNvPr id="18" name="PlaceHolder 1"/>
+          <p:cNvPr id="17" name="PlaceHolder 1"/>
           <p:cNvSpPr>
             <a:spLocks noGrp="1"/>
           </p:cNvSpPr>
@@ -2861,7 +3105,7 @@
         <p:spPr>
           <a:xfrm>
             <a:off x="311760" y="4230720"/>
-            <a:ext cx="5994720" cy="601200"/>
+            <a:ext cx="5993280" cy="599760"/>
           </a:xfrm>
           <a:prstGeom prst="rect">
             <a:avLst/>
@@ -2872,10 +3116,9 @@
           </a:ln>
         </p:spPr>
         <p:txBody>
-          <a:bodyPr lIns="91440" tIns="91440" rIns="91440" bIns="91440" anchor="ctr">
+          <a:bodyPr lIns="91440" rIns="91440" tIns="91440" bIns="91440" anchor="ctr">
             <a:normAutofit fontScale="25000" lnSpcReduction="19999"/>
           </a:bodyPr>
-          <a:lstStyle/>
           <a:p>
             <a:pPr marL="432000" indent="-324000" defTabSz="914400">
               <a:lnSpc>
@@ -2892,7 +3135,7 @@
               <a:buChar char=""/>
             </a:pPr>
             <a:r>
-              <a:rPr lang="pt-PT" sz="1800" b="0" u="none" strike="noStrike">
+              <a:rPr b="0" lang="pt-PT" sz="1800" strike="noStrike" u="none">
                 <a:solidFill>
                   <a:srgbClr val="000000"/>
                 </a:solidFill>
@@ -2902,9 +3145,17 @@
               </a:rPr>
               <a:t>Clique para editar o formato de texto dos tópicos</a:t>
             </a:r>
-          </a:p>
-          <a:p>
-            <a:pPr marL="864000" lvl="1" indent="-324000" defTabSz="914400">
+            <a:endParaRPr b="0" lang="pt-PT" sz="1800" strike="noStrike" u="none">
+              <a:solidFill>
+                <a:srgbClr val="000000"/>
+              </a:solidFill>
+              <a:effectLst/>
+              <a:uFillTx/>
+              <a:latin typeface="Arial"/>
+            </a:endParaRPr>
+          </a:p>
+          <a:p>
+            <a:pPr lvl="1" marL="864000" indent="-324000" defTabSz="914400">
               <a:lnSpc>
                 <a:spcPct val="100000"/>
               </a:lnSpc>
@@ -2919,7 +3170,7 @@
               <a:buChar char=""/>
             </a:pPr>
             <a:r>
-              <a:rPr lang="pt-PT" sz="1800" b="0" u="none" strike="noStrike">
+              <a:rPr b="0" lang="pt-PT" sz="1800" strike="noStrike" u="none">
                 <a:solidFill>
                   <a:srgbClr val="000000"/>
                 </a:solidFill>
@@ -2929,9 +3180,17 @@
               </a:rPr>
               <a:t>Segundo nível de tópicos</a:t>
             </a:r>
-          </a:p>
-          <a:p>
-            <a:pPr marL="1296000" lvl="2" indent="-288000" defTabSz="914400">
+            <a:endParaRPr b="0" lang="pt-PT" sz="1800" strike="noStrike" u="none">
+              <a:solidFill>
+                <a:srgbClr val="000000"/>
+              </a:solidFill>
+              <a:effectLst/>
+              <a:uFillTx/>
+              <a:latin typeface="Arial"/>
+            </a:endParaRPr>
+          </a:p>
+          <a:p>
+            <a:pPr lvl="2" marL="1296000" indent="-288000" defTabSz="914400">
               <a:lnSpc>
                 <a:spcPct val="100000"/>
               </a:lnSpc>
@@ -2946,7 +3205,7 @@
               <a:buChar char=""/>
             </a:pPr>
             <a:r>
-              <a:rPr lang="pt-PT" sz="1800" b="0" u="none" strike="noStrike">
+              <a:rPr b="0" lang="pt-PT" sz="1800" strike="noStrike" u="none">
                 <a:solidFill>
                   <a:srgbClr val="000000"/>
                 </a:solidFill>
@@ -2956,9 +3215,17 @@
               </a:rPr>
               <a:t>Terceiro nível de tópicos</a:t>
             </a:r>
-          </a:p>
-          <a:p>
-            <a:pPr marL="1728000" lvl="3" indent="-216000" defTabSz="914400">
+            <a:endParaRPr b="0" lang="pt-PT" sz="1800" strike="noStrike" u="none">
+              <a:solidFill>
+                <a:srgbClr val="000000"/>
+              </a:solidFill>
+              <a:effectLst/>
+              <a:uFillTx/>
+              <a:latin typeface="Arial"/>
+            </a:endParaRPr>
+          </a:p>
+          <a:p>
+            <a:pPr lvl="3" marL="1728000" indent="-216000" defTabSz="914400">
               <a:lnSpc>
                 <a:spcPct val="100000"/>
               </a:lnSpc>
@@ -2973,7 +3240,7 @@
               <a:buChar char=""/>
             </a:pPr>
             <a:r>
-              <a:rPr lang="pt-PT" sz="1800" b="0" u="none" strike="noStrike">
+              <a:rPr b="0" lang="pt-PT" sz="1800" strike="noStrike" u="none">
                 <a:solidFill>
                   <a:srgbClr val="000000"/>
                 </a:solidFill>
@@ -2983,9 +3250,17 @@
               </a:rPr>
               <a:t>Quarto nível de tópicos</a:t>
             </a:r>
-          </a:p>
-          <a:p>
-            <a:pPr marL="2160000" lvl="4" indent="-216000" defTabSz="914400">
+            <a:endParaRPr b="0" lang="pt-PT" sz="1800" strike="noStrike" u="none">
+              <a:solidFill>
+                <a:srgbClr val="000000"/>
+              </a:solidFill>
+              <a:effectLst/>
+              <a:uFillTx/>
+              <a:latin typeface="Arial"/>
+            </a:endParaRPr>
+          </a:p>
+          <a:p>
+            <a:pPr lvl="4" marL="2160000" indent="-216000" defTabSz="914400">
               <a:lnSpc>
                 <a:spcPct val="100000"/>
               </a:lnSpc>
@@ -3000,7 +3275,7 @@
               <a:buChar char=""/>
             </a:pPr>
             <a:r>
-              <a:rPr lang="pt-PT" sz="1800" b="0" u="none" strike="noStrike">
+              <a:rPr b="0" lang="pt-PT" sz="1800" strike="noStrike" u="none">
                 <a:solidFill>
                   <a:srgbClr val="000000"/>
                 </a:solidFill>
@@ -3010,9 +3285,17 @@
               </a:rPr>
               <a:t>Quinto nível de tópicos</a:t>
             </a:r>
-          </a:p>
-          <a:p>
-            <a:pPr marL="2592000" lvl="5" indent="-216000" defTabSz="914400">
+            <a:endParaRPr b="0" lang="pt-PT" sz="1800" strike="noStrike" u="none">
+              <a:solidFill>
+                <a:srgbClr val="000000"/>
+              </a:solidFill>
+              <a:effectLst/>
+              <a:uFillTx/>
+              <a:latin typeface="Arial"/>
+            </a:endParaRPr>
+          </a:p>
+          <a:p>
+            <a:pPr lvl="5" marL="2592000" indent="-216000" defTabSz="914400">
               <a:lnSpc>
                 <a:spcPct val="100000"/>
               </a:lnSpc>
@@ -3027,7 +3310,7 @@
               <a:buChar char=""/>
             </a:pPr>
             <a:r>
-              <a:rPr lang="pt-PT" sz="1800" b="0" u="none" strike="noStrike">
+              <a:rPr b="0" lang="pt-PT" sz="1800" strike="noStrike" u="none">
                 <a:solidFill>
                   <a:srgbClr val="000000"/>
                 </a:solidFill>
@@ -3037,9 +3320,17 @@
               </a:rPr>
               <a:t>Sexto nível de tópicos</a:t>
             </a:r>
-          </a:p>
-          <a:p>
-            <a:pPr marL="3024000" lvl="6" indent="-216000" defTabSz="914400">
+            <a:endParaRPr b="0" lang="pt-PT" sz="1800" strike="noStrike" u="none">
+              <a:solidFill>
+                <a:srgbClr val="000000"/>
+              </a:solidFill>
+              <a:effectLst/>
+              <a:uFillTx/>
+              <a:latin typeface="Arial"/>
+            </a:endParaRPr>
+          </a:p>
+          <a:p>
+            <a:pPr lvl="6" marL="3024000" indent="-216000" defTabSz="914400">
               <a:lnSpc>
                 <a:spcPct val="100000"/>
               </a:lnSpc>
@@ -3054,7 +3345,7 @@
               <a:buChar char=""/>
             </a:pPr>
             <a:r>
-              <a:rPr lang="pt-PT" sz="1800" b="0" u="none" strike="noStrike">
+              <a:rPr b="0" lang="pt-PT" sz="1800" strike="noStrike" u="none">
                 <a:solidFill>
                   <a:srgbClr val="000000"/>
                 </a:solidFill>
@@ -3064,12 +3355,20 @@
               </a:rPr>
               <a:t>Sétimo nível de tópicos</a:t>
             </a:r>
+            <a:endParaRPr b="0" lang="pt-PT" sz="1800" strike="noStrike" u="none">
+              <a:solidFill>
+                <a:srgbClr val="000000"/>
+              </a:solidFill>
+              <a:effectLst/>
+              <a:uFillTx/>
+              <a:latin typeface="Arial"/>
+            </a:endParaRPr>
           </a:p>
         </p:txBody>
       </p:sp>
       <p:sp>
         <p:nvSpPr>
-          <p:cNvPr id="19" name="PlaceHolder 2"/>
+          <p:cNvPr id="18" name="PlaceHolder 2"/>
           <p:cNvSpPr>
             <a:spLocks noGrp="1"/>
           </p:cNvSpPr>
@@ -3080,7 +3379,7 @@
         <p:spPr>
           <a:xfrm>
             <a:off x="8472600" y="4663080"/>
-            <a:ext cx="544680" cy="389520"/>
+            <a:ext cx="543240" cy="388080"/>
           </a:xfrm>
           <a:prstGeom prst="rect">
             <a:avLst/>
@@ -3091,7 +3390,7 @@
           </a:ln>
         </p:spPr>
         <p:txBody>
-          <a:bodyPr lIns="91440" tIns="91440" rIns="91440" bIns="91440" anchor="ctr">
+          <a:bodyPr lIns="91440" rIns="91440" tIns="91440" bIns="91440" anchor="ctr">
             <a:normAutofit/>
           </a:bodyPr>
           <a:lstStyle>
@@ -3101,9 +3400,9 @@
               </a:lnSpc>
               <a:buNone/>
               <a:tabLst>
-                <a:tab pos="0" algn="l"/>
-              </a:tabLst>
-              <a:defRPr lang="pt-PT" sz="1000" b="0" u="none" strike="noStrike">
+                <a:tab algn="l" pos="0"/>
+              </a:tabLst>
+              <a:defRPr b="0" lang="pt-PT" sz="1000" strike="noStrike" u="none">
                 <a:solidFill>
                   <a:schemeClr val="dk2"/>
                 </a:solidFill>
@@ -3121,11 +3420,11 @@
               </a:lnSpc>
               <a:buNone/>
               <a:tabLst>
-                <a:tab pos="0" algn="l"/>
-              </a:tabLst>
-            </a:pPr>
-            <a:fld id="{1814D839-142B-4E5D-AAE6-AA1F79E0E1DB}" type="slidenum">
-              <a:rPr lang="pt-PT" sz="1000" b="0" u="none" strike="noStrike">
+                <a:tab algn="l" pos="0"/>
+              </a:tabLst>
+            </a:pPr>
+            <a:fld id="{873D2881-B28C-4629-819B-19C3DC9822E9}" type="slidenum">
+              <a:rPr b="0" lang="pt-PT" sz="1000" strike="noStrike" u="none">
                 <a:solidFill>
                   <a:schemeClr val="dk2"/>
                 </a:solidFill>
@@ -3134,9 +3433,9 @@
                 <a:latin typeface="Arial"/>
                 <a:ea typeface="Arial"/>
               </a:rPr>
-              <a:t>‹nº›</a:t>
+              <a:t>&lt;número&gt;</a:t>
             </a:fld>
-            <a:endParaRPr lang="pt-PT" sz="1000" b="0" u="none" strike="noStrike">
+            <a:endParaRPr b="0" lang="pt-PT" sz="1000" strike="noStrike" u="none">
               <a:solidFill>
                 <a:srgbClr val="000000"/>
               </a:solidFill>
@@ -3149,21 +3448,17 @@
       </p:sp>
     </p:spTree>
   </p:cSld>
-  <p:clrMapOvr>
-    <a:masterClrMapping/>
-  </p:clrMapOvr>
 </p:sldLayout>
 </file>
 
 <file path=ppt/slideLayouts/slideLayout8.xml><?xml version="1.0" encoding="utf-8"?>
-<p:sldLayout xmlns:a="http://schemas.openxmlformats.org/drawingml/2006/main" xmlns:r="http://schemas.openxmlformats.org/officeDocument/2006/relationships" xmlns:p="http://schemas.openxmlformats.org/presentationml/2006/main" type="title" preserve="1">
+<p:sldLayout xmlns:a="http://schemas.openxmlformats.org/drawingml/2006/main" xmlns:p="http://schemas.openxmlformats.org/presentationml/2006/main" xmlns:r="http://schemas.openxmlformats.org/officeDocument/2006/relationships" xmlns:p14="http://schemas.microsoft.com/office/powerpoint/2010/main" xmlns:p15="http://schemas.microsoft.com/office/powerpoint/2012/main" xmlns:mc="http://schemas.openxmlformats.org/markup-compatibility/2006" type="title" preserve="1">
   <p:cSld name="TITLE">
     <p:bg>
       <p:bgPr>
         <a:solidFill>
-          <a:srgbClr val="FFFFFF"/>
+          <a:srgbClr val="ffffff"/>
         </a:solidFill>
-        <a:effectLst/>
       </p:bgPr>
     </p:bg>
     <p:spTree>
@@ -3182,7 +3477,7 @@
       </p:grpSpPr>
       <p:sp>
         <p:nvSpPr>
-          <p:cNvPr id="20" name="PlaceHolder 1"/>
+          <p:cNvPr id="19" name="PlaceHolder 1"/>
           <p:cNvSpPr>
             <a:spLocks noGrp="1"/>
           </p:cNvSpPr>
@@ -3193,7 +3488,7 @@
         <p:spPr>
           <a:xfrm>
             <a:off x="311760" y="744480"/>
-            <a:ext cx="8516520" cy="2048760"/>
+            <a:ext cx="8515080" cy="2047320"/>
           </a:xfrm>
           <a:prstGeom prst="rect">
             <a:avLst/>
@@ -3204,10 +3499,9 @@
           </a:ln>
         </p:spPr>
         <p:txBody>
-          <a:bodyPr lIns="91440" tIns="91440" rIns="91440" bIns="91440" anchor="b">
+          <a:bodyPr lIns="91440" rIns="91440" tIns="91440" bIns="91440" anchor="b">
             <a:normAutofit/>
           </a:bodyPr>
-          <a:lstStyle/>
           <a:p>
             <a:pPr indent="0" defTabSz="914400">
               <a:lnSpc>
@@ -3215,11 +3509,11 @@
               </a:lnSpc>
               <a:buNone/>
               <a:tabLst>
-                <a:tab pos="0" algn="l"/>
-              </a:tabLst>
-            </a:pPr>
-            <a:r>
-              <a:rPr lang="pt-PT" sz="5200" b="0" u="none" strike="noStrike">
+                <a:tab algn="l" pos="0"/>
+              </a:tabLst>
+            </a:pPr>
+            <a:r>
+              <a:rPr b="0" lang="pt-PT" sz="5200" strike="noStrike" u="none">
                 <a:solidFill>
                   <a:srgbClr val="000000"/>
                 </a:solidFill>
@@ -3229,12 +3523,20 @@
               </a:rPr>
               <a:t>Clique para editar o formato do título</a:t>
             </a:r>
+            <a:endParaRPr b="0" lang="pt-PT" sz="5200" strike="noStrike" u="none">
+              <a:solidFill>
+                <a:srgbClr val="000000"/>
+              </a:solidFill>
+              <a:effectLst/>
+              <a:uFillTx/>
+              <a:latin typeface="Arial"/>
+            </a:endParaRPr>
           </a:p>
         </p:txBody>
       </p:sp>
       <p:sp>
         <p:nvSpPr>
-          <p:cNvPr id="21" name="PlaceHolder 2"/>
+          <p:cNvPr id="20" name="PlaceHolder 2"/>
           <p:cNvSpPr>
             <a:spLocks noGrp="1"/>
           </p:cNvSpPr>
@@ -3245,7 +3547,7 @@
         <p:spPr>
           <a:xfrm>
             <a:off x="8472600" y="4663080"/>
-            <a:ext cx="544680" cy="389520"/>
+            <a:ext cx="543240" cy="388080"/>
           </a:xfrm>
           <a:prstGeom prst="rect">
             <a:avLst/>
@@ -3256,7 +3558,7 @@
           </a:ln>
         </p:spPr>
         <p:txBody>
-          <a:bodyPr lIns="91440" tIns="91440" rIns="91440" bIns="91440" anchor="ctr">
+          <a:bodyPr lIns="91440" rIns="91440" tIns="91440" bIns="91440" anchor="ctr">
             <a:normAutofit/>
           </a:bodyPr>
           <a:lstStyle>
@@ -3266,9 +3568,9 @@
               </a:lnSpc>
               <a:buNone/>
               <a:tabLst>
-                <a:tab pos="0" algn="l"/>
-              </a:tabLst>
-              <a:defRPr lang="pt-PT" sz="1000" b="0" u="none" strike="noStrike">
+                <a:tab algn="l" pos="0"/>
+              </a:tabLst>
+              <a:defRPr b="0" lang="pt-PT" sz="1000" strike="noStrike" u="none">
                 <a:solidFill>
                   <a:schemeClr val="dk2"/>
                 </a:solidFill>
@@ -3286,11 +3588,11 @@
               </a:lnSpc>
               <a:buNone/>
               <a:tabLst>
-                <a:tab pos="0" algn="l"/>
-              </a:tabLst>
-            </a:pPr>
-            <a:fld id="{C18B5417-4C06-4048-9D17-45B36EEE3EED}" type="slidenum">
-              <a:rPr lang="pt-PT" sz="1000" b="0" u="none" strike="noStrike">
+                <a:tab algn="l" pos="0"/>
+              </a:tabLst>
+            </a:pPr>
+            <a:fld id="{14D8769D-44CD-4A7F-92E6-79472B986310}" type="slidenum">
+              <a:rPr b="0" lang="pt-PT" sz="1000" strike="noStrike" u="none">
                 <a:solidFill>
                   <a:schemeClr val="dk2"/>
                 </a:solidFill>
@@ -3299,9 +3601,9 @@
                 <a:latin typeface="Arial"/>
                 <a:ea typeface="Arial"/>
               </a:rPr>
-              <a:t>‹nº›</a:t>
+              <a:t>&lt;número&gt;</a:t>
             </a:fld>
-            <a:endParaRPr lang="pt-PT" sz="1000" b="0" u="none" strike="noStrike">
+            <a:endParaRPr b="0" lang="pt-PT" sz="1000" strike="noStrike" u="none">
               <a:solidFill>
                 <a:srgbClr val="000000"/>
               </a:solidFill>
@@ -3314,21 +3616,17 @@
       </p:sp>
     </p:spTree>
   </p:cSld>
-  <p:clrMapOvr>
-    <a:masterClrMapping/>
-  </p:clrMapOvr>
 </p:sldLayout>
 </file>
 
 <file path=ppt/slideLayouts/slideLayout9.xml><?xml version="1.0" encoding="utf-8"?>
-<p:sldLayout xmlns:a="http://schemas.openxmlformats.org/drawingml/2006/main" xmlns:r="http://schemas.openxmlformats.org/officeDocument/2006/relationships" xmlns:p="http://schemas.openxmlformats.org/presentationml/2006/main" type="blank" preserve="1">
+<p:sldLayout xmlns:a="http://schemas.openxmlformats.org/drawingml/2006/main" xmlns:p="http://schemas.openxmlformats.org/presentationml/2006/main" xmlns:r="http://schemas.openxmlformats.org/officeDocument/2006/relationships" xmlns:p14="http://schemas.microsoft.com/office/powerpoint/2010/main" xmlns:p15="http://schemas.microsoft.com/office/powerpoint/2012/main" xmlns:mc="http://schemas.openxmlformats.org/markup-compatibility/2006" type="blank" preserve="1">
   <p:cSld name="BIG_NUMBER">
     <p:bg>
       <p:bgPr>
         <a:solidFill>
-          <a:srgbClr val="FFFFFF"/>
+          <a:srgbClr val="ffffff"/>
         </a:solidFill>
-        <a:effectLst/>
       </p:bgPr>
     </p:bg>
     <p:spTree>
@@ -3347,7 +3645,7 @@
       </p:grpSpPr>
       <p:sp>
         <p:nvSpPr>
-          <p:cNvPr id="22" name="PlaceHolder 1"/>
+          <p:cNvPr id="21" name="PlaceHolder 1"/>
           <p:cNvSpPr>
             <a:spLocks noGrp="1"/>
           </p:cNvSpPr>
@@ -3358,7 +3656,7 @@
         <p:spPr>
           <a:xfrm>
             <a:off x="311760" y="1106280"/>
-            <a:ext cx="8516520" cy="1959480"/>
+            <a:ext cx="8515080" cy="1958040"/>
           </a:xfrm>
           <a:prstGeom prst="rect">
             <a:avLst/>
@@ -3369,10 +3667,9 @@
           </a:ln>
         </p:spPr>
         <p:txBody>
-          <a:bodyPr lIns="91440" tIns="91440" rIns="91440" bIns="91440" anchor="b">
+          <a:bodyPr lIns="91440" rIns="91440" tIns="91440" bIns="91440" anchor="b">
             <a:normAutofit lnSpcReduction="9999"/>
           </a:bodyPr>
-          <a:lstStyle/>
           <a:p>
             <a:pPr indent="0" algn="ctr" defTabSz="914400">
               <a:lnSpc>
@@ -3380,11 +3677,11 @@
               </a:lnSpc>
               <a:buNone/>
               <a:tabLst>
-                <a:tab pos="0" algn="l"/>
-              </a:tabLst>
-            </a:pPr>
-            <a:r>
-              <a:rPr lang="pt-PT" sz="12000" b="0" u="none" strike="noStrike">
+                <a:tab algn="l" pos="0"/>
+              </a:tabLst>
+            </a:pPr>
+            <a:r>
+              <a:rPr b="0" lang="pt-PT" sz="12000" strike="noStrike" u="none">
                 <a:solidFill>
                   <a:schemeClr val="dk1"/>
                 </a:solidFill>
@@ -3395,7 +3692,7 @@
               </a:rPr>
               <a:t>xx%</a:t>
             </a:r>
-            <a:endParaRPr lang="pt-PT" sz="12000" b="0" u="none" strike="noStrike">
+            <a:endParaRPr b="0" lang="pt-PT" sz="12000" strike="noStrike" u="none">
               <a:solidFill>
                 <a:srgbClr val="000000"/>
               </a:solidFill>
@@ -3408,7 +3705,7 @@
       </p:sp>
       <p:sp>
         <p:nvSpPr>
-          <p:cNvPr id="23" name="PlaceHolder 2"/>
+          <p:cNvPr id="22" name="PlaceHolder 2"/>
           <p:cNvSpPr>
             <a:spLocks noGrp="1"/>
           </p:cNvSpPr>
@@ -3419,7 +3716,7 @@
         <p:spPr>
           <a:xfrm>
             <a:off x="311760" y="3152160"/>
-            <a:ext cx="8516520" cy="1296720"/>
+            <a:ext cx="8515080" cy="1295280"/>
           </a:xfrm>
           <a:prstGeom prst="rect">
             <a:avLst/>
@@ -3430,10 +3727,9 @@
           </a:ln>
         </p:spPr>
         <p:txBody>
-          <a:bodyPr lIns="91440" tIns="91440" rIns="91440" bIns="91440" anchor="t">
+          <a:bodyPr lIns="91440" rIns="91440" tIns="91440" bIns="91440" anchor="t">
             <a:normAutofit fontScale="40000" lnSpcReduction="19999"/>
           </a:bodyPr>
-          <a:lstStyle/>
           <a:p>
             <a:pPr marL="432000" indent="-324000" defTabSz="914400">
               <a:lnSpc>
@@ -3450,7 +3746,7 @@
               <a:buChar char=""/>
             </a:pPr>
             <a:r>
-              <a:rPr lang="pt-PT" sz="1800" b="0" u="none" strike="noStrike">
+              <a:rPr b="0" lang="pt-PT" sz="1800" strike="noStrike" u="none">
                 <a:solidFill>
                   <a:srgbClr val="000000"/>
                 </a:solidFill>
@@ -3460,9 +3756,17 @@
               </a:rPr>
               <a:t>Clique para editar o formato de texto dos tópicos</a:t>
             </a:r>
-          </a:p>
-          <a:p>
-            <a:pPr marL="864000" lvl="1" indent="-324000" defTabSz="914400">
+            <a:endParaRPr b="0" lang="pt-PT" sz="1800" strike="noStrike" u="none">
+              <a:solidFill>
+                <a:srgbClr val="000000"/>
+              </a:solidFill>
+              <a:effectLst/>
+              <a:uFillTx/>
+              <a:latin typeface="Arial"/>
+            </a:endParaRPr>
+          </a:p>
+          <a:p>
+            <a:pPr lvl="1" marL="864000" indent="-324000" defTabSz="914400">
               <a:lnSpc>
                 <a:spcPct val="100000"/>
               </a:lnSpc>
@@ -3477,7 +3781,7 @@
               <a:buChar char=""/>
             </a:pPr>
             <a:r>
-              <a:rPr lang="pt-PT" sz="1800" b="0" u="none" strike="noStrike">
+              <a:rPr b="0" lang="pt-PT" sz="1800" strike="noStrike" u="none">
                 <a:solidFill>
                   <a:srgbClr val="000000"/>
                 </a:solidFill>
@@ -3487,9 +3791,17 @@
               </a:rPr>
               <a:t>Segundo nível de tópicos</a:t>
             </a:r>
-          </a:p>
-          <a:p>
-            <a:pPr marL="1296000" lvl="2" indent="-288000" defTabSz="914400">
+            <a:endParaRPr b="0" lang="pt-PT" sz="1800" strike="noStrike" u="none">
+              <a:solidFill>
+                <a:srgbClr val="000000"/>
+              </a:solidFill>
+              <a:effectLst/>
+              <a:uFillTx/>
+              <a:latin typeface="Arial"/>
+            </a:endParaRPr>
+          </a:p>
+          <a:p>
+            <a:pPr lvl="2" marL="1296000" indent="-288000" defTabSz="914400">
               <a:lnSpc>
                 <a:spcPct val="100000"/>
               </a:lnSpc>
@@ -3504,7 +3816,7 @@
               <a:buChar char=""/>
             </a:pPr>
             <a:r>
-              <a:rPr lang="pt-PT" sz="1800" b="0" u="none" strike="noStrike">
+              <a:rPr b="0" lang="pt-PT" sz="1800" strike="noStrike" u="none">
                 <a:solidFill>
                   <a:srgbClr val="000000"/>
                 </a:solidFill>
@@ -3514,9 +3826,17 @@
               </a:rPr>
               <a:t>Terceiro nível de tópicos</a:t>
             </a:r>
-          </a:p>
-          <a:p>
-            <a:pPr marL="1728000" lvl="3" indent="-216000" defTabSz="914400">
+            <a:endParaRPr b="0" lang="pt-PT" sz="1800" strike="noStrike" u="none">
+              <a:solidFill>
+                <a:srgbClr val="000000"/>
+              </a:solidFill>
+              <a:effectLst/>
+              <a:uFillTx/>
+              <a:latin typeface="Arial"/>
+            </a:endParaRPr>
+          </a:p>
+          <a:p>
+            <a:pPr lvl="3" marL="1728000" indent="-216000" defTabSz="914400">
               <a:lnSpc>
                 <a:spcPct val="100000"/>
               </a:lnSpc>
@@ -3531,7 +3851,7 @@
               <a:buChar char=""/>
             </a:pPr>
             <a:r>
-              <a:rPr lang="pt-PT" sz="1800" b="0" u="none" strike="noStrike">
+              <a:rPr b="0" lang="pt-PT" sz="1800" strike="noStrike" u="none">
                 <a:solidFill>
                   <a:srgbClr val="000000"/>
                 </a:solidFill>
@@ -3541,9 +3861,17 @@
               </a:rPr>
               <a:t>Quarto nível de tópicos</a:t>
             </a:r>
-          </a:p>
-          <a:p>
-            <a:pPr marL="2160000" lvl="4" indent="-216000" defTabSz="914400">
+            <a:endParaRPr b="0" lang="pt-PT" sz="1800" strike="noStrike" u="none">
+              <a:solidFill>
+                <a:srgbClr val="000000"/>
+              </a:solidFill>
+              <a:effectLst/>
+              <a:uFillTx/>
+              <a:latin typeface="Arial"/>
+            </a:endParaRPr>
+          </a:p>
+          <a:p>
+            <a:pPr lvl="4" marL="2160000" indent="-216000" defTabSz="914400">
               <a:lnSpc>
                 <a:spcPct val="100000"/>
               </a:lnSpc>
@@ -3558,7 +3886,7 @@
               <a:buChar char=""/>
             </a:pPr>
             <a:r>
-              <a:rPr lang="pt-PT" sz="1800" b="0" u="none" strike="noStrike">
+              <a:rPr b="0" lang="pt-PT" sz="1800" strike="noStrike" u="none">
                 <a:solidFill>
                   <a:srgbClr val="000000"/>
                 </a:solidFill>
@@ -3568,9 +3896,17 @@
               </a:rPr>
               <a:t>Quinto nível de tópicos</a:t>
             </a:r>
-          </a:p>
-          <a:p>
-            <a:pPr marL="2592000" lvl="5" indent="-216000" defTabSz="914400">
+            <a:endParaRPr b="0" lang="pt-PT" sz="1800" strike="noStrike" u="none">
+              <a:solidFill>
+                <a:srgbClr val="000000"/>
+              </a:solidFill>
+              <a:effectLst/>
+              <a:uFillTx/>
+              <a:latin typeface="Arial"/>
+            </a:endParaRPr>
+          </a:p>
+          <a:p>
+            <a:pPr lvl="5" marL="2592000" indent="-216000" defTabSz="914400">
               <a:lnSpc>
                 <a:spcPct val="100000"/>
               </a:lnSpc>
@@ -3585,7 +3921,7 @@
               <a:buChar char=""/>
             </a:pPr>
             <a:r>
-              <a:rPr lang="pt-PT" sz="1800" b="0" u="none" strike="noStrike">
+              <a:rPr b="0" lang="pt-PT" sz="1800" strike="noStrike" u="none">
                 <a:solidFill>
                   <a:srgbClr val="000000"/>
                 </a:solidFill>
@@ -3595,9 +3931,17 @@
               </a:rPr>
               <a:t>Sexto nível de tópicos</a:t>
             </a:r>
-          </a:p>
-          <a:p>
-            <a:pPr marL="3024000" lvl="6" indent="-216000" defTabSz="914400">
+            <a:endParaRPr b="0" lang="pt-PT" sz="1800" strike="noStrike" u="none">
+              <a:solidFill>
+                <a:srgbClr val="000000"/>
+              </a:solidFill>
+              <a:effectLst/>
+              <a:uFillTx/>
+              <a:latin typeface="Arial"/>
+            </a:endParaRPr>
+          </a:p>
+          <a:p>
+            <a:pPr lvl="6" marL="3024000" indent="-216000" defTabSz="914400">
               <a:lnSpc>
                 <a:spcPct val="100000"/>
               </a:lnSpc>
@@ -3612,7 +3956,7 @@
               <a:buChar char=""/>
             </a:pPr>
             <a:r>
-              <a:rPr lang="pt-PT" sz="1800" b="0" u="none" strike="noStrike">
+              <a:rPr b="0" lang="pt-PT" sz="1800" strike="noStrike" u="none">
                 <a:solidFill>
                   <a:srgbClr val="000000"/>
                 </a:solidFill>
@@ -3622,12 +3966,20 @@
               </a:rPr>
               <a:t>Sétimo nível de tópicos</a:t>
             </a:r>
+            <a:endParaRPr b="0" lang="pt-PT" sz="1800" strike="noStrike" u="none">
+              <a:solidFill>
+                <a:srgbClr val="000000"/>
+              </a:solidFill>
+              <a:effectLst/>
+              <a:uFillTx/>
+              <a:latin typeface="Arial"/>
+            </a:endParaRPr>
           </a:p>
         </p:txBody>
       </p:sp>
       <p:sp>
         <p:nvSpPr>
-          <p:cNvPr id="24" name="PlaceHolder 3"/>
+          <p:cNvPr id="23" name="PlaceHolder 3"/>
           <p:cNvSpPr>
             <a:spLocks noGrp="1"/>
           </p:cNvSpPr>
@@ -3638,7 +3990,7 @@
         <p:spPr>
           <a:xfrm>
             <a:off x="8472600" y="4663080"/>
-            <a:ext cx="544680" cy="389520"/>
+            <a:ext cx="543240" cy="388080"/>
           </a:xfrm>
           <a:prstGeom prst="rect">
             <a:avLst/>
@@ -3649,7 +4001,7 @@
           </a:ln>
         </p:spPr>
         <p:txBody>
-          <a:bodyPr lIns="91440" tIns="91440" rIns="91440" bIns="91440" anchor="ctr">
+          <a:bodyPr lIns="91440" rIns="91440" tIns="91440" bIns="91440" anchor="ctr">
             <a:normAutofit/>
           </a:bodyPr>
           <a:lstStyle>
@@ -3659,9 +4011,9 @@
               </a:lnSpc>
               <a:buNone/>
               <a:tabLst>
-                <a:tab pos="0" algn="l"/>
-              </a:tabLst>
-              <a:defRPr lang="pt-PT" sz="1000" b="0" u="none" strike="noStrike">
+                <a:tab algn="l" pos="0"/>
+              </a:tabLst>
+              <a:defRPr b="0" lang="pt-PT" sz="1000" strike="noStrike" u="none">
                 <a:solidFill>
                   <a:schemeClr val="dk2"/>
                 </a:solidFill>
@@ -3679,11 +4031,11 @@
               </a:lnSpc>
               <a:buNone/>
               <a:tabLst>
-                <a:tab pos="0" algn="l"/>
-              </a:tabLst>
-            </a:pPr>
-            <a:fld id="{2859EC53-BF28-4B49-8D91-16210101F9ED}" type="slidenum">
-              <a:rPr lang="pt-PT" sz="1000" b="0" u="none" strike="noStrike">
+                <a:tab algn="l" pos="0"/>
+              </a:tabLst>
+            </a:pPr>
+            <a:fld id="{187B8377-4FA6-409C-B6CC-749315A53133}" type="slidenum">
+              <a:rPr b="0" lang="pt-PT" sz="1000" strike="noStrike" u="none">
                 <a:solidFill>
                   <a:schemeClr val="dk2"/>
                 </a:solidFill>
@@ -3692,9 +4044,9 @@
                 <a:latin typeface="Arial"/>
                 <a:ea typeface="Arial"/>
               </a:rPr>
-              <a:t>‹nº›</a:t>
+              <a:t>&lt;número&gt;</a:t>
             </a:fld>
-            <a:endParaRPr lang="pt-PT" sz="1000" b="0" u="none" strike="noStrike">
+            <a:endParaRPr b="0" lang="pt-PT" sz="1000" strike="noStrike" u="none">
               <a:solidFill>
                 <a:srgbClr val="000000"/>
               </a:solidFill>
@@ -3707,20 +4059,12 @@
       </p:sp>
     </p:spTree>
   </p:cSld>
-  <p:clrMapOvr>
-    <a:masterClrMapping/>
-  </p:clrMapOvr>
 </p:sldLayout>
 </file>
 
 <file path=ppt/slideMasters/slideMaster1.xml><?xml version="1.0" encoding="utf-8"?>
-<p:sldMaster xmlns:a="http://schemas.openxmlformats.org/drawingml/2006/main" xmlns:r="http://schemas.openxmlformats.org/officeDocument/2006/relationships" xmlns:p="http://schemas.openxmlformats.org/presentationml/2006/main">
+<p:sldMaster xmlns:a="http://schemas.openxmlformats.org/drawingml/2006/main" xmlns:p="http://schemas.openxmlformats.org/presentationml/2006/main" xmlns:r="http://schemas.openxmlformats.org/officeDocument/2006/relationships" xmlns:p14="http://schemas.microsoft.com/office/powerpoint/2010/main" xmlns:p15="http://schemas.microsoft.com/office/powerpoint/2012/main" xmlns:mc="http://schemas.openxmlformats.org/markup-compatibility/2006">
   <p:cSld>
-    <p:bg>
-      <p:bgRef idx="1001">
-        <a:schemeClr val="bg1"/>
-      </p:bgRef>
-    </p:bg>
     <p:spTree>
       <p:nvGrpSpPr>
         <p:cNvPr id="1" name=""/>
@@ -3739,303 +4083,23 @@
   </p:cSld>
   <p:clrMap bg1="lt1" tx1="dk1" bg2="dk2" tx2="lt2" accent1="accent1" accent2="accent2" accent3="accent3" accent4="accent4" accent5="accent5" accent6="accent6" hlink="hlink" folHlink="folHlink"/>
   <p:sldLayoutIdLst>
-    <p:sldLayoutId id="2147483649" r:id="rId1"/>
-    <p:sldLayoutId id="2147483650" r:id="rId2"/>
-    <p:sldLayoutId id="2147483651" r:id="rId3"/>
-    <p:sldLayoutId id="2147483652" r:id="rId4"/>
-    <p:sldLayoutId id="2147483653" r:id="rId5"/>
-    <p:sldLayoutId id="2147483654" r:id="rId6"/>
-    <p:sldLayoutId id="2147483655" r:id="rId7"/>
-    <p:sldLayoutId id="2147483656" r:id="rId8"/>
-    <p:sldLayoutId id="2147483657" r:id="rId9"/>
-    <p:sldLayoutId id="2147483658" r:id="rId10"/>
-    <p:sldLayoutId id="2147483659" r:id="rId11"/>
+    <p:sldLayoutId id="2147483649" r:id="rId2"/>
+    <p:sldLayoutId id="2147483650" r:id="rId3"/>
+    <p:sldLayoutId id="2147483651" r:id="rId4"/>
+    <p:sldLayoutId id="2147483652" r:id="rId5"/>
+    <p:sldLayoutId id="2147483653" r:id="rId6"/>
+    <p:sldLayoutId id="2147483654" r:id="rId7"/>
+    <p:sldLayoutId id="2147483655" r:id="rId8"/>
+    <p:sldLayoutId id="2147483656" r:id="rId9"/>
+    <p:sldLayoutId id="2147483657" r:id="rId10"/>
+    <p:sldLayoutId id="2147483658" r:id="rId11"/>
+    <p:sldLayoutId id="2147483659" r:id="rId12"/>
   </p:sldLayoutIdLst>
-  <p:txStyles>
-    <p:titleStyle>
-      <a:lvl1pPr algn="l" defTabSz="914400" rtl="0" eaLnBrk="1" latinLnBrk="0" hangingPunct="1">
-        <a:lnSpc>
-          <a:spcPct val="90000"/>
-        </a:lnSpc>
-        <a:spcBef>
-          <a:spcPct val="0"/>
-        </a:spcBef>
-        <a:buNone/>
-        <a:defRPr sz="4400" kern="1200">
-          <a:solidFill>
-            <a:schemeClr val="tx1"/>
-          </a:solidFill>
-          <a:latin typeface="+mj-lt"/>
-          <a:ea typeface="+mj-ea"/>
-          <a:cs typeface="+mj-cs"/>
-        </a:defRPr>
-      </a:lvl1pPr>
-    </p:titleStyle>
-    <p:bodyStyle>
-      <a:lvl1pPr marL="228600" indent="-228600" algn="l" defTabSz="914400" rtl="0" eaLnBrk="1" latinLnBrk="0" hangingPunct="1">
-        <a:lnSpc>
-          <a:spcPct val="90000"/>
-        </a:lnSpc>
-        <a:spcBef>
-          <a:spcPts val="1000"/>
-        </a:spcBef>
-        <a:buFont typeface="Arial" panose="020B0604020202020204" pitchFamily="34" charset="0"/>
-        <a:buChar char="•"/>
-        <a:defRPr sz="2800" kern="1200">
-          <a:solidFill>
-            <a:schemeClr val="tx1"/>
-          </a:solidFill>
-          <a:latin typeface="+mn-lt"/>
-          <a:ea typeface="+mn-ea"/>
-          <a:cs typeface="+mn-cs"/>
-        </a:defRPr>
-      </a:lvl1pPr>
-      <a:lvl2pPr marL="685800" indent="-228600" algn="l" defTabSz="914400" rtl="0" eaLnBrk="1" latinLnBrk="0" hangingPunct="1">
-        <a:lnSpc>
-          <a:spcPct val="90000"/>
-        </a:lnSpc>
-        <a:spcBef>
-          <a:spcPts val="500"/>
-        </a:spcBef>
-        <a:buFont typeface="Arial" panose="020B0604020202020204" pitchFamily="34" charset="0"/>
-        <a:buChar char="•"/>
-        <a:defRPr sz="2400" kern="1200">
-          <a:solidFill>
-            <a:schemeClr val="tx1"/>
-          </a:solidFill>
-          <a:latin typeface="+mn-lt"/>
-          <a:ea typeface="+mn-ea"/>
-          <a:cs typeface="+mn-cs"/>
-        </a:defRPr>
-      </a:lvl2pPr>
-      <a:lvl3pPr marL="1143000" indent="-228600" algn="l" defTabSz="914400" rtl="0" eaLnBrk="1" latinLnBrk="0" hangingPunct="1">
-        <a:lnSpc>
-          <a:spcPct val="90000"/>
-        </a:lnSpc>
-        <a:spcBef>
-          <a:spcPts val="500"/>
-        </a:spcBef>
-        <a:buFont typeface="Arial" panose="020B0604020202020204" pitchFamily="34" charset="0"/>
-        <a:buChar char="•"/>
-        <a:defRPr sz="2000" kern="1200">
-          <a:solidFill>
-            <a:schemeClr val="tx1"/>
-          </a:solidFill>
-          <a:latin typeface="+mn-lt"/>
-          <a:ea typeface="+mn-ea"/>
-          <a:cs typeface="+mn-cs"/>
-        </a:defRPr>
-      </a:lvl3pPr>
-      <a:lvl4pPr marL="1600200" indent="-228600" algn="l" defTabSz="914400" rtl="0" eaLnBrk="1" latinLnBrk="0" hangingPunct="1">
-        <a:lnSpc>
-          <a:spcPct val="90000"/>
-        </a:lnSpc>
-        <a:spcBef>
-          <a:spcPts val="500"/>
-        </a:spcBef>
-        <a:buFont typeface="Arial" panose="020B0604020202020204" pitchFamily="34" charset="0"/>
-        <a:buChar char="•"/>
-        <a:defRPr sz="1800" kern="1200">
-          <a:solidFill>
-            <a:schemeClr val="tx1"/>
-          </a:solidFill>
-          <a:latin typeface="+mn-lt"/>
-          <a:ea typeface="+mn-ea"/>
-          <a:cs typeface="+mn-cs"/>
-        </a:defRPr>
-      </a:lvl4pPr>
-      <a:lvl5pPr marL="2057400" indent="-228600" algn="l" defTabSz="914400" rtl="0" eaLnBrk="1" latinLnBrk="0" hangingPunct="1">
-        <a:lnSpc>
-          <a:spcPct val="90000"/>
-        </a:lnSpc>
-        <a:spcBef>
-          <a:spcPts val="500"/>
-        </a:spcBef>
-        <a:buFont typeface="Arial" panose="020B0604020202020204" pitchFamily="34" charset="0"/>
-        <a:buChar char="•"/>
-        <a:defRPr sz="1800" kern="1200">
-          <a:solidFill>
-            <a:schemeClr val="tx1"/>
-          </a:solidFill>
-          <a:latin typeface="+mn-lt"/>
-          <a:ea typeface="+mn-ea"/>
-          <a:cs typeface="+mn-cs"/>
-        </a:defRPr>
-      </a:lvl5pPr>
-      <a:lvl6pPr marL="2514600" indent="-228600" algn="l" defTabSz="914400" rtl="0" eaLnBrk="1" latinLnBrk="0" hangingPunct="1">
-        <a:lnSpc>
-          <a:spcPct val="90000"/>
-        </a:lnSpc>
-        <a:spcBef>
-          <a:spcPts val="500"/>
-        </a:spcBef>
-        <a:buFont typeface="Arial" panose="020B0604020202020204" pitchFamily="34" charset="0"/>
-        <a:buChar char="•"/>
-        <a:defRPr sz="1800" kern="1200">
-          <a:solidFill>
-            <a:schemeClr val="tx1"/>
-          </a:solidFill>
-          <a:latin typeface="+mn-lt"/>
-          <a:ea typeface="+mn-ea"/>
-          <a:cs typeface="+mn-cs"/>
-        </a:defRPr>
-      </a:lvl6pPr>
-      <a:lvl7pPr marL="2971800" indent="-228600" algn="l" defTabSz="914400" rtl="0" eaLnBrk="1" latinLnBrk="0" hangingPunct="1">
-        <a:lnSpc>
-          <a:spcPct val="90000"/>
-        </a:lnSpc>
-        <a:spcBef>
-          <a:spcPts val="500"/>
-        </a:spcBef>
-        <a:buFont typeface="Arial" panose="020B0604020202020204" pitchFamily="34" charset="0"/>
-        <a:buChar char="•"/>
-        <a:defRPr sz="1800" kern="1200">
-          <a:solidFill>
-            <a:schemeClr val="tx1"/>
-          </a:solidFill>
-          <a:latin typeface="+mn-lt"/>
-          <a:ea typeface="+mn-ea"/>
-          <a:cs typeface="+mn-cs"/>
-        </a:defRPr>
-      </a:lvl7pPr>
-      <a:lvl8pPr marL="3429000" indent="-228600" algn="l" defTabSz="914400" rtl="0" eaLnBrk="1" latinLnBrk="0" hangingPunct="1">
-        <a:lnSpc>
-          <a:spcPct val="90000"/>
-        </a:lnSpc>
-        <a:spcBef>
-          <a:spcPts val="500"/>
-        </a:spcBef>
-        <a:buFont typeface="Arial" panose="020B0604020202020204" pitchFamily="34" charset="0"/>
-        <a:buChar char="•"/>
-        <a:defRPr sz="1800" kern="1200">
-          <a:solidFill>
-            <a:schemeClr val="tx1"/>
-          </a:solidFill>
-          <a:latin typeface="+mn-lt"/>
-          <a:ea typeface="+mn-ea"/>
-          <a:cs typeface="+mn-cs"/>
-        </a:defRPr>
-      </a:lvl8pPr>
-      <a:lvl9pPr marL="3886200" indent="-228600" algn="l" defTabSz="914400" rtl="0" eaLnBrk="1" latinLnBrk="0" hangingPunct="1">
-        <a:lnSpc>
-          <a:spcPct val="90000"/>
-        </a:lnSpc>
-        <a:spcBef>
-          <a:spcPts val="500"/>
-        </a:spcBef>
-        <a:buFont typeface="Arial" panose="020B0604020202020204" pitchFamily="34" charset="0"/>
-        <a:buChar char="•"/>
-        <a:defRPr sz="1800" kern="1200">
-          <a:solidFill>
-            <a:schemeClr val="tx1"/>
-          </a:solidFill>
-          <a:latin typeface="+mn-lt"/>
-          <a:ea typeface="+mn-ea"/>
-          <a:cs typeface="+mn-cs"/>
-        </a:defRPr>
-      </a:lvl9pPr>
-    </p:bodyStyle>
-    <p:otherStyle>
-      <a:defPPr>
-        <a:defRPr lang="pt-PT"/>
-      </a:defPPr>
-      <a:lvl1pPr marL="0" algn="l" defTabSz="914400" rtl="0" eaLnBrk="1" latinLnBrk="0" hangingPunct="1">
-        <a:defRPr sz="1800" kern="1200">
-          <a:solidFill>
-            <a:schemeClr val="tx1"/>
-          </a:solidFill>
-          <a:latin typeface="+mn-lt"/>
-          <a:ea typeface="+mn-ea"/>
-          <a:cs typeface="+mn-cs"/>
-        </a:defRPr>
-      </a:lvl1pPr>
-      <a:lvl2pPr marL="457200" algn="l" defTabSz="914400" rtl="0" eaLnBrk="1" latinLnBrk="0" hangingPunct="1">
-        <a:defRPr sz="1800" kern="1200">
-          <a:solidFill>
-            <a:schemeClr val="tx1"/>
-          </a:solidFill>
-          <a:latin typeface="+mn-lt"/>
-          <a:ea typeface="+mn-ea"/>
-          <a:cs typeface="+mn-cs"/>
-        </a:defRPr>
-      </a:lvl2pPr>
-      <a:lvl3pPr marL="914400" algn="l" defTabSz="914400" rtl="0" eaLnBrk="1" latinLnBrk="0" hangingPunct="1">
-        <a:defRPr sz="1800" kern="1200">
-          <a:solidFill>
-            <a:schemeClr val="tx1"/>
-          </a:solidFill>
-          <a:latin typeface="+mn-lt"/>
-          <a:ea typeface="+mn-ea"/>
-          <a:cs typeface="+mn-cs"/>
-        </a:defRPr>
-      </a:lvl3pPr>
-      <a:lvl4pPr marL="1371600" algn="l" defTabSz="914400" rtl="0" eaLnBrk="1" latinLnBrk="0" hangingPunct="1">
-        <a:defRPr sz="1800" kern="1200">
-          <a:solidFill>
-            <a:schemeClr val="tx1"/>
-          </a:solidFill>
-          <a:latin typeface="+mn-lt"/>
-          <a:ea typeface="+mn-ea"/>
-          <a:cs typeface="+mn-cs"/>
-        </a:defRPr>
-      </a:lvl4pPr>
-      <a:lvl5pPr marL="1828800" algn="l" defTabSz="914400" rtl="0" eaLnBrk="1" latinLnBrk="0" hangingPunct="1">
-        <a:defRPr sz="1800" kern="1200">
-          <a:solidFill>
-            <a:schemeClr val="tx1"/>
-          </a:solidFill>
-          <a:latin typeface="+mn-lt"/>
-          <a:ea typeface="+mn-ea"/>
-          <a:cs typeface="+mn-cs"/>
-        </a:defRPr>
-      </a:lvl5pPr>
-      <a:lvl6pPr marL="2286000" algn="l" defTabSz="914400" rtl="0" eaLnBrk="1" latinLnBrk="0" hangingPunct="1">
-        <a:defRPr sz="1800" kern="1200">
-          <a:solidFill>
-            <a:schemeClr val="tx1"/>
-          </a:solidFill>
-          <a:latin typeface="+mn-lt"/>
-          <a:ea typeface="+mn-ea"/>
-          <a:cs typeface="+mn-cs"/>
-        </a:defRPr>
-      </a:lvl6pPr>
-      <a:lvl7pPr marL="2743200" algn="l" defTabSz="914400" rtl="0" eaLnBrk="1" latinLnBrk="0" hangingPunct="1">
-        <a:defRPr sz="1800" kern="1200">
-          <a:solidFill>
-            <a:schemeClr val="tx1"/>
-          </a:solidFill>
-          <a:latin typeface="+mn-lt"/>
-          <a:ea typeface="+mn-ea"/>
-          <a:cs typeface="+mn-cs"/>
-        </a:defRPr>
-      </a:lvl7pPr>
-      <a:lvl8pPr marL="3200400" algn="l" defTabSz="914400" rtl="0" eaLnBrk="1" latinLnBrk="0" hangingPunct="1">
-        <a:defRPr sz="1800" kern="1200">
-          <a:solidFill>
-            <a:schemeClr val="tx1"/>
-          </a:solidFill>
-          <a:latin typeface="+mn-lt"/>
-          <a:ea typeface="+mn-ea"/>
-          <a:cs typeface="+mn-cs"/>
-        </a:defRPr>
-      </a:lvl8pPr>
-      <a:lvl9pPr marL="3657600" algn="l" defTabSz="914400" rtl="0" eaLnBrk="1" latinLnBrk="0" hangingPunct="1">
-        <a:defRPr sz="1800" kern="1200">
-          <a:solidFill>
-            <a:schemeClr val="tx1"/>
-          </a:solidFill>
-          <a:latin typeface="+mn-lt"/>
-          <a:ea typeface="+mn-ea"/>
-          <a:cs typeface="+mn-cs"/>
-        </a:defRPr>
-      </a:lvl9pPr>
-    </p:otherStyle>
-  </p:txStyles>
 </p:sldMaster>
 </file>
 
 <file path=ppt/slides/slide1.xml><?xml version="1.0" encoding="utf-8"?>
-<p:sld xmlns:a="http://schemas.openxmlformats.org/drawingml/2006/main" xmlns:r="http://schemas.openxmlformats.org/officeDocument/2006/relationships" xmlns:p="http://schemas.openxmlformats.org/presentationml/2006/main">
+<p:sld xmlns:a="http://schemas.openxmlformats.org/drawingml/2006/main" xmlns:p="http://schemas.openxmlformats.org/presentationml/2006/main" xmlns:r="http://schemas.openxmlformats.org/officeDocument/2006/relationships" xmlns:p14="http://schemas.microsoft.com/office/powerpoint/2010/main" xmlns:p15="http://schemas.microsoft.com/office/powerpoint/2012/main" xmlns:mc="http://schemas.openxmlformats.org/markup-compatibility/2006">
   <p:cSld>
     <p:spTree>
       <p:nvGrpSpPr>
@@ -4053,18 +4117,18 @@
       </p:grpSpPr>
       <p:pic>
         <p:nvPicPr>
-          <p:cNvPr id="30" name="Google Shape;54;p13"/>
+          <p:cNvPr id="30" name="Google Shape;54;p13" descr=""/>
           <p:cNvPicPr/>
           <p:nvPr/>
         </p:nvPicPr>
         <p:blipFill>
-          <a:blip r:embed="rId2"/>
+          <a:blip r:embed="rId1"/>
           <a:stretch/>
         </p:blipFill>
         <p:spPr>
           <a:xfrm>
             <a:off x="4080960" y="385920"/>
-            <a:ext cx="978120" cy="978120"/>
+            <a:ext cx="976680" cy="976680"/>
           </a:xfrm>
           <a:prstGeom prst="rect">
             <a:avLst/>
@@ -4084,7 +4148,7 @@
         <p:spPr>
           <a:xfrm>
             <a:off x="2187720" y="1367640"/>
-            <a:ext cx="4764600" cy="572040"/>
+            <a:ext cx="4763160" cy="570600"/>
           </a:xfrm>
           <a:prstGeom prst="rect">
             <a:avLst/>
@@ -4095,39 +4159,32 @@
           </a:ln>
         </p:spPr>
         <p:style>
-          <a:lnRef idx="0">
-            <a:scrgbClr r="0" g="0" b="0"/>
-          </a:lnRef>
-          <a:fillRef idx="0">
-            <a:scrgbClr r="0" g="0" b="0"/>
-          </a:fillRef>
-          <a:effectRef idx="0">
-            <a:scrgbClr r="0" g="0" b="0"/>
-          </a:effectRef>
+          <a:lnRef idx="0"/>
+          <a:fillRef idx="0"/>
+          <a:effectRef idx="0"/>
           <a:fontRef idx="minor"/>
         </p:style>
         <p:txBody>
-          <a:bodyPr lIns="90000" tIns="91440" rIns="90000" bIns="91440" anchor="t">
+          <a:bodyPr lIns="90000" rIns="90000" tIns="91440" bIns="91440" anchor="t">
             <a:noAutofit/>
           </a:bodyPr>
-          <a:lstStyle/>
           <a:p>
             <a:pPr algn="ctr" defTabSz="914400">
               <a:lnSpc>
                 <a:spcPct val="115000"/>
               </a:lnSpc>
               <a:tabLst>
-                <a:tab pos="0" algn="l"/>
-              </a:tabLst>
-            </a:pPr>
-            <a:r>
-              <a:rPr lang="pt-PT" sz="1200" b="1" u="none" strike="noStrike">
+                <a:tab algn="l" pos="0"/>
+              </a:tabLst>
+            </a:pPr>
+            <a:r>
+              <a:rPr b="1" lang="pt-PT" sz="1200" strike="noStrike" u="none">
                 <a:solidFill>
                   <a:schemeClr val="dk1"/>
                 </a:solidFill>
                 <a:effectLst/>
                 <a:highlight>
-                  <a:srgbClr val="F5F5F5"/>
+                  <a:srgbClr val="f5f5f5"/>
                 </a:highlight>
                 <a:uFillTx/>
                 <a:latin typeface="Arial"/>
@@ -4136,13 +4193,13 @@
               <a:t>INSTITUTO POLITÉCNICO INDUSTRIAL DO KILAMBA KIAXI</a:t>
             </a:r>
             <a:r>
-              <a:rPr lang="pt-PT" sz="1200" b="0" u="none" strike="noStrike">
+              <a:rPr b="0" lang="pt-PT" sz="1200" strike="noStrike" u="none">
                 <a:solidFill>
                   <a:schemeClr val="dk1"/>
                 </a:solidFill>
                 <a:effectLst/>
                 <a:highlight>
-                  <a:srgbClr val="F5F5F5"/>
+                  <a:srgbClr val="f5f5f5"/>
                 </a:highlight>
                 <a:uFillTx/>
                 <a:latin typeface="Arial"/>
@@ -4150,7 +4207,7 @@
               </a:rPr>
               <a:t>​</a:t>
             </a:r>
-            <a:endParaRPr lang="pt-PT" sz="1200" b="0" u="none" strike="noStrike">
+            <a:endParaRPr b="0" lang="pt-PT" sz="1200" strike="noStrike" u="none">
               <a:solidFill>
                 <a:srgbClr val="000000"/>
               </a:solidFill>
@@ -4165,17 +4222,17 @@
                 <a:spcPct val="115000"/>
               </a:lnSpc>
               <a:tabLst>
-                <a:tab pos="0" algn="l"/>
-              </a:tabLst>
-            </a:pPr>
-            <a:r>
-              <a:rPr lang="pt-PT" sz="1200" b="1" u="none" strike="noStrike">
+                <a:tab algn="l" pos="0"/>
+              </a:tabLst>
+            </a:pPr>
+            <a:r>
+              <a:rPr b="1" lang="pt-PT" sz="1200" strike="noStrike" u="none">
                 <a:solidFill>
                   <a:schemeClr val="dk1"/>
                 </a:solidFill>
                 <a:effectLst/>
                 <a:highlight>
-                  <a:srgbClr val="F5F5F5"/>
+                  <a:srgbClr val="f5f5f5"/>
                 </a:highlight>
                 <a:uFillTx/>
                 <a:latin typeface="Arial"/>
@@ -4184,13 +4241,13 @@
               <a:t>Nº 8056 “NOVA VIDA”</a:t>
             </a:r>
             <a:r>
-              <a:rPr lang="pt-PT" sz="1200" b="0" u="none" strike="noStrike">
+              <a:rPr b="0" lang="pt-PT" sz="1200" strike="noStrike" u="none">
                 <a:solidFill>
                   <a:schemeClr val="dk1"/>
                 </a:solidFill>
                 <a:effectLst/>
                 <a:highlight>
-                  <a:srgbClr val="F5F5F5"/>
+                  <a:srgbClr val="f5f5f5"/>
                 </a:highlight>
                 <a:uFillTx/>
                 <a:latin typeface="Arial"/>
@@ -4198,7 +4255,7 @@
               </a:rPr>
               <a:t>​</a:t>
             </a:r>
-            <a:endParaRPr lang="pt-PT" sz="1200" b="0" u="none" strike="noStrike">
+            <a:endParaRPr b="0" lang="pt-PT" sz="1200" strike="noStrike" u="none">
               <a:solidFill>
                 <a:srgbClr val="000000"/>
               </a:solidFill>
@@ -4213,17 +4270,17 @@
                 <a:spcPct val="115000"/>
               </a:lnSpc>
               <a:tabLst>
-                <a:tab pos="0" algn="l"/>
-              </a:tabLst>
-            </a:pPr>
-            <a:r>
-              <a:rPr lang="pt-PT" sz="1800" b="0" u="none" strike="noStrike">
+                <a:tab algn="l" pos="0"/>
+              </a:tabLst>
+            </a:pPr>
+            <a:r>
+              <a:rPr b="0" lang="pt-PT" sz="1800" strike="noStrike" u="none">
                 <a:solidFill>
                   <a:schemeClr val="dk1"/>
                 </a:solidFill>
                 <a:effectLst/>
                 <a:highlight>
-                  <a:srgbClr val="F5F5F5"/>
+                  <a:srgbClr val="f5f5f5"/>
                 </a:highlight>
                 <a:uFillTx/>
                 <a:latin typeface="Arial"/>
@@ -4231,7 +4288,7 @@
               </a:rPr>
               <a:t>​</a:t>
             </a:r>
-            <a:endParaRPr lang="pt-PT" sz="1800" b="0" u="none" strike="noStrike">
+            <a:endParaRPr b="0" lang="pt-PT" sz="1800" strike="noStrike" u="none">
               <a:solidFill>
                 <a:srgbClr val="000000"/>
               </a:solidFill>
@@ -4246,10 +4303,10 @@
                 <a:spcPct val="100000"/>
               </a:lnSpc>
               <a:tabLst>
-                <a:tab pos="0" algn="l"/>
-              </a:tabLst>
-            </a:pPr>
-            <a:endParaRPr lang="pt-PT" sz="1800" b="0" u="none" strike="noStrike">
+                <a:tab algn="l" pos="0"/>
+              </a:tabLst>
+            </a:pPr>
+            <a:endParaRPr b="0" lang="pt-PT" sz="1800" strike="noStrike" u="none">
               <a:solidFill>
                 <a:srgbClr val="000000"/>
               </a:solidFill>
@@ -4262,18 +4319,18 @@
       </p:sp>
       <p:pic>
         <p:nvPicPr>
-          <p:cNvPr id="32" name="Google Shape;56;p13"/>
+          <p:cNvPr id="32" name="Google Shape;56;p13" descr=""/>
           <p:cNvPicPr/>
           <p:nvPr/>
         </p:nvPicPr>
         <p:blipFill>
-          <a:blip r:embed="rId3"/>
+          <a:blip r:embed="rId2"/>
           <a:stretch/>
         </p:blipFill>
         <p:spPr>
           <a:xfrm>
             <a:off x="4128120" y="1943640"/>
-            <a:ext cx="883800" cy="853200"/>
+            <a:ext cx="882360" cy="851760"/>
           </a:xfrm>
           <a:prstGeom prst="rect">
             <a:avLst/>
@@ -4293,7 +4350,7 @@
         <p:spPr>
           <a:xfrm>
             <a:off x="2692440" y="2800800"/>
-            <a:ext cx="3755520" cy="357480"/>
+            <a:ext cx="3754080" cy="356040"/>
           </a:xfrm>
           <a:prstGeom prst="rect">
             <a:avLst/>
@@ -4304,39 +4361,32 @@
           </a:ln>
         </p:spPr>
         <p:style>
-          <a:lnRef idx="0">
-            <a:scrgbClr r="0" g="0" b="0"/>
-          </a:lnRef>
-          <a:fillRef idx="0">
-            <a:scrgbClr r="0" g="0" b="0"/>
-          </a:fillRef>
-          <a:effectRef idx="0">
-            <a:scrgbClr r="0" g="0" b="0"/>
-          </a:effectRef>
+          <a:lnRef idx="0"/>
+          <a:fillRef idx="0"/>
+          <a:effectRef idx="0"/>
           <a:fontRef idx="minor"/>
         </p:style>
         <p:txBody>
-          <a:bodyPr lIns="90000" tIns="91440" rIns="90000" bIns="91440" anchor="t">
+          <a:bodyPr lIns="90000" rIns="90000" tIns="91440" bIns="91440" anchor="t">
             <a:noAutofit/>
           </a:bodyPr>
-          <a:lstStyle/>
           <a:p>
             <a:pPr defTabSz="914400">
               <a:lnSpc>
                 <a:spcPct val="100000"/>
               </a:lnSpc>
               <a:tabLst>
-                <a:tab pos="0" algn="l"/>
-              </a:tabLst>
-            </a:pPr>
-            <a:r>
-              <a:rPr lang="pt-PT" sz="1200" b="1" u="none" strike="noStrike">
+                <a:tab algn="l" pos="0"/>
+              </a:tabLst>
+            </a:pPr>
+            <a:r>
+              <a:rPr b="1" lang="pt-PT" sz="1200" strike="noStrike" u="none">
                 <a:solidFill>
                   <a:schemeClr val="dk1"/>
                 </a:solidFill>
                 <a:effectLst/>
                 <a:highlight>
-                  <a:srgbClr val="FFFFFF"/>
+                  <a:srgbClr val="ffffff"/>
                 </a:highlight>
                 <a:uFillTx/>
                 <a:latin typeface="Arial"/>
@@ -4345,13 +4395,13 @@
               <a:t>COMPLEXO ESCOLAR PRIVADO MONA TOWER</a:t>
             </a:r>
             <a:r>
-              <a:rPr lang="pt-PT" sz="1200" b="0" u="none" strike="noStrike">
+              <a:rPr b="0" lang="pt-PT" sz="1200" strike="noStrike" u="none">
                 <a:solidFill>
                   <a:schemeClr val="dk1"/>
                 </a:solidFill>
                 <a:effectLst/>
                 <a:highlight>
-                  <a:srgbClr val="FFFFFF"/>
+                  <a:srgbClr val="ffffff"/>
                 </a:highlight>
                 <a:uFillTx/>
                 <a:latin typeface="Arial"/>
@@ -4359,7 +4409,7 @@
               </a:rPr>
               <a:t> </a:t>
             </a:r>
-            <a:endParaRPr lang="pt-PT" sz="1200" b="0" u="none" strike="noStrike">
+            <a:endParaRPr b="0" lang="pt-PT" sz="1200" strike="noStrike" u="none">
               <a:solidFill>
                 <a:srgbClr val="000000"/>
               </a:solidFill>
@@ -4379,7 +4429,7 @@
         <p:spPr>
           <a:xfrm>
             <a:off x="1446480" y="3162600"/>
-            <a:ext cx="6246720" cy="978120"/>
+            <a:ext cx="6245280" cy="976680"/>
           </a:xfrm>
           <a:prstGeom prst="rect">
             <a:avLst/>
@@ -4390,22 +4440,15 @@
           </a:ln>
         </p:spPr>
         <p:style>
-          <a:lnRef idx="0">
-            <a:scrgbClr r="0" g="0" b="0"/>
-          </a:lnRef>
-          <a:fillRef idx="0">
-            <a:scrgbClr r="0" g="0" b="0"/>
-          </a:fillRef>
-          <a:effectRef idx="0">
-            <a:scrgbClr r="0" g="0" b="0"/>
-          </a:effectRef>
+          <a:lnRef idx="0"/>
+          <a:fillRef idx="0"/>
+          <a:effectRef idx="0"/>
           <a:fontRef idx="minor"/>
         </p:style>
         <p:txBody>
-          <a:bodyPr lIns="90000" tIns="91440" rIns="90000" bIns="91440" anchor="t">
+          <a:bodyPr lIns="90000" rIns="90000" tIns="91440" bIns="91440" anchor="t">
             <a:noAutofit/>
           </a:bodyPr>
-          <a:lstStyle/>
           <a:p>
             <a:pPr algn="ctr" defTabSz="914400">
               <a:lnSpc>
@@ -4415,10 +4458,10 @@
                 <a:spcPts val="1199"/>
               </a:spcBef>
               <a:tabLst>
-                <a:tab pos="0" algn="l"/>
-              </a:tabLst>
-            </a:pPr>
-            <a:endParaRPr lang="pt-PT" sz="1200" b="0" u="none" strike="noStrike">
+                <a:tab algn="l" pos="0"/>
+              </a:tabLst>
+            </a:pPr>
+            <a:endParaRPr b="0" lang="pt-PT" sz="1200" strike="noStrike" u="none">
               <a:solidFill>
                 <a:srgbClr val="000000"/>
               </a:solidFill>
@@ -4436,11 +4479,11 @@
                 <a:spcPts val="1199"/>
               </a:spcBef>
               <a:tabLst>
-                <a:tab pos="0" algn="l"/>
-              </a:tabLst>
-            </a:pPr>
-            <a:r>
-              <a:rPr lang="pt-PT" sz="1200" b="1" u="none" strike="noStrike">
+                <a:tab algn="l" pos="0"/>
+              </a:tabLst>
+            </a:pPr>
+            <a:r>
+              <a:rPr b="1" lang="pt-PT" sz="1200" strike="noStrike" u="none">
                 <a:solidFill>
                   <a:schemeClr val="dk1"/>
                 </a:solidFill>
@@ -4451,7 +4494,7 @@
               </a:rPr>
               <a:t>SISTEMA INTEGRADO DE GESTÃO E PROCESSAMENTO DE PAGAMENTOS PARA O COLÉGIO MONA TOWER</a:t>
             </a:r>
-            <a:endParaRPr lang="pt-PT" sz="1200" b="0" u="none" strike="noStrike">
+            <a:endParaRPr b="0" lang="pt-PT" sz="1200" strike="noStrike" u="none">
               <a:solidFill>
                 <a:srgbClr val="000000"/>
               </a:solidFill>
@@ -4469,10 +4512,10 @@
                 <a:spcPts val="99"/>
               </a:spcBef>
               <a:tabLst>
-                <a:tab pos="0" algn="l"/>
-              </a:tabLst>
-            </a:pPr>
-            <a:endParaRPr lang="pt-PT" sz="1200" b="0" u="none" strike="noStrike">
+                <a:tab algn="l" pos="0"/>
+              </a:tabLst>
+            </a:pPr>
+            <a:endParaRPr b="0" lang="pt-PT" sz="1200" strike="noStrike" u="none">
               <a:solidFill>
                 <a:srgbClr val="000000"/>
               </a:solidFill>
@@ -4492,7 +4535,7 @@
         <p:spPr>
           <a:xfrm>
             <a:off x="3975840" y="4666680"/>
-            <a:ext cx="1188360" cy="472680"/>
+            <a:ext cx="1186920" cy="471240"/>
           </a:xfrm>
           <a:prstGeom prst="rect">
             <a:avLst/>
@@ -4503,39 +4546,32 @@
           </a:ln>
         </p:spPr>
         <p:style>
-          <a:lnRef idx="0">
-            <a:scrgbClr r="0" g="0" b="0"/>
-          </a:lnRef>
-          <a:fillRef idx="0">
-            <a:scrgbClr r="0" g="0" b="0"/>
-          </a:fillRef>
-          <a:effectRef idx="0">
-            <a:scrgbClr r="0" g="0" b="0"/>
-          </a:effectRef>
+          <a:lnRef idx="0"/>
+          <a:fillRef idx="0"/>
+          <a:effectRef idx="0"/>
           <a:fontRef idx="minor"/>
         </p:style>
         <p:txBody>
-          <a:bodyPr lIns="90000" tIns="91440" rIns="90000" bIns="91440" anchor="t">
+          <a:bodyPr lIns="90000" rIns="90000" tIns="91440" bIns="91440" anchor="t">
             <a:normAutofit fontScale="25000" lnSpcReduction="19999"/>
           </a:bodyPr>
-          <a:lstStyle/>
           <a:p>
             <a:pPr algn="ctr" defTabSz="914400">
               <a:lnSpc>
                 <a:spcPct val="115000"/>
               </a:lnSpc>
               <a:tabLst>
-                <a:tab pos="0" algn="l"/>
-              </a:tabLst>
-            </a:pPr>
-            <a:r>
-              <a:rPr lang="pt-PT" sz="4800" b="0" u="none" strike="noStrike">
+                <a:tab algn="l" pos="0"/>
+              </a:tabLst>
+            </a:pPr>
+            <a:r>
+              <a:rPr b="0" lang="pt-PT" sz="4800" strike="noStrike" u="none">
                 <a:solidFill>
                   <a:schemeClr val="dk1"/>
                 </a:solidFill>
                 <a:effectLst/>
                 <a:highlight>
-                  <a:srgbClr val="F5F5F5"/>
+                  <a:srgbClr val="f5f5f5"/>
                 </a:highlight>
                 <a:uFillTx/>
                 <a:latin typeface="Arial"/>
@@ -4543,7 +4579,7 @@
               </a:rPr>
               <a:t>Luanda​</a:t>
             </a:r>
-            <a:endParaRPr lang="pt-PT" sz="4800" b="0" u="none" strike="noStrike">
+            <a:endParaRPr b="0" lang="pt-PT" sz="4800" strike="noStrike" u="none">
               <a:solidFill>
                 <a:srgbClr val="000000"/>
               </a:solidFill>
@@ -4558,17 +4594,17 @@
                 <a:spcPct val="115000"/>
               </a:lnSpc>
               <a:tabLst>
-                <a:tab pos="0" algn="l"/>
-              </a:tabLst>
-            </a:pPr>
-            <a:r>
-              <a:rPr lang="pt-PT" sz="4800" b="0" u="none" strike="noStrike">
+                <a:tab algn="l" pos="0"/>
+              </a:tabLst>
+            </a:pPr>
+            <a:r>
+              <a:rPr b="0" lang="pt-PT" sz="4800" strike="noStrike" u="none">
                 <a:solidFill>
                   <a:schemeClr val="dk1"/>
                 </a:solidFill>
                 <a:effectLst/>
                 <a:highlight>
-                  <a:srgbClr val="F5F5F5"/>
+                  <a:srgbClr val="f5f5f5"/>
                 </a:highlight>
                 <a:uFillTx/>
                 <a:latin typeface="Arial"/>
@@ -4576,7 +4612,7 @@
               </a:rPr>
               <a:t>2025/26</a:t>
             </a:r>
-            <a:endParaRPr lang="pt-PT" sz="4800" b="0" u="none" strike="noStrike">
+            <a:endParaRPr b="0" lang="pt-PT" sz="4800" strike="noStrike" u="none">
               <a:solidFill>
                 <a:srgbClr val="000000"/>
               </a:solidFill>
@@ -4591,10 +4627,10 @@
                 <a:spcPct val="100000"/>
               </a:lnSpc>
               <a:tabLst>
-                <a:tab pos="0" algn="l"/>
-              </a:tabLst>
-            </a:pPr>
-            <a:endParaRPr lang="pt-PT" sz="1800" b="0" u="none" strike="noStrike">
+                <a:tab algn="l" pos="0"/>
+              </a:tabLst>
+            </a:pPr>
+            <a:endParaRPr b="0" lang="pt-PT" sz="1800" strike="noStrike" u="none">
               <a:solidFill>
                 <a:srgbClr val="000000"/>
               </a:solidFill>
@@ -4607,14 +4643,19 @@
       </p:sp>
     </p:spTree>
   </p:cSld>
-  <p:clrMapOvr>
-    <a:masterClrMapping/>
-  </p:clrMapOvr>
+  <mc:AlternateContent>
+    <mc:Choice Requires="p14">
+      <p:transition spd="slow" p14:dur="2000"/>
+    </mc:Choice>
+    <mc:Fallback>
+      <p:transition spd="slow"/>
+    </mc:Fallback>
+  </mc:AlternateContent>
 </p:sld>
 </file>
 
 <file path=ppt/slides/slide10.xml><?xml version="1.0" encoding="utf-8"?>
-<p:sld xmlns:a="http://schemas.openxmlformats.org/drawingml/2006/main" xmlns:r="http://schemas.openxmlformats.org/officeDocument/2006/relationships" xmlns:p="http://schemas.openxmlformats.org/presentationml/2006/main">
+<p:sld xmlns:a="http://schemas.openxmlformats.org/drawingml/2006/main" xmlns:p="http://schemas.openxmlformats.org/presentationml/2006/main" xmlns:r="http://schemas.openxmlformats.org/officeDocument/2006/relationships" xmlns:p14="http://schemas.microsoft.com/office/powerpoint/2010/main" xmlns:p15="http://schemas.microsoft.com/office/powerpoint/2012/main" xmlns:mc="http://schemas.openxmlformats.org/markup-compatibility/2006">
   <p:cSld>
     <p:spTree>
       <p:nvGrpSpPr>
@@ -4632,14 +4673,14 @@
       </p:grpSpPr>
       <p:sp>
         <p:nvSpPr>
-          <p:cNvPr id="61" name="CaixaDeTexto 3"/>
+          <p:cNvPr id="56" name="Google Shape;111;p21"/>
           <p:cNvSpPr/>
           <p:nvPr/>
         </p:nvSpPr>
         <p:spPr>
           <a:xfrm>
-            <a:off x="603720" y="641520"/>
-            <a:ext cx="4570200" cy="639000"/>
+            <a:off x="549000" y="638640"/>
+            <a:ext cx="3289680" cy="492480"/>
           </a:xfrm>
           <a:prstGeom prst="rect">
             <a:avLst/>
@@ -4650,56 +4691,37 @@
           </a:ln>
         </p:spPr>
         <p:style>
-          <a:lnRef idx="0">
-            <a:scrgbClr r="0" g="0" b="0"/>
-          </a:lnRef>
-          <a:fillRef idx="0">
-            <a:scrgbClr r="0" g="0" b="0"/>
-          </a:fillRef>
-          <a:effectRef idx="0">
-            <a:scrgbClr r="0" g="0" b="0"/>
-          </a:effectRef>
+          <a:lnRef idx="0"/>
+          <a:fillRef idx="0"/>
+          <a:effectRef idx="0"/>
           <a:fontRef idx="minor"/>
         </p:style>
         <p:txBody>
-          <a:bodyPr horzOverflow="overflow" lIns="90000" tIns="45000" rIns="90000" bIns="45000" numCol="1" spcCol="0" anchor="t">
-            <a:spAutoFit/>
+          <a:bodyPr lIns="90000" rIns="90000" tIns="91440" bIns="91440" anchor="t">
+            <a:noAutofit/>
           </a:bodyPr>
-          <a:lstStyle/>
           <a:p>
             <a:pPr defTabSz="914400">
               <a:lnSpc>
                 <a:spcPct val="100000"/>
               </a:lnSpc>
-            </a:pPr>
-            <a:r>
-              <a:rPr lang="pt-PT" sz="1800" b="1" u="none" strike="noStrike">
-                <a:solidFill>
-                  <a:srgbClr val="000000"/>
+              <a:tabLst>
+                <a:tab algn="l" pos="0"/>
+              </a:tabLst>
+            </a:pPr>
+            <a:r>
+              <a:rPr b="1" lang="pt-PT" sz="1800" strike="noStrike" u="none">
+                <a:solidFill>
+                  <a:schemeClr val="dk1"/>
                 </a:solidFill>
                 <a:effectLst/>
                 <a:uFillTx/>
                 <a:latin typeface="Arial"/>
                 <a:ea typeface="Arial"/>
               </a:rPr>
-              <a:t>Ferramentas </a:t>
-            </a:r>
-            <a:endParaRPr lang="pt-PT" sz="1800" b="0" u="none" strike="noStrike">
-              <a:solidFill>
-                <a:srgbClr val="000000"/>
-              </a:solidFill>
-              <a:effectLst/>
-              <a:uFillTx/>
-              <a:latin typeface="Arial"/>
-            </a:endParaRPr>
-          </a:p>
-          <a:p>
-            <a:pPr algn="ctr" defTabSz="914400">
-              <a:lnSpc>
-                <a:spcPct val="100000"/>
-              </a:lnSpc>
-            </a:pPr>
-            <a:endParaRPr lang="pt-PT" sz="1800" b="0" u="none" strike="noStrike">
+              <a:t>Tecnologias</a:t>
+            </a:r>
+            <a:endParaRPr b="0" lang="pt-PT" sz="1800" strike="noStrike" u="none">
               <a:solidFill>
                 <a:srgbClr val="000000"/>
               </a:solidFill>
@@ -4712,18 +4734,18 @@
       </p:sp>
       <p:pic>
         <p:nvPicPr>
-          <p:cNvPr id="62" name="Imagem 4" descr="Uma imagem com Azul elétrico, símbolo, Retângulo, azul&#10;&#10;Os conteúdos gerados por IA poderão estar incorretos."/>
+          <p:cNvPr id="57" name="Imagem 1" descr="Uma imagem com desenho, clipart, Gráficos, elefante&#10;&#10;Os conteúdos gerados por IA poderão estar incorretos."/>
           <p:cNvPicPr/>
           <p:nvPr/>
         </p:nvPicPr>
         <p:blipFill>
-          <a:blip r:embed="rId2"/>
+          <a:blip r:embed="rId1"/>
           <a:stretch/>
         </p:blipFill>
         <p:spPr>
           <a:xfrm>
-            <a:off x="1041840" y="1414080"/>
-            <a:ext cx="1634400" cy="1634400"/>
+            <a:off x="2247480" y="1358640"/>
+            <a:ext cx="1572480" cy="1064160"/>
           </a:xfrm>
           <a:prstGeom prst="rect">
             <a:avLst/>
@@ -4736,24 +4758,45 @@
       </p:pic>
       <p:pic>
         <p:nvPicPr>
-          <p:cNvPr id="63" name="Gráfico 5"/>
+          <p:cNvPr id="58" name="Imagem 2" descr="Uma imagem com design, logótipo, Gráficos, Tipo de letra&#10;&#10;Os conteúdos gerados por IA poderão estar incorretos."/>
           <p:cNvPicPr/>
           <p:nvPr/>
         </p:nvPicPr>
         <p:blipFill>
-          <a:blip>
-            <a:extLst>
-              <a:ext uri="{96DAC541-7B7A-43D3-8B79-37D633B846F1}">
-                <asvg:svgBlip xmlns:asvg="http://schemas.microsoft.com/office/drawing/2016/SVG/main" r:embed="rId3"/>
-              </a:ext>
-            </a:extLst>
-          </a:blip>
+          <a:blip r:embed="rId2"/>
+          <a:srcRect l="0" t="-4284" r="-18212" b="-9629"/>
           <a:stretch/>
         </p:blipFill>
         <p:spPr>
           <a:xfrm>
-            <a:off x="2889720" y="2570040"/>
-            <a:ext cx="3049920" cy="1629720"/>
+            <a:off x="3671640" y="2934360"/>
+            <a:ext cx="1787040" cy="1785960"/>
+          </a:xfrm>
+          <a:prstGeom prst="rect">
+            <a:avLst/>
+          </a:prstGeom>
+          <a:noFill/>
+          <a:ln w="0">
+            <a:solidFill>
+              <a:srgbClr val="ffffff"/>
+            </a:solidFill>
+          </a:ln>
+        </p:spPr>
+      </p:pic>
+      <p:pic>
+        <p:nvPicPr>
+          <p:cNvPr id="59" name="Imagem 3" descr="Uma imagem com texto, Gráficos, design gráfico, Tipo de letra&#10;&#10;Os conteúdos gerados por IA poderão estar incorretos."/>
+          <p:cNvPicPr/>
+          <p:nvPr/>
+        </p:nvPicPr>
+        <p:blipFill>
+          <a:blip r:embed="rId3"/>
+          <a:stretch/>
+        </p:blipFill>
+        <p:spPr>
+          <a:xfrm>
+            <a:off x="5707080" y="2684880"/>
+            <a:ext cx="2816640" cy="1883880"/>
           </a:xfrm>
           <a:prstGeom prst="rect">
             <a:avLst/>
@@ -4766,7 +4809,7 @@
       </p:pic>
       <p:pic>
         <p:nvPicPr>
-          <p:cNvPr id="64" name="Imagem 6" descr="Uma imagem com preto, escuridão&#10;&#10;Os conteúdos gerados por IA poderão estar incorretos."/>
+          <p:cNvPr id="60" name="Imagem 4" descr="Uma imagem com Gráficos, Tipo de letra, logótipo, design gráfico&#10;&#10;Os conteúdos gerados por IA poderão estar incorretos."/>
           <p:cNvPicPr/>
           <p:nvPr/>
         </p:nvPicPr>
@@ -4776,8 +4819,32 @@
         </p:blipFill>
         <p:spPr>
           <a:xfrm>
-            <a:off x="5661000" y="1412640"/>
-            <a:ext cx="3200760" cy="1798920"/>
+            <a:off x="486000" y="2984040"/>
+            <a:ext cx="2863800" cy="1587600"/>
+          </a:xfrm>
+          <a:prstGeom prst="rect">
+            <a:avLst/>
+          </a:prstGeom>
+          <a:noFill/>
+          <a:ln w="0">
+            <a:noFill/>
+          </a:ln>
+        </p:spPr>
+      </p:pic>
+      <p:pic>
+        <p:nvPicPr>
+          <p:cNvPr id="61" name="Imagem 5" descr="Uma imagem com coração, logótipo, Gráficos, design&#10;&#10;Os conteúdos gerados por IA poderão estar incorretos."/>
+          <p:cNvPicPr/>
+          <p:nvPr/>
+        </p:nvPicPr>
+        <p:blipFill>
+          <a:blip r:embed="rId5"/>
+          <a:stretch/>
+        </p:blipFill>
+        <p:spPr>
+          <a:xfrm>
+            <a:off x="5010120" y="1101240"/>
+            <a:ext cx="1579320" cy="1579320"/>
           </a:xfrm>
           <a:prstGeom prst="rect">
             <a:avLst/>
@@ -4790,14 +4857,19 @@
       </p:pic>
     </p:spTree>
   </p:cSld>
-  <p:clrMapOvr>
-    <a:masterClrMapping/>
-  </p:clrMapOvr>
+  <mc:AlternateContent>
+    <mc:Choice Requires="p14">
+      <p:transition spd="slow" p14:dur="2000"/>
+    </mc:Choice>
+    <mc:Fallback>
+      <p:transition spd="slow"/>
+    </mc:Fallback>
+  </mc:AlternateContent>
 </p:sld>
 </file>
 
 <file path=ppt/slides/slide11.xml><?xml version="1.0" encoding="utf-8"?>
-<p:sld xmlns:a="http://schemas.openxmlformats.org/drawingml/2006/main" xmlns:r="http://schemas.openxmlformats.org/officeDocument/2006/relationships" xmlns:p="http://schemas.openxmlformats.org/presentationml/2006/main">
+<p:sld xmlns:a="http://schemas.openxmlformats.org/drawingml/2006/main" xmlns:p="http://schemas.openxmlformats.org/presentationml/2006/main" xmlns:r="http://schemas.openxmlformats.org/officeDocument/2006/relationships" xmlns:p14="http://schemas.microsoft.com/office/powerpoint/2010/main" xmlns:p15="http://schemas.microsoft.com/office/powerpoint/2012/main" xmlns:mc="http://schemas.openxmlformats.org/markup-compatibility/2006">
   <p:cSld>
     <p:spTree>
       <p:nvGrpSpPr>
@@ -4815,14 +4887,14 @@
       </p:grpSpPr>
       <p:sp>
         <p:nvSpPr>
-          <p:cNvPr id="73" name="Google Shape;126;p23"/>
+          <p:cNvPr id="62" name="CaixaDeTexto 3"/>
           <p:cNvSpPr/>
           <p:nvPr/>
         </p:nvSpPr>
         <p:spPr>
           <a:xfrm>
-            <a:off x="523440" y="638640"/>
-            <a:ext cx="3086640" cy="457560"/>
+            <a:off x="603720" y="641520"/>
+            <a:ext cx="4568760" cy="639000"/>
           </a:xfrm>
           <a:prstGeom prst="rect">
             <a:avLst/>
@@ -4833,44 +4905,49 @@
           </a:ln>
         </p:spPr>
         <p:style>
-          <a:lnRef idx="0">
-            <a:scrgbClr r="0" g="0" b="0"/>
-          </a:lnRef>
-          <a:fillRef idx="0">
-            <a:scrgbClr r="0" g="0" b="0"/>
-          </a:fillRef>
-          <a:effectRef idx="0">
-            <a:scrgbClr r="0" g="0" b="0"/>
-          </a:effectRef>
+          <a:lnRef idx="0"/>
+          <a:fillRef idx="0"/>
+          <a:effectRef idx="0"/>
           <a:fontRef idx="minor"/>
         </p:style>
         <p:txBody>
-          <a:bodyPr lIns="90000" tIns="91440" rIns="90000" bIns="91440" anchor="t">
+          <a:bodyPr numCol="1" spcCol="0" horzOverflow="overflow" lIns="90000" rIns="90000" tIns="45000" bIns="45000" anchor="t">
             <a:spAutoFit/>
           </a:bodyPr>
-          <a:lstStyle/>
           <a:p>
             <a:pPr defTabSz="914400">
               <a:lnSpc>
                 <a:spcPct val="100000"/>
               </a:lnSpc>
-              <a:tabLst>
-                <a:tab pos="0" algn="l"/>
-              </a:tabLst>
-            </a:pPr>
-            <a:r>
-              <a:rPr lang="pt-PT" sz="1800" b="1" u="none" strike="noStrike">
-                <a:solidFill>
-                  <a:schemeClr val="dk1"/>
+            </a:pPr>
+            <a:r>
+              <a:rPr b="1" lang="pt-PT" sz="1800" strike="noStrike" u="none">
+                <a:solidFill>
+                  <a:srgbClr val="000000"/>
                 </a:solidFill>
                 <a:effectLst/>
                 <a:uFillTx/>
                 <a:latin typeface="Arial"/>
                 <a:ea typeface="Arial"/>
               </a:rPr>
-              <a:t>Diagrama de Caso de Uso</a:t>
-            </a:r>
-            <a:endParaRPr lang="pt-PT" sz="1800" b="0" u="none" strike="noStrike">
+              <a:t>Ferramentas </a:t>
+            </a:r>
+            <a:endParaRPr b="0" lang="pt-PT" sz="1800" strike="noStrike" u="none">
+              <a:solidFill>
+                <a:srgbClr val="000000"/>
+              </a:solidFill>
+              <a:effectLst/>
+              <a:uFillTx/>
+              <a:latin typeface="Arial"/>
+            </a:endParaRPr>
+          </a:p>
+          <a:p>
+            <a:pPr algn="ctr" defTabSz="914400">
+              <a:lnSpc>
+                <a:spcPct val="100000"/>
+              </a:lnSpc>
+            </a:pPr>
+            <a:endParaRPr b="0" lang="pt-PT" sz="1800" strike="noStrike" u="none">
               <a:solidFill>
                 <a:srgbClr val="000000"/>
               </a:solidFill>
@@ -4883,18 +4960,96 @@
       </p:sp>
       <p:pic>
         <p:nvPicPr>
-          <p:cNvPr id="74" name="Imagem 73"/>
+          <p:cNvPr id="63" name="Imagem 4" descr="Uma imagem com Azul elétrico, símbolo, Retângulo, azul&#10;&#10;Os conteúdos gerados por IA poderão estar incorretos."/>
           <p:cNvPicPr/>
           <p:nvPr/>
         </p:nvPicPr>
         <p:blipFill>
-          <a:blip r:embed="rId2"/>
+          <a:blip r:embed="rId1"/>
           <a:stretch/>
         </p:blipFill>
         <p:spPr>
           <a:xfrm>
-            <a:off x="2160000" y="1089720"/>
-            <a:ext cx="5218560" cy="3588840"/>
+            <a:off x="1041840" y="1414080"/>
+            <a:ext cx="1632960" cy="1632960"/>
+          </a:xfrm>
+          <a:prstGeom prst="rect">
+            <a:avLst/>
+          </a:prstGeom>
+          <a:noFill/>
+          <a:ln w="0">
+            <a:noFill/>
+          </a:ln>
+        </p:spPr>
+      </p:pic>
+      <p:pic>
+        <p:nvPicPr>
+          <p:cNvPr id="64" name="Gráfico 5" descr=""/>
+          <p:cNvPicPr/>
+          <p:nvPr/>
+        </p:nvPicPr>
+        <p:blipFill>
+          <a:blip r:embed="rId2">
+            <a:extLst>
+              <a:ext uri="{96DAC541-7B7A-43D3-8B79-37D633B846F1}">
+                <asvg:svgBlip xmlns:asvg="http://schemas.microsoft.com/office/drawing/2016/SVG/main" r:embed="rId3"/>
+              </a:ext>
+            </a:extLst>
+          </a:blip>
+          <a:stretch/>
+        </p:blipFill>
+        <p:spPr>
+          <a:xfrm>
+            <a:off x="2880000" y="2880000"/>
+            <a:ext cx="3048480" cy="1628280"/>
+          </a:xfrm>
+          <a:prstGeom prst="rect">
+            <a:avLst/>
+          </a:prstGeom>
+          <a:noFill/>
+          <a:ln w="0">
+            <a:noFill/>
+          </a:ln>
+        </p:spPr>
+      </p:pic>
+      <p:pic>
+        <p:nvPicPr>
+          <p:cNvPr id="65" name="Imagem 6" descr="Uma imagem com preto, escuridão&#10;&#10;Os conteúdos gerados por IA poderão estar incorretos."/>
+          <p:cNvPicPr/>
+          <p:nvPr/>
+        </p:nvPicPr>
+        <p:blipFill>
+          <a:blip r:embed="rId4"/>
+          <a:stretch/>
+        </p:blipFill>
+        <p:spPr>
+          <a:xfrm>
+            <a:off x="5661000" y="1412640"/>
+            <a:ext cx="3199320" cy="1797480"/>
+          </a:xfrm>
+          <a:prstGeom prst="rect">
+            <a:avLst/>
+          </a:prstGeom>
+          <a:noFill/>
+          <a:ln w="0">
+            <a:noFill/>
+          </a:ln>
+        </p:spPr>
+      </p:pic>
+      <p:pic>
+        <p:nvPicPr>
+          <p:cNvPr id="66" name="" descr=""/>
+          <p:cNvPicPr/>
+          <p:nvPr/>
+        </p:nvPicPr>
+        <p:blipFill>
+          <a:blip r:embed="rId5"/>
+          <a:stretch/>
+        </p:blipFill>
+        <p:spPr>
+          <a:xfrm>
+            <a:off x="3671280" y="971280"/>
+            <a:ext cx="1548000" cy="1548000"/>
           </a:xfrm>
           <a:prstGeom prst="rect">
             <a:avLst/>
@@ -4907,14 +5062,19 @@
       </p:pic>
     </p:spTree>
   </p:cSld>
-  <p:clrMapOvr>
-    <a:masterClrMapping/>
-  </p:clrMapOvr>
+  <mc:AlternateContent>
+    <mc:Choice Requires="p14">
+      <p:transition spd="slow" p14:dur="2000"/>
+    </mc:Choice>
+    <mc:Fallback>
+      <p:transition spd="slow"/>
+    </mc:Fallback>
+  </mc:AlternateContent>
 </p:sld>
 </file>
 
 <file path=ppt/slides/slide12.xml><?xml version="1.0" encoding="utf-8"?>
-<p:sld xmlns:a="http://schemas.openxmlformats.org/drawingml/2006/main" xmlns:r="http://schemas.openxmlformats.org/officeDocument/2006/relationships" xmlns:p="http://schemas.openxmlformats.org/presentationml/2006/main">
+<p:sld xmlns:a="http://schemas.openxmlformats.org/drawingml/2006/main" xmlns:p="http://schemas.openxmlformats.org/presentationml/2006/main" xmlns:r="http://schemas.openxmlformats.org/officeDocument/2006/relationships" xmlns:p14="http://schemas.microsoft.com/office/powerpoint/2010/main" xmlns:p15="http://schemas.microsoft.com/office/powerpoint/2012/main" xmlns:mc="http://schemas.openxmlformats.org/markup-compatibility/2006">
   <p:cSld>
     <p:spTree>
       <p:nvGrpSpPr>
@@ -4932,14 +5092,14 @@
       </p:grpSpPr>
       <p:sp>
         <p:nvSpPr>
-          <p:cNvPr id="75" name="Google Shape;138;p25"/>
+          <p:cNvPr id="67" name="Google Shape;89;p18"/>
           <p:cNvSpPr/>
           <p:nvPr/>
         </p:nvSpPr>
         <p:spPr>
           <a:xfrm>
-            <a:off x="357480" y="727920"/>
-            <a:ext cx="1796760" cy="366480"/>
+            <a:off x="536400" y="625680"/>
+            <a:ext cx="1565280" cy="457560"/>
           </a:xfrm>
           <a:prstGeom prst="rect">
             <a:avLst/>
@@ -4950,44 +5110,36 @@
           </a:ln>
         </p:spPr>
         <p:style>
-          <a:lnRef idx="0">
-            <a:scrgbClr r="0" g="0" b="0"/>
-          </a:lnRef>
-          <a:fillRef idx="0">
-            <a:scrgbClr r="0" g="0" b="0"/>
-          </a:fillRef>
-          <a:effectRef idx="0">
-            <a:scrgbClr r="0" g="0" b="0"/>
-          </a:effectRef>
+          <a:lnRef idx="0"/>
+          <a:fillRef idx="0"/>
+          <a:effectRef idx="0"/>
           <a:fontRef idx="minor"/>
         </p:style>
         <p:txBody>
-          <a:bodyPr lIns="90000" tIns="91440" rIns="90000" bIns="91440" anchor="t">
-            <a:noAutofit/>
+          <a:bodyPr lIns="90000" rIns="90000" tIns="91440" bIns="91440" anchor="t">
+            <a:spAutoFit/>
           </a:bodyPr>
-          <a:lstStyle/>
           <a:p>
             <a:pPr defTabSz="914400">
               <a:lnSpc>
                 <a:spcPct val="100000"/>
               </a:lnSpc>
               <a:tabLst>
-                <a:tab pos="0" algn="l"/>
-              </a:tabLst>
-            </a:pPr>
-            <a:r>
-              <a:rPr lang="pt-PT" sz="1800" b="1" u="none" strike="noStrike">
+                <a:tab algn="l" pos="0"/>
+              </a:tabLst>
+            </a:pPr>
+            <a:r>
+              <a:rPr b="1" lang="pt-PT" sz="1800" strike="noStrike" u="none">
                 <a:solidFill>
                   <a:schemeClr val="dk1"/>
                 </a:solidFill>
                 <a:effectLst/>
                 <a:uFillTx/>
                 <a:latin typeface="Arial"/>
-                <a:ea typeface="Arial"/>
-              </a:rPr>
-              <a:t>DER</a:t>
-            </a:r>
-            <a:endParaRPr lang="pt-PT" sz="1800" b="0" u="none" strike="noStrike">
+              </a:rPr>
+              <a:t>Requisitos</a:t>
+            </a:r>
+            <a:endParaRPr b="0" lang="pt-PT" sz="1800" strike="noStrike" u="none">
               <a:solidFill>
                 <a:srgbClr val="000000"/>
               </a:solidFill>
@@ -4998,20 +5150,16 @@
           </a:p>
         </p:txBody>
       </p:sp>
-      <p:pic>
-        <p:nvPicPr>
-          <p:cNvPr id="76" name="Imagem 1" descr="Uma imagem com diagrama, texto, desenho, file&#10;&#10;Os conteúdos gerados por IA poderão estar incorretos."/>
-          <p:cNvPicPr/>
+      <p:sp>
+        <p:nvSpPr>
+          <p:cNvPr id="68" name="Google Shape;90;p18"/>
+          <p:cNvSpPr/>
           <p:nvPr/>
-        </p:nvPicPr>
-        <p:blipFill>
-          <a:blip r:embed="rId2"/>
-          <a:stretch/>
-        </p:blipFill>
+        </p:nvSpPr>
         <p:spPr>
           <a:xfrm>
-            <a:off x="414360" y="1170360"/>
-            <a:ext cx="8313480" cy="3598560"/>
+            <a:off x="536400" y="1087560"/>
+            <a:ext cx="7721280" cy="1744200"/>
           </a:xfrm>
           <a:prstGeom prst="rect">
             <a:avLst/>
@@ -5021,17 +5169,387 @@
             <a:noFill/>
           </a:ln>
         </p:spPr>
-      </p:pic>
+        <p:style>
+          <a:lnRef idx="0"/>
+          <a:fillRef idx="0"/>
+          <a:effectRef idx="0"/>
+          <a:fontRef idx="minor"/>
+        </p:style>
+        <p:txBody>
+          <a:bodyPr lIns="90000" rIns="90000" tIns="91440" bIns="91440" anchor="t">
+            <a:noAutofit/>
+          </a:bodyPr>
+          <a:p>
+            <a:pPr defTabSz="914400">
+              <a:lnSpc>
+                <a:spcPct val="100000"/>
+              </a:lnSpc>
+              <a:tabLst>
+                <a:tab algn="l" pos="0"/>
+              </a:tabLst>
+            </a:pPr>
+            <a:r>
+              <a:rPr b="1" lang="pt-PT" sz="1400" strike="noStrike" u="none">
+                <a:solidFill>
+                  <a:schemeClr val="dk1"/>
+                </a:solidFill>
+                <a:effectLst/>
+                <a:uFillTx/>
+                <a:latin typeface="Arial"/>
+              </a:rPr>
+              <a:t>Requisitos Funcionais</a:t>
+            </a:r>
+            <a:endParaRPr b="0" lang="pt-PT" sz="1400" strike="noStrike" u="none">
+              <a:solidFill>
+                <a:srgbClr val="000000"/>
+              </a:solidFill>
+              <a:effectLst/>
+              <a:uFillTx/>
+              <a:latin typeface="Arial"/>
+            </a:endParaRPr>
+          </a:p>
+          <a:p>
+            <a:pPr defTabSz="914400">
+              <a:lnSpc>
+                <a:spcPct val="100000"/>
+              </a:lnSpc>
+              <a:tabLst>
+                <a:tab algn="l" pos="0"/>
+              </a:tabLst>
+            </a:pPr>
+            <a:endParaRPr b="0" lang="pt-PT" sz="1400" strike="noStrike" u="none">
+              <a:solidFill>
+                <a:srgbClr val="000000"/>
+              </a:solidFill>
+              <a:effectLst/>
+              <a:uFillTx/>
+              <a:latin typeface="Arial"/>
+            </a:endParaRPr>
+          </a:p>
+          <a:p>
+            <a:pPr defTabSz="914400">
+              <a:lnSpc>
+                <a:spcPct val="100000"/>
+              </a:lnSpc>
+              <a:tabLst>
+                <a:tab algn="l" pos="0"/>
+              </a:tabLst>
+            </a:pPr>
+            <a:r>
+              <a:rPr b="1" lang="pt-PT" sz="1400" strike="noStrike" u="none">
+                <a:solidFill>
+                  <a:schemeClr val="dk1"/>
+                </a:solidFill>
+                <a:effectLst/>
+                <a:uFillTx/>
+                <a:latin typeface="Arial"/>
+              </a:rPr>
+              <a:t>RF01 </a:t>
+            </a:r>
+            <a:r>
+              <a:rPr b="0" lang="pt-BR" sz="1400" strike="noStrike" u="none">
+                <a:solidFill>
+                  <a:schemeClr val="dk1"/>
+                </a:solidFill>
+                <a:effectLst/>
+                <a:uFillTx/>
+                <a:latin typeface="Times New Roman"/>
+              </a:rPr>
+              <a:t>– </a:t>
+            </a:r>
+            <a:r>
+              <a:rPr b="0" lang="pt-BR" sz="1400" strike="noStrike" u="none">
+                <a:solidFill>
+                  <a:schemeClr val="dk1"/>
+                </a:solidFill>
+                <a:effectLst/>
+                <a:uFillTx/>
+                <a:latin typeface="Arial"/>
+              </a:rPr>
+              <a:t>Emissão de Faturação Digital: O sistema deve permitir a geração de faturas detalhadas para todos os serviços académicos.</a:t>
+            </a:r>
+            <a:endParaRPr b="0" lang="pt-PT" sz="1400" strike="noStrike" u="none">
+              <a:solidFill>
+                <a:srgbClr val="000000"/>
+              </a:solidFill>
+              <a:effectLst/>
+              <a:uFillTx/>
+              <a:latin typeface="Arial"/>
+            </a:endParaRPr>
+          </a:p>
+          <a:p>
+            <a:pPr defTabSz="914400">
+              <a:lnSpc>
+                <a:spcPct val="100000"/>
+              </a:lnSpc>
+              <a:tabLst>
+                <a:tab algn="l" pos="0"/>
+              </a:tabLst>
+            </a:pPr>
+            <a:endParaRPr b="0" lang="pt-PT" sz="1400" strike="noStrike" u="none">
+              <a:solidFill>
+                <a:srgbClr val="000000"/>
+              </a:solidFill>
+              <a:effectLst/>
+              <a:uFillTx/>
+              <a:latin typeface="Arial"/>
+            </a:endParaRPr>
+          </a:p>
+          <a:p>
+            <a:pPr defTabSz="914400">
+              <a:lnSpc>
+                <a:spcPct val="100000"/>
+              </a:lnSpc>
+              <a:tabLst>
+                <a:tab algn="l" pos="0"/>
+              </a:tabLst>
+            </a:pPr>
+            <a:r>
+              <a:rPr b="1" lang="pt-BR" sz="1400" strike="noStrike" u="none">
+                <a:solidFill>
+                  <a:schemeClr val="dk1"/>
+                </a:solidFill>
+                <a:effectLst/>
+                <a:uFillTx/>
+                <a:latin typeface="Arial"/>
+              </a:rPr>
+              <a:t>RF02 </a:t>
+            </a:r>
+            <a:r>
+              <a:rPr b="0" lang="pt-BR" sz="1400" strike="noStrike" u="none">
+                <a:solidFill>
+                  <a:schemeClr val="dk1"/>
+                </a:solidFill>
+                <a:effectLst/>
+                <a:uFillTx/>
+                <a:latin typeface="Arial"/>
+              </a:rPr>
+              <a:t>– Gestão de Emolumentos e Multas: O sistema deve calcular automaticamente sanções pecuniárias por atrasos.</a:t>
+            </a:r>
+            <a:endParaRPr b="0" lang="pt-PT" sz="1400" strike="noStrike" u="none">
+              <a:solidFill>
+                <a:srgbClr val="000000"/>
+              </a:solidFill>
+              <a:effectLst/>
+              <a:uFillTx/>
+              <a:latin typeface="Arial"/>
+            </a:endParaRPr>
+          </a:p>
+        </p:txBody>
+      </p:sp>
+      <p:sp>
+        <p:nvSpPr>
+          <p:cNvPr id="69" name="Google Shape;90;p18"/>
+          <p:cNvSpPr/>
+          <p:nvPr/>
+        </p:nvSpPr>
+        <p:spPr>
+          <a:xfrm>
+            <a:off x="536400" y="2834280"/>
+            <a:ext cx="7721280" cy="1744200"/>
+          </a:xfrm>
+          <a:prstGeom prst="rect">
+            <a:avLst/>
+          </a:prstGeom>
+          <a:noFill/>
+          <a:ln w="0">
+            <a:noFill/>
+          </a:ln>
+        </p:spPr>
+        <p:style>
+          <a:lnRef idx="0"/>
+          <a:fillRef idx="0"/>
+          <a:effectRef idx="0"/>
+          <a:fontRef idx="minor"/>
+        </p:style>
+        <p:txBody>
+          <a:bodyPr lIns="90000" rIns="90000" tIns="91440" bIns="91440" anchor="t">
+            <a:noAutofit/>
+          </a:bodyPr>
+          <a:p>
+            <a:pPr defTabSz="914400">
+              <a:lnSpc>
+                <a:spcPct val="100000"/>
+              </a:lnSpc>
+              <a:tabLst>
+                <a:tab algn="l" pos="0"/>
+              </a:tabLst>
+            </a:pPr>
+            <a:r>
+              <a:rPr b="1" lang="pt-PT" sz="1400" strike="noStrike" u="none">
+                <a:solidFill>
+                  <a:schemeClr val="dk1"/>
+                </a:solidFill>
+                <a:effectLst/>
+                <a:uFillTx/>
+                <a:latin typeface="Arial"/>
+              </a:rPr>
+              <a:t>Requisitos Não Funcionais</a:t>
+            </a:r>
+            <a:endParaRPr b="0" lang="pt-PT" sz="1400" strike="noStrike" u="none">
+              <a:solidFill>
+                <a:srgbClr val="000000"/>
+              </a:solidFill>
+              <a:effectLst/>
+              <a:uFillTx/>
+              <a:latin typeface="Arial"/>
+            </a:endParaRPr>
+          </a:p>
+          <a:p>
+            <a:pPr defTabSz="914400">
+              <a:lnSpc>
+                <a:spcPct val="100000"/>
+              </a:lnSpc>
+              <a:tabLst>
+                <a:tab algn="l" pos="0"/>
+              </a:tabLst>
+            </a:pPr>
+            <a:endParaRPr b="0" lang="pt-PT" sz="1400" strike="noStrike" u="none">
+              <a:solidFill>
+                <a:srgbClr val="000000"/>
+              </a:solidFill>
+              <a:effectLst/>
+              <a:uFillTx/>
+              <a:latin typeface="Arial"/>
+            </a:endParaRPr>
+          </a:p>
+          <a:p>
+            <a:pPr defTabSz="914400">
+              <a:lnSpc>
+                <a:spcPct val="100000"/>
+              </a:lnSpc>
+              <a:tabLst>
+                <a:tab algn="l" pos="0"/>
+              </a:tabLst>
+            </a:pPr>
+            <a:r>
+              <a:rPr b="1" lang="pt-BR" sz="1400" strike="noStrike" u="none">
+                <a:solidFill>
+                  <a:schemeClr val="dk1"/>
+                </a:solidFill>
+                <a:effectLst/>
+                <a:uFillTx/>
+                <a:latin typeface="Arial"/>
+              </a:rPr>
+              <a:t>RNF01 </a:t>
+            </a:r>
+            <a:r>
+              <a:rPr b="0" lang="pt-BR" sz="1400" strike="noStrike" u="none">
+                <a:solidFill>
+                  <a:schemeClr val="dk1"/>
+                </a:solidFill>
+                <a:effectLst/>
+                <a:uFillTx/>
+                <a:latin typeface="Arial"/>
+              </a:rPr>
+              <a:t>– Controlo de Acesso e Autenticação: O sistema deve implementar protocolos de autenticação segura, garantindo que apenas utilizadores autorizados acedam a informações sensíveis.</a:t>
+            </a:r>
+            <a:endParaRPr b="0" lang="pt-PT" sz="1400" strike="noStrike" u="none">
+              <a:solidFill>
+                <a:srgbClr val="000000"/>
+              </a:solidFill>
+              <a:effectLst/>
+              <a:uFillTx/>
+              <a:latin typeface="Arial"/>
+            </a:endParaRPr>
+          </a:p>
+          <a:p>
+            <a:pPr defTabSz="914400">
+              <a:lnSpc>
+                <a:spcPct val="100000"/>
+              </a:lnSpc>
+              <a:tabLst>
+                <a:tab algn="l" pos="0"/>
+              </a:tabLst>
+            </a:pPr>
+            <a:endParaRPr b="0" lang="pt-PT" sz="1400" strike="noStrike" u="none">
+              <a:solidFill>
+                <a:srgbClr val="000000"/>
+              </a:solidFill>
+              <a:effectLst/>
+              <a:uFillTx/>
+              <a:latin typeface="Arial"/>
+            </a:endParaRPr>
+          </a:p>
+          <a:p>
+            <a:pPr defTabSz="914400">
+              <a:lnSpc>
+                <a:spcPct val="100000"/>
+              </a:lnSpc>
+              <a:tabLst>
+                <a:tab algn="l" pos="0"/>
+              </a:tabLst>
+            </a:pPr>
+            <a:r>
+              <a:rPr b="1" lang="pt-BR" sz="1400" strike="noStrike" u="none">
+                <a:solidFill>
+                  <a:schemeClr val="dk1"/>
+                </a:solidFill>
+                <a:effectLst/>
+                <a:uFillTx/>
+                <a:latin typeface="Arial"/>
+              </a:rPr>
+              <a:t>RNF02 </a:t>
+            </a:r>
+            <a:r>
+              <a:rPr b="0" lang="pt-BR" sz="1400" strike="noStrike" u="none">
+                <a:solidFill>
+                  <a:schemeClr val="dk1"/>
+                </a:solidFill>
+                <a:effectLst/>
+                <a:uFillTx/>
+                <a:latin typeface="Arial"/>
+              </a:rPr>
+              <a:t>– Auditoria e Rastreabilidade (Logs): Todas as transações financeiras e alterações críticas de dados devem ser registadas em </a:t>
+            </a:r>
+            <a:r>
+              <a:rPr b="0" i="1" lang="pt-BR" sz="1400" strike="noStrike" u="none">
+                <a:solidFill>
+                  <a:schemeClr val="dk1"/>
+                </a:solidFill>
+                <a:effectLst/>
+                <a:uFillTx/>
+                <a:latin typeface="Arial"/>
+              </a:rPr>
+              <a:t>logs</a:t>
+            </a:r>
+            <a:r>
+              <a:rPr b="0" lang="pt-BR" sz="1400" strike="noStrike" u="none">
+                <a:solidFill>
+                  <a:schemeClr val="dk1"/>
+                </a:solidFill>
+                <a:effectLst/>
+                <a:uFillTx/>
+                <a:latin typeface="Arial"/>
+              </a:rPr>
+              <a:t>, permitindo a identificação do autor, data e hora da operação.</a:t>
+            </a:r>
+            <a:endParaRPr b="0" lang="pt-PT" sz="1400" strike="noStrike" u="none">
+              <a:solidFill>
+                <a:srgbClr val="000000"/>
+              </a:solidFill>
+              <a:effectLst/>
+              <a:uFillTx/>
+              <a:latin typeface="Arial"/>
+            </a:endParaRPr>
+          </a:p>
+        </p:txBody>
+      </p:sp>
     </p:spTree>
   </p:cSld>
-  <p:clrMapOvr>
-    <a:masterClrMapping/>
-  </p:clrMapOvr>
+  <mc:AlternateContent>
+    <mc:Choice Requires="p14">
+      <p:transition spd="slow" p14:dur="2000"/>
+    </mc:Choice>
+    <mc:Fallback>
+      <p:transition spd="slow"/>
+    </mc:Fallback>
+  </mc:AlternateContent>
 </p:sld>
 </file>
 
 <file path=ppt/slides/slide13.xml><?xml version="1.0" encoding="utf-8"?>
-<p:sld xmlns:a="http://schemas.openxmlformats.org/drawingml/2006/main" xmlns:r="http://schemas.openxmlformats.org/officeDocument/2006/relationships" xmlns:p="http://schemas.openxmlformats.org/presentationml/2006/main">
+<p:sld xmlns:a="http://schemas.openxmlformats.org/drawingml/2006/main" xmlns:p="http://schemas.openxmlformats.org/presentationml/2006/main" xmlns:r="http://schemas.openxmlformats.org/officeDocument/2006/relationships" xmlns:p14="http://schemas.microsoft.com/office/powerpoint/2010/main" xmlns:p15="http://schemas.microsoft.com/office/powerpoint/2012/main" xmlns:mc="http://schemas.openxmlformats.org/markup-compatibility/2006">
   <p:cSld>
     <p:spTree>
       <p:nvGrpSpPr>
@@ -5049,14 +5567,14 @@
       </p:grpSpPr>
       <p:sp>
         <p:nvSpPr>
-          <p:cNvPr id="67" name="CaixaDeTexto 66"/>
-          <p:cNvSpPr txBox="1"/>
+          <p:cNvPr id="70" name="Google Shape;126;p23"/>
+          <p:cNvSpPr/>
           <p:nvPr/>
         </p:nvSpPr>
         <p:spPr>
           <a:xfrm>
-            <a:off x="360000" y="360000"/>
-            <a:ext cx="2340000" cy="360000"/>
+            <a:off x="523440" y="638640"/>
+            <a:ext cx="3085200" cy="457560"/>
           </a:xfrm>
           <a:prstGeom prst="rect">
             <a:avLst/>
@@ -5066,14 +5584,27 @@
             <a:noFill/>
           </a:ln>
         </p:spPr>
+        <p:style>
+          <a:lnRef idx="0"/>
+          <a:fillRef idx="0"/>
+          <a:effectRef idx="0"/>
+          <a:fontRef idx="minor"/>
+        </p:style>
         <p:txBody>
-          <a:bodyPr lIns="90000" tIns="45000" rIns="90000" bIns="45000" anchor="t">
+          <a:bodyPr lIns="90000" rIns="90000" tIns="91440" bIns="91440" anchor="t">
             <a:spAutoFit/>
           </a:bodyPr>
-          <a:lstStyle/>
-          <a:p>
-            <a:r>
-              <a:rPr lang="pt-PT" sz="1800" b="1" u="none" strike="noStrike">
+          <a:p>
+            <a:pPr defTabSz="914400">
+              <a:lnSpc>
+                <a:spcPct val="100000"/>
+              </a:lnSpc>
+              <a:tabLst>
+                <a:tab algn="l" pos="0"/>
+              </a:tabLst>
+            </a:pPr>
+            <a:r>
+              <a:rPr b="1" lang="pt-PT" sz="1800" strike="noStrike" u="none">
                 <a:solidFill>
                   <a:schemeClr val="dk1"/>
                 </a:solidFill>
@@ -5082,9 +5613,9 @@
                 <a:latin typeface="Arial"/>
                 <a:ea typeface="Arial"/>
               </a:rPr>
-              <a:t>Arquitetura Lógica</a:t>
-            </a:r>
-            <a:endParaRPr lang="pt-PT" sz="1800" b="0" u="none" strike="noStrike">
+              <a:t>Diagrama de Caso de Uso</a:t>
+            </a:r>
+            <a:endParaRPr b="0" lang="pt-PT" sz="1800" strike="noStrike" u="none">
               <a:solidFill>
                 <a:srgbClr val="000000"/>
               </a:solidFill>
@@ -5097,18 +5628,18 @@
       </p:sp>
       <p:pic>
         <p:nvPicPr>
-          <p:cNvPr id="68" name="Imagem 67"/>
+          <p:cNvPr id="71" name="" descr=""/>
           <p:cNvPicPr/>
           <p:nvPr/>
         </p:nvPicPr>
         <p:blipFill>
-          <a:blip r:embed="rId2"/>
+          <a:blip r:embed="rId1"/>
           <a:stretch/>
         </p:blipFill>
         <p:spPr>
           <a:xfrm>
-            <a:off x="3012120" y="360000"/>
-            <a:ext cx="3210120" cy="4625640"/>
+            <a:off x="2136960" y="967680"/>
+            <a:ext cx="5961960" cy="4100400"/>
           </a:xfrm>
           <a:prstGeom prst="rect">
             <a:avLst/>
@@ -5121,14 +5652,19 @@
       </p:pic>
     </p:spTree>
   </p:cSld>
-  <p:clrMapOvr>
-    <a:masterClrMapping/>
-  </p:clrMapOvr>
+  <mc:AlternateContent>
+    <mc:Choice Requires="p14">
+      <p:transition spd="slow" p14:dur="2000"/>
+    </mc:Choice>
+    <mc:Fallback>
+      <p:transition spd="slow"/>
+    </mc:Fallback>
+  </mc:AlternateContent>
 </p:sld>
 </file>
 
 <file path=ppt/slides/slide14.xml><?xml version="1.0" encoding="utf-8"?>
-<p:sld xmlns:a="http://schemas.openxmlformats.org/drawingml/2006/main" xmlns:r="http://schemas.openxmlformats.org/officeDocument/2006/relationships" xmlns:p="http://schemas.openxmlformats.org/presentationml/2006/main">
+<p:sld xmlns:a="http://schemas.openxmlformats.org/drawingml/2006/main" xmlns:p="http://schemas.openxmlformats.org/presentationml/2006/main" xmlns:r="http://schemas.openxmlformats.org/officeDocument/2006/relationships" xmlns:p14="http://schemas.microsoft.com/office/powerpoint/2010/main" xmlns:p15="http://schemas.microsoft.com/office/powerpoint/2012/main" xmlns:mc="http://schemas.openxmlformats.org/markup-compatibility/2006">
   <p:cSld>
     <p:spTree>
       <p:nvGrpSpPr>
@@ -5146,14 +5682,14 @@
       </p:grpSpPr>
       <p:sp>
         <p:nvSpPr>
-          <p:cNvPr id="69" name="CaixaDeTexto 68"/>
-          <p:cNvSpPr txBox="1"/>
+          <p:cNvPr id="72" name="Google Shape;138;p25"/>
+          <p:cNvSpPr/>
           <p:nvPr/>
         </p:nvSpPr>
         <p:spPr>
           <a:xfrm>
-            <a:off x="360000" y="360000"/>
-            <a:ext cx="2880000" cy="360000"/>
+            <a:off x="357480" y="727920"/>
+            <a:ext cx="1795320" cy="365040"/>
           </a:xfrm>
           <a:prstGeom prst="rect">
             <a:avLst/>
@@ -5163,14 +5699,27 @@
             <a:noFill/>
           </a:ln>
         </p:spPr>
+        <p:style>
+          <a:lnRef idx="0"/>
+          <a:fillRef idx="0"/>
+          <a:effectRef idx="0"/>
+          <a:fontRef idx="minor"/>
+        </p:style>
         <p:txBody>
-          <a:bodyPr lIns="90000" tIns="45000" rIns="90000" bIns="45000" anchor="t">
-            <a:spAutoFit/>
+          <a:bodyPr lIns="90000" rIns="90000" tIns="91440" bIns="91440" anchor="t">
+            <a:noAutofit/>
           </a:bodyPr>
-          <a:lstStyle/>
-          <a:p>
-            <a:r>
-              <a:rPr lang="pt-PT" sz="1800" b="1" u="none" strike="noStrike">
+          <a:p>
+            <a:pPr defTabSz="914400">
+              <a:lnSpc>
+                <a:spcPct val="100000"/>
+              </a:lnSpc>
+              <a:tabLst>
+                <a:tab algn="l" pos="0"/>
+              </a:tabLst>
+            </a:pPr>
+            <a:r>
+              <a:rPr b="1" lang="pt-PT" sz="1800" strike="noStrike" u="none">
                 <a:solidFill>
                   <a:schemeClr val="dk1"/>
                 </a:solidFill>
@@ -5179,9 +5728,9 @@
                 <a:latin typeface="Arial"/>
                 <a:ea typeface="Arial"/>
               </a:rPr>
-              <a:t>Arquitetura de Software</a:t>
-            </a:r>
-            <a:endParaRPr lang="pt-PT" sz="1800" b="0" u="none" strike="noStrike">
+              <a:t>DER</a:t>
+            </a:r>
+            <a:endParaRPr b="0" lang="pt-PT" sz="1800" strike="noStrike" u="none">
               <a:solidFill>
                 <a:srgbClr val="000000"/>
               </a:solidFill>
@@ -5194,18 +5743,18 @@
       </p:sp>
       <p:pic>
         <p:nvPicPr>
-          <p:cNvPr id="70" name="Imagem 69"/>
+          <p:cNvPr id="73" name="Imagem 1" descr="Uma imagem com diagrama, texto, desenho, file&#10;&#10;Os conteúdos gerados por IA poderão estar incorretos."/>
           <p:cNvPicPr/>
           <p:nvPr/>
         </p:nvPicPr>
         <p:blipFill>
-          <a:blip r:embed="rId2"/>
+          <a:blip r:embed="rId1"/>
           <a:stretch/>
         </p:blipFill>
         <p:spPr>
           <a:xfrm>
-            <a:off x="3302280" y="54360"/>
-            <a:ext cx="2630160" cy="4985640"/>
+            <a:off x="1260000" y="542880"/>
+            <a:ext cx="7466400" cy="3957120"/>
           </a:xfrm>
           <a:prstGeom prst="rect">
             <a:avLst/>
@@ -5218,14 +5767,19 @@
       </p:pic>
     </p:spTree>
   </p:cSld>
-  <p:clrMapOvr>
-    <a:masterClrMapping/>
-  </p:clrMapOvr>
+  <mc:AlternateContent>
+    <mc:Choice Requires="p14">
+      <p:transition spd="slow" p14:dur="2000"/>
+    </mc:Choice>
+    <mc:Fallback>
+      <p:transition spd="slow"/>
+    </mc:Fallback>
+  </mc:AlternateContent>
 </p:sld>
 </file>
 
 <file path=ppt/slides/slide15.xml><?xml version="1.0" encoding="utf-8"?>
-<p:sld xmlns:a="http://schemas.openxmlformats.org/drawingml/2006/main" xmlns:r="http://schemas.openxmlformats.org/officeDocument/2006/relationships" xmlns:p="http://schemas.openxmlformats.org/presentationml/2006/main">
+<p:sld xmlns:a="http://schemas.openxmlformats.org/drawingml/2006/main" xmlns:p="http://schemas.openxmlformats.org/presentationml/2006/main" xmlns:r="http://schemas.openxmlformats.org/officeDocument/2006/relationships" xmlns:p14="http://schemas.microsoft.com/office/powerpoint/2010/main" xmlns:p15="http://schemas.microsoft.com/office/powerpoint/2012/main" xmlns:mc="http://schemas.openxmlformats.org/markup-compatibility/2006">
   <p:cSld>
     <p:spTree>
       <p:nvGrpSpPr>
@@ -5243,14 +5797,14 @@
       </p:grpSpPr>
       <p:sp>
         <p:nvSpPr>
-          <p:cNvPr id="71" name="CaixaDeTexto 70"/>
-          <p:cNvSpPr txBox="1"/>
+          <p:cNvPr id="74" name="CaixaDeTexto 66"/>
+          <p:cNvSpPr/>
           <p:nvPr/>
         </p:nvSpPr>
         <p:spPr>
           <a:xfrm>
             <a:off x="360000" y="360000"/>
-            <a:ext cx="2124000" cy="346680"/>
+            <a:ext cx="2338560" cy="363960"/>
           </a:xfrm>
           <a:prstGeom prst="rect">
             <a:avLst/>
@@ -5260,14 +5814,24 @@
             <a:noFill/>
           </a:ln>
         </p:spPr>
+        <p:style>
+          <a:lnRef idx="0"/>
+          <a:fillRef idx="0"/>
+          <a:effectRef idx="0"/>
+          <a:fontRef idx="minor"/>
+        </p:style>
         <p:txBody>
-          <a:bodyPr lIns="90000" tIns="45000" rIns="90000" bIns="45000" anchor="t">
+          <a:bodyPr lIns="90000" rIns="90000" tIns="45000" bIns="45000" anchor="t">
             <a:spAutoFit/>
           </a:bodyPr>
-          <a:lstStyle/>
-          <a:p>
-            <a:r>
-              <a:rPr lang="pt-PT" sz="1800" b="1" u="none" strike="noStrike">
+          <a:p>
+            <a:pPr defTabSz="914400">
+              <a:lnSpc>
+                <a:spcPct val="100000"/>
+              </a:lnSpc>
+            </a:pPr>
+            <a:r>
+              <a:rPr b="1" lang="pt-PT" sz="1800" strike="noStrike" u="none">
                 <a:solidFill>
                   <a:schemeClr val="dk1"/>
                 </a:solidFill>
@@ -5276,9 +5840,9 @@
                 <a:latin typeface="Arial"/>
                 <a:ea typeface="Arial"/>
               </a:rPr>
-              <a:t>Arquitetura Física</a:t>
-            </a:r>
-            <a:endParaRPr lang="pt-PT" sz="1800" b="0" u="none" strike="noStrike">
+              <a:t>Arquitetura Lógica</a:t>
+            </a:r>
+            <a:endParaRPr b="0" lang="pt-PT" sz="1800" strike="noStrike" u="none">
               <a:solidFill>
                 <a:srgbClr val="000000"/>
               </a:solidFill>
@@ -5291,18 +5855,18 @@
       </p:sp>
       <p:pic>
         <p:nvPicPr>
-          <p:cNvPr id="72" name="Imagem 71"/>
+          <p:cNvPr id="75" name="Imagem 67" descr=""/>
           <p:cNvPicPr/>
           <p:nvPr/>
         </p:nvPicPr>
         <p:blipFill>
-          <a:blip r:embed="rId2"/>
+          <a:blip r:embed="rId1"/>
           <a:stretch/>
         </p:blipFill>
         <p:spPr>
           <a:xfrm>
-            <a:off x="2102760" y="900000"/>
-            <a:ext cx="5028840" cy="3600000"/>
+            <a:off x="3012120" y="360000"/>
+            <a:ext cx="3208680" cy="4624200"/>
           </a:xfrm>
           <a:prstGeom prst="rect">
             <a:avLst/>
@@ -5315,14 +5879,19 @@
       </p:pic>
     </p:spTree>
   </p:cSld>
-  <p:clrMapOvr>
-    <a:masterClrMapping/>
-  </p:clrMapOvr>
+  <mc:AlternateContent>
+    <mc:Choice Requires="p14">
+      <p:transition spd="slow" p14:dur="2000"/>
+    </mc:Choice>
+    <mc:Fallback>
+      <p:transition spd="slow"/>
+    </mc:Fallback>
+  </mc:AlternateContent>
 </p:sld>
 </file>
 
 <file path=ppt/slides/slide16.xml><?xml version="1.0" encoding="utf-8"?>
-<p:sld xmlns:a="http://schemas.openxmlformats.org/drawingml/2006/main" xmlns:r="http://schemas.openxmlformats.org/officeDocument/2006/relationships" xmlns:p="http://schemas.openxmlformats.org/presentationml/2006/main">
+<p:sld xmlns:a="http://schemas.openxmlformats.org/drawingml/2006/main" xmlns:p="http://schemas.openxmlformats.org/presentationml/2006/main" xmlns:r="http://schemas.openxmlformats.org/officeDocument/2006/relationships" xmlns:p14="http://schemas.microsoft.com/office/powerpoint/2010/main" xmlns:p15="http://schemas.microsoft.com/office/powerpoint/2012/main" xmlns:mc="http://schemas.openxmlformats.org/markup-compatibility/2006">
   <p:cSld>
     <p:spTree>
       <p:nvGrpSpPr>
@@ -5340,14 +5909,14 @@
       </p:grpSpPr>
       <p:sp>
         <p:nvSpPr>
-          <p:cNvPr id="77" name="Google Shape;144;p26"/>
+          <p:cNvPr id="76" name="CaixaDeTexto 68"/>
           <p:cNvSpPr/>
           <p:nvPr/>
         </p:nvSpPr>
         <p:spPr>
           <a:xfrm>
-            <a:off x="536400" y="625680"/>
-            <a:ext cx="1503000" cy="457560"/>
+            <a:off x="360000" y="360000"/>
+            <a:ext cx="2878560" cy="363960"/>
           </a:xfrm>
           <a:prstGeom prst="rect">
             <a:avLst/>
@@ -5358,33 +5927,23 @@
           </a:ln>
         </p:spPr>
         <p:style>
-          <a:lnRef idx="0">
-            <a:scrgbClr r="0" g="0" b="0"/>
-          </a:lnRef>
-          <a:fillRef idx="0">
-            <a:scrgbClr r="0" g="0" b="0"/>
-          </a:fillRef>
-          <a:effectRef idx="0">
-            <a:scrgbClr r="0" g="0" b="0"/>
-          </a:effectRef>
+          <a:lnRef idx="0"/>
+          <a:fillRef idx="0"/>
+          <a:effectRef idx="0"/>
           <a:fontRef idx="minor"/>
         </p:style>
         <p:txBody>
-          <a:bodyPr lIns="90000" tIns="91440" rIns="90000" bIns="91440" anchor="t">
+          <a:bodyPr lIns="90000" rIns="90000" tIns="45000" bIns="45000" anchor="t">
             <a:spAutoFit/>
           </a:bodyPr>
-          <a:lstStyle/>
           <a:p>
             <a:pPr defTabSz="914400">
               <a:lnSpc>
                 <a:spcPct val="100000"/>
               </a:lnSpc>
-              <a:tabLst>
-                <a:tab pos="0" algn="l"/>
-              </a:tabLst>
-            </a:pPr>
-            <a:r>
-              <a:rPr lang="pt-PT" sz="1800" b="1" u="none" strike="noStrike">
+            </a:pPr>
+            <a:r>
+              <a:rPr b="1" lang="pt-PT" sz="1800" strike="noStrike" u="none">
                 <a:solidFill>
                   <a:schemeClr val="dk1"/>
                 </a:solidFill>
@@ -5393,9 +5952,9 @@
                 <a:latin typeface="Arial"/>
                 <a:ea typeface="Arial"/>
               </a:rPr>
-              <a:t>Conclusão</a:t>
-            </a:r>
-            <a:endParaRPr lang="pt-PT" sz="1800" b="0" u="none" strike="noStrike">
+              <a:t>Arquitetura de Software</a:t>
+            </a:r>
+            <a:endParaRPr b="0" lang="pt-PT" sz="1800" strike="noStrike" u="none">
               <a:solidFill>
                 <a:srgbClr val="000000"/>
               </a:solidFill>
@@ -5406,16 +5965,70 @@
           </a:p>
         </p:txBody>
       </p:sp>
+      <p:pic>
+        <p:nvPicPr>
+          <p:cNvPr id="77" name="Imagem 69" descr=""/>
+          <p:cNvPicPr/>
+          <p:nvPr/>
+        </p:nvPicPr>
+        <p:blipFill>
+          <a:blip r:embed="rId1"/>
+          <a:stretch/>
+        </p:blipFill>
+        <p:spPr>
+          <a:xfrm>
+            <a:off x="3302280" y="54360"/>
+            <a:ext cx="2628720" cy="4984200"/>
+          </a:xfrm>
+          <a:prstGeom prst="rect">
+            <a:avLst/>
+          </a:prstGeom>
+          <a:noFill/>
+          <a:ln w="0">
+            <a:noFill/>
+          </a:ln>
+        </p:spPr>
+      </p:pic>
+    </p:spTree>
+  </p:cSld>
+  <mc:AlternateContent>
+    <mc:Choice Requires="p14">
+      <p:transition spd="slow" p14:dur="2000"/>
+    </mc:Choice>
+    <mc:Fallback>
+      <p:transition spd="slow"/>
+    </mc:Fallback>
+  </mc:AlternateContent>
+</p:sld>
+</file>
+
+<file path=ppt/slides/slide17.xml><?xml version="1.0" encoding="utf-8"?>
+<p:sld xmlns:a="http://schemas.openxmlformats.org/drawingml/2006/main" xmlns:p="http://schemas.openxmlformats.org/presentationml/2006/main" xmlns:r="http://schemas.openxmlformats.org/officeDocument/2006/relationships" xmlns:p14="http://schemas.microsoft.com/office/powerpoint/2010/main" xmlns:p15="http://schemas.microsoft.com/office/powerpoint/2012/main" xmlns:mc="http://schemas.openxmlformats.org/markup-compatibility/2006">
+  <p:cSld>
+    <p:spTree>
+      <p:nvGrpSpPr>
+        <p:cNvPr id="1" name=""/>
+        <p:cNvGrpSpPr/>
+        <p:nvPr/>
+      </p:nvGrpSpPr>
+      <p:grpSpPr>
+        <a:xfrm>
+          <a:off x="0" y="0"/>
+          <a:ext cx="0" cy="0"/>
+          <a:chOff x="0" y="0"/>
+          <a:chExt cx="0" cy="0"/>
+        </a:xfrm>
+      </p:grpSpPr>
       <p:sp>
         <p:nvSpPr>
-          <p:cNvPr id="78" name="Google Shape;145;p26"/>
+          <p:cNvPr id="78" name="CaixaDeTexto 70"/>
           <p:cNvSpPr/>
           <p:nvPr/>
         </p:nvSpPr>
         <p:spPr>
           <a:xfrm>
-            <a:off x="536400" y="1087560"/>
-            <a:ext cx="7479720" cy="2371320"/>
+            <a:off x="360000" y="360000"/>
+            <a:ext cx="2122560" cy="638280"/>
           </a:xfrm>
           <a:prstGeom prst="rect">
             <a:avLst/>
@@ -5426,22 +6039,188 @@
           </a:ln>
         </p:spPr>
         <p:style>
-          <a:lnRef idx="0">
-            <a:scrgbClr r="0" g="0" b="0"/>
-          </a:lnRef>
-          <a:fillRef idx="0">
-            <a:scrgbClr r="0" g="0" b="0"/>
-          </a:fillRef>
-          <a:effectRef idx="0">
-            <a:scrgbClr r="0" g="0" b="0"/>
-          </a:effectRef>
+          <a:lnRef idx="0"/>
+          <a:fillRef idx="0"/>
+          <a:effectRef idx="0"/>
           <a:fontRef idx="minor"/>
         </p:style>
         <p:txBody>
-          <a:bodyPr lIns="90000" tIns="91440" rIns="90000" bIns="91440" anchor="t">
+          <a:bodyPr lIns="90000" rIns="90000" tIns="45000" bIns="45000" anchor="t">
+            <a:spAutoFit/>
+          </a:bodyPr>
+          <a:p>
+            <a:pPr defTabSz="914400">
+              <a:lnSpc>
+                <a:spcPct val="100000"/>
+              </a:lnSpc>
+            </a:pPr>
+            <a:r>
+              <a:rPr b="1" lang="pt-PT" sz="1800" strike="noStrike" u="none">
+                <a:solidFill>
+                  <a:schemeClr val="dk1"/>
+                </a:solidFill>
+                <a:effectLst/>
+                <a:uFillTx/>
+                <a:latin typeface="Arial"/>
+                <a:ea typeface="Arial"/>
+              </a:rPr>
+              <a:t>Arquitetura Física</a:t>
+            </a:r>
+            <a:endParaRPr b="0" lang="pt-PT" sz="1800" strike="noStrike" u="none">
+              <a:solidFill>
+                <a:srgbClr val="000000"/>
+              </a:solidFill>
+              <a:effectLst/>
+              <a:uFillTx/>
+              <a:latin typeface="Arial"/>
+            </a:endParaRPr>
+          </a:p>
+        </p:txBody>
+      </p:sp>
+      <p:pic>
+        <p:nvPicPr>
+          <p:cNvPr id="79" name="Imagem 71" descr=""/>
+          <p:cNvPicPr/>
+          <p:nvPr/>
+        </p:nvPicPr>
+        <p:blipFill>
+          <a:blip r:embed="rId1"/>
+          <a:stretch/>
+        </p:blipFill>
+        <p:spPr>
+          <a:xfrm>
+            <a:off x="2102760" y="900000"/>
+            <a:ext cx="5027400" cy="3598560"/>
+          </a:xfrm>
+          <a:prstGeom prst="rect">
+            <a:avLst/>
+          </a:prstGeom>
+          <a:noFill/>
+          <a:ln w="0">
+            <a:noFill/>
+          </a:ln>
+        </p:spPr>
+      </p:pic>
+    </p:spTree>
+  </p:cSld>
+  <mc:AlternateContent>
+    <mc:Choice Requires="p14">
+      <p:transition spd="slow" p14:dur="2000"/>
+    </mc:Choice>
+    <mc:Fallback>
+      <p:transition spd="slow"/>
+    </mc:Fallback>
+  </mc:AlternateContent>
+</p:sld>
+</file>
+
+<file path=ppt/slides/slide18.xml><?xml version="1.0" encoding="utf-8"?>
+<p:sld xmlns:a="http://schemas.openxmlformats.org/drawingml/2006/main" xmlns:p="http://schemas.openxmlformats.org/presentationml/2006/main" xmlns:r="http://schemas.openxmlformats.org/officeDocument/2006/relationships" xmlns:p14="http://schemas.microsoft.com/office/powerpoint/2010/main" xmlns:p15="http://schemas.microsoft.com/office/powerpoint/2012/main" xmlns:mc="http://schemas.openxmlformats.org/markup-compatibility/2006">
+  <p:cSld>
+    <p:spTree>
+      <p:nvGrpSpPr>
+        <p:cNvPr id="1" name=""/>
+        <p:cNvGrpSpPr/>
+        <p:nvPr/>
+      </p:nvGrpSpPr>
+      <p:grpSpPr>
+        <a:xfrm>
+          <a:off x="0" y="0"/>
+          <a:ext cx="0" cy="0"/>
+          <a:chOff x="0" y="0"/>
+          <a:chExt cx="0" cy="0"/>
+        </a:xfrm>
+      </p:grpSpPr>
+      <p:sp>
+        <p:nvSpPr>
+          <p:cNvPr id="80" name="Google Shape;144;p26"/>
+          <p:cNvSpPr/>
+          <p:nvPr/>
+        </p:nvSpPr>
+        <p:spPr>
+          <a:xfrm>
+            <a:off x="536400" y="625680"/>
+            <a:ext cx="1501560" cy="457560"/>
+          </a:xfrm>
+          <a:prstGeom prst="rect">
+            <a:avLst/>
+          </a:prstGeom>
+          <a:noFill/>
+          <a:ln w="0">
+            <a:noFill/>
+          </a:ln>
+        </p:spPr>
+        <p:style>
+          <a:lnRef idx="0"/>
+          <a:fillRef idx="0"/>
+          <a:effectRef idx="0"/>
+          <a:fontRef idx="minor"/>
+        </p:style>
+        <p:txBody>
+          <a:bodyPr lIns="90000" rIns="90000" tIns="91440" bIns="91440" anchor="t">
+            <a:spAutoFit/>
+          </a:bodyPr>
+          <a:p>
+            <a:pPr defTabSz="914400">
+              <a:lnSpc>
+                <a:spcPct val="100000"/>
+              </a:lnSpc>
+              <a:tabLst>
+                <a:tab algn="l" pos="0"/>
+              </a:tabLst>
+            </a:pPr>
+            <a:r>
+              <a:rPr b="1" lang="pt-PT" sz="1800" strike="noStrike" u="none">
+                <a:solidFill>
+                  <a:schemeClr val="dk1"/>
+                </a:solidFill>
+                <a:effectLst/>
+                <a:uFillTx/>
+                <a:latin typeface="Arial"/>
+                <a:ea typeface="Arial"/>
+              </a:rPr>
+              <a:t>Conclusão</a:t>
+            </a:r>
+            <a:endParaRPr b="0" lang="pt-PT" sz="1800" strike="noStrike" u="none">
+              <a:solidFill>
+                <a:srgbClr val="000000"/>
+              </a:solidFill>
+              <a:effectLst/>
+              <a:uFillTx/>
+              <a:latin typeface="Arial"/>
+            </a:endParaRPr>
+          </a:p>
+        </p:txBody>
+      </p:sp>
+      <p:sp>
+        <p:nvSpPr>
+          <p:cNvPr id="81" name="Google Shape;145;p26"/>
+          <p:cNvSpPr/>
+          <p:nvPr/>
+        </p:nvSpPr>
+        <p:spPr>
+          <a:xfrm>
+            <a:off x="536400" y="1087560"/>
+            <a:ext cx="7478280" cy="2369880"/>
+          </a:xfrm>
+          <a:prstGeom prst="rect">
+            <a:avLst/>
+          </a:prstGeom>
+          <a:noFill/>
+          <a:ln w="0">
+            <a:noFill/>
+          </a:ln>
+        </p:spPr>
+        <p:style>
+          <a:lnRef idx="0"/>
+          <a:fillRef idx="0"/>
+          <a:effectRef idx="0"/>
+          <a:fontRef idx="minor"/>
+        </p:style>
+        <p:txBody>
+          <a:bodyPr lIns="90000" rIns="90000" tIns="91440" bIns="91440" anchor="t">
             <a:noAutofit/>
           </a:bodyPr>
-          <a:lstStyle/>
           <a:p>
             <a:pPr defTabSz="914400">
               <a:lnSpc>
@@ -5451,11 +6230,11 @@
                 <a:spcPts val="1199"/>
               </a:spcBef>
               <a:tabLst>
-                <a:tab pos="0" algn="l"/>
-              </a:tabLst>
-            </a:pPr>
-            <a:r>
-              <a:rPr lang="pt-PT" sz="1400" b="0" u="none" strike="noStrike">
+                <a:tab algn="l" pos="0"/>
+              </a:tabLst>
+            </a:pPr>
+            <a:r>
+              <a:rPr b="0" lang="pt-PT" sz="1400" strike="noStrike" u="none">
                 <a:solidFill>
                   <a:schemeClr val="dk1"/>
                 </a:solidFill>
@@ -5466,7 +6245,7 @@
               </a:rPr>
               <a:t>A implementação do Sistema Integrado de Gestão e Processamento de Pagamentos representa um avanço significativo para o Colégio Mona Tower. O sistema reduz erros, melhora a eficiência dos processos, aumenta a transparência e facilita o acesso às informações financeiras.</a:t>
             </a:r>
-            <a:endParaRPr lang="pt-PT" sz="1400" b="0" u="none" strike="noStrike">
+            <a:endParaRPr b="0" lang="pt-PT" sz="1400" strike="noStrike" u="none">
               <a:solidFill>
                 <a:srgbClr val="000000"/>
               </a:solidFill>
@@ -5479,14 +6258,19 @@
       </p:sp>
     </p:spTree>
   </p:cSld>
-  <p:clrMapOvr>
-    <a:masterClrMapping/>
-  </p:clrMapOvr>
+  <mc:AlternateContent>
+    <mc:Choice Requires="p14">
+      <p:transition spd="slow" p14:dur="2000"/>
+    </mc:Choice>
+    <mc:Fallback>
+      <p:transition spd="slow"/>
+    </mc:Fallback>
+  </mc:AlternateContent>
 </p:sld>
 </file>
 
 <file path=ppt/slides/slide2.xml><?xml version="1.0" encoding="utf-8"?>
-<p:sld xmlns:a="http://schemas.openxmlformats.org/drawingml/2006/main" xmlns:r="http://schemas.openxmlformats.org/officeDocument/2006/relationships" xmlns:p="http://schemas.openxmlformats.org/presentationml/2006/main">
+<p:sld xmlns:a="http://schemas.openxmlformats.org/drawingml/2006/main" xmlns:p="http://schemas.openxmlformats.org/presentationml/2006/main" xmlns:r="http://schemas.openxmlformats.org/officeDocument/2006/relationships" xmlns:p14="http://schemas.microsoft.com/office/powerpoint/2010/main" xmlns:p15="http://schemas.microsoft.com/office/powerpoint/2012/main" xmlns:mc="http://schemas.openxmlformats.org/markup-compatibility/2006">
   <p:cSld>
     <p:spTree>
       <p:nvGrpSpPr>
@@ -5511,7 +6295,7 @@
         <p:spPr>
           <a:xfrm>
             <a:off x="3020400" y="638640"/>
-            <a:ext cx="3099240" cy="660240"/>
+            <a:ext cx="3097800" cy="658800"/>
           </a:xfrm>
           <a:prstGeom prst="rect">
             <a:avLst/>
@@ -5522,33 +6306,26 @@
           </a:ln>
         </p:spPr>
         <p:style>
-          <a:lnRef idx="0">
-            <a:scrgbClr r="0" g="0" b="0"/>
-          </a:lnRef>
-          <a:fillRef idx="0">
-            <a:scrgbClr r="0" g="0" b="0"/>
-          </a:fillRef>
-          <a:effectRef idx="0">
-            <a:scrgbClr r="0" g="0" b="0"/>
-          </a:effectRef>
+          <a:lnRef idx="0"/>
+          <a:fillRef idx="0"/>
+          <a:effectRef idx="0"/>
           <a:fontRef idx="minor"/>
         </p:style>
         <p:txBody>
-          <a:bodyPr lIns="90000" tIns="91440" rIns="90000" bIns="91440" anchor="t">
+          <a:bodyPr lIns="90000" rIns="90000" tIns="91440" bIns="91440" anchor="t">
             <a:noAutofit/>
           </a:bodyPr>
-          <a:lstStyle/>
           <a:p>
             <a:pPr algn="ctr" defTabSz="914400">
               <a:lnSpc>
                 <a:spcPct val="100000"/>
               </a:lnSpc>
               <a:tabLst>
-                <a:tab pos="0" algn="l"/>
-              </a:tabLst>
-            </a:pPr>
-            <a:r>
-              <a:rPr lang="pt-PT" sz="1400" b="1" u="none" strike="noStrike">
+                <a:tab algn="l" pos="0"/>
+              </a:tabLst>
+            </a:pPr>
+            <a:r>
+              <a:rPr b="1" lang="pt-PT" sz="1400" strike="noStrike" u="none">
                 <a:solidFill>
                   <a:schemeClr val="dk1"/>
                 </a:solidFill>
@@ -5559,7 +6336,7 @@
               </a:rPr>
               <a:t>Cristiano Alexandre Kamati Glória</a:t>
             </a:r>
-            <a:endParaRPr lang="pt-PT" sz="1400" b="0" u="none" strike="noStrike">
+            <a:endParaRPr b="0" lang="pt-PT" sz="1400" strike="noStrike" u="none">
               <a:solidFill>
                 <a:srgbClr val="000000"/>
               </a:solidFill>
@@ -5574,17 +6351,17 @@
                 <a:spcPct val="100000"/>
               </a:lnSpc>
               <a:tabLst>
-                <a:tab pos="0" algn="l"/>
-              </a:tabLst>
-            </a:pPr>
-            <a:r>
-              <a:rPr lang="pt-PT" sz="1400" b="1" u="none" strike="noStrike">
+                <a:tab algn="l" pos="0"/>
+              </a:tabLst>
+            </a:pPr>
+            <a:r>
+              <a:rPr b="1" lang="pt-PT" sz="1400" strike="noStrike" u="none">
                 <a:solidFill>
                   <a:schemeClr val="dk1"/>
                 </a:solidFill>
                 <a:effectLst/>
                 <a:highlight>
-                  <a:srgbClr val="FFFFFF"/>
+                  <a:srgbClr val="ffffff"/>
                 </a:highlight>
                 <a:uFillTx/>
                 <a:latin typeface="Arial"/>
@@ -5592,7 +6369,7 @@
               </a:rPr>
               <a:t> José Emanuel Rosário Preto</a:t>
             </a:r>
-            <a:endParaRPr lang="pt-PT" sz="1400" b="0" u="none" strike="noStrike">
+            <a:endParaRPr b="0" lang="pt-PT" sz="1400" strike="noStrike" u="none">
               <a:solidFill>
                 <a:srgbClr val="000000"/>
               </a:solidFill>
@@ -5612,7 +6389,7 @@
         <p:spPr>
           <a:xfrm>
             <a:off x="647280" y="2088000"/>
-            <a:ext cx="7845120" cy="1122480"/>
+            <a:ext cx="7843680" cy="1121040"/>
           </a:xfrm>
           <a:prstGeom prst="rect">
             <a:avLst/>
@@ -5623,22 +6400,15 @@
           </a:ln>
         </p:spPr>
         <p:style>
-          <a:lnRef idx="0">
-            <a:scrgbClr r="0" g="0" b="0"/>
-          </a:lnRef>
-          <a:fillRef idx="0">
-            <a:scrgbClr r="0" g="0" b="0"/>
-          </a:fillRef>
-          <a:effectRef idx="0">
-            <a:scrgbClr r="0" g="0" b="0"/>
-          </a:effectRef>
+          <a:lnRef idx="0"/>
+          <a:fillRef idx="0"/>
+          <a:effectRef idx="0"/>
           <a:fontRef idx="minor"/>
         </p:style>
         <p:txBody>
-          <a:bodyPr lIns="90000" tIns="91440" rIns="90000" bIns="91440" anchor="t">
+          <a:bodyPr lIns="90000" rIns="90000" tIns="91440" bIns="91440" anchor="t">
             <a:noAutofit/>
           </a:bodyPr>
-          <a:lstStyle/>
           <a:p>
             <a:pPr algn="ctr" defTabSz="914400">
               <a:lnSpc>
@@ -5648,10 +6418,10 @@
                 <a:spcPts val="1199"/>
               </a:spcBef>
               <a:tabLst>
-                <a:tab pos="0" algn="l"/>
-              </a:tabLst>
-            </a:pPr>
-            <a:endParaRPr lang="pt-PT" sz="1200" b="0" u="none" strike="noStrike">
+                <a:tab algn="l" pos="0"/>
+              </a:tabLst>
+            </a:pPr>
+            <a:endParaRPr b="0" lang="pt-PT" sz="1200" strike="noStrike" u="none">
               <a:solidFill>
                 <a:srgbClr val="000000"/>
               </a:solidFill>
@@ -5672,11 +6442,11 @@
                 <a:spcPts val="99"/>
               </a:spcAft>
               <a:tabLst>
-                <a:tab pos="0" algn="l"/>
-              </a:tabLst>
-            </a:pPr>
-            <a:r>
-              <a:rPr lang="pt-PT" sz="1200" b="1" u="none" strike="noStrike">
+                <a:tab algn="l" pos="0"/>
+              </a:tabLst>
+            </a:pPr>
+            <a:r>
+              <a:rPr b="1" lang="pt-PT" sz="1200" strike="noStrike" u="none">
                 <a:solidFill>
                   <a:schemeClr val="dk1"/>
                 </a:solidFill>
@@ -5687,7 +6457,7 @@
               </a:rPr>
               <a:t>SISTEMA INTEGRADO DE GESTÃO E PROCESSAMENTO DE PAGAMENTOS PARA O COLÉGIO MONA TOWER</a:t>
             </a:r>
-            <a:endParaRPr lang="pt-PT" sz="1200" b="0" u="none" strike="noStrike">
+            <a:endParaRPr b="0" lang="pt-PT" sz="1200" strike="noStrike" u="none">
               <a:solidFill>
                 <a:srgbClr val="000000"/>
               </a:solidFill>
@@ -5707,7 +6477,7 @@
         <p:spPr>
           <a:xfrm>
             <a:off x="3978000" y="4701600"/>
-            <a:ext cx="991800" cy="438120"/>
+            <a:ext cx="990360" cy="436680"/>
           </a:xfrm>
           <a:prstGeom prst="rect">
             <a:avLst/>
@@ -5718,33 +6488,26 @@
           </a:ln>
         </p:spPr>
         <p:style>
-          <a:lnRef idx="0">
-            <a:scrgbClr r="0" g="0" b="0"/>
-          </a:lnRef>
-          <a:fillRef idx="0">
-            <a:scrgbClr r="0" g="0" b="0"/>
-          </a:fillRef>
-          <a:effectRef idx="0">
-            <a:scrgbClr r="0" g="0" b="0"/>
-          </a:effectRef>
+          <a:lnRef idx="0"/>
+          <a:fillRef idx="0"/>
+          <a:effectRef idx="0"/>
           <a:fontRef idx="minor"/>
         </p:style>
         <p:txBody>
-          <a:bodyPr lIns="90000" tIns="91440" rIns="90000" bIns="91440" anchor="t">
+          <a:bodyPr lIns="90000" rIns="90000" tIns="91440" bIns="91440" anchor="t">
             <a:noAutofit/>
           </a:bodyPr>
-          <a:lstStyle/>
           <a:p>
             <a:pPr algn="ctr" defTabSz="914400">
               <a:lnSpc>
                 <a:spcPct val="100000"/>
               </a:lnSpc>
               <a:tabLst>
-                <a:tab pos="0" algn="l"/>
-              </a:tabLst>
-            </a:pPr>
-            <a:r>
-              <a:rPr lang="pt-PT" sz="1200" b="0" u="none" strike="noStrike">
+                <a:tab algn="l" pos="0"/>
+              </a:tabLst>
+            </a:pPr>
+            <a:r>
+              <a:rPr b="0" lang="pt-PT" sz="1200" strike="noStrike" u="none">
                 <a:solidFill>
                   <a:srgbClr val="000000"/>
                 </a:solidFill>
@@ -5755,7 +6518,7 @@
               </a:rPr>
               <a:t>Luanda​</a:t>
             </a:r>
-            <a:endParaRPr lang="pt-PT" sz="1200" b="0" u="none" strike="noStrike">
+            <a:endParaRPr b="0" lang="pt-PT" sz="1200" strike="noStrike" u="none">
               <a:solidFill>
                 <a:srgbClr val="000000"/>
               </a:solidFill>
@@ -5770,11 +6533,11 @@
                 <a:spcPct val="100000"/>
               </a:lnSpc>
               <a:tabLst>
-                <a:tab pos="0" algn="l"/>
-              </a:tabLst>
-            </a:pPr>
-            <a:r>
-              <a:rPr lang="pt-PT" sz="1200" b="0" u="none" strike="noStrike">
+                <a:tab algn="l" pos="0"/>
+              </a:tabLst>
+            </a:pPr>
+            <a:r>
+              <a:rPr b="0" lang="pt-PT" sz="1200" strike="noStrike" u="none">
                 <a:solidFill>
                   <a:srgbClr val="000000"/>
                 </a:solidFill>
@@ -5785,7 +6548,7 @@
               </a:rPr>
               <a:t>2025/26</a:t>
             </a:r>
-            <a:endParaRPr lang="pt-PT" sz="1200" b="0" u="none" strike="noStrike">
+            <a:endParaRPr b="0" lang="pt-PT" sz="1200" strike="noStrike" u="none">
               <a:solidFill>
                 <a:srgbClr val="000000"/>
               </a:solidFill>
@@ -5798,14 +6561,19 @@
       </p:sp>
     </p:spTree>
   </p:cSld>
-  <p:clrMapOvr>
-    <a:masterClrMapping/>
-  </p:clrMapOvr>
+  <mc:AlternateContent>
+    <mc:Choice Requires="p14">
+      <p:transition spd="slow" p14:dur="2000"/>
+    </mc:Choice>
+    <mc:Fallback>
+      <p:transition spd="slow"/>
+    </mc:Fallback>
+  </mc:AlternateContent>
 </p:sld>
 </file>
 
 <file path=ppt/slides/slide3.xml><?xml version="1.0" encoding="utf-8"?>
-<p:sld xmlns:a="http://schemas.openxmlformats.org/drawingml/2006/main" xmlns:r="http://schemas.openxmlformats.org/officeDocument/2006/relationships" xmlns:p="http://schemas.openxmlformats.org/presentationml/2006/main">
+<p:sld xmlns:a="http://schemas.openxmlformats.org/drawingml/2006/main" xmlns:p="http://schemas.openxmlformats.org/presentationml/2006/main" xmlns:r="http://schemas.openxmlformats.org/officeDocument/2006/relationships" xmlns:p14="http://schemas.microsoft.com/office/powerpoint/2010/main" xmlns:p15="http://schemas.microsoft.com/office/powerpoint/2012/main" xmlns:mc="http://schemas.openxmlformats.org/markup-compatibility/2006">
   <p:cSld>
     <p:spTree>
       <p:nvGrpSpPr>
@@ -5830,7 +6598,7 @@
         <p:spPr>
           <a:xfrm>
             <a:off x="549000" y="623160"/>
-            <a:ext cx="2808720" cy="457560"/>
+            <a:ext cx="2807280" cy="457560"/>
           </a:xfrm>
           <a:prstGeom prst="rect">
             <a:avLst/>
@@ -5841,44 +6609,36 @@
           </a:ln>
         </p:spPr>
         <p:style>
-          <a:lnRef idx="0">
-            <a:scrgbClr r="0" g="0" b="0"/>
-          </a:lnRef>
-          <a:fillRef idx="0">
-            <a:scrgbClr r="0" g="0" b="0"/>
-          </a:fillRef>
-          <a:effectRef idx="0">
-            <a:scrgbClr r="0" g="0" b="0"/>
-          </a:effectRef>
+          <a:lnRef idx="0"/>
+          <a:fillRef idx="0"/>
+          <a:effectRef idx="0"/>
           <a:fontRef idx="minor"/>
         </p:style>
         <p:txBody>
-          <a:bodyPr lIns="90000" tIns="91440" rIns="90000" bIns="91440" anchor="t">
+          <a:bodyPr lIns="90000" rIns="90000" tIns="91440" bIns="91440" anchor="t">
             <a:spAutoFit/>
           </a:bodyPr>
-          <a:lstStyle/>
           <a:p>
             <a:pPr defTabSz="914400">
               <a:lnSpc>
                 <a:spcPct val="100000"/>
               </a:lnSpc>
               <a:tabLst>
-                <a:tab pos="0" algn="l"/>
-              </a:tabLst>
-            </a:pPr>
-            <a:r>
-              <a:rPr lang="pt-PT" sz="1800" b="1" u="none" strike="noStrike">
+                <a:tab algn="l" pos="0"/>
+              </a:tabLst>
+            </a:pPr>
+            <a:r>
+              <a:rPr b="1" lang="pt-PT" sz="1800" strike="noStrike" u="none">
                 <a:solidFill>
                   <a:schemeClr val="dk1"/>
                 </a:solidFill>
                 <a:effectLst/>
                 <a:uFillTx/>
                 <a:latin typeface="Arial"/>
-                <a:ea typeface="Arial"/>
-              </a:rPr>
-              <a:t>Situação Problemática</a:t>
-            </a:r>
-            <a:endParaRPr lang="pt-PT" sz="1800" b="0" u="none" strike="noStrike">
+              </a:rPr>
+              <a:t>Introdução</a:t>
+            </a:r>
+            <a:endParaRPr b="0" lang="pt-PT" sz="1800" strike="noStrike" u="none">
               <a:solidFill>
                 <a:srgbClr val="000000"/>
               </a:solidFill>
@@ -5898,7 +6658,7 @@
         <p:spPr>
           <a:xfrm>
             <a:off x="549000" y="1085040"/>
-            <a:ext cx="7711560" cy="3197520"/>
+            <a:ext cx="7710120" cy="3196080"/>
           </a:xfrm>
           <a:prstGeom prst="rect">
             <a:avLst/>
@@ -5909,26 +6669,19 @@
           </a:ln>
         </p:spPr>
         <p:style>
-          <a:lnRef idx="0">
-            <a:scrgbClr r="0" g="0" b="0"/>
-          </a:lnRef>
-          <a:fillRef idx="0">
-            <a:scrgbClr r="0" g="0" b="0"/>
-          </a:fillRef>
-          <a:effectRef idx="0">
-            <a:scrgbClr r="0" g="0" b="0"/>
-          </a:effectRef>
+          <a:lnRef idx="0"/>
+          <a:fillRef idx="0"/>
+          <a:effectRef idx="0"/>
           <a:fontRef idx="minor"/>
         </p:style>
         <p:txBody>
-          <a:bodyPr lIns="90000" tIns="91440" rIns="90000" bIns="91440" anchor="t">
+          <a:bodyPr lIns="90000" rIns="90000" tIns="91440" bIns="91440" anchor="t">
             <a:noAutofit/>
           </a:bodyPr>
-          <a:lstStyle/>
           <a:p>
             <a:pPr defTabSz="914400">
               <a:lnSpc>
-                <a:spcPct val="115000"/>
+                <a:spcPct val="100000"/>
               </a:lnSpc>
               <a:spcBef>
                 <a:spcPts val="1191"/>
@@ -5937,25 +6690,64 @@
                 <a:spcPts val="992"/>
               </a:spcAft>
               <a:tabLst>
-                <a:tab pos="0" algn="l"/>
-              </a:tabLst>
-            </a:pPr>
-            <a:r>
-              <a:rPr lang="pt-PT" sz="1400" b="0" u="none" strike="noStrike">
-                <a:solidFill>
-                  <a:srgbClr val="0F1115"/>
+                <a:tab algn="l" pos="0"/>
+              </a:tabLst>
+            </a:pPr>
+            <a:r>
+              <a:rPr b="0" lang="pt-PT" sz="1400" strike="noStrike" u="none">
+                <a:solidFill>
+                  <a:srgbClr val="0f1115"/>
                 </a:solidFill>
                 <a:effectLst/>
                 <a:highlight>
-                  <a:srgbClr val="FFFFFF"/>
+                  <a:srgbClr val="ffffff"/>
                 </a:highlight>
                 <a:uFillTx/>
                 <a:latin typeface="Arial"/>
                 <a:ea typeface="Arial"/>
               </a:rPr>
-              <a:t>O Colégio Mona Tower enfrenta dificuldades financeiras devido a processos manuais e à falta de integração entre os setores. Esta fragmentação pode causar falhas no controlo de dívidas e inconsistência nos dados, comprometendo o fluxo de caixa e a tomada de decisão estratégica.</a:t>
-            </a:r>
-            <a:endParaRPr lang="pt-PT" sz="1400" b="0" u="none" strike="noStrike">
+              <a:t>A eficiência na administração financeira é essencial para o bom funcionamento das instituições de ensino. Contudo, muitas escolas angolanas ainda enfrentam dificuldades relacionadas à gestão manual de serviços estudantis, controlo de pagamentos, emissão de relatórios e notificações de dívidas em papel.</a:t>
+            </a:r>
+            <a:endParaRPr b="0" lang="pt-PT" sz="1400" strike="noStrike" u="none">
+              <a:solidFill>
+                <a:srgbClr val="000000"/>
+              </a:solidFill>
+              <a:effectLst/>
+              <a:uFillTx/>
+              <a:latin typeface="Arial"/>
+            </a:endParaRPr>
+          </a:p>
+          <a:p>
+            <a:pPr defTabSz="914400">
+              <a:lnSpc>
+                <a:spcPct val="100000"/>
+              </a:lnSpc>
+              <a:spcBef>
+                <a:spcPts val="1191"/>
+              </a:spcBef>
+              <a:spcAft>
+                <a:spcPts val="992"/>
+              </a:spcAft>
+              <a:tabLst>
+                <a:tab algn="l" pos="0"/>
+              </a:tabLst>
+            </a:pPr>
+            <a:r>
+              <a:rPr b="0" lang="pt-PT" sz="1400" strike="noStrike" u="none">
+                <a:solidFill>
+                  <a:srgbClr val="0f1115"/>
+                </a:solidFill>
+                <a:effectLst/>
+                <a:highlight>
+                  <a:srgbClr val="ffffff"/>
+                </a:highlight>
+                <a:uFillTx/>
+                <a:latin typeface="Arial"/>
+                <a:ea typeface="Arial"/>
+              </a:rPr>
+              <a:t>Neste contexto, o presente projecto propõe o desenvolvimento de um Sistema Integrado de Gestão Financeira Escolar para o Colégio Mona Tower, com o objectivo de automatizar processos financeiros, melhorar o controlo administrativo e optimizar a comunicação com os encarregados de educação.</a:t>
+            </a:r>
+            <a:endParaRPr b="0" lang="pt-PT" sz="1400" strike="noStrike" u="none">
               <a:solidFill>
                 <a:srgbClr val="000000"/>
               </a:solidFill>
@@ -5968,14 +6760,19 @@
       </p:sp>
     </p:spTree>
   </p:cSld>
-  <p:clrMapOvr>
-    <a:masterClrMapping/>
-  </p:clrMapOvr>
+  <mc:AlternateContent>
+    <mc:Choice Requires="p14">
+      <p:transition spd="slow" p14:dur="2000"/>
+    </mc:Choice>
+    <mc:Fallback>
+      <p:transition spd="slow"/>
+    </mc:Fallback>
+  </mc:AlternateContent>
 </p:sld>
 </file>
 
 <file path=ppt/slides/slide4.xml><?xml version="1.0" encoding="utf-8"?>
-<p:sld xmlns:a="http://schemas.openxmlformats.org/drawingml/2006/main" xmlns:r="http://schemas.openxmlformats.org/officeDocument/2006/relationships" xmlns:p="http://schemas.openxmlformats.org/presentationml/2006/main">
+<p:sld xmlns:a="http://schemas.openxmlformats.org/drawingml/2006/main" xmlns:p="http://schemas.openxmlformats.org/presentationml/2006/main" xmlns:r="http://schemas.openxmlformats.org/officeDocument/2006/relationships" xmlns:p14="http://schemas.microsoft.com/office/powerpoint/2010/main" xmlns:p15="http://schemas.microsoft.com/office/powerpoint/2012/main" xmlns:mc="http://schemas.openxmlformats.org/markup-compatibility/2006">
   <p:cSld>
     <p:spTree>
       <p:nvGrpSpPr>
@@ -5993,14 +6790,14 @@
       </p:grpSpPr>
       <p:sp>
         <p:nvSpPr>
-          <p:cNvPr id="41" name="Google Shape;77;p16"/>
+          <p:cNvPr id="41" name="Google Shape;71;p15"/>
           <p:cNvSpPr/>
           <p:nvPr/>
         </p:nvSpPr>
         <p:spPr>
           <a:xfrm>
-            <a:off x="537120" y="627840"/>
-            <a:ext cx="2688120" cy="531720"/>
+            <a:off x="549000" y="623160"/>
+            <a:ext cx="2807280" cy="457560"/>
           </a:xfrm>
           <a:prstGeom prst="rect">
             <a:avLst/>
@@ -6011,33 +6808,26 @@
           </a:ln>
         </p:spPr>
         <p:style>
-          <a:lnRef idx="0">
-            <a:scrgbClr r="0" g="0" b="0"/>
-          </a:lnRef>
-          <a:fillRef idx="0">
-            <a:scrgbClr r="0" g="0" b="0"/>
-          </a:fillRef>
-          <a:effectRef idx="0">
-            <a:scrgbClr r="0" g="0" b="0"/>
-          </a:effectRef>
+          <a:lnRef idx="0"/>
+          <a:fillRef idx="0"/>
+          <a:effectRef idx="0"/>
           <a:fontRef idx="minor"/>
         </p:style>
         <p:txBody>
-          <a:bodyPr lIns="90000" tIns="91440" rIns="90000" bIns="91440" anchor="t">
-            <a:noAutofit/>
+          <a:bodyPr lIns="90000" rIns="90000" tIns="91440" bIns="91440" anchor="t">
+            <a:spAutoFit/>
           </a:bodyPr>
-          <a:lstStyle/>
           <a:p>
             <a:pPr defTabSz="914400">
               <a:lnSpc>
                 <a:spcPct val="100000"/>
               </a:lnSpc>
               <a:tabLst>
-                <a:tab pos="0" algn="l"/>
-              </a:tabLst>
-            </a:pPr>
-            <a:r>
-              <a:rPr lang="pt-PT" sz="1800" b="1" u="none" strike="noStrike">
+                <a:tab algn="l" pos="0"/>
+              </a:tabLst>
+            </a:pPr>
+            <a:r>
+              <a:rPr b="1" lang="pt-PT" sz="1800" strike="noStrike" u="none">
                 <a:solidFill>
                   <a:schemeClr val="dk1"/>
                 </a:solidFill>
@@ -6046,9 +6836,9 @@
                 <a:latin typeface="Arial"/>
                 <a:ea typeface="Arial"/>
               </a:rPr>
-              <a:t>Problema de Pesquisa</a:t>
-            </a:r>
-            <a:endParaRPr lang="pt-PT" sz="1800" b="0" u="none" strike="noStrike">
+              <a:t>Situação Problemática</a:t>
+            </a:r>
+            <a:endParaRPr b="0" lang="pt-PT" sz="1800" strike="noStrike" u="none">
               <a:solidFill>
                 <a:srgbClr val="000000"/>
               </a:solidFill>
@@ -6061,14 +6851,14 @@
       </p:sp>
       <p:sp>
         <p:nvSpPr>
-          <p:cNvPr id="42" name="Google Shape;78;p16"/>
+          <p:cNvPr id="42" name="Google Shape;72;p15"/>
           <p:cNvSpPr/>
           <p:nvPr/>
         </p:nvSpPr>
         <p:spPr>
           <a:xfrm>
-            <a:off x="537120" y="1318680"/>
-            <a:ext cx="7913880" cy="839160"/>
+            <a:off x="549000" y="1085040"/>
+            <a:ext cx="7710120" cy="3196080"/>
           </a:xfrm>
           <a:prstGeom prst="rect">
             <a:avLst/>
@@ -6079,26 +6869,19 @@
           </a:ln>
         </p:spPr>
         <p:style>
-          <a:lnRef idx="0">
-            <a:scrgbClr r="0" g="0" b="0"/>
-          </a:lnRef>
-          <a:fillRef idx="0">
-            <a:scrgbClr r="0" g="0" b="0"/>
-          </a:fillRef>
-          <a:effectRef idx="0">
-            <a:scrgbClr r="0" g="0" b="0"/>
-          </a:effectRef>
+          <a:lnRef idx="0"/>
+          <a:fillRef idx="0"/>
+          <a:effectRef idx="0"/>
           <a:fontRef idx="minor"/>
         </p:style>
         <p:txBody>
-          <a:bodyPr lIns="90000" tIns="91440" rIns="90000" bIns="91440" anchor="t">
+          <a:bodyPr lIns="90000" rIns="90000" tIns="91440" bIns="91440" anchor="t">
             <a:noAutofit/>
           </a:bodyPr>
-          <a:lstStyle/>
           <a:p>
             <a:pPr defTabSz="914400">
               <a:lnSpc>
-                <a:spcPct val="126000"/>
+                <a:spcPct val="115000"/>
               </a:lnSpc>
               <a:spcBef>
                 <a:spcPts val="1191"/>
@@ -6107,22 +6890,25 @@
                 <a:spcPts val="992"/>
               </a:spcAft>
               <a:tabLst>
-                <a:tab pos="0" algn="l"/>
-              </a:tabLst>
-            </a:pPr>
-            <a:r>
-              <a:rPr lang="pt-PT" sz="1400" b="0" u="none" strike="noStrike">
-                <a:solidFill>
-                  <a:schemeClr val="dk1"/>
-                </a:solidFill>
-                <a:effectLst/>
+                <a:tab algn="l" pos="0"/>
+              </a:tabLst>
+            </a:pPr>
+            <a:r>
+              <a:rPr b="0" lang="pt-PT" sz="1400" strike="noStrike" u="none">
+                <a:solidFill>
+                  <a:srgbClr val="0f1115"/>
+                </a:solidFill>
+                <a:effectLst/>
+                <a:highlight>
+                  <a:srgbClr val="ffffff"/>
+                </a:highlight>
                 <a:uFillTx/>
                 <a:latin typeface="Arial"/>
                 <a:ea typeface="Arial"/>
               </a:rPr>
-              <a:t>Como tornar a gestão financeira do colégio Mona Tower mais fiável e eficiente? </a:t>
-            </a:r>
-            <a:endParaRPr lang="pt-PT" sz="1400" b="0" u="none" strike="noStrike">
+              <a:t>O Colégio Mona Tower enfrenta dificuldades na gestão financeira devido à utilização de processos manuais no controlo de serviços estudantis, pagamentos, emissão de relatórios e notificações de dívidas. A dependência de registos físicos e comunicações em papel dificulta a organização e o acompanhamento eficiente das informações financeiras.</a:t>
+            </a:r>
+            <a:endParaRPr b="0" lang="pt-PT" sz="1400" strike="noStrike" u="none">
               <a:solidFill>
                 <a:srgbClr val="000000"/>
               </a:solidFill>
@@ -6134,7 +6920,7 @@
           <a:p>
             <a:pPr defTabSz="914400">
               <a:lnSpc>
-                <a:spcPct val="126000"/>
+                <a:spcPct val="115000"/>
               </a:lnSpc>
               <a:spcBef>
                 <a:spcPts val="1191"/>
@@ -6143,10 +6929,25 @@
                 <a:spcPts val="992"/>
               </a:spcAft>
               <a:tabLst>
-                <a:tab pos="0" algn="l"/>
-              </a:tabLst>
-            </a:pPr>
-            <a:endParaRPr lang="pt-PT" sz="1400" b="0" u="none" strike="noStrike">
+                <a:tab algn="l" pos="0"/>
+              </a:tabLst>
+            </a:pPr>
+            <a:r>
+              <a:rPr b="0" lang="pt-PT" sz="1400" strike="noStrike" u="none">
+                <a:solidFill>
+                  <a:srgbClr val="0f1115"/>
+                </a:solidFill>
+                <a:effectLst/>
+                <a:highlight>
+                  <a:srgbClr val="ffffff"/>
+                </a:highlight>
+                <a:uFillTx/>
+                <a:latin typeface="Arial"/>
+                <a:ea typeface="Arial"/>
+              </a:rPr>
+              <a:t>Além disso, a fragmentação entre sectores administrativos compromete o controlo de mensalidades e serviços recorrentes, aumentando o risco de erros, atrasos e inconsistências nos registos financeiros e na comunicação com os encarregados de educação.</a:t>
+            </a:r>
+            <a:endParaRPr b="0" lang="pt-PT" sz="1400" strike="noStrike" u="none">
               <a:solidFill>
                 <a:srgbClr val="000000"/>
               </a:solidFill>
@@ -6159,14 +6960,19 @@
       </p:sp>
     </p:spTree>
   </p:cSld>
-  <p:clrMapOvr>
-    <a:masterClrMapping/>
-  </p:clrMapOvr>
+  <mc:AlternateContent>
+    <mc:Choice Requires="p14">
+      <p:transition spd="slow" p14:dur="2000"/>
+    </mc:Choice>
+    <mc:Fallback>
+      <p:transition spd="slow"/>
+    </mc:Fallback>
+  </mc:AlternateContent>
 </p:sld>
 </file>
 
 <file path=ppt/slides/slide5.xml><?xml version="1.0" encoding="utf-8"?>
-<p:sld xmlns:a="http://schemas.openxmlformats.org/drawingml/2006/main" xmlns:r="http://schemas.openxmlformats.org/officeDocument/2006/relationships" xmlns:p="http://schemas.openxmlformats.org/presentationml/2006/main">
+<p:sld xmlns:a="http://schemas.openxmlformats.org/drawingml/2006/main" xmlns:p="http://schemas.openxmlformats.org/presentationml/2006/main" xmlns:r="http://schemas.openxmlformats.org/officeDocument/2006/relationships" xmlns:p14="http://schemas.microsoft.com/office/powerpoint/2010/main" xmlns:p15="http://schemas.microsoft.com/office/powerpoint/2012/main" xmlns:mc="http://schemas.openxmlformats.org/markup-compatibility/2006">
   <p:cSld>
     <p:spTree>
       <p:nvGrpSpPr>
@@ -6184,14 +6990,14 @@
       </p:grpSpPr>
       <p:sp>
         <p:nvSpPr>
-          <p:cNvPr id="43" name="Google Shape;83;p17"/>
+          <p:cNvPr id="43" name="Google Shape;77;p16"/>
           <p:cNvSpPr/>
           <p:nvPr/>
         </p:nvSpPr>
         <p:spPr>
           <a:xfrm>
-            <a:off x="549000" y="625680"/>
-            <a:ext cx="1285920" cy="468720"/>
+            <a:off x="537120" y="627840"/>
+            <a:ext cx="2686680" cy="530280"/>
           </a:xfrm>
           <a:prstGeom prst="rect">
             <a:avLst/>
@@ -6202,33 +7008,26 @@
           </a:ln>
         </p:spPr>
         <p:style>
-          <a:lnRef idx="0">
-            <a:scrgbClr r="0" g="0" b="0"/>
-          </a:lnRef>
-          <a:fillRef idx="0">
-            <a:scrgbClr r="0" g="0" b="0"/>
-          </a:fillRef>
-          <a:effectRef idx="0">
-            <a:scrgbClr r="0" g="0" b="0"/>
-          </a:effectRef>
+          <a:lnRef idx="0"/>
+          <a:fillRef idx="0"/>
+          <a:effectRef idx="0"/>
           <a:fontRef idx="minor"/>
         </p:style>
         <p:txBody>
-          <a:bodyPr lIns="90000" tIns="91440" rIns="90000" bIns="91440" anchor="t">
+          <a:bodyPr lIns="90000" rIns="90000" tIns="91440" bIns="91440" anchor="t">
             <a:noAutofit/>
           </a:bodyPr>
-          <a:lstStyle/>
           <a:p>
             <a:pPr defTabSz="914400">
               <a:lnSpc>
                 <a:spcPct val="100000"/>
               </a:lnSpc>
               <a:tabLst>
-                <a:tab pos="0" algn="l"/>
-              </a:tabLst>
-            </a:pPr>
-            <a:r>
-              <a:rPr lang="pt-PT" sz="1800" b="1" u="none" strike="noStrike">
+                <a:tab algn="l" pos="0"/>
+              </a:tabLst>
+            </a:pPr>
+            <a:r>
+              <a:rPr b="1" lang="pt-PT" sz="1800" strike="noStrike" u="none">
                 <a:solidFill>
                   <a:schemeClr val="dk1"/>
                 </a:solidFill>
@@ -6237,9 +7036,9 @@
                 <a:latin typeface="Arial"/>
                 <a:ea typeface="Arial"/>
               </a:rPr>
-              <a:t>Hipóteses</a:t>
-            </a:r>
-            <a:endParaRPr lang="pt-PT" sz="1800" b="0" u="none" strike="noStrike">
+              <a:t>Problema de Pesquisa</a:t>
+            </a:r>
+            <a:endParaRPr b="0" lang="pt-PT" sz="1800" strike="noStrike" u="none">
               <a:solidFill>
                 <a:srgbClr val="000000"/>
               </a:solidFill>
@@ -6252,14 +7051,14 @@
       </p:sp>
       <p:sp>
         <p:nvSpPr>
-          <p:cNvPr id="44" name="Google Shape;84;p17"/>
+          <p:cNvPr id="44" name="Google Shape;78;p16"/>
           <p:cNvSpPr/>
           <p:nvPr/>
         </p:nvSpPr>
         <p:spPr>
           <a:xfrm>
-            <a:off x="540000" y="1271160"/>
-            <a:ext cx="7760520" cy="3227040"/>
+            <a:off x="537120" y="1318680"/>
+            <a:ext cx="7912440" cy="837720"/>
           </a:xfrm>
           <a:prstGeom prst="rect">
             <a:avLst/>
@@ -6270,86 +7069,43 @@
           </a:ln>
         </p:spPr>
         <p:style>
-          <a:lnRef idx="0">
-            <a:scrgbClr r="0" g="0" b="0"/>
-          </a:lnRef>
-          <a:fillRef idx="0">
-            <a:scrgbClr r="0" g="0" b="0"/>
-          </a:fillRef>
-          <a:effectRef idx="0">
-            <a:scrgbClr r="0" g="0" b="0"/>
-          </a:effectRef>
+          <a:lnRef idx="0"/>
+          <a:fillRef idx="0"/>
+          <a:effectRef idx="0"/>
           <a:fontRef idx="minor"/>
         </p:style>
         <p:txBody>
-          <a:bodyPr lIns="90000" tIns="91440" rIns="90000" bIns="91440" anchor="t">
+          <a:bodyPr lIns="90000" rIns="90000" tIns="91440" bIns="91440" anchor="t">
             <a:noAutofit/>
           </a:bodyPr>
-          <a:lstStyle/>
           <a:p>
             <a:pPr defTabSz="914400">
               <a:lnSpc>
-                <a:spcPct val="115000"/>
+                <a:spcPct val="126000"/>
               </a:lnSpc>
               <a:spcBef>
-                <a:spcPts val="1199"/>
+                <a:spcPts val="1191"/>
               </a:spcBef>
-              <a:tabLst>
-                <a:tab pos="0" algn="l"/>
-              </a:tabLst>
-            </a:pPr>
-            <a:r>
-              <a:rPr lang="pt-PT" sz="1400" b="0" u="none" strike="noStrike">
-                <a:solidFill>
-                  <a:srgbClr val="0F1115"/>
-                </a:solidFill>
-                <a:effectLst/>
-                <a:highlight>
-                  <a:srgbClr val="FFFFFF"/>
-                </a:highlight>
+              <a:spcAft>
+                <a:spcPts val="992"/>
+              </a:spcAft>
+              <a:tabLst>
+                <a:tab algn="l" pos="0"/>
+              </a:tabLst>
+            </a:pPr>
+            <a:r>
+              <a:rPr b="0" lang="pt-PT" sz="1400" strike="noStrike" u="none">
+                <a:solidFill>
+                  <a:schemeClr val="dk1"/>
+                </a:solidFill>
+                <a:effectLst/>
                 <a:uFillTx/>
                 <a:latin typeface="Arial"/>
                 <a:ea typeface="Arial"/>
               </a:rPr>
-              <a:t>1º Desenvolver um sistema integrado de gestão e processamento de pagamentos.</a:t>
-            </a:r>
-            <a:endParaRPr lang="pt-PT" sz="1400" b="0" u="none" strike="noStrike">
-              <a:solidFill>
-                <a:srgbClr val="000000"/>
-              </a:solidFill>
-              <a:effectLst/>
-              <a:uFillTx/>
-              <a:latin typeface="Arial"/>
-            </a:endParaRPr>
-          </a:p>
-          <a:p>
-            <a:pPr defTabSz="914400">
-              <a:lnSpc>
-                <a:spcPct val="115000"/>
-              </a:lnSpc>
-              <a:spcBef>
-                <a:spcPts val="1199"/>
-              </a:spcBef>
-              <a:tabLst>
-                <a:tab pos="0" algn="l"/>
-              </a:tabLst>
-            </a:pPr>
-            <a:r>
-              <a:rPr lang="pt-PT" sz="1400" b="0" u="none" strike="noStrike">
-                <a:solidFill>
-                  <a:srgbClr val="0F1115"/>
-                </a:solidFill>
-                <a:effectLst/>
-                <a:highlight>
-                  <a:srgbClr val="FFFFFF"/>
-                </a:highlight>
-                <a:uFillTx/>
-                <a:latin typeface="Arial"/>
-                <a:ea typeface="Arial"/>
-              </a:rPr>
-              <a:t>2º Adquirir um software comercial de gestão escolar com módulos financeiros pré-definidos.</a:t>
-            </a:r>
-            <a:endParaRPr lang="pt-PT" sz="1400" b="0" u="none" strike="noStrike">
+              <a:t>Como tornar a gestão financeira do Colégio Mona Tower mais integrada, eficiente e fiável?</a:t>
+            </a:r>
+            <a:endParaRPr b="0" lang="pt-PT" sz="1400" strike="noStrike" u="none">
               <a:solidFill>
                 <a:srgbClr val="000000"/>
               </a:solidFill>
@@ -6362,14 +7118,19 @@
       </p:sp>
     </p:spTree>
   </p:cSld>
-  <p:clrMapOvr>
-    <a:masterClrMapping/>
-  </p:clrMapOvr>
+  <mc:AlternateContent>
+    <mc:Choice Requires="p14">
+      <p:transition spd="slow" p14:dur="2000"/>
+    </mc:Choice>
+    <mc:Fallback>
+      <p:transition spd="slow"/>
+    </mc:Fallback>
+  </mc:AlternateContent>
 </p:sld>
 </file>
 
 <file path=ppt/slides/slide6.xml><?xml version="1.0" encoding="utf-8"?>
-<p:sld xmlns:a="http://schemas.openxmlformats.org/drawingml/2006/main" xmlns:r="http://schemas.openxmlformats.org/officeDocument/2006/relationships" xmlns:p="http://schemas.openxmlformats.org/presentationml/2006/main">
+<p:sld xmlns:a="http://schemas.openxmlformats.org/drawingml/2006/main" xmlns:p="http://schemas.openxmlformats.org/presentationml/2006/main" xmlns:r="http://schemas.openxmlformats.org/officeDocument/2006/relationships" xmlns:p14="http://schemas.microsoft.com/office/powerpoint/2010/main" xmlns:p15="http://schemas.microsoft.com/office/powerpoint/2012/main" xmlns:mc="http://schemas.openxmlformats.org/markup-compatibility/2006">
   <p:cSld>
     <p:spTree>
       <p:nvGrpSpPr>
@@ -6387,14 +7148,14 @@
       </p:grpSpPr>
       <p:sp>
         <p:nvSpPr>
-          <p:cNvPr id="45" name="Google Shape;89;p18"/>
+          <p:cNvPr id="45" name="Google Shape;83;p17"/>
           <p:cNvSpPr/>
           <p:nvPr/>
         </p:nvSpPr>
         <p:spPr>
           <a:xfrm>
-            <a:off x="536400" y="625680"/>
-            <a:ext cx="1566720" cy="457560"/>
+            <a:off x="549000" y="625680"/>
+            <a:ext cx="1284480" cy="467280"/>
           </a:xfrm>
           <a:prstGeom prst="rect">
             <a:avLst/>
@@ -6405,33 +7166,26 @@
           </a:ln>
         </p:spPr>
         <p:style>
-          <a:lnRef idx="0">
-            <a:scrgbClr r="0" g="0" b="0"/>
-          </a:lnRef>
-          <a:fillRef idx="0">
-            <a:scrgbClr r="0" g="0" b="0"/>
-          </a:fillRef>
-          <a:effectRef idx="0">
-            <a:scrgbClr r="0" g="0" b="0"/>
-          </a:effectRef>
+          <a:lnRef idx="0"/>
+          <a:fillRef idx="0"/>
+          <a:effectRef idx="0"/>
           <a:fontRef idx="minor"/>
         </p:style>
         <p:txBody>
-          <a:bodyPr lIns="90000" tIns="91440" rIns="90000" bIns="91440" anchor="t">
-            <a:spAutoFit/>
+          <a:bodyPr lIns="90000" rIns="90000" tIns="91440" bIns="91440" anchor="t">
+            <a:noAutofit/>
           </a:bodyPr>
-          <a:lstStyle/>
           <a:p>
             <a:pPr defTabSz="914400">
               <a:lnSpc>
                 <a:spcPct val="100000"/>
               </a:lnSpc>
               <a:tabLst>
-                <a:tab pos="0" algn="l"/>
-              </a:tabLst>
-            </a:pPr>
-            <a:r>
-              <a:rPr lang="pt-PT" sz="1800" b="1" u="none" strike="noStrike">
+                <a:tab algn="l" pos="0"/>
+              </a:tabLst>
+            </a:pPr>
+            <a:r>
+              <a:rPr b="1" lang="pt-PT" sz="1800" strike="noStrike" u="none">
                 <a:solidFill>
                   <a:schemeClr val="dk1"/>
                 </a:solidFill>
@@ -6440,9 +7194,9 @@
                 <a:latin typeface="Arial"/>
                 <a:ea typeface="Arial"/>
               </a:rPr>
-              <a:t>Justificativa</a:t>
-            </a:r>
-            <a:endParaRPr lang="pt-PT" sz="1800" b="0" u="none" strike="noStrike">
+              <a:t>Hipóteses</a:t>
+            </a:r>
+            <a:endParaRPr b="0" lang="pt-PT" sz="1800" strike="noStrike" u="none">
               <a:solidFill>
                 <a:srgbClr val="000000"/>
               </a:solidFill>
@@ -6455,14 +7209,14 @@
       </p:sp>
       <p:sp>
         <p:nvSpPr>
-          <p:cNvPr id="46" name="Google Shape;90;p18"/>
+          <p:cNvPr id="46" name="Google Shape;84;p17"/>
           <p:cNvSpPr/>
           <p:nvPr/>
         </p:nvSpPr>
         <p:spPr>
           <a:xfrm>
-            <a:off x="536400" y="1087560"/>
-            <a:ext cx="7722720" cy="1745640"/>
+            <a:off x="540000" y="1271160"/>
+            <a:ext cx="7759080" cy="3225600"/>
           </a:xfrm>
           <a:prstGeom prst="rect">
             <a:avLst/>
@@ -6473,44 +7227,79 @@
           </a:ln>
         </p:spPr>
         <p:style>
-          <a:lnRef idx="0">
-            <a:scrgbClr r="0" g="0" b="0"/>
-          </a:lnRef>
-          <a:fillRef idx="0">
-            <a:scrgbClr r="0" g="0" b="0"/>
-          </a:fillRef>
-          <a:effectRef idx="0">
-            <a:scrgbClr r="0" g="0" b="0"/>
-          </a:effectRef>
+          <a:lnRef idx="0"/>
+          <a:fillRef idx="0"/>
+          <a:effectRef idx="0"/>
           <a:fontRef idx="minor"/>
         </p:style>
         <p:txBody>
-          <a:bodyPr lIns="90000" tIns="91440" rIns="90000" bIns="91440" anchor="t">
+          <a:bodyPr lIns="90000" rIns="90000" tIns="91440" bIns="91440" anchor="t">
             <a:noAutofit/>
           </a:bodyPr>
-          <a:lstStyle/>
           <a:p>
             <a:pPr defTabSz="914400">
               <a:lnSpc>
-                <a:spcPct val="100000"/>
-              </a:lnSpc>
-              <a:tabLst>
-                <a:tab pos="0" algn="l"/>
-              </a:tabLst>
-            </a:pPr>
-            <a:r>
-              <a:rPr lang="pt-PT" sz="1400" b="0" u="none" strike="noStrike">
-                <a:solidFill>
-                  <a:schemeClr val="dk1"/>
-                </a:solidFill>
-                <a:effectLst/>
+                <a:spcPct val="115000"/>
+              </a:lnSpc>
+              <a:spcBef>
+                <a:spcPts val="1199"/>
+              </a:spcBef>
+              <a:tabLst>
+                <a:tab algn="l" pos="0"/>
+              </a:tabLst>
+            </a:pPr>
+            <a:r>
+              <a:rPr b="0" lang="pt-PT" sz="1400" strike="noStrike" u="none">
+                <a:solidFill>
+                  <a:srgbClr val="0f1115"/>
+                </a:solidFill>
+                <a:effectLst/>
+                <a:highlight>
+                  <a:srgbClr val="ffffff"/>
+                </a:highlight>
                 <a:uFillTx/>
                 <a:latin typeface="Arial"/>
                 <a:ea typeface="Arial"/>
               </a:rPr>
-              <a:t>O sistema é necessário para modernizar a gestão financeira da instituição, reduzindo a dependência de processos manuais. A solução facilitará a comunicação entre encarregados e administração, garantindo simultaneamente segurança e rastreabilidade dos dados. Adicionalmente, permitirá aumentar significativamente a transparência e eficiência das operações financeiras do colégio.</a:t>
-            </a:r>
-            <a:endParaRPr lang="pt-PT" sz="1400" b="0" u="none" strike="noStrike">
+              <a:t>1º Desenvolver um sistema integrado de gestão e processamento de pagamentos.</a:t>
+            </a:r>
+            <a:endParaRPr b="0" lang="pt-PT" sz="1400" strike="noStrike" u="none">
+              <a:solidFill>
+                <a:srgbClr val="000000"/>
+              </a:solidFill>
+              <a:effectLst/>
+              <a:uFillTx/>
+              <a:latin typeface="Arial"/>
+            </a:endParaRPr>
+          </a:p>
+          <a:p>
+            <a:pPr defTabSz="914400">
+              <a:lnSpc>
+                <a:spcPct val="115000"/>
+              </a:lnSpc>
+              <a:spcBef>
+                <a:spcPts val="1199"/>
+              </a:spcBef>
+              <a:tabLst>
+                <a:tab algn="l" pos="0"/>
+              </a:tabLst>
+            </a:pPr>
+            <a:r>
+              <a:rPr b="0" lang="pt-PT" sz="1400" strike="noStrike" u="none">
+                <a:solidFill>
+                  <a:srgbClr val="0f1115"/>
+                </a:solidFill>
+                <a:effectLst/>
+                <a:highlight>
+                  <a:srgbClr val="ffffff"/>
+                </a:highlight>
+                <a:uFillTx/>
+                <a:latin typeface="Arial"/>
+                <a:ea typeface="Arial"/>
+              </a:rPr>
+              <a:t>2º Adquirir um software comercial de gestão escolar com módulos financeiros pré-definidos.</a:t>
+            </a:r>
+            <a:endParaRPr b="0" lang="pt-PT" sz="1400" strike="noStrike" u="none">
               <a:solidFill>
                 <a:srgbClr val="000000"/>
               </a:solidFill>
@@ -6523,14 +7312,19 @@
       </p:sp>
     </p:spTree>
   </p:cSld>
-  <p:clrMapOvr>
-    <a:masterClrMapping/>
-  </p:clrMapOvr>
+  <mc:AlternateContent>
+    <mc:Choice Requires="p14">
+      <p:transition spd="slow" p14:dur="2000"/>
+    </mc:Choice>
+    <mc:Fallback>
+      <p:transition spd="slow"/>
+    </mc:Fallback>
+  </mc:AlternateContent>
 </p:sld>
 </file>
 
 <file path=ppt/slides/slide7.xml><?xml version="1.0" encoding="utf-8"?>
-<p:sld xmlns:a="http://schemas.openxmlformats.org/drawingml/2006/main" xmlns:r="http://schemas.openxmlformats.org/officeDocument/2006/relationships" xmlns:p="http://schemas.openxmlformats.org/presentationml/2006/main">
+<p:sld xmlns:a="http://schemas.openxmlformats.org/drawingml/2006/main" xmlns:p="http://schemas.openxmlformats.org/presentationml/2006/main" xmlns:r="http://schemas.openxmlformats.org/officeDocument/2006/relationships" xmlns:p14="http://schemas.microsoft.com/office/powerpoint/2010/main" xmlns:p15="http://schemas.microsoft.com/office/powerpoint/2012/main" xmlns:mc="http://schemas.openxmlformats.org/markup-compatibility/2006">
   <p:cSld>
     <p:spTree>
       <p:nvGrpSpPr>
@@ -6548,14 +7342,14 @@
       </p:grpSpPr>
       <p:sp>
         <p:nvSpPr>
-          <p:cNvPr id="47" name="Google Shape;95;p19"/>
+          <p:cNvPr id="47" name="Google Shape;89;p18"/>
           <p:cNvSpPr/>
           <p:nvPr/>
         </p:nvSpPr>
         <p:spPr>
           <a:xfrm>
-            <a:off x="549000" y="625680"/>
-            <a:ext cx="1324080" cy="457560"/>
+            <a:off x="536400" y="625680"/>
+            <a:ext cx="1565280" cy="457560"/>
           </a:xfrm>
           <a:prstGeom prst="rect">
             <a:avLst/>
@@ -6566,33 +7360,26 @@
           </a:ln>
         </p:spPr>
         <p:style>
-          <a:lnRef idx="0">
-            <a:scrgbClr r="0" g="0" b="0"/>
-          </a:lnRef>
-          <a:fillRef idx="0">
-            <a:scrgbClr r="0" g="0" b="0"/>
-          </a:fillRef>
-          <a:effectRef idx="0">
-            <a:scrgbClr r="0" g="0" b="0"/>
-          </a:effectRef>
+          <a:lnRef idx="0"/>
+          <a:fillRef idx="0"/>
+          <a:effectRef idx="0"/>
           <a:fontRef idx="minor"/>
         </p:style>
         <p:txBody>
-          <a:bodyPr lIns="90000" tIns="91440" rIns="90000" bIns="91440" anchor="t">
+          <a:bodyPr lIns="90000" rIns="90000" tIns="91440" bIns="91440" anchor="t">
             <a:spAutoFit/>
           </a:bodyPr>
-          <a:lstStyle/>
           <a:p>
             <a:pPr defTabSz="914400">
               <a:lnSpc>
                 <a:spcPct val="100000"/>
               </a:lnSpc>
               <a:tabLst>
-                <a:tab pos="0" algn="l"/>
-              </a:tabLst>
-            </a:pPr>
-            <a:r>
-              <a:rPr lang="pt-PT" sz="1800" b="1" u="none" strike="noStrike">
+                <a:tab algn="l" pos="0"/>
+              </a:tabLst>
+            </a:pPr>
+            <a:r>
+              <a:rPr b="1" lang="pt-PT" sz="1800" strike="noStrike" u="none">
                 <a:solidFill>
                   <a:schemeClr val="dk1"/>
                 </a:solidFill>
@@ -6601,9 +7388,9 @@
                 <a:latin typeface="Arial"/>
                 <a:ea typeface="Arial"/>
               </a:rPr>
-              <a:t>Objetivos</a:t>
-            </a:r>
-            <a:endParaRPr lang="pt-PT" sz="1800" b="0" u="none" strike="noStrike">
+              <a:t>Justificativa</a:t>
+            </a:r>
+            <a:endParaRPr b="0" lang="pt-PT" sz="1800" strike="noStrike" u="none">
               <a:solidFill>
                 <a:srgbClr val="000000"/>
               </a:solidFill>
@@ -6616,14 +7403,14 @@
       </p:sp>
       <p:sp>
         <p:nvSpPr>
-          <p:cNvPr id="48" name="Google Shape;96;p19"/>
+          <p:cNvPr id="48" name="Google Shape;90;p18"/>
           <p:cNvSpPr/>
           <p:nvPr/>
         </p:nvSpPr>
         <p:spPr>
           <a:xfrm>
-            <a:off x="549000" y="1087560"/>
-            <a:ext cx="1554120" cy="396720"/>
+            <a:off x="536400" y="1087560"/>
+            <a:ext cx="7721280" cy="1744200"/>
           </a:xfrm>
           <a:prstGeom prst="rect">
             <a:avLst/>
@@ -6634,107 +7421,32 @@
           </a:ln>
         </p:spPr>
         <p:style>
-          <a:lnRef idx="0">
-            <a:scrgbClr r="0" g="0" b="0"/>
-          </a:lnRef>
-          <a:fillRef idx="0">
-            <a:scrgbClr r="0" g="0" b="0"/>
-          </a:fillRef>
-          <a:effectRef idx="0">
-            <a:scrgbClr r="0" g="0" b="0"/>
-          </a:effectRef>
+          <a:lnRef idx="0"/>
+          <a:fillRef idx="0"/>
+          <a:effectRef idx="0"/>
           <a:fontRef idx="minor"/>
         </p:style>
         <p:txBody>
-          <a:bodyPr lIns="90000" tIns="91440" rIns="90000" bIns="91440" anchor="t">
-            <a:spAutoFit/>
-          </a:bodyPr>
-          <a:lstStyle/>
-          <a:p>
-            <a:pPr defTabSz="914400">
-              <a:lnSpc>
-                <a:spcPct val="100000"/>
-              </a:lnSpc>
-              <a:tabLst>
-                <a:tab pos="0" algn="l"/>
-              </a:tabLst>
-            </a:pPr>
-            <a:r>
-              <a:rPr lang="pt-PT" sz="1400" b="1" u="none" strike="noStrike">
-                <a:solidFill>
-                  <a:schemeClr val="dk1"/>
-                </a:solidFill>
-                <a:effectLst/>
-                <a:uFillTx/>
-                <a:latin typeface="Arial"/>
-                <a:ea typeface="Arial"/>
-              </a:rPr>
-              <a:t>Objetivo Geral</a:t>
-            </a:r>
-            <a:endParaRPr lang="pt-PT" sz="1400" b="0" u="none" strike="noStrike">
-              <a:solidFill>
-                <a:srgbClr val="000000"/>
-              </a:solidFill>
-              <a:effectLst/>
-              <a:uFillTx/>
-              <a:latin typeface="Arial"/>
-            </a:endParaRPr>
-          </a:p>
-        </p:txBody>
-      </p:sp>
-      <p:sp>
-        <p:nvSpPr>
-          <p:cNvPr id="49" name="Google Shape;97;p19"/>
-          <p:cNvSpPr/>
-          <p:nvPr/>
-        </p:nvSpPr>
-        <p:spPr>
-          <a:xfrm>
-            <a:off x="549000" y="1487880"/>
-            <a:ext cx="7237080" cy="851760"/>
-          </a:xfrm>
-          <a:prstGeom prst="rect">
-            <a:avLst/>
-          </a:prstGeom>
-          <a:noFill/>
-          <a:ln w="0">
-            <a:noFill/>
-          </a:ln>
-        </p:spPr>
-        <p:style>
-          <a:lnRef idx="0">
-            <a:scrgbClr r="0" g="0" b="0"/>
-          </a:lnRef>
-          <a:fillRef idx="0">
-            <a:scrgbClr r="0" g="0" b="0"/>
-          </a:fillRef>
-          <a:effectRef idx="0">
-            <a:scrgbClr r="0" g="0" b="0"/>
-          </a:effectRef>
-          <a:fontRef idx="minor"/>
-        </p:style>
-        <p:txBody>
-          <a:bodyPr lIns="90000" tIns="91440" rIns="90000" bIns="91440" anchor="t">
+          <a:bodyPr lIns="90000" rIns="90000" tIns="91440" bIns="91440" anchor="t">
             <a:noAutofit/>
           </a:bodyPr>
-          <a:lstStyle/>
           <a:p>
             <a:pPr defTabSz="914400">
               <a:lnSpc>
-                <a:spcPct val="126000"/>
+                <a:spcPct val="100000"/>
               </a:lnSpc>
               <a:spcBef>
-                <a:spcPts val="1199"/>
+                <a:spcPts val="1191"/>
               </a:spcBef>
               <a:spcAft>
-                <a:spcPts val="799"/>
+                <a:spcPts val="992"/>
               </a:spcAft>
               <a:tabLst>
-                <a:tab pos="0" algn="l"/>
-              </a:tabLst>
-            </a:pPr>
-            <a:r>
-              <a:rPr lang="pt-PT" sz="1400" b="0" u="none" strike="noStrike">
+                <a:tab algn="l" pos="0"/>
+              </a:tabLst>
+            </a:pPr>
+            <a:r>
+              <a:rPr b="0" lang="pt-PT" sz="1400" strike="noStrike" u="none">
                 <a:solidFill>
                   <a:schemeClr val="dk1"/>
                 </a:solidFill>
@@ -6743,331 +7455,9 @@
                 <a:latin typeface="Arial"/>
                 <a:ea typeface="Arial"/>
               </a:rPr>
-              <a:t>Criar uma plataforma robusta, segura e eficiente que permita ao colégio melhorar o controlo financeiro.</a:t>
-            </a:r>
-            <a:endParaRPr lang="pt-PT" sz="1400" b="0" u="none" strike="noStrike">
-              <a:solidFill>
-                <a:srgbClr val="000000"/>
-              </a:solidFill>
-              <a:effectLst/>
-              <a:uFillTx/>
-              <a:latin typeface="Arial"/>
-            </a:endParaRPr>
-          </a:p>
-        </p:txBody>
-      </p:sp>
-      <p:sp>
-        <p:nvSpPr>
-          <p:cNvPr id="50" name="Google Shape;98;p19"/>
-          <p:cNvSpPr/>
-          <p:nvPr/>
-        </p:nvSpPr>
-        <p:spPr>
-          <a:xfrm>
-            <a:off x="549000" y="2301840"/>
-            <a:ext cx="2103120" cy="396360"/>
-          </a:xfrm>
-          <a:prstGeom prst="rect">
-            <a:avLst/>
-          </a:prstGeom>
-          <a:noFill/>
-          <a:ln w="0">
-            <a:noFill/>
-          </a:ln>
-        </p:spPr>
-        <p:style>
-          <a:lnRef idx="0">
-            <a:scrgbClr r="0" g="0" b="0"/>
-          </a:lnRef>
-          <a:fillRef idx="0">
-            <a:scrgbClr r="0" g="0" b="0"/>
-          </a:fillRef>
-          <a:effectRef idx="0">
-            <a:scrgbClr r="0" g="0" b="0"/>
-          </a:effectRef>
-          <a:fontRef idx="minor"/>
-        </p:style>
-        <p:txBody>
-          <a:bodyPr lIns="90000" tIns="91440" rIns="90000" bIns="91440" anchor="t">
-            <a:noAutofit/>
-          </a:bodyPr>
-          <a:lstStyle/>
-          <a:p>
-            <a:pPr defTabSz="914400">
-              <a:lnSpc>
-                <a:spcPct val="100000"/>
-              </a:lnSpc>
-              <a:tabLst>
-                <a:tab pos="0" algn="l"/>
-              </a:tabLst>
-            </a:pPr>
-            <a:r>
-              <a:rPr lang="pt-PT" sz="1400" b="1" u="none" strike="noStrike">
-                <a:solidFill>
-                  <a:schemeClr val="dk1"/>
-                </a:solidFill>
-                <a:effectLst/>
-                <a:uFillTx/>
-                <a:latin typeface="Arial"/>
-                <a:ea typeface="Arial"/>
-              </a:rPr>
-              <a:t>Objetivos Específicos</a:t>
-            </a:r>
-            <a:endParaRPr lang="pt-PT" sz="1400" b="0" u="none" strike="noStrike">
-              <a:solidFill>
-                <a:srgbClr val="000000"/>
-              </a:solidFill>
-              <a:effectLst/>
-              <a:uFillTx/>
-              <a:latin typeface="Arial"/>
-            </a:endParaRPr>
-          </a:p>
-        </p:txBody>
-      </p:sp>
-      <p:sp>
-        <p:nvSpPr>
-          <p:cNvPr id="51" name="Google Shape;99;p19"/>
-          <p:cNvSpPr/>
-          <p:nvPr/>
-        </p:nvSpPr>
-        <p:spPr>
-          <a:xfrm>
-            <a:off x="549000" y="2647800"/>
-            <a:ext cx="7543800" cy="2030400"/>
-          </a:xfrm>
-          <a:prstGeom prst="rect">
-            <a:avLst/>
-          </a:prstGeom>
-          <a:noFill/>
-          <a:ln w="0">
-            <a:noFill/>
-          </a:ln>
-        </p:spPr>
-        <p:style>
-          <a:lnRef idx="0">
-            <a:scrgbClr r="0" g="0" b="0"/>
-          </a:lnRef>
-          <a:fillRef idx="0">
-            <a:scrgbClr r="0" g="0" b="0"/>
-          </a:fillRef>
-          <a:effectRef idx="0">
-            <a:scrgbClr r="0" g="0" b="0"/>
-          </a:effectRef>
-          <a:fontRef idx="minor"/>
-        </p:style>
-        <p:txBody>
-          <a:bodyPr lIns="90000" tIns="91440" rIns="90000" bIns="91440" anchor="t">
-            <a:noAutofit/>
-          </a:bodyPr>
-          <a:lstStyle/>
-          <a:p>
-            <a:pPr marL="457200" indent="-317520" defTabSz="914400">
-              <a:lnSpc>
-                <a:spcPct val="115000"/>
-              </a:lnSpc>
-              <a:spcBef>
-                <a:spcPts val="1199"/>
-              </a:spcBef>
-              <a:buClr>
-                <a:srgbClr val="0F1115"/>
-              </a:buClr>
-              <a:buFont typeface="Arial"/>
-              <a:buChar char="●"/>
-            </a:pPr>
-            <a:r>
-              <a:rPr lang="pt-PT" sz="1400" b="0" u="none" strike="noStrike">
-                <a:solidFill>
-                  <a:srgbClr val="0F1115"/>
-                </a:solidFill>
-                <a:effectLst/>
-                <a:highlight>
-                  <a:srgbClr val="FFFFFF"/>
-                </a:highlight>
-                <a:uFillTx/>
-                <a:latin typeface="Arial"/>
-                <a:ea typeface="Arial"/>
-              </a:rPr>
-              <a:t>Modelar e criar o banco de dados</a:t>
-            </a:r>
-            <a:endParaRPr lang="pt-PT" sz="1400" b="0" u="none" strike="noStrike">
-              <a:solidFill>
-                <a:srgbClr val="000000"/>
-              </a:solidFill>
-              <a:effectLst/>
-              <a:uFillTx/>
-              <a:latin typeface="Arial"/>
-            </a:endParaRPr>
-          </a:p>
-          <a:p>
-            <a:pPr marL="457200" indent="-317520" defTabSz="914400">
-              <a:lnSpc>
-                <a:spcPct val="115000"/>
-              </a:lnSpc>
-              <a:spcBef>
-                <a:spcPts val="1199"/>
-              </a:spcBef>
-              <a:buClr>
-                <a:srgbClr val="0F1115"/>
-              </a:buClr>
-              <a:buFont typeface="Arial"/>
-              <a:buChar char="●"/>
-            </a:pPr>
-            <a:r>
-              <a:rPr lang="pt-PT" sz="1400" b="0" u="none" strike="noStrike">
-                <a:solidFill>
-                  <a:srgbClr val="0F1115"/>
-                </a:solidFill>
-                <a:effectLst/>
-                <a:highlight>
-                  <a:srgbClr val="FFFFFF"/>
-                </a:highlight>
-                <a:uFillTx/>
-                <a:latin typeface="Arial"/>
-                <a:ea typeface="Arial"/>
-              </a:rPr>
-              <a:t>Automatizar a geração de facturas para todos os serviços.</a:t>
-            </a:r>
-            <a:endParaRPr lang="pt-PT" sz="1400" b="0" u="none" strike="noStrike">
-              <a:solidFill>
-                <a:srgbClr val="000000"/>
-              </a:solidFill>
-              <a:effectLst/>
-              <a:uFillTx/>
-              <a:latin typeface="Arial"/>
-            </a:endParaRPr>
-          </a:p>
-          <a:p>
-            <a:pPr marL="457200" indent="-317520" defTabSz="914400">
-              <a:lnSpc>
-                <a:spcPct val="115000"/>
-              </a:lnSpc>
-              <a:buClr>
-                <a:srgbClr val="0F1115"/>
-              </a:buClr>
-              <a:buFont typeface="Arial"/>
-              <a:buChar char="●"/>
-            </a:pPr>
-            <a:r>
-              <a:rPr lang="pt-PT" sz="1400" b="0" u="none" strike="noStrike">
-                <a:solidFill>
-                  <a:srgbClr val="0F1115"/>
-                </a:solidFill>
-                <a:effectLst/>
-                <a:highlight>
-                  <a:srgbClr val="FFFFFF"/>
-                </a:highlight>
-                <a:uFillTx/>
-                <a:latin typeface="Arial"/>
-                <a:ea typeface="Arial"/>
-              </a:rPr>
-              <a:t>Criar um módulo de registo de pagamentos.</a:t>
-            </a:r>
-            <a:endParaRPr lang="pt-PT" sz="1400" b="0" u="none" strike="noStrike">
-              <a:solidFill>
-                <a:srgbClr val="000000"/>
-              </a:solidFill>
-              <a:effectLst/>
-              <a:uFillTx/>
-              <a:latin typeface="Arial"/>
-            </a:endParaRPr>
-          </a:p>
-          <a:p>
-            <a:pPr marL="457200" indent="-317520" defTabSz="914400">
-              <a:lnSpc>
-                <a:spcPct val="115000"/>
-              </a:lnSpc>
-              <a:buClr>
-                <a:srgbClr val="0F1115"/>
-              </a:buClr>
-              <a:buFont typeface="Arial"/>
-              <a:buChar char="●"/>
-            </a:pPr>
-            <a:r>
-              <a:rPr lang="pt-PT" sz="1400" b="0" u="none" strike="noStrike">
-                <a:solidFill>
-                  <a:srgbClr val="0F1115"/>
-                </a:solidFill>
-                <a:effectLst/>
-                <a:highlight>
-                  <a:srgbClr val="FFFFFF"/>
-                </a:highlight>
-                <a:uFillTx/>
-                <a:latin typeface="Arial"/>
-                <a:ea typeface="Arial"/>
-              </a:rPr>
-              <a:t>Criar relatórios financeiros detalhados (mensais, anuais, por estudante, turma ou serviço)</a:t>
-            </a:r>
-            <a:endParaRPr lang="pt-PT" sz="1400" b="0" u="none" strike="noStrike">
-              <a:solidFill>
-                <a:srgbClr val="000000"/>
-              </a:solidFill>
-              <a:effectLst/>
-              <a:uFillTx/>
-              <a:latin typeface="Arial"/>
-            </a:endParaRPr>
-          </a:p>
-          <a:p>
-            <a:pPr marL="457200" indent="-317520" defTabSz="914400">
-              <a:lnSpc>
-                <a:spcPct val="115000"/>
-              </a:lnSpc>
-              <a:buClr>
-                <a:srgbClr val="0F1115"/>
-              </a:buClr>
-              <a:buFont typeface="Arial"/>
-              <a:buChar char="●"/>
-            </a:pPr>
-            <a:r>
-              <a:rPr lang="pt-PT" sz="1400" b="0" u="none" strike="noStrike">
-                <a:solidFill>
-                  <a:srgbClr val="0F1115"/>
-                </a:solidFill>
-                <a:effectLst/>
-                <a:highlight>
-                  <a:srgbClr val="FFFFFF"/>
-                </a:highlight>
-                <a:uFillTx/>
-                <a:latin typeface="Arial"/>
-                <a:ea typeface="Arial"/>
-              </a:rPr>
-              <a:t>Criar um módulo de notificação automática para encarregados, sobre os status da mensalidade</a:t>
-            </a:r>
-            <a:endParaRPr lang="pt-PT" sz="1400" b="0" u="none" strike="noStrike">
-              <a:solidFill>
-                <a:srgbClr val="000000"/>
-              </a:solidFill>
-              <a:effectLst/>
-              <a:uFillTx/>
-              <a:latin typeface="Arial"/>
-            </a:endParaRPr>
-          </a:p>
-          <a:p>
-            <a:pPr marL="457200" indent="-317520" defTabSz="914400">
-              <a:lnSpc>
-                <a:spcPct val="115000"/>
-              </a:lnSpc>
-              <a:buClr>
-                <a:srgbClr val="0F1115"/>
-              </a:buClr>
-              <a:buFont typeface="Arial"/>
-              <a:buChar char="●"/>
-            </a:pPr>
-            <a:r>
-              <a:rPr lang="pt-PT" sz="1400" b="0" u="none" strike="noStrike">
-                <a:solidFill>
-                  <a:srgbClr val="0F1115"/>
-                </a:solidFill>
-                <a:effectLst/>
-                <a:highlight>
-                  <a:srgbClr val="FFFFFF"/>
-                </a:highlight>
-                <a:uFillTx/>
-                <a:latin typeface="Arial"/>
-                <a:ea typeface="Arial"/>
-              </a:rPr>
-              <a:t>Garantir a segurança de dados e rastreabilidade através de logs de auditoria</a:t>
-            </a:r>
-            <a:endParaRPr lang="pt-PT" sz="1400" b="0" u="none" strike="noStrike">
+              <a:t>A implementação do sistema permitirá centralizar e automatizar os processos financeiros do colégio, reduzindo erros e melhorando o controlo de mensalidades, pagamentos e serviços estudantis. Além disso, o envio de notificações automáticas aos encarregados contribuirá para uma comunicação mais eficiente e organizada.</a:t>
+            </a:r>
+            <a:endParaRPr b="0" lang="pt-PT" sz="1400" strike="noStrike" u="none">
               <a:solidFill>
                 <a:srgbClr val="000000"/>
               </a:solidFill>
@@ -7080,14 +7470,19 @@
       </p:sp>
     </p:spTree>
   </p:cSld>
-  <p:clrMapOvr>
-    <a:masterClrMapping/>
-  </p:clrMapOvr>
+  <mc:AlternateContent>
+    <mc:Choice Requires="p14">
+      <p:transition spd="slow" p14:dur="2000"/>
+    </mc:Choice>
+    <mc:Fallback>
+      <p:transition spd="slow"/>
+    </mc:Fallback>
+  </mc:AlternateContent>
 </p:sld>
 </file>
 
 <file path=ppt/slides/slide8.xml><?xml version="1.0" encoding="utf-8"?>
-<p:sld xmlns:a="http://schemas.openxmlformats.org/drawingml/2006/main" xmlns:r="http://schemas.openxmlformats.org/officeDocument/2006/relationships" xmlns:p="http://schemas.openxmlformats.org/presentationml/2006/main">
+<p:sld xmlns:a="http://schemas.openxmlformats.org/drawingml/2006/main" xmlns:p="http://schemas.openxmlformats.org/presentationml/2006/main" xmlns:r="http://schemas.openxmlformats.org/officeDocument/2006/relationships" xmlns:p14="http://schemas.microsoft.com/office/powerpoint/2010/main" xmlns:p15="http://schemas.microsoft.com/office/powerpoint/2012/main" xmlns:mc="http://schemas.openxmlformats.org/markup-compatibility/2006">
   <p:cSld>
     <p:spTree>
       <p:nvGrpSpPr>
@@ -7105,14 +7500,14 @@
       </p:grpSpPr>
       <p:sp>
         <p:nvSpPr>
-          <p:cNvPr id="52" name="Google Shape;104;p20"/>
+          <p:cNvPr id="49" name="Google Shape;95;p19"/>
           <p:cNvSpPr/>
           <p:nvPr/>
         </p:nvSpPr>
         <p:spPr>
           <a:xfrm>
-            <a:off x="523440" y="638640"/>
-            <a:ext cx="5053680" cy="493920"/>
+            <a:off x="549000" y="625680"/>
+            <a:ext cx="1322640" cy="457560"/>
           </a:xfrm>
           <a:prstGeom prst="rect">
             <a:avLst/>
@@ -7123,33 +7518,26 @@
           </a:ln>
         </p:spPr>
         <p:style>
-          <a:lnRef idx="0">
-            <a:scrgbClr r="0" g="0" b="0"/>
-          </a:lnRef>
-          <a:fillRef idx="0">
-            <a:scrgbClr r="0" g="0" b="0"/>
-          </a:fillRef>
-          <a:effectRef idx="0">
-            <a:scrgbClr r="0" g="0" b="0"/>
-          </a:effectRef>
+          <a:lnRef idx="0"/>
+          <a:fillRef idx="0"/>
+          <a:effectRef idx="0"/>
           <a:fontRef idx="minor"/>
         </p:style>
         <p:txBody>
-          <a:bodyPr lIns="90000" tIns="91440" rIns="90000" bIns="91440" anchor="t">
-            <a:noAutofit/>
+          <a:bodyPr lIns="90000" rIns="90000" tIns="91440" bIns="91440" anchor="t">
+            <a:spAutoFit/>
           </a:bodyPr>
-          <a:lstStyle/>
           <a:p>
             <a:pPr defTabSz="914400">
               <a:lnSpc>
                 <a:spcPct val="100000"/>
               </a:lnSpc>
               <a:tabLst>
-                <a:tab pos="0" algn="l"/>
-              </a:tabLst>
-            </a:pPr>
-            <a:r>
-              <a:rPr lang="pt-PT" sz="1800" b="1" u="none" strike="noStrike">
+                <a:tab algn="l" pos="0"/>
+              </a:tabLst>
+            </a:pPr>
+            <a:r>
+              <a:rPr b="1" lang="pt-PT" sz="1800" strike="noStrike" u="none">
                 <a:solidFill>
                   <a:schemeClr val="dk1"/>
                 </a:solidFill>
@@ -7158,9 +7546,9 @@
                 <a:latin typeface="Arial"/>
                 <a:ea typeface="Arial"/>
               </a:rPr>
-              <a:t>Metodologia de Investigação Cientifica</a:t>
-            </a:r>
-            <a:endParaRPr lang="pt-PT" sz="1800" b="0" u="none" strike="noStrike">
+              <a:t>Objetivos</a:t>
+            </a:r>
+            <a:endParaRPr b="0" lang="pt-PT" sz="1800" strike="noStrike" u="none">
               <a:solidFill>
                 <a:srgbClr val="000000"/>
               </a:solidFill>
@@ -7173,14 +7561,14 @@
       </p:sp>
       <p:sp>
         <p:nvSpPr>
-          <p:cNvPr id="53" name="Google Shape;105;p20"/>
+          <p:cNvPr id="50" name="Google Shape;96;p19"/>
           <p:cNvSpPr/>
           <p:nvPr/>
         </p:nvSpPr>
         <p:spPr>
           <a:xfrm>
-            <a:off x="523440" y="1136520"/>
-            <a:ext cx="2371320" cy="493920"/>
+            <a:off x="549000" y="1087560"/>
+            <a:ext cx="1552680" cy="396720"/>
           </a:xfrm>
           <a:prstGeom prst="rect">
             <a:avLst/>
@@ -7191,33 +7579,26 @@
           </a:ln>
         </p:spPr>
         <p:style>
-          <a:lnRef idx="0">
-            <a:scrgbClr r="0" g="0" b="0"/>
-          </a:lnRef>
-          <a:fillRef idx="0">
-            <a:scrgbClr r="0" g="0" b="0"/>
-          </a:fillRef>
-          <a:effectRef idx="0">
-            <a:scrgbClr r="0" g="0" b="0"/>
-          </a:effectRef>
+          <a:lnRef idx="0"/>
+          <a:fillRef idx="0"/>
+          <a:effectRef idx="0"/>
           <a:fontRef idx="minor"/>
         </p:style>
         <p:txBody>
-          <a:bodyPr lIns="90000" tIns="91440" rIns="90000" bIns="91440" anchor="t">
-            <a:noAutofit/>
+          <a:bodyPr lIns="90000" rIns="90000" tIns="91440" bIns="91440" anchor="t">
+            <a:spAutoFit/>
           </a:bodyPr>
-          <a:lstStyle/>
           <a:p>
             <a:pPr defTabSz="914400">
               <a:lnSpc>
                 <a:spcPct val="100000"/>
               </a:lnSpc>
               <a:tabLst>
-                <a:tab pos="0" algn="l"/>
-              </a:tabLst>
-            </a:pPr>
-            <a:r>
-              <a:rPr lang="pt-PT" sz="1400" b="1" u="none" strike="noStrike">
+                <a:tab algn="l" pos="0"/>
+              </a:tabLst>
+            </a:pPr>
+            <a:r>
+              <a:rPr b="1" lang="pt-PT" sz="1400" strike="noStrike" u="none">
                 <a:solidFill>
                   <a:schemeClr val="dk1"/>
                 </a:solidFill>
@@ -7226,9 +7607,9 @@
                 <a:latin typeface="Arial"/>
                 <a:ea typeface="Arial"/>
               </a:rPr>
-              <a:t>Metodologia Quantitativa</a:t>
-            </a:r>
-            <a:endParaRPr lang="pt-PT" sz="1400" b="0" u="none" strike="noStrike">
+              <a:t>Objetivo Geral</a:t>
+            </a:r>
+            <a:endParaRPr b="0" lang="pt-PT" sz="1400" strike="noStrike" u="none">
               <a:solidFill>
                 <a:srgbClr val="000000"/>
               </a:solidFill>
@@ -7241,14 +7622,14 @@
       </p:sp>
       <p:sp>
         <p:nvSpPr>
-          <p:cNvPr id="54" name="Google Shape;106;p20"/>
+          <p:cNvPr id="51" name="Google Shape;97;p19"/>
           <p:cNvSpPr/>
           <p:nvPr/>
         </p:nvSpPr>
         <p:spPr>
           <a:xfrm>
-            <a:off x="523440" y="1634400"/>
-            <a:ext cx="7518240" cy="2652480"/>
+            <a:off x="549000" y="1487880"/>
+            <a:ext cx="7235640" cy="850320"/>
           </a:xfrm>
           <a:prstGeom prst="rect">
             <a:avLst/>
@@ -7259,22 +7640,15 @@
           </a:ln>
         </p:spPr>
         <p:style>
-          <a:lnRef idx="0">
-            <a:scrgbClr r="0" g="0" b="0"/>
-          </a:lnRef>
-          <a:fillRef idx="0">
-            <a:scrgbClr r="0" g="0" b="0"/>
-          </a:fillRef>
-          <a:effectRef idx="0">
-            <a:scrgbClr r="0" g="0" b="0"/>
-          </a:effectRef>
+          <a:lnRef idx="0"/>
+          <a:fillRef idx="0"/>
+          <a:effectRef idx="0"/>
           <a:fontRef idx="minor"/>
         </p:style>
         <p:txBody>
-          <a:bodyPr lIns="90000" tIns="91440" rIns="90000" bIns="91440" anchor="t">
+          <a:bodyPr lIns="90000" rIns="90000" tIns="91440" bIns="91440" anchor="t">
             <a:noAutofit/>
           </a:bodyPr>
-          <a:lstStyle/>
           <a:p>
             <a:pPr defTabSz="914400">
               <a:lnSpc>
@@ -7283,12 +7657,15 @@
               <a:spcBef>
                 <a:spcPts val="1199"/>
               </a:spcBef>
-              <a:tabLst>
-                <a:tab pos="0" algn="l"/>
-              </a:tabLst>
-            </a:pPr>
-            <a:r>
-              <a:rPr lang="pt-PT" sz="1400" b="0" u="none" strike="noStrike">
+              <a:spcAft>
+                <a:spcPts val="799"/>
+              </a:spcAft>
+              <a:tabLst>
+                <a:tab algn="l" pos="0"/>
+              </a:tabLst>
+            </a:pPr>
+            <a:r>
+              <a:rPr b="0" lang="pt-PT" sz="1400" strike="noStrike" u="none">
                 <a:solidFill>
                   <a:schemeClr val="dk1"/>
                 </a:solidFill>
@@ -7297,9 +7674,317 @@
                 <a:latin typeface="Arial"/>
                 <a:ea typeface="Arial"/>
               </a:rPr>
-              <a:t>A metodologia adoptada é a metodologia quantitativa que foca na recolha e análise de dados. </a:t>
-            </a:r>
-            <a:endParaRPr lang="pt-PT" sz="1400" b="0" u="none" strike="noStrike">
+              <a:t>Criar uma plataforma robusta, segura e eficiente que permita ao colégio melhorar o controlo financeiro.</a:t>
+            </a:r>
+            <a:endParaRPr b="0" lang="pt-PT" sz="1400" strike="noStrike" u="none">
+              <a:solidFill>
+                <a:srgbClr val="000000"/>
+              </a:solidFill>
+              <a:effectLst/>
+              <a:uFillTx/>
+              <a:latin typeface="Arial"/>
+            </a:endParaRPr>
+          </a:p>
+        </p:txBody>
+      </p:sp>
+      <p:sp>
+        <p:nvSpPr>
+          <p:cNvPr id="52" name="Google Shape;98;p19"/>
+          <p:cNvSpPr/>
+          <p:nvPr/>
+        </p:nvSpPr>
+        <p:spPr>
+          <a:xfrm>
+            <a:off x="549000" y="2301840"/>
+            <a:ext cx="2101680" cy="394920"/>
+          </a:xfrm>
+          <a:prstGeom prst="rect">
+            <a:avLst/>
+          </a:prstGeom>
+          <a:noFill/>
+          <a:ln w="0">
+            <a:noFill/>
+          </a:ln>
+        </p:spPr>
+        <p:style>
+          <a:lnRef idx="0"/>
+          <a:fillRef idx="0"/>
+          <a:effectRef idx="0"/>
+          <a:fontRef idx="minor"/>
+        </p:style>
+        <p:txBody>
+          <a:bodyPr lIns="90000" rIns="90000" tIns="91440" bIns="91440" anchor="t">
+            <a:noAutofit/>
+          </a:bodyPr>
+          <a:p>
+            <a:pPr defTabSz="914400">
+              <a:lnSpc>
+                <a:spcPct val="100000"/>
+              </a:lnSpc>
+              <a:tabLst>
+                <a:tab algn="l" pos="0"/>
+              </a:tabLst>
+            </a:pPr>
+            <a:r>
+              <a:rPr b="1" lang="pt-PT" sz="1400" strike="noStrike" u="none">
+                <a:solidFill>
+                  <a:schemeClr val="dk1"/>
+                </a:solidFill>
+                <a:effectLst/>
+                <a:uFillTx/>
+                <a:latin typeface="Arial"/>
+                <a:ea typeface="Arial"/>
+              </a:rPr>
+              <a:t>Objetivos Específicos</a:t>
+            </a:r>
+            <a:endParaRPr b="0" lang="pt-PT" sz="1400" strike="noStrike" u="none">
+              <a:solidFill>
+                <a:srgbClr val="000000"/>
+              </a:solidFill>
+              <a:effectLst/>
+              <a:uFillTx/>
+              <a:latin typeface="Arial"/>
+            </a:endParaRPr>
+          </a:p>
+        </p:txBody>
+      </p:sp>
+      <p:sp>
+        <p:nvSpPr>
+          <p:cNvPr id="53" name="Google Shape;99;p19"/>
+          <p:cNvSpPr/>
+          <p:nvPr/>
+        </p:nvSpPr>
+        <p:spPr>
+          <a:xfrm>
+            <a:off x="549000" y="2647800"/>
+            <a:ext cx="7542360" cy="2028960"/>
+          </a:xfrm>
+          <a:prstGeom prst="rect">
+            <a:avLst/>
+          </a:prstGeom>
+          <a:noFill/>
+          <a:ln w="0">
+            <a:noFill/>
+          </a:ln>
+        </p:spPr>
+        <p:style>
+          <a:lnRef idx="0"/>
+          <a:fillRef idx="0"/>
+          <a:effectRef idx="0"/>
+          <a:fontRef idx="minor"/>
+        </p:style>
+        <p:txBody>
+          <a:bodyPr lIns="90000" rIns="90000" tIns="91440" bIns="91440" anchor="t">
+            <a:noAutofit/>
+          </a:bodyPr>
+          <a:p>
+            <a:pPr marL="457200" indent="-317520" defTabSz="914400">
+              <a:lnSpc>
+                <a:spcPct val="115000"/>
+              </a:lnSpc>
+              <a:spcBef>
+                <a:spcPts val="1199"/>
+              </a:spcBef>
+              <a:buClr>
+                <a:srgbClr val="0f1115"/>
+              </a:buClr>
+              <a:buFont typeface="Arial"/>
+              <a:buChar char="●"/>
+            </a:pPr>
+            <a:r>
+              <a:rPr b="0" lang="pt-PT" sz="1400" strike="noStrike" u="none">
+                <a:solidFill>
+                  <a:srgbClr val="0f1115"/>
+                </a:solidFill>
+                <a:effectLst/>
+                <a:highlight>
+                  <a:srgbClr val="ffffff"/>
+                </a:highlight>
+                <a:uFillTx/>
+                <a:latin typeface="Arial"/>
+                <a:ea typeface="Arial"/>
+              </a:rPr>
+              <a:t>Modelar e criar o banco de dados</a:t>
+            </a:r>
+            <a:endParaRPr b="0" lang="pt-PT" sz="1400" strike="noStrike" u="none">
+              <a:solidFill>
+                <a:srgbClr val="000000"/>
+              </a:solidFill>
+              <a:effectLst/>
+              <a:uFillTx/>
+              <a:latin typeface="Arial"/>
+            </a:endParaRPr>
+          </a:p>
+          <a:p>
+            <a:pPr marL="457200" indent="-317520" defTabSz="914400">
+              <a:lnSpc>
+                <a:spcPct val="115000"/>
+              </a:lnSpc>
+              <a:spcBef>
+                <a:spcPts val="1199"/>
+              </a:spcBef>
+              <a:buClr>
+                <a:srgbClr val="0f1115"/>
+              </a:buClr>
+              <a:buFont typeface="Arial"/>
+              <a:buChar char="●"/>
+            </a:pPr>
+            <a:r>
+              <a:rPr b="0" lang="pt-PT" sz="1400" strike="noStrike" u="none">
+                <a:solidFill>
+                  <a:srgbClr val="0f1115"/>
+                </a:solidFill>
+                <a:effectLst/>
+                <a:highlight>
+                  <a:srgbClr val="ffffff"/>
+                </a:highlight>
+                <a:uFillTx/>
+                <a:latin typeface="Arial"/>
+                <a:ea typeface="Arial"/>
+              </a:rPr>
+              <a:t>Automatizar a geração de facturas para todos os serviços.</a:t>
+            </a:r>
+            <a:endParaRPr b="0" lang="pt-PT" sz="1400" strike="noStrike" u="none">
+              <a:solidFill>
+                <a:srgbClr val="000000"/>
+              </a:solidFill>
+              <a:effectLst/>
+              <a:uFillTx/>
+              <a:latin typeface="Arial"/>
+            </a:endParaRPr>
+          </a:p>
+          <a:p>
+            <a:pPr marL="457200" indent="-317520" defTabSz="914400">
+              <a:lnSpc>
+                <a:spcPct val="115000"/>
+              </a:lnSpc>
+              <a:buClr>
+                <a:srgbClr val="0f1115"/>
+              </a:buClr>
+              <a:buFont typeface="Arial"/>
+              <a:buChar char="●"/>
+            </a:pPr>
+            <a:r>
+              <a:rPr b="0" lang="pt-PT" sz="1400" strike="noStrike" u="none">
+                <a:solidFill>
+                  <a:srgbClr val="0f1115"/>
+                </a:solidFill>
+                <a:effectLst/>
+                <a:highlight>
+                  <a:srgbClr val="ffffff"/>
+                </a:highlight>
+                <a:uFillTx/>
+                <a:latin typeface="Arial"/>
+                <a:ea typeface="Arial"/>
+              </a:rPr>
+              <a:t>Criar um módulo de registo de pagamentos.</a:t>
+            </a:r>
+            <a:endParaRPr b="0" lang="pt-PT" sz="1400" strike="noStrike" u="none">
+              <a:solidFill>
+                <a:srgbClr val="000000"/>
+              </a:solidFill>
+              <a:effectLst/>
+              <a:uFillTx/>
+              <a:latin typeface="Arial"/>
+            </a:endParaRPr>
+          </a:p>
+          <a:p>
+            <a:pPr marL="457200" indent="-317520" defTabSz="914400">
+              <a:lnSpc>
+                <a:spcPct val="115000"/>
+              </a:lnSpc>
+              <a:buClr>
+                <a:srgbClr val="0f1115"/>
+              </a:buClr>
+              <a:buFont typeface="Arial"/>
+              <a:buChar char="●"/>
+            </a:pPr>
+            <a:r>
+              <a:rPr b="0" lang="pt-PT" sz="1400" strike="noStrike" u="none">
+                <a:solidFill>
+                  <a:srgbClr val="0f1115"/>
+                </a:solidFill>
+                <a:effectLst/>
+                <a:highlight>
+                  <a:srgbClr val="ffffff"/>
+                </a:highlight>
+                <a:uFillTx/>
+                <a:latin typeface="Arial"/>
+                <a:ea typeface="Arial"/>
+              </a:rPr>
+              <a:t>Criar relatórios financeiros detalhados (mensais, anuais, por estudante, turma ou serviço)</a:t>
+            </a:r>
+            <a:endParaRPr b="0" lang="pt-PT" sz="1400" strike="noStrike" u="none">
+              <a:solidFill>
+                <a:srgbClr val="000000"/>
+              </a:solidFill>
+              <a:effectLst/>
+              <a:uFillTx/>
+              <a:latin typeface="Arial"/>
+            </a:endParaRPr>
+          </a:p>
+          <a:p>
+            <a:pPr marL="457200" indent="-317520" defTabSz="914400">
+              <a:lnSpc>
+                <a:spcPct val="115000"/>
+              </a:lnSpc>
+              <a:buClr>
+                <a:srgbClr val="0f1115"/>
+              </a:buClr>
+              <a:buFont typeface="Arial"/>
+              <a:buChar char="●"/>
+            </a:pPr>
+            <a:r>
+              <a:rPr b="0" lang="pt-PT" sz="1400" strike="noStrike" u="none">
+                <a:solidFill>
+                  <a:srgbClr val="0f1115"/>
+                </a:solidFill>
+                <a:effectLst/>
+                <a:highlight>
+                  <a:srgbClr val="ffffff"/>
+                </a:highlight>
+                <a:uFillTx/>
+                <a:latin typeface="Arial"/>
+                <a:ea typeface="Arial"/>
+              </a:rPr>
+              <a:t>Criar um módulo de notificação automática para encarregados, sobre os status da mensalidade</a:t>
+            </a:r>
+            <a:endParaRPr b="0" lang="pt-PT" sz="1400" strike="noStrike" u="none">
+              <a:solidFill>
+                <a:srgbClr val="000000"/>
+              </a:solidFill>
+              <a:effectLst/>
+              <a:uFillTx/>
+              <a:latin typeface="Arial"/>
+            </a:endParaRPr>
+          </a:p>
+          <a:p>
+            <a:pPr marL="457200" indent="-317520" defTabSz="914400">
+              <a:lnSpc>
+                <a:spcPct val="115000"/>
+              </a:lnSpc>
+              <a:buClr>
+                <a:srgbClr val="0f1115"/>
+              </a:buClr>
+              <a:buFont typeface="Arial"/>
+              <a:buChar char="●"/>
+            </a:pPr>
+            <a:r>
+              <a:rPr b="0" lang="pt-PT" sz="1400" strike="noStrike" u="none">
+                <a:solidFill>
+                  <a:srgbClr val="0f1115"/>
+                </a:solidFill>
+                <a:effectLst/>
+                <a:highlight>
+                  <a:srgbClr val="ffffff"/>
+                </a:highlight>
+                <a:uFillTx/>
+                <a:latin typeface="Arial"/>
+                <a:ea typeface="Arial"/>
+              </a:rPr>
+              <a:t>Garantir a segurança de dados e rastreabilidade através de logs de auditoria</a:t>
+            </a:r>
+            <a:endParaRPr b="0" lang="pt-PT" sz="1400" strike="noStrike" u="none">
               <a:solidFill>
                 <a:srgbClr val="000000"/>
               </a:solidFill>
@@ -7312,14 +7997,19 @@
       </p:sp>
     </p:spTree>
   </p:cSld>
-  <p:clrMapOvr>
-    <a:masterClrMapping/>
-  </p:clrMapOvr>
+  <mc:AlternateContent>
+    <mc:Choice Requires="p14">
+      <p:transition spd="slow" p14:dur="2000"/>
+    </mc:Choice>
+    <mc:Fallback>
+      <p:transition spd="slow"/>
+    </mc:Fallback>
+  </mc:AlternateContent>
 </p:sld>
 </file>
 
 <file path=ppt/slides/slide9.xml><?xml version="1.0" encoding="utf-8"?>
-<p:sld xmlns:a="http://schemas.openxmlformats.org/drawingml/2006/main" xmlns:r="http://schemas.openxmlformats.org/officeDocument/2006/relationships" xmlns:p="http://schemas.openxmlformats.org/presentationml/2006/main">
+<p:sld xmlns:a="http://schemas.openxmlformats.org/drawingml/2006/main" xmlns:p="http://schemas.openxmlformats.org/presentationml/2006/main" xmlns:r="http://schemas.openxmlformats.org/officeDocument/2006/relationships" xmlns:p14="http://schemas.microsoft.com/office/powerpoint/2010/main" xmlns:p15="http://schemas.microsoft.com/office/powerpoint/2012/main" xmlns:mc="http://schemas.openxmlformats.org/markup-compatibility/2006">
   <p:cSld>
     <p:spTree>
       <p:nvGrpSpPr>
@@ -7337,14 +8027,14 @@
       </p:grpSpPr>
       <p:sp>
         <p:nvSpPr>
-          <p:cNvPr id="55" name="Google Shape;111;p21"/>
+          <p:cNvPr id="54" name="Google Shape;104;p20"/>
           <p:cNvSpPr/>
           <p:nvPr/>
         </p:nvSpPr>
         <p:spPr>
           <a:xfrm>
-            <a:off x="549000" y="638640"/>
-            <a:ext cx="3291120" cy="493920"/>
+            <a:off x="523440" y="638640"/>
+            <a:ext cx="5052240" cy="492480"/>
           </a:xfrm>
           <a:prstGeom prst="rect">
             <a:avLst/>
@@ -7355,33 +8045,26 @@
           </a:ln>
         </p:spPr>
         <p:style>
-          <a:lnRef idx="0">
-            <a:scrgbClr r="0" g="0" b="0"/>
-          </a:lnRef>
-          <a:fillRef idx="0">
-            <a:scrgbClr r="0" g="0" b="0"/>
-          </a:fillRef>
-          <a:effectRef idx="0">
-            <a:scrgbClr r="0" g="0" b="0"/>
-          </a:effectRef>
+          <a:lnRef idx="0"/>
+          <a:fillRef idx="0"/>
+          <a:effectRef idx="0"/>
           <a:fontRef idx="minor"/>
         </p:style>
         <p:txBody>
-          <a:bodyPr lIns="90000" tIns="91440" rIns="90000" bIns="91440" anchor="t">
+          <a:bodyPr lIns="90000" rIns="90000" tIns="91440" bIns="91440" anchor="t">
             <a:noAutofit/>
           </a:bodyPr>
-          <a:lstStyle/>
           <a:p>
             <a:pPr defTabSz="914400">
               <a:lnSpc>
                 <a:spcPct val="100000"/>
               </a:lnSpc>
               <a:tabLst>
-                <a:tab pos="0" algn="l"/>
-              </a:tabLst>
-            </a:pPr>
-            <a:r>
-              <a:rPr lang="pt-PT" sz="1800" b="1" u="none" strike="noStrike">
+                <a:tab algn="l" pos="0"/>
+              </a:tabLst>
+            </a:pPr>
+            <a:r>
+              <a:rPr b="1" lang="pt-PT" sz="1800" strike="noStrike" u="none">
                 <a:solidFill>
                   <a:schemeClr val="dk1"/>
                 </a:solidFill>
@@ -7390,9 +8073,9 @@
                 <a:latin typeface="Arial"/>
                 <a:ea typeface="Arial"/>
               </a:rPr>
-              <a:t>Tecnologias</a:t>
-            </a:r>
-            <a:endParaRPr lang="pt-PT" sz="1800" b="0" u="none" strike="noStrike">
+              <a:t>Metodologia</a:t>
+            </a:r>
+            <a:endParaRPr b="0" lang="pt-PT" sz="1800" strike="noStrike" u="none">
               <a:solidFill>
                 <a:srgbClr val="000000"/>
               </a:solidFill>
@@ -7403,20 +8086,16 @@
           </a:p>
         </p:txBody>
       </p:sp>
-      <p:pic>
-        <p:nvPicPr>
-          <p:cNvPr id="56" name="Imagem 1" descr="Uma imagem com desenho, clipart, Gráficos, elefante&#10;&#10;Os conteúdos gerados por IA poderão estar incorretos."/>
-          <p:cNvPicPr/>
+      <p:sp>
+        <p:nvSpPr>
+          <p:cNvPr id="55" name="Google Shape;106;p20"/>
+          <p:cNvSpPr/>
           <p:nvPr/>
-        </p:nvPicPr>
-        <p:blipFill>
-          <a:blip r:embed="rId2"/>
-          <a:stretch/>
-        </p:blipFill>
+        </p:nvSpPr>
         <p:spPr>
           <a:xfrm>
-            <a:off x="2247480" y="1358640"/>
-            <a:ext cx="1573920" cy="1065600"/>
+            <a:off x="523440" y="1138320"/>
+            <a:ext cx="7516800" cy="2651040"/>
           </a:xfrm>
           <a:prstGeom prst="rect">
             <a:avLst/>
@@ -7426,163 +8105,203 @@
             <a:noFill/>
           </a:ln>
         </p:spPr>
-      </p:pic>
-      <p:pic>
-        <p:nvPicPr>
-          <p:cNvPr id="57" name="Imagem 2" descr="Uma imagem com design, logótipo, Gráficos, Tipo de letra&#10;&#10;Os conteúdos gerados por IA poderão estar incorretos."/>
-          <p:cNvPicPr/>
-          <p:nvPr/>
-        </p:nvPicPr>
-        <p:blipFill>
-          <a:blip r:embed="rId3"/>
-          <a:srcRect t="-4284" r="-18212" b="-9629"/>
-          <a:stretch/>
-        </p:blipFill>
-        <p:spPr>
-          <a:xfrm>
-            <a:off x="3671640" y="2934360"/>
-            <a:ext cx="1788480" cy="1787400"/>
-          </a:xfrm>
-          <a:prstGeom prst="rect">
-            <a:avLst/>
-          </a:prstGeom>
-          <a:noFill/>
-          <a:ln w="0">
-            <a:solidFill>
-              <a:srgbClr val="FFFFFF"/>
-            </a:solidFill>
-          </a:ln>
-        </p:spPr>
-      </p:pic>
-      <p:pic>
-        <p:nvPicPr>
-          <p:cNvPr id="58" name="Imagem 3" descr="Uma imagem com texto, Gráficos, design gráfico, Tipo de letra&#10;&#10;Os conteúdos gerados por IA poderão estar incorretos."/>
-          <p:cNvPicPr/>
-          <p:nvPr/>
-        </p:nvPicPr>
-        <p:blipFill>
-          <a:blip r:embed="rId4"/>
-          <a:stretch/>
-        </p:blipFill>
-        <p:spPr>
-          <a:xfrm>
-            <a:off x="5707080" y="2684880"/>
-            <a:ext cx="2818080" cy="1885320"/>
-          </a:xfrm>
-          <a:prstGeom prst="rect">
-            <a:avLst/>
-          </a:prstGeom>
-          <a:noFill/>
-          <a:ln w="0">
-            <a:noFill/>
-          </a:ln>
-        </p:spPr>
-      </p:pic>
-      <p:pic>
-        <p:nvPicPr>
-          <p:cNvPr id="59" name="Imagem 4" descr="Uma imagem com Gráficos, Tipo de letra, logótipo, design gráfico&#10;&#10;Os conteúdos gerados por IA poderão estar incorretos."/>
-          <p:cNvPicPr/>
-          <p:nvPr/>
-        </p:nvPicPr>
-        <p:blipFill>
-          <a:blip r:embed="rId5"/>
-          <a:stretch/>
-        </p:blipFill>
-        <p:spPr>
-          <a:xfrm>
-            <a:off x="486000" y="2984040"/>
-            <a:ext cx="2865240" cy="1589040"/>
-          </a:xfrm>
-          <a:prstGeom prst="rect">
-            <a:avLst/>
-          </a:prstGeom>
-          <a:noFill/>
-          <a:ln w="0">
-            <a:noFill/>
-          </a:ln>
-        </p:spPr>
-      </p:pic>
-      <p:pic>
-        <p:nvPicPr>
-          <p:cNvPr id="60" name="Imagem 5" descr="Uma imagem com coração, logótipo, Gráficos, design&#10;&#10;Os conteúdos gerados por IA poderão estar incorretos."/>
-          <p:cNvPicPr/>
-          <p:nvPr/>
-        </p:nvPicPr>
-        <p:blipFill>
-          <a:blip r:embed="rId6"/>
-          <a:stretch/>
-        </p:blipFill>
-        <p:spPr>
-          <a:xfrm>
-            <a:off x="5010120" y="1101240"/>
-            <a:ext cx="1580760" cy="1580760"/>
-          </a:xfrm>
-          <a:prstGeom prst="rect">
-            <a:avLst/>
-          </a:prstGeom>
-          <a:noFill/>
-          <a:ln w="0">
-            <a:noFill/>
-          </a:ln>
-        </p:spPr>
-      </p:pic>
+        <p:style>
+          <a:lnRef idx="0"/>
+          <a:fillRef idx="0"/>
+          <a:effectRef idx="0"/>
+          <a:fontRef idx="minor"/>
+        </p:style>
+        <p:txBody>
+          <a:bodyPr lIns="90000" rIns="90000" tIns="91440" bIns="91440" anchor="t">
+            <a:noAutofit/>
+          </a:bodyPr>
+          <a:p>
+            <a:pPr defTabSz="914400">
+              <a:lnSpc>
+                <a:spcPct val="100000"/>
+              </a:lnSpc>
+              <a:tabLst>
+                <a:tab algn="l" pos="0"/>
+              </a:tabLst>
+            </a:pPr>
+            <a:r>
+              <a:rPr b="1" lang="pt-PT" sz="1400" strike="noStrike" u="none">
+                <a:solidFill>
+                  <a:schemeClr val="dk1"/>
+                </a:solidFill>
+                <a:effectLst/>
+                <a:uFillTx/>
+                <a:latin typeface="Arial"/>
+                <a:ea typeface="Arial"/>
+              </a:rPr>
+              <a:t>Metodologia de Investigação:</a:t>
+            </a:r>
+            <a:r>
+              <a:rPr b="0" lang="pt-PT" sz="1400" strike="noStrike" u="none">
+                <a:solidFill>
+                  <a:schemeClr val="dk1"/>
+                </a:solidFill>
+                <a:effectLst/>
+                <a:uFillTx/>
+                <a:latin typeface="Arial"/>
+                <a:ea typeface="Arial"/>
+              </a:rPr>
+              <a:t> Quantitativa (análise de dados financeiros e medição de resultados).</a:t>
+            </a:r>
+            <a:endParaRPr b="0" lang="pt-PT" sz="1400" strike="noStrike" u="none">
+              <a:solidFill>
+                <a:srgbClr val="000000"/>
+              </a:solidFill>
+              <a:effectLst/>
+              <a:uFillTx/>
+              <a:latin typeface="Arial"/>
+            </a:endParaRPr>
+          </a:p>
+          <a:p>
+            <a:pPr defTabSz="914400">
+              <a:lnSpc>
+                <a:spcPct val="100000"/>
+              </a:lnSpc>
+              <a:tabLst>
+                <a:tab algn="l" pos="0"/>
+              </a:tabLst>
+            </a:pPr>
+            <a:endParaRPr b="0" lang="pt-PT" sz="1400" strike="noStrike" u="none">
+              <a:solidFill>
+                <a:srgbClr val="000000"/>
+              </a:solidFill>
+              <a:effectLst/>
+              <a:uFillTx/>
+              <a:latin typeface="Arial"/>
+            </a:endParaRPr>
+          </a:p>
+          <a:p>
+            <a:pPr defTabSz="914400">
+              <a:lnSpc>
+                <a:spcPct val="100000"/>
+              </a:lnSpc>
+              <a:tabLst>
+                <a:tab algn="l" pos="0"/>
+              </a:tabLst>
+            </a:pPr>
+            <a:r>
+              <a:rPr b="1" lang="pt-PT" sz="1400" strike="noStrike" u="none">
+                <a:solidFill>
+                  <a:schemeClr val="dk1"/>
+                </a:solidFill>
+                <a:effectLst/>
+                <a:uFillTx/>
+                <a:latin typeface="Arial"/>
+                <a:ea typeface="Arial"/>
+              </a:rPr>
+              <a:t>Metodologia de Desenvolvimento:</a:t>
+            </a:r>
+            <a:r>
+              <a:rPr b="0" lang="pt-PT" sz="1400" strike="noStrike" u="none">
+                <a:solidFill>
+                  <a:schemeClr val="dk1"/>
+                </a:solidFill>
+                <a:effectLst/>
+                <a:uFillTx/>
+                <a:latin typeface="Arial"/>
+                <a:ea typeface="Arial"/>
+              </a:rPr>
+              <a:t> Ágil (entregas iterativas, adaptação a mudanças e feedback contínuo).</a:t>
+            </a:r>
+            <a:endParaRPr b="0" lang="pt-PT" sz="1400" strike="noStrike" u="none">
+              <a:solidFill>
+                <a:srgbClr val="000000"/>
+              </a:solidFill>
+              <a:effectLst/>
+              <a:uFillTx/>
+              <a:latin typeface="Arial"/>
+            </a:endParaRPr>
+          </a:p>
+          <a:p>
+            <a:pPr defTabSz="914400">
+              <a:lnSpc>
+                <a:spcPct val="126000"/>
+              </a:lnSpc>
+              <a:spcBef>
+                <a:spcPts val="1199"/>
+              </a:spcBef>
+              <a:tabLst>
+                <a:tab algn="l" pos="0"/>
+              </a:tabLst>
+            </a:pPr>
+            <a:endParaRPr b="0" lang="pt-PT" sz="1400" strike="noStrike" u="none">
+              <a:solidFill>
+                <a:srgbClr val="000000"/>
+              </a:solidFill>
+              <a:effectLst/>
+              <a:uFillTx/>
+              <a:latin typeface="Arial"/>
+            </a:endParaRPr>
+          </a:p>
+        </p:txBody>
+      </p:sp>
     </p:spTree>
   </p:cSld>
-  <p:clrMapOvr>
-    <a:masterClrMapping/>
-  </p:clrMapOvr>
+  <mc:AlternateContent>
+    <mc:Choice Requires="p14">
+      <p:transition spd="slow" p14:dur="2000"/>
+    </mc:Choice>
+    <mc:Fallback>
+      <p:transition spd="slow"/>
+    </mc:Fallback>
+  </mc:AlternateContent>
 </p:sld>
 </file>
 
 <file path=ppt/theme/theme1.xml><?xml version="1.0" encoding="utf-8"?>
-<a:theme xmlns:a="http://schemas.openxmlformats.org/drawingml/2006/main" name="Simple Light">
+<a:theme xmlns:a="http://schemas.openxmlformats.org/drawingml/2006/main" xmlns:r="http://schemas.openxmlformats.org/officeDocument/2006/relationships" name="Simple Light">
   <a:themeElements>
     <a:clrScheme name="Simple Light">
       <a:dk1>
         <a:srgbClr val="000000"/>
       </a:dk1>
       <a:lt1>
-        <a:srgbClr val="FFFFFF"/>
+        <a:srgbClr val="ffffff"/>
       </a:lt1>
       <a:dk2>
         <a:srgbClr val="595959"/>
       </a:dk2>
       <a:lt2>
-        <a:srgbClr val="EEEEEE"/>
+        <a:srgbClr val="eeeeee"/>
       </a:lt2>
       <a:accent1>
-        <a:srgbClr val="4285F4"/>
+        <a:srgbClr val="4285f4"/>
       </a:accent1>
       <a:accent2>
         <a:srgbClr val="212121"/>
       </a:accent2>
       <a:accent3>
-        <a:srgbClr val="78909C"/>
+        <a:srgbClr val="78909c"/>
       </a:accent3>
       <a:accent4>
-        <a:srgbClr val="FFAB40"/>
+        <a:srgbClr val="ffab40"/>
       </a:accent4>
       <a:accent5>
-        <a:srgbClr val="0097A7"/>
+        <a:srgbClr val="0097a7"/>
       </a:accent5>
       <a:accent6>
-        <a:srgbClr val="EEFF41"/>
+        <a:srgbClr val="eeff41"/>
       </a:accent6>
       <a:hlink>
-        <a:srgbClr val="0097A7"/>
+        <a:srgbClr val="0097a7"/>
       </a:hlink>
       <a:folHlink>
-        <a:srgbClr val="0097A7"/>
+        <a:srgbClr val="0097a7"/>
       </a:folHlink>
     </a:clrScheme>
     <a:fontScheme name="Office">
       <a:majorFont>
-        <a:latin typeface="Arial"/>
+        <a:latin typeface="Arial" pitchFamily="0" charset="1"/>
         <a:ea typeface=""/>
         <a:cs typeface=""/>
       </a:majorFont>
       <a:minorFont>
-        <a:latin typeface="Arial"/>
+        <a:latin typeface="Arial" pitchFamily="0" charset="1"/>
         <a:ea typeface=""/>
         <a:cs typeface=""/>
       </a:minorFont>
@@ -7611,7 +8330,7 @@
             </a:gs>
           </a:gsLst>
           <a:lin ang="16200000" scaled="1"/>
-          <a:tileRect/>
+          <a:tileRect l="0" t="0" r="0" b="0"/>
         </a:gradFill>
         <a:gradFill>
           <a:gsLst>
@@ -7629,7 +8348,7 @@
             </a:gs>
           </a:gsLst>
           <a:lin ang="16200000" scaled="0"/>
-          <a:tileRect/>
+          <a:tileRect l="0" t="0" r="0" b="0"/>
         </a:gradFill>
       </a:fillStyleLst>
       <a:lnStyleLst>
@@ -7680,7 +8399,7 @@
           <a:path path="circle">
             <a:fillToRect l="50000" t="-80000" r="50000" b="180000"/>
           </a:path>
-          <a:tileRect/>
+          <a:tileRect l="0" t="0" r="0" b="0"/>
         </a:gradFill>
         <a:gradFill>
           <a:gsLst>
@@ -7698,12 +8417,10 @@
           <a:path path="circle">
             <a:fillToRect l="50000" t="50000" r="50000" b="50000"/>
           </a:path>
-          <a:tileRect/>
+          <a:tileRect l="0" t="0" r="0" b="0"/>
         </a:gradFill>
       </a:bgFillStyleLst>
     </a:fmtScheme>
   </a:themeElements>
-  <a:objectDefaults/>
-  <a:extraClrSchemeLst/>
 </a:theme>
 </file>